--- a/public/documents/countries/haiti.pptx
+++ b/public/documents/countries/haiti.pptx
@@ -117,7 +117,7 @@
 </p:presentation>
 </file>
 
-<file path=ppt/charts/chart22.xml><?xml version="1.0" encoding="utf-8"?>
+<file path=ppt/charts/chart28.xml><?xml version="1.0" encoding="utf-8"?>
 <c:chartSpace xmlns:c="http://schemas.openxmlformats.org/drawingml/2006/chart" xmlns:a="http://schemas.openxmlformats.org/drawingml/2006/main" xmlns:r="http://schemas.openxmlformats.org/officeDocument/2006/relationships">
   <c:date1904 val="0"/>
   <c:roundedCorners val="1"/>
@@ -362,7 +362,7 @@
 </c:chartSpace>
 </file>
 
-<file path=ppt/charts/chart23.xml><?xml version="1.0" encoding="utf-8"?>
+<file path=ppt/charts/chart29.xml><?xml version="1.0" encoding="utf-8"?>
 <c:chartSpace xmlns:c="http://schemas.openxmlformats.org/drawingml/2006/chart" xmlns:a="http://schemas.openxmlformats.org/drawingml/2006/main" xmlns:r="http://schemas.openxmlformats.org/officeDocument/2006/relationships">
   <c:date1904 val="0"/>
   <c:roundedCorners val="1"/>
@@ -670,7 +670,7 @@
 </c:chartSpace>
 </file>
 
-<file path=ppt/charts/chart24.xml><?xml version="1.0" encoding="utf-8"?>
+<file path=ppt/charts/chart30.xml><?xml version="1.0" encoding="utf-8"?>
 <c:chartSpace xmlns:c="http://schemas.openxmlformats.org/drawingml/2006/chart" xmlns:a="http://schemas.openxmlformats.org/drawingml/2006/main" xmlns:r="http://schemas.openxmlformats.org/officeDocument/2006/relationships">
   <c:date1904 val="0"/>
   <c:roundedCorners val="1"/>
@@ -3842,9 +3842,35 @@
           </a:p>
         </p:txBody>
       </p:sp>
-      <p:sp>
-        <p:nvSpPr>
-          <p:cNvPr id="6" name="Text 3"/>
+      <p:pic>
+        <p:nvPicPr>
+          <p:cNvPr id="6" name="Image 1" descr="C:\Users\Utilisateur\dev\green-solutions-web\scripts\dossiers\sceau-aim-clair.png">    </p:cNvPr>
+          <p:cNvPicPr>
+            <a:picLocks noChangeAspect="1"/>
+          </p:cNvPicPr>
+          <p:nvPr/>
+        </p:nvPicPr>
+        <p:blipFill>
+          <a:blip r:embed="rId2">
+            <a:alphaModFix amt="85000"/>
+          </a:blip>
+          <a:stretch>
+            <a:fillRect/>
+          </a:stretch>
+        </p:blipFill>
+        <p:spPr>
+          <a:xfrm>
+            <a:off x="10637215" y="5193792"/>
+            <a:ext cx="1051560" cy="1051560"/>
+          </a:xfrm>
+          <a:prstGeom prst="rect">
+            <a:avLst/>
+          </a:prstGeom>
+        </p:spPr>
+      </p:pic>
+      <p:sp>
+        <p:nvSpPr>
+          <p:cNvPr id="7" name="Text 3"/>
           <p:cNvSpPr txBox="1"/>
           <p:nvPr/>
         </p:nvSpPr>
@@ -3885,7 +3911,7 @@
       </p:sp>
       <p:sp>
         <p:nvSpPr>
-          <p:cNvPr id="7" name="Text 4"/>
+          <p:cNvPr id="8" name="Text 4"/>
           <p:cNvSpPr txBox="1"/>
           <p:nvPr/>
         </p:nvSpPr>

--- a/public/documents/countries/haiti.pptx
+++ b/public/documents/countries/haiti.pptx
@@ -16,9 +16,16 @@
     <p:sldId id="264" r:id="rId10"/>
     <p:sldId id="265" r:id="rId11"/>
     <p:sldId id="266" r:id="rId12"/>
+    <p:sldId id="267" r:id="rId13"/>
+    <p:sldId id="268" r:id="rId14"/>
+    <p:sldId id="269" r:id="rId15"/>
+    <p:sldId id="270" r:id="rId16"/>
+    <p:sldId id="271" r:id="rId17"/>
+    <p:sldId id="272" r:id="rId18"/>
+    <p:sldId id="273" r:id="rId19"/>
   </p:sldIdLst>
   <p:notesMasterIdLst>
-    <p:notesMasterId r:id="rId13"/>
+    <p:notesMasterId r:id="rId20"/>
   </p:notesMasterIdLst>
   <p:sldSz cx="12192000" cy="6858000"/>
   <p:notesSz cx="6858000" cy="12192000"/>
@@ -117,7 +124,7 @@
 </p:presentation>
 </file>
 
-<file path=ppt/charts/chart28.xml><?xml version="1.0" encoding="utf-8"?>
+<file path=ppt/charts/chart5.xml><?xml version="1.0" encoding="utf-8"?>
 <c:chartSpace xmlns:c="http://schemas.openxmlformats.org/drawingml/2006/chart" xmlns:a="http://schemas.openxmlformats.org/drawingml/2006/main" xmlns:r="http://schemas.openxmlformats.org/officeDocument/2006/relationships">
   <c:date1904 val="0"/>
   <c:roundedCorners val="1"/>
@@ -362,7 +369,7 @@
 </c:chartSpace>
 </file>
 
-<file path=ppt/charts/chart29.xml><?xml version="1.0" encoding="utf-8"?>
+<file path=ppt/charts/chart6.xml><?xml version="1.0" encoding="utf-8"?>
 <c:chartSpace xmlns:c="http://schemas.openxmlformats.org/drawingml/2006/chart" xmlns:a="http://schemas.openxmlformats.org/drawingml/2006/main" xmlns:r="http://schemas.openxmlformats.org/officeDocument/2006/relationships">
   <c:date1904 val="0"/>
   <c:roundedCorners val="1"/>
@@ -670,7 +677,372 @@
 </c:chartSpace>
 </file>
 
-<file path=ppt/charts/chart30.xml><?xml version="1.0" encoding="utf-8"?>
+<file path=ppt/charts/chart7.xml><?xml version="1.0" encoding="utf-8"?>
+<c:chartSpace xmlns:c="http://schemas.openxmlformats.org/drawingml/2006/chart" xmlns:a="http://schemas.openxmlformats.org/drawingml/2006/main" xmlns:r="http://schemas.openxmlformats.org/officeDocument/2006/relationships">
+  <c:date1904 val="0"/>
+  <c:roundedCorners val="1"/>
+  <c:chart>
+    <c:autoTitleDeleted val="1"/>
+    <c:plotArea>
+      <c:layout/>
+      <c:barChart>
+        <c:barDir val="col"/>
+        <c:grouping val="clustered"/>
+        <c:varyColors val="0"/>
+        <c:ser>
+          <c:idx val="0"/>
+          <c:order val="0"/>
+          <c:tx>
+            <c:strRef>
+              <c:f>Sheet1!$B$1</c:f>
+              <c:strCache>
+                <c:ptCount val="1"/>
+                <c:pt idx="0">
+                  <c:v>Bas de fourchette (%)</c:v>
+                </c:pt>
+              </c:strCache>
+            </c:strRef>
+          </c:tx>
+          <c:spPr>
+            <a:solidFill>
+              <a:srgbClr val="1C5A73"/>
+            </a:solidFill>
+            <a:effectLst/>
+          </c:spPr>
+          <c:invertIfNegative val="0"/>
+          <c:dLbls>
+            <c:numFmt formatCode="[$-40C]0&quot;%&quot;" sourceLinked="0"/>
+            <c:txPr>
+              <a:bodyPr/>
+              <a:lstStyle/>
+              <a:p>
+                <a:pPr>
+                  <a:defRPr b="0" i="0" strike="noStrike" sz="1100" u="none">
+                    <a:solidFill>
+                      <a:srgbClr val="0E3546"/>
+                    </a:solidFill>
+                    <a:latin typeface="Calibri"/>
+                  </a:defRPr>
+                </a:pPr>
+              </a:p>
+            </c:txPr>
+            <c:showLegendKey val="0"/>
+            <c:showVal val="1"/>
+            <c:showCatName val="0"/>
+            <c:showSerName val="0"/>
+            <c:showPercent val="0"/>
+            <c:showBubbleSize val="0"/>
+            <c:showLeaderLines val="0"/>
+          </c:dLbls>
+          <c:cat>
+            <c:multiLvlStrRef>
+              <c:f>Sheet1!$A$2:$A$6</c:f>
+              <c:multiLvlStrCache>
+                <c:ptCount val="5"/>
+                <c:lvl>
+                  <c:pt idx="0">
+                    <c:v>Mangues</c:v>
+                  </c:pt>
+                  <c:pt idx="1">
+                    <c:v>Bananes</c:v>
+                  </c:pt>
+                  <c:pt idx="2">
+                    <c:v>Cacao</c:v>
+                  </c:pt>
+                  <c:pt idx="3">
+                    <c:v>Manioc</c:v>
+                  </c:pt>
+                  <c:pt idx="4">
+                    <c:v>Tomates</c:v>
+                  </c:pt>
+                </c:lvl>
+              </c:multiLvlStrCache>
+            </c:multiLvlStrRef>
+          </c:cat>
+          <c:val>
+            <c:numRef>
+              <c:f>Sheet1!$B$2:$B$6</c:f>
+              <c:numCache>
+                <c:formatCode>General</c:formatCode>
+                <c:ptCount val="5"/>
+                <c:pt idx="0">
+                  <c:v>20</c:v>
+                </c:pt>
+                <c:pt idx="1">
+                  <c:v>15</c:v>
+                </c:pt>
+                <c:pt idx="2">
+                  <c:v>20</c:v>
+                </c:pt>
+                <c:pt idx="3">
+                  <c:v>20</c:v>
+                </c:pt>
+                <c:pt idx="4">
+                  <c:v>30</c:v>
+                </c:pt>
+              </c:numCache>
+            </c:numRef>
+          </c:val>
+        </c:ser>
+        <c:ser>
+          <c:idx val="1"/>
+          <c:order val="1"/>
+          <c:tx>
+            <c:strRef>
+              <c:f>Sheet1!$C$1</c:f>
+              <c:strCache>
+                <c:ptCount val="1"/>
+                <c:pt idx="0">
+                  <c:v>Haut de fourchette (%)</c:v>
+                </c:pt>
+              </c:strCache>
+            </c:strRef>
+          </c:tx>
+          <c:spPr>
+            <a:solidFill>
+              <a:srgbClr val="E0A33E"/>
+            </a:solidFill>
+            <a:effectLst/>
+          </c:spPr>
+          <c:invertIfNegative val="0"/>
+          <c:dLbls>
+            <c:numFmt formatCode="[$-40C]0&quot;%&quot;" sourceLinked="0"/>
+            <c:txPr>
+              <a:bodyPr/>
+              <a:lstStyle/>
+              <a:p>
+                <a:pPr>
+                  <a:defRPr b="0" i="0" strike="noStrike" sz="1100" u="none">
+                    <a:solidFill>
+                      <a:srgbClr val="0E3546"/>
+                    </a:solidFill>
+                    <a:latin typeface="Calibri"/>
+                  </a:defRPr>
+                </a:pPr>
+              </a:p>
+            </c:txPr>
+            <c:showLegendKey val="0"/>
+            <c:showVal val="1"/>
+            <c:showCatName val="0"/>
+            <c:showSerName val="0"/>
+            <c:showPercent val="0"/>
+            <c:showBubbleSize val="0"/>
+            <c:showLeaderLines val="0"/>
+          </c:dLbls>
+          <c:cat>
+            <c:multiLvlStrRef>
+              <c:f>Sheet1!$A$2:$A$6</c:f>
+              <c:multiLvlStrCache>
+                <c:ptCount val="5"/>
+                <c:lvl>
+                  <c:pt idx="0">
+                    <c:v>Mangues</c:v>
+                  </c:pt>
+                  <c:pt idx="1">
+                    <c:v>Bananes</c:v>
+                  </c:pt>
+                  <c:pt idx="2">
+                    <c:v>Cacao</c:v>
+                  </c:pt>
+                  <c:pt idx="3">
+                    <c:v>Manioc</c:v>
+                  </c:pt>
+                  <c:pt idx="4">
+                    <c:v>Tomates</c:v>
+                  </c:pt>
+                </c:lvl>
+              </c:multiLvlStrCache>
+            </c:multiLvlStrRef>
+          </c:cat>
+          <c:val>
+            <c:numRef>
+              <c:f>Sheet1!$C$2:$C$6</c:f>
+              <c:numCache>
+                <c:formatCode>General</c:formatCode>
+                <c:ptCount val="5"/>
+                <c:pt idx="0">
+                  <c:v>40</c:v>
+                </c:pt>
+                <c:pt idx="1">
+                  <c:v>30</c:v>
+                </c:pt>
+                <c:pt idx="2">
+                  <c:v>40</c:v>
+                </c:pt>
+                <c:pt idx="3">
+                  <c:v>40</c:v>
+                </c:pt>
+                <c:pt idx="4">
+                  <c:v>50</c:v>
+                </c:pt>
+              </c:numCache>
+            </c:numRef>
+          </c:val>
+        </c:ser>
+        <c:dLbls>
+          <c:numFmt formatCode="[$-40C]0&quot;%&quot;" sourceLinked="0"/>
+          <c:txPr>
+            <a:bodyPr/>
+            <a:lstStyle/>
+            <a:p>
+              <a:pPr>
+                <a:defRPr b="0" i="0" strike="noStrike" sz="1100" u="none">
+                  <a:solidFill>
+                    <a:srgbClr val="0E3546"/>
+                  </a:solidFill>
+                  <a:latin typeface="Calibri"/>
+                </a:defRPr>
+              </a:pPr>
+            </a:p>
+          </c:txPr>
+          <c:showLegendKey val="0"/>
+          <c:showVal val="1"/>
+          <c:showCatName val="0"/>
+          <c:showSerName val="0"/>
+          <c:showPercent val="0"/>
+          <c:showBubbleSize val="0"/>
+          <c:showLeaderLines val="0"/>
+        </c:dLbls>
+        <c:gapWidth val="150"/>
+        <c:overlap val="0"/>
+        <c:axId val="2094734554"/>
+        <c:axId val="2094734552"/>
+        <c:axId val="2094734556"/>
+      </c:barChart>
+      <c:catAx>
+        <c:axId val="2094734554"/>
+        <c:scaling>
+          <c:orientation val="minMax"/>
+        </c:scaling>
+        <c:delete val="0"/>
+        <c:axPos val="b"/>
+        <c:numFmt formatCode="General" sourceLinked="1"/>
+        <c:majorTickMark val="out"/>
+        <c:minorTickMark val="none"/>
+        <c:tickLblPos val="low"/>
+        <c:spPr>
+          <a:ln w="12700" cap="flat">
+            <a:solidFill>
+              <a:srgbClr val="888888"/>
+            </a:solidFill>
+            <a:prstDash val="solid"/>
+            <a:round/>
+          </a:ln>
+        </c:spPr>
+        <c:txPr>
+          <a:bodyPr/>
+          <a:lstStyle/>
+          <a:p>
+            <a:pPr>
+              <a:defRPr sz="1100" b="0" i="0" u="none" strike="noStrike">
+                <a:solidFill>
+                  <a:srgbClr val="6C8089"/>
+                </a:solidFill>
+                <a:latin typeface="Calibri"/>
+              </a:defRPr>
+            </a:pPr>
+            <a:endParaRPr lang="en-US"/>
+          </a:p>
+        </c:txPr>
+        <c:crossAx val="2094734552"/>
+        <c:crosses val="autoZero"/>
+        <c:auto val="1"/>
+        <c:lblAlgn val="ctr"/>
+        <c:noMultiLvlLbl val="1"/>
+      </c:catAx>
+      <c:valAx>
+        <c:axId val="2094734552"/>
+        <c:scaling>
+          <c:orientation val="minMax"/>
+          <c:min val="0"/>
+        </c:scaling>
+        <c:delete val="0"/>
+        <c:axPos val="l"/>
+        <c:majorGridlines>
+          <c:spPr>
+            <a:ln w="9525" cap="flat">
+              <a:solidFill>
+                <a:srgbClr val="D6E2E7"/>
+              </a:solidFill>
+              <a:prstDash val="solid"/>
+              <a:round/>
+            </a:ln>
+          </c:spPr>
+        </c:majorGridlines>
+        <c:numFmt formatCode="General" sourceLinked="0"/>
+        <c:majorTickMark val="out"/>
+        <c:minorTickMark val="none"/>
+        <c:tickLblPos val="nextTo"/>
+        <c:spPr>
+          <a:ln w="12700" cap="flat">
+            <a:solidFill>
+              <a:srgbClr val="888888"/>
+            </a:solidFill>
+            <a:prstDash val="solid"/>
+            <a:round/>
+          </a:ln>
+        </c:spPr>
+        <c:txPr>
+          <a:bodyPr/>
+          <a:lstStyle/>
+          <a:p>
+            <a:pPr>
+              <a:defRPr sz="1100" b="0" i="0" u="none" strike="noStrike">
+                <a:solidFill>
+                  <a:srgbClr val="6C8089"/>
+                </a:solidFill>
+                <a:latin typeface="Calibri"/>
+              </a:defRPr>
+            </a:pPr>
+            <a:endParaRPr lang="en-US"/>
+          </a:p>
+        </c:txPr>
+        <c:crossAx val="2094734554"/>
+        <c:crosses val="autoZero"/>
+        <c:crossBetween val="between"/>
+      </c:valAx>
+      <c:spPr>
+        <a:noFill/>
+        <a:ln>
+          <a:noFill/>
+        </a:ln>
+        <a:effectLst/>
+      </c:spPr>
+    </c:plotArea>
+    <c:legend>
+      <c:legendPos val="b"/>
+      <c:overlay val="0"/>
+      <c:txPr>
+        <a:bodyPr/>
+        <a:lstStyle/>
+        <a:p>
+          <a:pPr>
+            <a:defRPr sz="1100">
+              <a:latin typeface="Calibri"/>
+              <a:cs typeface="Calibri"/>
+            </a:defRPr>
+          </a:pPr>
+          <a:endParaRPr lang="en-US"/>
+        </a:p>
+      </c:txPr>
+    </c:legend>
+    <c:plotVisOnly val="1"/>
+    <c:dispBlanksAs val="span"/>
+  </c:chart>
+  <c:spPr>
+    <a:noFill/>
+    <a:ln>
+      <a:noFill/>
+    </a:ln>
+    <a:effectLst/>
+  </c:spPr>
+  <c:externalData r:id="rId1">
+    <c:autoUpdate val="0"/>
+  </c:externalData>
+</c:chartSpace>
+</file>
+
+<file path=ppt/charts/chart8.xml><?xml version="1.0" encoding="utf-8"?>
 <c:chartSpace xmlns:c="http://schemas.openxmlformats.org/drawingml/2006/chart" xmlns:a="http://schemas.openxmlformats.org/drawingml/2006/main" xmlns:r="http://schemas.openxmlformats.org/officeDocument/2006/relationships">
   <c:date1904 val="0"/>
   <c:roundedCorners val="1"/>
@@ -1618,6 +1990,622 @@
             <a:fld id="{F7021451-1387-4CA6-816F-3879F97B5CBC}" type="slidenum">
               <a:rPr lang="en-US"/>
               <a:t>11</a:t>
+            </a:fld>
+            <a:endParaRPr lang="en-US"/>
+          </a:p>
+        </p:txBody>
+      </p:sp>
+    </p:spTree>
+    <p:extLst>
+      <p:ext uri="{BB962C8B-B14F-4D97-AF65-F5344CB8AC3E}">
+        <p14:creationId xmlns:p14="http://schemas.microsoft.com/office/powerpoint/2010/main" val="1024086991"/>
+      </p:ext>
+    </p:extLst>
+  </p:cSld>
+  <p:clrMapOvr>
+    <a:masterClrMapping/>
+  </p:clrMapOvr>
+</p:notes>
+</file>
+
+<file path=ppt/notesSlides/notesSlide12.xml><?xml version="1.0" encoding="utf-8"?>
+<p:notes xmlns:a="http://schemas.openxmlformats.org/drawingml/2006/main" xmlns:r="http://schemas.openxmlformats.org/officeDocument/2006/relationships" xmlns:p="http://schemas.openxmlformats.org/presentationml/2006/main">
+  <p:cSld>
+    <p:spTree>
+      <p:nvGrpSpPr>
+        <p:cNvPr id="1" name=""/>
+        <p:cNvGrpSpPr/>
+        <p:nvPr/>
+      </p:nvGrpSpPr>
+      <p:grpSpPr>
+        <a:xfrm>
+          <a:off x="0" y="0"/>
+          <a:ext cx="0" cy="0"/>
+          <a:chOff x="0" y="0"/>
+          <a:chExt cx="0" cy="0"/>
+        </a:xfrm>
+      </p:grpSpPr>
+      <p:sp>
+        <p:nvSpPr>
+          <p:cNvPr id="2" name="Slide Image Placeholder 1"/>
+          <p:cNvSpPr>
+            <a:spLocks noGrp="1" noRot="1" noChangeAspect="1"/>
+          </p:cNvSpPr>
+          <p:nvPr>
+            <p:ph type="sldImg"/>
+          </p:nvPr>
+        </p:nvSpPr>
+        <p:spPr/>
+      </p:sp>
+      <p:sp>
+        <p:nvSpPr>
+          <p:cNvPr id="3" name="Notes Placeholder 2"/>
+          <p:cNvSpPr>
+            <a:spLocks noGrp="1"/>
+          </p:cNvSpPr>
+          <p:nvPr>
+            <p:ph type="body" idx="1"/>
+          </p:nvPr>
+        </p:nvSpPr>
+        <p:spPr/>
+        <p:txBody>
+          <a:bodyPr/>
+          <a:lstStyle/>
+          <a:p>
+            <a:r>
+              <a:rPr lang="en-US" dirty="0"/>
+              <a:t/>
+            </a:r>
+            <a:endParaRPr lang="en-US" dirty="0"/>
+          </a:p>
+        </p:txBody>
+      </p:sp>
+      <p:sp>
+        <p:nvSpPr>
+          <p:cNvPr id="4" name="Slide Number Placeholder 3"/>
+          <p:cNvSpPr>
+            <a:spLocks noGrp="1"/>
+          </p:cNvSpPr>
+          <p:nvPr>
+            <p:ph type="sldNum" sz="quarter" idx="10"/>
+          </p:nvPr>
+        </p:nvSpPr>
+        <p:spPr/>
+        <p:txBody>
+          <a:bodyPr/>
+          <a:lstStyle/>
+          <a:p>
+            <a:fld id="{F7021451-1387-4CA6-816F-3879F97B5CBC}" type="slidenum">
+              <a:rPr lang="en-US"/>
+              <a:t>12</a:t>
+            </a:fld>
+            <a:endParaRPr lang="en-US"/>
+          </a:p>
+        </p:txBody>
+      </p:sp>
+    </p:spTree>
+    <p:extLst>
+      <p:ext uri="{BB962C8B-B14F-4D97-AF65-F5344CB8AC3E}">
+        <p14:creationId xmlns:p14="http://schemas.microsoft.com/office/powerpoint/2010/main" val="1024086991"/>
+      </p:ext>
+    </p:extLst>
+  </p:cSld>
+  <p:clrMapOvr>
+    <a:masterClrMapping/>
+  </p:clrMapOvr>
+</p:notes>
+</file>
+
+<file path=ppt/notesSlides/notesSlide13.xml><?xml version="1.0" encoding="utf-8"?>
+<p:notes xmlns:a="http://schemas.openxmlformats.org/drawingml/2006/main" xmlns:r="http://schemas.openxmlformats.org/officeDocument/2006/relationships" xmlns:p="http://schemas.openxmlformats.org/presentationml/2006/main">
+  <p:cSld>
+    <p:spTree>
+      <p:nvGrpSpPr>
+        <p:cNvPr id="1" name=""/>
+        <p:cNvGrpSpPr/>
+        <p:nvPr/>
+      </p:nvGrpSpPr>
+      <p:grpSpPr>
+        <a:xfrm>
+          <a:off x="0" y="0"/>
+          <a:ext cx="0" cy="0"/>
+          <a:chOff x="0" y="0"/>
+          <a:chExt cx="0" cy="0"/>
+        </a:xfrm>
+      </p:grpSpPr>
+      <p:sp>
+        <p:nvSpPr>
+          <p:cNvPr id="2" name="Slide Image Placeholder 1"/>
+          <p:cNvSpPr>
+            <a:spLocks noGrp="1" noRot="1" noChangeAspect="1"/>
+          </p:cNvSpPr>
+          <p:nvPr>
+            <p:ph type="sldImg"/>
+          </p:nvPr>
+        </p:nvSpPr>
+        <p:spPr/>
+      </p:sp>
+      <p:sp>
+        <p:nvSpPr>
+          <p:cNvPr id="3" name="Notes Placeholder 2"/>
+          <p:cNvSpPr>
+            <a:spLocks noGrp="1"/>
+          </p:cNvSpPr>
+          <p:nvPr>
+            <p:ph type="body" idx="1"/>
+          </p:nvPr>
+        </p:nvSpPr>
+        <p:spPr/>
+        <p:txBody>
+          <a:bodyPr/>
+          <a:lstStyle/>
+          <a:p>
+            <a:r>
+              <a:rPr lang="en-US" dirty="0"/>
+              <a:t/>
+            </a:r>
+            <a:endParaRPr lang="en-US" dirty="0"/>
+          </a:p>
+        </p:txBody>
+      </p:sp>
+      <p:sp>
+        <p:nvSpPr>
+          <p:cNvPr id="4" name="Slide Number Placeholder 3"/>
+          <p:cNvSpPr>
+            <a:spLocks noGrp="1"/>
+          </p:cNvSpPr>
+          <p:nvPr>
+            <p:ph type="sldNum" sz="quarter" idx="10"/>
+          </p:nvPr>
+        </p:nvSpPr>
+        <p:spPr/>
+        <p:txBody>
+          <a:bodyPr/>
+          <a:lstStyle/>
+          <a:p>
+            <a:fld id="{F7021451-1387-4CA6-816F-3879F97B5CBC}" type="slidenum">
+              <a:rPr lang="en-US"/>
+              <a:t>13</a:t>
+            </a:fld>
+            <a:endParaRPr lang="en-US"/>
+          </a:p>
+        </p:txBody>
+      </p:sp>
+    </p:spTree>
+    <p:extLst>
+      <p:ext uri="{BB962C8B-B14F-4D97-AF65-F5344CB8AC3E}">
+        <p14:creationId xmlns:p14="http://schemas.microsoft.com/office/powerpoint/2010/main" val="1024086991"/>
+      </p:ext>
+    </p:extLst>
+  </p:cSld>
+  <p:clrMapOvr>
+    <a:masterClrMapping/>
+  </p:clrMapOvr>
+</p:notes>
+</file>
+
+<file path=ppt/notesSlides/notesSlide14.xml><?xml version="1.0" encoding="utf-8"?>
+<p:notes xmlns:a="http://schemas.openxmlformats.org/drawingml/2006/main" xmlns:r="http://schemas.openxmlformats.org/officeDocument/2006/relationships" xmlns:p="http://schemas.openxmlformats.org/presentationml/2006/main">
+  <p:cSld>
+    <p:spTree>
+      <p:nvGrpSpPr>
+        <p:cNvPr id="1" name=""/>
+        <p:cNvGrpSpPr/>
+        <p:nvPr/>
+      </p:nvGrpSpPr>
+      <p:grpSpPr>
+        <a:xfrm>
+          <a:off x="0" y="0"/>
+          <a:ext cx="0" cy="0"/>
+          <a:chOff x="0" y="0"/>
+          <a:chExt cx="0" cy="0"/>
+        </a:xfrm>
+      </p:grpSpPr>
+      <p:sp>
+        <p:nvSpPr>
+          <p:cNvPr id="2" name="Slide Image Placeholder 1"/>
+          <p:cNvSpPr>
+            <a:spLocks noGrp="1" noRot="1" noChangeAspect="1"/>
+          </p:cNvSpPr>
+          <p:nvPr>
+            <p:ph type="sldImg"/>
+          </p:nvPr>
+        </p:nvSpPr>
+        <p:spPr/>
+      </p:sp>
+      <p:sp>
+        <p:nvSpPr>
+          <p:cNvPr id="3" name="Notes Placeholder 2"/>
+          <p:cNvSpPr>
+            <a:spLocks noGrp="1"/>
+          </p:cNvSpPr>
+          <p:nvPr>
+            <p:ph type="body" idx="1"/>
+          </p:nvPr>
+        </p:nvSpPr>
+        <p:spPr/>
+        <p:txBody>
+          <a:bodyPr/>
+          <a:lstStyle/>
+          <a:p>
+            <a:r>
+              <a:rPr lang="en-US" dirty="0"/>
+              <a:t/>
+            </a:r>
+            <a:endParaRPr lang="en-US" dirty="0"/>
+          </a:p>
+        </p:txBody>
+      </p:sp>
+      <p:sp>
+        <p:nvSpPr>
+          <p:cNvPr id="4" name="Slide Number Placeholder 3"/>
+          <p:cNvSpPr>
+            <a:spLocks noGrp="1"/>
+          </p:cNvSpPr>
+          <p:nvPr>
+            <p:ph type="sldNum" sz="quarter" idx="10"/>
+          </p:nvPr>
+        </p:nvSpPr>
+        <p:spPr/>
+        <p:txBody>
+          <a:bodyPr/>
+          <a:lstStyle/>
+          <a:p>
+            <a:fld id="{F7021451-1387-4CA6-816F-3879F97B5CBC}" type="slidenum">
+              <a:rPr lang="en-US"/>
+              <a:t>14</a:t>
+            </a:fld>
+            <a:endParaRPr lang="en-US"/>
+          </a:p>
+        </p:txBody>
+      </p:sp>
+    </p:spTree>
+    <p:extLst>
+      <p:ext uri="{BB962C8B-B14F-4D97-AF65-F5344CB8AC3E}">
+        <p14:creationId xmlns:p14="http://schemas.microsoft.com/office/powerpoint/2010/main" val="1024086991"/>
+      </p:ext>
+    </p:extLst>
+  </p:cSld>
+  <p:clrMapOvr>
+    <a:masterClrMapping/>
+  </p:clrMapOvr>
+</p:notes>
+</file>
+
+<file path=ppt/notesSlides/notesSlide15.xml><?xml version="1.0" encoding="utf-8"?>
+<p:notes xmlns:a="http://schemas.openxmlformats.org/drawingml/2006/main" xmlns:r="http://schemas.openxmlformats.org/officeDocument/2006/relationships" xmlns:p="http://schemas.openxmlformats.org/presentationml/2006/main">
+  <p:cSld>
+    <p:spTree>
+      <p:nvGrpSpPr>
+        <p:cNvPr id="1" name=""/>
+        <p:cNvGrpSpPr/>
+        <p:nvPr/>
+      </p:nvGrpSpPr>
+      <p:grpSpPr>
+        <a:xfrm>
+          <a:off x="0" y="0"/>
+          <a:ext cx="0" cy="0"/>
+          <a:chOff x="0" y="0"/>
+          <a:chExt cx="0" cy="0"/>
+        </a:xfrm>
+      </p:grpSpPr>
+      <p:sp>
+        <p:nvSpPr>
+          <p:cNvPr id="2" name="Slide Image Placeholder 1"/>
+          <p:cNvSpPr>
+            <a:spLocks noGrp="1" noRot="1" noChangeAspect="1"/>
+          </p:cNvSpPr>
+          <p:nvPr>
+            <p:ph type="sldImg"/>
+          </p:nvPr>
+        </p:nvSpPr>
+        <p:spPr/>
+      </p:sp>
+      <p:sp>
+        <p:nvSpPr>
+          <p:cNvPr id="3" name="Notes Placeholder 2"/>
+          <p:cNvSpPr>
+            <a:spLocks noGrp="1"/>
+          </p:cNvSpPr>
+          <p:nvPr>
+            <p:ph type="body" idx="1"/>
+          </p:nvPr>
+        </p:nvSpPr>
+        <p:spPr/>
+        <p:txBody>
+          <a:bodyPr/>
+          <a:lstStyle/>
+          <a:p>
+            <a:r>
+              <a:rPr lang="en-US" dirty="0"/>
+              <a:t/>
+            </a:r>
+            <a:endParaRPr lang="en-US" dirty="0"/>
+          </a:p>
+        </p:txBody>
+      </p:sp>
+      <p:sp>
+        <p:nvSpPr>
+          <p:cNvPr id="4" name="Slide Number Placeholder 3"/>
+          <p:cNvSpPr>
+            <a:spLocks noGrp="1"/>
+          </p:cNvSpPr>
+          <p:nvPr>
+            <p:ph type="sldNum" sz="quarter" idx="10"/>
+          </p:nvPr>
+        </p:nvSpPr>
+        <p:spPr/>
+        <p:txBody>
+          <a:bodyPr/>
+          <a:lstStyle/>
+          <a:p>
+            <a:fld id="{F7021451-1387-4CA6-816F-3879F97B5CBC}" type="slidenum">
+              <a:rPr lang="en-US"/>
+              <a:t>15</a:t>
+            </a:fld>
+            <a:endParaRPr lang="en-US"/>
+          </a:p>
+        </p:txBody>
+      </p:sp>
+    </p:spTree>
+    <p:extLst>
+      <p:ext uri="{BB962C8B-B14F-4D97-AF65-F5344CB8AC3E}">
+        <p14:creationId xmlns:p14="http://schemas.microsoft.com/office/powerpoint/2010/main" val="1024086991"/>
+      </p:ext>
+    </p:extLst>
+  </p:cSld>
+  <p:clrMapOvr>
+    <a:masterClrMapping/>
+  </p:clrMapOvr>
+</p:notes>
+</file>
+
+<file path=ppt/notesSlides/notesSlide16.xml><?xml version="1.0" encoding="utf-8"?>
+<p:notes xmlns:a="http://schemas.openxmlformats.org/drawingml/2006/main" xmlns:r="http://schemas.openxmlformats.org/officeDocument/2006/relationships" xmlns:p="http://schemas.openxmlformats.org/presentationml/2006/main">
+  <p:cSld>
+    <p:spTree>
+      <p:nvGrpSpPr>
+        <p:cNvPr id="1" name=""/>
+        <p:cNvGrpSpPr/>
+        <p:nvPr/>
+      </p:nvGrpSpPr>
+      <p:grpSpPr>
+        <a:xfrm>
+          <a:off x="0" y="0"/>
+          <a:ext cx="0" cy="0"/>
+          <a:chOff x="0" y="0"/>
+          <a:chExt cx="0" cy="0"/>
+        </a:xfrm>
+      </p:grpSpPr>
+      <p:sp>
+        <p:nvSpPr>
+          <p:cNvPr id="2" name="Slide Image Placeholder 1"/>
+          <p:cNvSpPr>
+            <a:spLocks noGrp="1" noRot="1" noChangeAspect="1"/>
+          </p:cNvSpPr>
+          <p:nvPr>
+            <p:ph type="sldImg"/>
+          </p:nvPr>
+        </p:nvSpPr>
+        <p:spPr/>
+      </p:sp>
+      <p:sp>
+        <p:nvSpPr>
+          <p:cNvPr id="3" name="Notes Placeholder 2"/>
+          <p:cNvSpPr>
+            <a:spLocks noGrp="1"/>
+          </p:cNvSpPr>
+          <p:nvPr>
+            <p:ph type="body" idx="1"/>
+          </p:nvPr>
+        </p:nvSpPr>
+        <p:spPr/>
+        <p:txBody>
+          <a:bodyPr/>
+          <a:lstStyle/>
+          <a:p>
+            <a:r>
+              <a:rPr lang="en-US" dirty="0"/>
+              <a:t/>
+            </a:r>
+            <a:endParaRPr lang="en-US" dirty="0"/>
+          </a:p>
+        </p:txBody>
+      </p:sp>
+      <p:sp>
+        <p:nvSpPr>
+          <p:cNvPr id="4" name="Slide Number Placeholder 3"/>
+          <p:cNvSpPr>
+            <a:spLocks noGrp="1"/>
+          </p:cNvSpPr>
+          <p:nvPr>
+            <p:ph type="sldNum" sz="quarter" idx="10"/>
+          </p:nvPr>
+        </p:nvSpPr>
+        <p:spPr/>
+        <p:txBody>
+          <a:bodyPr/>
+          <a:lstStyle/>
+          <a:p>
+            <a:fld id="{F7021451-1387-4CA6-816F-3879F97B5CBC}" type="slidenum">
+              <a:rPr lang="en-US"/>
+              <a:t>16</a:t>
+            </a:fld>
+            <a:endParaRPr lang="en-US"/>
+          </a:p>
+        </p:txBody>
+      </p:sp>
+    </p:spTree>
+    <p:extLst>
+      <p:ext uri="{BB962C8B-B14F-4D97-AF65-F5344CB8AC3E}">
+        <p14:creationId xmlns:p14="http://schemas.microsoft.com/office/powerpoint/2010/main" val="1024086991"/>
+      </p:ext>
+    </p:extLst>
+  </p:cSld>
+  <p:clrMapOvr>
+    <a:masterClrMapping/>
+  </p:clrMapOvr>
+</p:notes>
+</file>
+
+<file path=ppt/notesSlides/notesSlide17.xml><?xml version="1.0" encoding="utf-8"?>
+<p:notes xmlns:a="http://schemas.openxmlformats.org/drawingml/2006/main" xmlns:r="http://schemas.openxmlformats.org/officeDocument/2006/relationships" xmlns:p="http://schemas.openxmlformats.org/presentationml/2006/main">
+  <p:cSld>
+    <p:spTree>
+      <p:nvGrpSpPr>
+        <p:cNvPr id="1" name=""/>
+        <p:cNvGrpSpPr/>
+        <p:nvPr/>
+      </p:nvGrpSpPr>
+      <p:grpSpPr>
+        <a:xfrm>
+          <a:off x="0" y="0"/>
+          <a:ext cx="0" cy="0"/>
+          <a:chOff x="0" y="0"/>
+          <a:chExt cx="0" cy="0"/>
+        </a:xfrm>
+      </p:grpSpPr>
+      <p:sp>
+        <p:nvSpPr>
+          <p:cNvPr id="2" name="Slide Image Placeholder 1"/>
+          <p:cNvSpPr>
+            <a:spLocks noGrp="1" noRot="1" noChangeAspect="1"/>
+          </p:cNvSpPr>
+          <p:nvPr>
+            <p:ph type="sldImg"/>
+          </p:nvPr>
+        </p:nvSpPr>
+        <p:spPr/>
+      </p:sp>
+      <p:sp>
+        <p:nvSpPr>
+          <p:cNvPr id="3" name="Notes Placeholder 2"/>
+          <p:cNvSpPr>
+            <a:spLocks noGrp="1"/>
+          </p:cNvSpPr>
+          <p:nvPr>
+            <p:ph type="body" idx="1"/>
+          </p:nvPr>
+        </p:nvSpPr>
+        <p:spPr/>
+        <p:txBody>
+          <a:bodyPr/>
+          <a:lstStyle/>
+          <a:p>
+            <a:r>
+              <a:rPr lang="en-US" dirty="0"/>
+              <a:t/>
+            </a:r>
+            <a:endParaRPr lang="en-US" dirty="0"/>
+          </a:p>
+        </p:txBody>
+      </p:sp>
+      <p:sp>
+        <p:nvSpPr>
+          <p:cNvPr id="4" name="Slide Number Placeholder 3"/>
+          <p:cNvSpPr>
+            <a:spLocks noGrp="1"/>
+          </p:cNvSpPr>
+          <p:nvPr>
+            <p:ph type="sldNum" sz="quarter" idx="10"/>
+          </p:nvPr>
+        </p:nvSpPr>
+        <p:spPr/>
+        <p:txBody>
+          <a:bodyPr/>
+          <a:lstStyle/>
+          <a:p>
+            <a:fld id="{F7021451-1387-4CA6-816F-3879F97B5CBC}" type="slidenum">
+              <a:rPr lang="en-US"/>
+              <a:t>17</a:t>
+            </a:fld>
+            <a:endParaRPr lang="en-US"/>
+          </a:p>
+        </p:txBody>
+      </p:sp>
+    </p:spTree>
+    <p:extLst>
+      <p:ext uri="{BB962C8B-B14F-4D97-AF65-F5344CB8AC3E}">
+        <p14:creationId xmlns:p14="http://schemas.microsoft.com/office/powerpoint/2010/main" val="1024086991"/>
+      </p:ext>
+    </p:extLst>
+  </p:cSld>
+  <p:clrMapOvr>
+    <a:masterClrMapping/>
+  </p:clrMapOvr>
+</p:notes>
+</file>
+
+<file path=ppt/notesSlides/notesSlide18.xml><?xml version="1.0" encoding="utf-8"?>
+<p:notes xmlns:a="http://schemas.openxmlformats.org/drawingml/2006/main" xmlns:r="http://schemas.openxmlformats.org/officeDocument/2006/relationships" xmlns:p="http://schemas.openxmlformats.org/presentationml/2006/main">
+  <p:cSld>
+    <p:spTree>
+      <p:nvGrpSpPr>
+        <p:cNvPr id="1" name=""/>
+        <p:cNvGrpSpPr/>
+        <p:nvPr/>
+      </p:nvGrpSpPr>
+      <p:grpSpPr>
+        <a:xfrm>
+          <a:off x="0" y="0"/>
+          <a:ext cx="0" cy="0"/>
+          <a:chOff x="0" y="0"/>
+          <a:chExt cx="0" cy="0"/>
+        </a:xfrm>
+      </p:grpSpPr>
+      <p:sp>
+        <p:nvSpPr>
+          <p:cNvPr id="2" name="Slide Image Placeholder 1"/>
+          <p:cNvSpPr>
+            <a:spLocks noGrp="1" noRot="1" noChangeAspect="1"/>
+          </p:cNvSpPr>
+          <p:nvPr>
+            <p:ph type="sldImg"/>
+          </p:nvPr>
+        </p:nvSpPr>
+        <p:spPr/>
+      </p:sp>
+      <p:sp>
+        <p:nvSpPr>
+          <p:cNvPr id="3" name="Notes Placeholder 2"/>
+          <p:cNvSpPr>
+            <a:spLocks noGrp="1"/>
+          </p:cNvSpPr>
+          <p:nvPr>
+            <p:ph type="body" idx="1"/>
+          </p:nvPr>
+        </p:nvSpPr>
+        <p:spPr/>
+        <p:txBody>
+          <a:bodyPr/>
+          <a:lstStyle/>
+          <a:p>
+            <a:r>
+              <a:rPr lang="en-US" dirty="0"/>
+              <a:t/>
+            </a:r>
+            <a:endParaRPr lang="en-US" dirty="0"/>
+          </a:p>
+        </p:txBody>
+      </p:sp>
+      <p:sp>
+        <p:nvSpPr>
+          <p:cNvPr id="4" name="Slide Number Placeholder 3"/>
+          <p:cNvSpPr>
+            <a:spLocks noGrp="1"/>
+          </p:cNvSpPr>
+          <p:nvPr>
+            <p:ph type="sldNum" sz="quarter" idx="10"/>
+          </p:nvPr>
+        </p:nvSpPr>
+        <p:spPr/>
+        <p:txBody>
+          <a:bodyPr/>
+          <a:lstStyle/>
+          <a:p>
+            <a:fld id="{F7021451-1387-4CA6-816F-3879F97B5CBC}" type="slidenum">
+              <a:rPr lang="en-US"/>
+              <a:t>18</a:t>
             </a:fld>
             <a:endParaRPr lang="en-US"/>
           </a:p>
@@ -3130,7 +4118,7 @@
                 <a:ea typeface="Calibri" pitchFamily="34" charset="-122"/>
                 <a:cs typeface="Calibri" pitchFamily="34" charset="-120"/>
               </a:rPr>
-              <a:t>CE QU'IL FAUT ANTICIPER</a:t>
+              <a:t>NOTRE RÉPONSE</a:t>
             </a:r>
             <a:endParaRPr lang="en-US" sz="1150" dirty="0"/>
           </a:p>
@@ -3169,7 +4157,7 @@
                 <a:ea typeface="Cambria" pitchFamily="34" charset="-122"/>
                 <a:cs typeface="Cambria" pitchFamily="34" charset="-120"/>
               </a:rPr>
-              <a:t>Risques identifiés et réponses</a:t>
+              <a:t>Deux technologies, deux contraintes différentes</a:t>
             </a:r>
             <a:endParaRPr lang="en-US" sz="3000" dirty="0"/>
           </a:p>
@@ -3208,7 +4196,7 @@
                 <a:ea typeface="Cambria" pitchFamily="34" charset="-122"/>
                 <a:cs typeface="Cambria" pitchFamily="34" charset="-120"/>
               </a:rPr>
-              <a:t>Risques</a:t>
+              <a:t>EVERGREEN® — retenir l'eau</a:t>
             </a:r>
             <a:endParaRPr lang="en-US" sz="1600" dirty="0"/>
           </a:p>
@@ -3254,7 +4242,7 @@
                 <a:ea typeface="Calibri" pitchFamily="34" charset="-122"/>
                 <a:cs typeface="Calibri" pitchFamily="34" charset="-120"/>
               </a:rPr>
-              <a:t>Morcellement extrême du foncier : la décision d'achat est dispersée sur des milliers de très petites exploitations.</a:t>
+              <a:t>Hydro-rétenteur à base de potassium, placé dans la zone racinaire à la plantation ou à la reprise.</a:t>
             </a:r>
             <a:endParaRPr lang="en-US" sz="1350" dirty="0"/>
           </a:p>
@@ -3278,7 +4266,7 @@
                 <a:ea typeface="Calibri" pitchFamily="34" charset="-122"/>
                 <a:cs typeface="Calibri" pitchFamily="34" charset="-120"/>
               </a:rPr>
-              <a:t>Capacité de trésorerie limitée des producteurs, qui rend tout achat d'intrant difficile à engager seul.</a:t>
+              <a:t>Capte l'eau de pluie avant qu'elle ne ruisselle et la restitue à la plante pendant les séquences sèches entre deux saisons.</a:t>
             </a:r>
             <a:endParaRPr lang="en-US" sz="1350" dirty="0"/>
           </a:p>
@@ -3302,7 +4290,7 @@
                 <a:ea typeface="Calibri" pitchFamily="34" charset="-122"/>
                 <a:cs typeface="Calibri" pitchFamily="34" charset="-120"/>
               </a:rPr>
-              <a:t>Aléa cyclonique : une tempête peut effacer les résultats d'un essai en cours de campagne.</a:t>
+              <a:t>Capacité d'absorption de l'ordre de 300 fois son poids ; durée d'effet utile de 3 à 4 ans dans le sol.</a:t>
             </a:r>
             <a:endParaRPr lang="en-US" sz="1350" dirty="0"/>
           </a:p>
@@ -3326,7 +4314,7 @@
                 <a:ea typeface="Calibri" pitchFamily="34" charset="-122"/>
                 <a:cs typeface="Calibri" pitchFamily="34" charset="-120"/>
               </a:rPr>
-              <a:t>Logistique intérieure et sécurité des déplacements, qui compliquent le suivi agronomique de terrain.</a:t>
+              <a:t>Sur parcelle en pente, il agit là où l'aménagement anti-érosif seul ne suffit pas : à l'intérieur du sol.</a:t>
             </a:r>
             <a:endParaRPr lang="en-US" sz="1350" dirty="0"/>
           </a:p>
@@ -3365,7 +4353,7 @@
                 <a:ea typeface="Cambria" pitchFamily="34" charset="-122"/>
                 <a:cs typeface="Cambria" pitchFamily="34" charset="-120"/>
               </a:rPr>
-              <a:t>Réponses</a:t>
+              <a:t>ECOFERT® — nourrir sans épuiser</a:t>
             </a:r>
             <a:endParaRPr lang="en-US" sz="1600" dirty="0"/>
           </a:p>
@@ -3411,7 +4399,7 @@
                 <a:ea typeface="Calibri" pitchFamily="34" charset="-122"/>
                 <a:cs typeface="Calibri" pitchFamily="34" charset="-120"/>
               </a:rPr>
-              <a:t>Passer par les organisations de producteurs et les coopératives plutôt que par l'exploitation individuelle.</a:t>
+              <a:t>Fertilisant en microdoses d'acides aminés, azote, phosphore et potassium, issu de ressources renouvelables.</a:t>
             </a:r>
             <a:endParaRPr lang="en-US" sz="1350" dirty="0"/>
           </a:p>
@@ -3435,7 +4423,7 @@
                 <a:ea typeface="Calibri" pitchFamily="34" charset="-122"/>
                 <a:cs typeface="Calibri" pitchFamily="34" charset="-120"/>
               </a:rPr>
-              <a:t>Adosser les premiers déploiements aux programmes de développement agricole et aux bailleurs déjà présents.</a:t>
+              <a:t>Non chélatant : il n'appauvrit pas le complexe argilo-humique, déjà très entamé sur les sols décapés.</a:t>
             </a:r>
             <a:endParaRPr lang="en-US" sz="1350" dirty="0"/>
           </a:p>
@@ -3459,7 +4447,7 @@
                 <a:ea typeface="Calibri" pitchFamily="34" charset="-122"/>
                 <a:cs typeface="Calibri" pitchFamily="34" charset="-120"/>
               </a:rPr>
-              <a:t>Conduire les essais sur deux cycles, pour que l'aléa d'une campagne ne décide pas seul du résultat.</a:t>
+              <a:t>Certifié SOHISCERT et EU Bio — utile pour les filières café et cacao qui visent les primes de certification.</a:t>
             </a:r>
             <a:endParaRPr lang="en-US" sz="1350" dirty="0"/>
           </a:p>
@@ -3483,7 +4471,7 @@
                 <a:ea typeface="Calibri" pitchFamily="34" charset="-122"/>
                 <a:cs typeface="Calibri" pitchFamily="34" charset="-120"/>
               </a:rPr>
-              <a:t>S'appuyer sur l'essai CEHPAPE en cours et sur un relais local établi pour le suivi des parcelles.</a:t>
+              <a:t>1 à 4 flacons de 140 ml par hectare : un format transportable, compatible avec le morcellement des parcelles.</a:t>
             </a:r>
             <a:endParaRPr lang="en-US" sz="1350" dirty="0"/>
           </a:p>
@@ -3552,7 +4540,7 @@
                 <a:ea typeface="Calibri" pitchFamily="34" charset="-122"/>
                 <a:cs typeface="Calibri" pitchFamily="34" charset="-120"/>
               </a:rPr>
-              <a:t>Analyse acrylamide (laboratoire Polymex, ISO 9001, teneur inférieure à 3,0 µg/g), screening REACH / SVHC (SGS) et certificat SOHISCERT valable jusqu'au 4 septembre 2027 : disponibles sur demande.</a:t>
+              <a:t>Les deux produits se vendent séparément mais ont été conçus pour se renforcer : l'hydro-rétenteur prolonge la disponibilité de l'eau, le fertilisant valorise cette eau disponible sans dégrader davantage un sol déjà fragile.</a:t>
             </a:r>
             <a:endParaRPr lang="en-US" sz="1100" dirty="0"/>
           </a:p>
@@ -3651,6 +4639,4717 @@
 <file path=ppt/slides/slide11.xml><?xml version="1.0" encoding="utf-8"?>
 <p:sld xmlns:a="http://schemas.openxmlformats.org/drawingml/2006/main" xmlns:r="http://schemas.openxmlformats.org/officeDocument/2006/relationships" xmlns:p="http://schemas.openxmlformats.org/presentationml/2006/main">
   <p:cSld name="Slide 11">
+    <p:bg>
+      <p:bgPr>
+        <a:solidFill>
+          <a:srgbClr val="FAFBFB"/>
+        </a:solidFill>
+      </p:bgPr>
+    </p:bg>
+    <p:spTree>
+      <p:nvGrpSpPr>
+        <p:cNvPr id="1" name=""/>
+        <p:cNvGrpSpPr/>
+        <p:nvPr/>
+      </p:nvGrpSpPr>
+      <p:grpSpPr>
+        <a:xfrm>
+          <a:off x="0" y="0"/>
+          <a:ext cx="0" cy="0"/>
+          <a:chOff x="0" y="0"/>
+          <a:chExt cx="0" cy="0"/>
+        </a:xfrm>
+      </p:grpSpPr>
+      <p:sp>
+        <p:nvSpPr>
+          <p:cNvPr id="2" name="Text 0"/>
+          <p:cNvSpPr txBox="1"/>
+          <p:nvPr/>
+        </p:nvSpPr>
+        <p:spPr>
+          <a:xfrm>
+            <a:off x="594360" y="411480"/>
+            <a:ext cx="10515600" cy="274320"/>
+          </a:xfrm>
+          <a:prstGeom prst="rect">
+            <a:avLst/>
+          </a:prstGeom>
+          <a:noFill/>
+          <a:ln/>
+        </p:spPr>
+        <p:txBody>
+          <a:bodyPr wrap="square" lIns="0" tIns="0" rIns="0" bIns="0" rtlCol="0" anchor="ctr"/>
+          <a:lstStyle/>
+          <a:p>
+            <a:pPr algn="l" indent="0" marL="0">
+              <a:buNone/>
+            </a:pPr>
+            <a:r>
+              <a:rPr lang="en-US" sz="1150" b="1" spc="200" kern="0" dirty="0">
+                <a:solidFill>
+                  <a:srgbClr val="E0A33E"/>
+                </a:solidFill>
+                <a:latin typeface="Calibri" pitchFamily="34" charset="0"/>
+                <a:ea typeface="Calibri" pitchFamily="34" charset="-122"/>
+                <a:cs typeface="Calibri" pitchFamily="34" charset="-120"/>
+              </a:rPr>
+              <a:t>Le reste de la gamme</a:t>
+            </a:r>
+            <a:endParaRPr lang="en-US" sz="1150" dirty="0"/>
+          </a:p>
+        </p:txBody>
+      </p:sp>
+      <p:sp>
+        <p:nvSpPr>
+          <p:cNvPr id="3" name="Text 1"/>
+          <p:cNvSpPr txBox="1"/>
+          <p:nvPr/>
+        </p:nvSpPr>
+        <p:spPr>
+          <a:xfrm>
+            <a:off x="594360" y="731520"/>
+            <a:ext cx="10881360" cy="731520"/>
+          </a:xfrm>
+          <a:prstGeom prst="rect">
+            <a:avLst/>
+          </a:prstGeom>
+          <a:noFill/>
+          <a:ln/>
+        </p:spPr>
+        <p:txBody>
+          <a:bodyPr wrap="square" lIns="0" tIns="0" rIns="0" bIns="0" rtlCol="0" anchor="ctr"/>
+          <a:lstStyle/>
+          <a:p>
+            <a:pPr algn="l" indent="0" marL="0">
+              <a:buNone/>
+            </a:pPr>
+            <a:r>
+              <a:rPr lang="en-US" sz="3000" b="1" dirty="0">
+                <a:solidFill>
+                  <a:srgbClr val="0E3546"/>
+                </a:solidFill>
+                <a:latin typeface="Cambria" pitchFamily="34" charset="0"/>
+                <a:ea typeface="Cambria" pitchFamily="34" charset="-122"/>
+                <a:cs typeface="Cambria" pitchFamily="34" charset="-120"/>
+              </a:rPr>
+              <a:t>Protéger les cultures, fixer les sols</a:t>
+            </a:r>
+            <a:endParaRPr lang="en-US" sz="3000" dirty="0"/>
+          </a:p>
+        </p:txBody>
+      </p:sp>
+      <p:sp>
+        <p:nvSpPr>
+          <p:cNvPr id="4" name="Text 2"/>
+          <p:cNvSpPr txBox="1"/>
+          <p:nvPr/>
+        </p:nvSpPr>
+        <p:spPr>
+          <a:xfrm>
+            <a:off x="594360" y="1783080"/>
+            <a:ext cx="5227168" cy="411480"/>
+          </a:xfrm>
+          <a:prstGeom prst="rect">
+            <a:avLst/>
+          </a:prstGeom>
+          <a:noFill/>
+          <a:ln/>
+        </p:spPr>
+        <p:txBody>
+          <a:bodyPr wrap="square" lIns="0" tIns="0" rIns="0" bIns="0" rtlCol="0" anchor="ctr"/>
+          <a:lstStyle/>
+          <a:p>
+            <a:pPr algn="l" indent="0" marL="0">
+              <a:buNone/>
+            </a:pPr>
+            <a:r>
+              <a:rPr lang="en-US" sz="1600" b="1" dirty="0">
+                <a:solidFill>
+                  <a:srgbClr val="1C5A73"/>
+                </a:solidFill>
+                <a:latin typeface="Cambria" pitchFamily="34" charset="0"/>
+                <a:ea typeface="Cambria" pitchFamily="34" charset="-122"/>
+                <a:cs typeface="Cambria" pitchFamily="34" charset="-120"/>
+              </a:rPr>
+              <a:t>NAPEMA® — protéger sans résidu</a:t>
+            </a:r>
+            <a:endParaRPr lang="en-US" sz="1600" dirty="0"/>
+          </a:p>
+        </p:txBody>
+      </p:sp>
+      <p:sp>
+        <p:nvSpPr>
+          <p:cNvPr id="5" name="Text 3"/>
+          <p:cNvSpPr txBox="1"/>
+          <p:nvPr/>
+        </p:nvSpPr>
+        <p:spPr>
+          <a:xfrm>
+            <a:off x="594360" y="2286000"/>
+            <a:ext cx="5227168" cy="2468880"/>
+          </a:xfrm>
+          <a:prstGeom prst="rect">
+            <a:avLst/>
+          </a:prstGeom>
+          <a:noFill/>
+          <a:ln/>
+        </p:spPr>
+        <p:txBody>
+          <a:bodyPr wrap="square" lIns="0" tIns="0" rIns="0" bIns="0" rtlCol="0" anchor="t"/>
+          <a:lstStyle/>
+          <a:p>
+            <a:pPr algn="l" marL="342900" indent="-342900">
+              <a:lnSpc>
+                <a:spcPct val="122000"/>
+              </a:lnSpc>
+              <a:spcAft>
+                <a:spcPts val="1000"/>
+              </a:spcAft>
+              <a:buSzPct val="100000"/>
+              <a:buChar char="•"/>
+            </a:pPr>
+            <a:r>
+              <a:rPr lang="en-US" sz="1350" dirty="0">
+                <a:solidFill>
+                  <a:srgbClr val="31424A"/>
+                </a:solidFill>
+                <a:latin typeface="Calibri" pitchFamily="34" charset="0"/>
+                <a:ea typeface="Calibri" pitchFamily="34" charset="-122"/>
+                <a:cs typeface="Calibri" pitchFamily="34" charset="-120"/>
+              </a:rPr>
+              <a:t>Lutte contre maladies, parasites, champignons et ravageurs, sans molécule de synthèse.</a:t>
+            </a:r>
+            <a:endParaRPr lang="en-US" sz="1350" dirty="0"/>
+          </a:p>
+          <a:p>
+            <a:pPr algn="l" marL="342900" indent="-342900">
+              <a:lnSpc>
+                <a:spcPct val="122000"/>
+              </a:lnSpc>
+              <a:spcAft>
+                <a:spcPts val="1000"/>
+              </a:spcAft>
+              <a:buSzPct val="100000"/>
+              <a:buChar char="•"/>
+            </a:pPr>
+            <a:r>
+              <a:rPr lang="en-US" sz="1350" dirty="0">
+                <a:solidFill>
+                  <a:srgbClr val="31424A"/>
+                </a:solidFill>
+                <a:latin typeface="Calibri" pitchFamily="34" charset="0"/>
+                <a:ea typeface="Calibri" pitchFamily="34" charset="-122"/>
+                <a:cs typeface="Calibri" pitchFamily="34" charset="-120"/>
+              </a:rPr>
+              <a:t>Pulvérisation foliaire et racinaire, à effet préventif comme curatif.</a:t>
+            </a:r>
+            <a:endParaRPr lang="en-US" sz="1350" dirty="0"/>
+          </a:p>
+          <a:p>
+            <a:pPr algn="l" marL="342900" indent="-342900">
+              <a:lnSpc>
+                <a:spcPct val="122000"/>
+              </a:lnSpc>
+              <a:spcAft>
+                <a:spcPts val="1000"/>
+              </a:spcAft>
+              <a:buSzPct val="100000"/>
+              <a:buChar char="•"/>
+            </a:pPr>
+            <a:r>
+              <a:rPr lang="en-US" sz="1350" dirty="0">
+                <a:solidFill>
+                  <a:srgbClr val="31424A"/>
+                </a:solidFill>
+                <a:latin typeface="Calibri" pitchFamily="34" charset="0"/>
+                <a:ea typeface="Calibri" pitchFamily="34" charset="-122"/>
+                <a:cs typeface="Calibri" pitchFamily="34" charset="-120"/>
+              </a:rPr>
+              <a:t>Aucun résidu dans le sol, la plante ou l'air : pollinisateurs et auxiliaires préservés.</a:t>
+            </a:r>
+            <a:endParaRPr lang="en-US" sz="1350" dirty="0"/>
+          </a:p>
+          <a:p>
+            <a:pPr algn="l" marL="342900" indent="-342900">
+              <a:lnSpc>
+                <a:spcPct val="122000"/>
+              </a:lnSpc>
+              <a:spcAft>
+                <a:spcPts val="1000"/>
+              </a:spcAft>
+              <a:buSzPct val="100000"/>
+              <a:buChar char="•"/>
+            </a:pPr>
+            <a:r>
+              <a:rPr lang="en-US" sz="1350" dirty="0">
+                <a:solidFill>
+                  <a:srgbClr val="31424A"/>
+                </a:solidFill>
+                <a:latin typeface="Calibri" pitchFamily="34" charset="0"/>
+                <a:ea typeface="Calibri" pitchFamily="34" charset="-122"/>
+                <a:cs typeface="Calibri" pitchFamily="34" charset="-120"/>
+              </a:rPr>
+              <a:t>Formulé sur mesure pour un problème précis : cochenille, HLB des agrumes, nématodes.</a:t>
+            </a:r>
+            <a:endParaRPr lang="en-US" sz="1350" dirty="0"/>
+          </a:p>
+        </p:txBody>
+      </p:sp>
+      <p:sp>
+        <p:nvSpPr>
+          <p:cNvPr id="6" name="Text 4"/>
+          <p:cNvSpPr txBox="1"/>
+          <p:nvPr/>
+        </p:nvSpPr>
+        <p:spPr>
+          <a:xfrm>
+            <a:off x="6370168" y="1783080"/>
+            <a:ext cx="5227168" cy="411480"/>
+          </a:xfrm>
+          <a:prstGeom prst="rect">
+            <a:avLst/>
+          </a:prstGeom>
+          <a:noFill/>
+          <a:ln/>
+        </p:spPr>
+        <p:txBody>
+          <a:bodyPr wrap="square" lIns="0" tIns="0" rIns="0" bIns="0" rtlCol="0" anchor="ctr"/>
+          <a:lstStyle/>
+          <a:p>
+            <a:pPr algn="l" indent="0" marL="0">
+              <a:buNone/>
+            </a:pPr>
+            <a:r>
+              <a:rPr lang="en-US" sz="1600" b="1" dirty="0">
+                <a:solidFill>
+                  <a:srgbClr val="1C5A73"/>
+                </a:solidFill>
+                <a:latin typeface="Cambria" pitchFamily="34" charset="0"/>
+                <a:ea typeface="Cambria" pitchFamily="34" charset="-122"/>
+                <a:cs typeface="Cambria" pitchFamily="34" charset="-120"/>
+              </a:rPr>
+              <a:t>Paulownia ALTIFOLIA® — l'arbre des régions chaudes</a:t>
+            </a:r>
+            <a:endParaRPr lang="en-US" sz="1600" dirty="0"/>
+          </a:p>
+        </p:txBody>
+      </p:sp>
+      <p:sp>
+        <p:nvSpPr>
+          <p:cNvPr id="7" name="Text 5"/>
+          <p:cNvSpPr txBox="1"/>
+          <p:nvPr/>
+        </p:nvSpPr>
+        <p:spPr>
+          <a:xfrm>
+            <a:off x="6370168" y="2286000"/>
+            <a:ext cx="5227168" cy="2468880"/>
+          </a:xfrm>
+          <a:prstGeom prst="rect">
+            <a:avLst/>
+          </a:prstGeom>
+          <a:noFill/>
+          <a:ln/>
+        </p:spPr>
+        <p:txBody>
+          <a:bodyPr wrap="square" lIns="0" tIns="0" rIns="0" bIns="0" rtlCol="0" anchor="t"/>
+          <a:lstStyle/>
+          <a:p>
+            <a:pPr algn="l" marL="342900" indent="-342900">
+              <a:lnSpc>
+                <a:spcPct val="122000"/>
+              </a:lnSpc>
+              <a:spcAft>
+                <a:spcPts val="1000"/>
+              </a:spcAft>
+              <a:buSzPct val="100000"/>
+              <a:buChar char="•"/>
+            </a:pPr>
+            <a:r>
+              <a:rPr lang="en-US" sz="1350" dirty="0">
+                <a:solidFill>
+                  <a:srgbClr val="31424A"/>
+                </a:solidFill>
+                <a:latin typeface="Calibri" pitchFamily="34" charset="0"/>
+                <a:ea typeface="Calibri" pitchFamily="34" charset="-122"/>
+                <a:cs typeface="Calibri" pitchFamily="34" charset="-120"/>
+              </a:rPr>
+              <a:t>13 à 15 m en six à huit ans, avec un tronc de gros diamètre.</a:t>
+            </a:r>
+            <a:endParaRPr lang="en-US" sz="1350" dirty="0"/>
+          </a:p>
+          <a:p>
+            <a:pPr algn="l" marL="342900" indent="-342900">
+              <a:lnSpc>
+                <a:spcPct val="122000"/>
+              </a:lnSpc>
+              <a:spcAft>
+                <a:spcPts val="1000"/>
+              </a:spcAft>
+              <a:buSzPct val="100000"/>
+              <a:buChar char="•"/>
+            </a:pPr>
+            <a:r>
+              <a:rPr lang="en-US" sz="1350" dirty="0">
+                <a:solidFill>
+                  <a:srgbClr val="31424A"/>
+                </a:solidFill>
+                <a:latin typeface="Calibri" pitchFamily="34" charset="0"/>
+                <a:ea typeface="Calibri" pitchFamily="34" charset="-122"/>
+                <a:cs typeface="Calibri" pitchFamily="34" charset="-120"/>
+              </a:rPr>
+              <a:t>Associé à 100 g d'EVERGREEN® par plant, l'irrigation nécessaire diminue de 50 %.</a:t>
+            </a:r>
+            <a:endParaRPr lang="en-US" sz="1350" dirty="0"/>
+          </a:p>
+          <a:p>
+            <a:pPr algn="l" marL="342900" indent="-342900">
+              <a:lnSpc>
+                <a:spcPct val="122000"/>
+              </a:lnSpc>
+              <a:spcAft>
+                <a:spcPts val="1000"/>
+              </a:spcAft>
+              <a:buSzPct val="100000"/>
+              <a:buChar char="•"/>
+            </a:pPr>
+            <a:r>
+              <a:rPr lang="en-US" sz="1350" dirty="0">
+                <a:solidFill>
+                  <a:srgbClr val="31424A"/>
+                </a:solidFill>
+                <a:latin typeface="Calibri" pitchFamily="34" charset="0"/>
+                <a:ea typeface="Calibri" pitchFamily="34" charset="-122"/>
+                <a:cs typeface="Calibri" pitchFamily="34" charset="-120"/>
+              </a:rPr>
+              <a:t>Résiste de −25 °C à +45 °C ; son bois ne s'enflamme qu'à partir de 426 °C.</a:t>
+            </a:r>
+            <a:endParaRPr lang="en-US" sz="1350" dirty="0"/>
+          </a:p>
+          <a:p>
+            <a:pPr algn="l" marL="342900" indent="-342900">
+              <a:lnSpc>
+                <a:spcPct val="122000"/>
+              </a:lnSpc>
+              <a:spcAft>
+                <a:spcPts val="1000"/>
+              </a:spcAft>
+              <a:buSzPct val="100000"/>
+              <a:buChar char="•"/>
+            </a:pPr>
+            <a:r>
+              <a:rPr lang="en-US" sz="1350" dirty="0">
+                <a:solidFill>
+                  <a:srgbClr val="31424A"/>
+                </a:solidFill>
+                <a:latin typeface="Calibri" pitchFamily="34" charset="0"/>
+                <a:ea typeface="Calibri" pitchFamily="34" charset="-122"/>
+                <a:cs typeface="Calibri" pitchFamily="34" charset="-120"/>
+              </a:rPr>
+              <a:t>Brise-vent, protection des sols contre l'érosion, 400 à 700 kg de miel par hectare.</a:t>
+            </a:r>
+            <a:endParaRPr lang="en-US" sz="1350" dirty="0"/>
+          </a:p>
+        </p:txBody>
+      </p:sp>
+      <p:sp>
+        <p:nvSpPr>
+          <p:cNvPr id="8" name="Shape 6"/>
+          <p:cNvSpPr/>
+          <p:nvPr/>
+        </p:nvSpPr>
+        <p:spPr>
+          <a:xfrm>
+            <a:off x="594360" y="4846320"/>
+            <a:ext cx="11002975" cy="960120"/>
+          </a:xfrm>
+          <a:prstGeom prst="roundRect">
+            <a:avLst>
+              <a:gd name="adj" fmla="val 7619"/>
+            </a:avLst>
+          </a:prstGeom>
+          <a:solidFill>
+            <a:srgbClr val="EDF3F5"/>
+          </a:solidFill>
+          <a:ln w="9525">
+            <a:solidFill>
+              <a:srgbClr val="D6E2E7"/>
+            </a:solidFill>
+            <a:prstDash val="solid"/>
+          </a:ln>
+        </p:spPr>
+      </p:sp>
+      <p:sp>
+        <p:nvSpPr>
+          <p:cNvPr id="9" name="Text 7"/>
+          <p:cNvSpPr txBox="1"/>
+          <p:nvPr/>
+        </p:nvSpPr>
+        <p:spPr>
+          <a:xfrm>
+            <a:off x="822960" y="4983480"/>
+            <a:ext cx="10545775" cy="713232"/>
+          </a:xfrm>
+          <a:prstGeom prst="rect">
+            <a:avLst/>
+          </a:prstGeom>
+          <a:noFill/>
+          <a:ln/>
+        </p:spPr>
+        <p:txBody>
+          <a:bodyPr wrap="square" lIns="0" tIns="0" rIns="0" bIns="0" rtlCol="0" anchor="t"/>
+          <a:lstStyle/>
+          <a:p>
+            <a:pPr algn="l" indent="0" marL="0">
+              <a:lnSpc>
+                <a:spcPct val="118000"/>
+              </a:lnSpc>
+              <a:buNone/>
+            </a:pPr>
+            <a:r>
+              <a:rPr lang="en-US" sz="1100" dirty="0">
+                <a:solidFill>
+                  <a:srgbClr val="6C8089"/>
+                </a:solidFill>
+                <a:latin typeface="Calibri" pitchFamily="34" charset="0"/>
+                <a:ea typeface="Calibri" pitchFamily="34" charset="-122"/>
+                <a:cs typeface="Calibri" pitchFamily="34" charset="-120"/>
+              </a:rPr>
+              <a:t>Plants livrés en pot (25 à 30 cm), certifiés indemnes de maladies et remplacés sous garantie en cas de perte. Première coupe à la fin de la sixième année, bois valorisé autour de 400 à 450 € le m³.</a:t>
+            </a:r>
+            <a:endParaRPr lang="en-US" sz="1100" dirty="0"/>
+          </a:p>
+        </p:txBody>
+      </p:sp>
+      <p:sp>
+        <p:nvSpPr>
+          <p:cNvPr id="10" name="Text 8"/>
+          <p:cNvSpPr txBox="1"/>
+          <p:nvPr/>
+        </p:nvSpPr>
+        <p:spPr>
+          <a:xfrm>
+            <a:off x="502920" y="6382512"/>
+            <a:ext cx="8229600" cy="274320"/>
+          </a:xfrm>
+          <a:prstGeom prst="rect">
+            <a:avLst/>
+          </a:prstGeom>
+          <a:noFill/>
+          <a:ln/>
+        </p:spPr>
+        <p:txBody>
+          <a:bodyPr wrap="square" lIns="0" tIns="0" rIns="0" bIns="0" rtlCol="0" anchor="ctr"/>
+          <a:lstStyle/>
+          <a:p>
+            <a:pPr algn="l" indent="0" marL="0">
+              <a:buNone/>
+            </a:pPr>
+            <a:r>
+              <a:rPr lang="en-US" sz="950" dirty="0">
+                <a:solidFill>
+                  <a:srgbClr val="6C8089">
+                    <a:alpha val="80000"/>
+                  </a:srgbClr>
+                </a:solidFill>
+                <a:latin typeface="Calibri" pitchFamily="34" charset="0"/>
+                <a:ea typeface="Calibri" pitchFamily="34" charset="-122"/>
+                <a:cs typeface="Calibri" pitchFamily="34" charset="-120"/>
+              </a:rPr>
+              <a:t>Green Solutions · Dossier marché Haïti</a:t>
+            </a:r>
+            <a:endParaRPr lang="en-US" sz="950" dirty="0"/>
+          </a:p>
+        </p:txBody>
+      </p:sp>
+      <p:sp>
+        <p:nvSpPr>
+          <p:cNvPr id="11" name="Text 9"/>
+          <p:cNvSpPr txBox="1"/>
+          <p:nvPr/>
+        </p:nvSpPr>
+        <p:spPr>
+          <a:xfrm>
+            <a:off x="11140135" y="6382512"/>
+            <a:ext cx="548640" cy="274320"/>
+          </a:xfrm>
+          <a:prstGeom prst="rect">
+            <a:avLst/>
+          </a:prstGeom>
+          <a:noFill/>
+          <a:ln/>
+        </p:spPr>
+        <p:txBody>
+          <a:bodyPr wrap="square" lIns="0" tIns="0" rIns="0" bIns="0" rtlCol="0" anchor="ctr"/>
+          <a:lstStyle/>
+          <a:p>
+            <a:pPr algn="r" indent="0" marL="0">
+              <a:buNone/>
+            </a:pPr>
+            <a:r>
+              <a:rPr lang="en-US" sz="950" dirty="0">
+                <a:solidFill>
+                  <a:srgbClr val="6C8089">
+                    <a:alpha val="80000"/>
+                  </a:srgbClr>
+                </a:solidFill>
+                <a:latin typeface="Calibri" pitchFamily="34" charset="0"/>
+                <a:ea typeface="Calibri" pitchFamily="34" charset="-122"/>
+                <a:cs typeface="Calibri" pitchFamily="34" charset="-120"/>
+              </a:rPr>
+              <a:t>10</a:t>
+            </a:r>
+            <a:endParaRPr lang="en-US" sz="950" dirty="0"/>
+          </a:p>
+        </p:txBody>
+      </p:sp>
+    </p:spTree>
+  </p:cSld>
+  <p:clrMapOvr>
+    <a:masterClrMapping/>
+  </p:clrMapOvr>
+</p:sld>
+</file>
+
+<file path=ppt/slides/slide12.xml><?xml version="1.0" encoding="utf-8"?>
+<p:sld xmlns:a="http://schemas.openxmlformats.org/drawingml/2006/main" xmlns:r="http://schemas.openxmlformats.org/officeDocument/2006/relationships" xmlns:p="http://schemas.openxmlformats.org/presentationml/2006/main">
+  <p:cSld name="Slide 12">
+    <p:bg>
+      <p:bgPr>
+        <a:solidFill>
+          <a:srgbClr val="FAFBFB"/>
+        </a:solidFill>
+      </p:bgPr>
+    </p:bg>
+    <p:spTree>
+      <p:nvGrpSpPr>
+        <p:cNvPr id="1" name=""/>
+        <p:cNvGrpSpPr/>
+        <p:nvPr/>
+      </p:nvGrpSpPr>
+      <p:grpSpPr>
+        <a:xfrm>
+          <a:off x="0" y="0"/>
+          <a:ext cx="0" cy="0"/>
+          <a:chOff x="0" y="0"/>
+          <a:chExt cx="0" cy="0"/>
+        </a:xfrm>
+      </p:grpSpPr>
+      <p:sp>
+        <p:nvSpPr>
+          <p:cNvPr id="2" name="Text 0"/>
+          <p:cNvSpPr txBox="1"/>
+          <p:nvPr/>
+        </p:nvSpPr>
+        <p:spPr>
+          <a:xfrm>
+            <a:off x="594360" y="411480"/>
+            <a:ext cx="10515600" cy="274320"/>
+          </a:xfrm>
+          <a:prstGeom prst="rect">
+            <a:avLst/>
+          </a:prstGeom>
+          <a:noFill/>
+          <a:ln/>
+        </p:spPr>
+        <p:txBody>
+          <a:bodyPr wrap="square" lIns="0" tIns="0" rIns="0" bIns="0" rtlCol="0" anchor="ctr"/>
+          <a:lstStyle/>
+          <a:p>
+            <a:pPr algn="l" indent="0" marL="0">
+              <a:buNone/>
+            </a:pPr>
+            <a:r>
+              <a:rPr lang="en-US" sz="1150" b="1" spc="200" kern="0" dirty="0">
+                <a:solidFill>
+                  <a:srgbClr val="E0A33E"/>
+                </a:solidFill>
+                <a:latin typeface="Calibri" pitchFamily="34" charset="0"/>
+                <a:ea typeface="Calibri" pitchFamily="34" charset="-122"/>
+                <a:cs typeface="Calibri" pitchFamily="34" charset="-120"/>
+              </a:rPr>
+              <a:t>ORDRES DE GRANDEUR</a:t>
+            </a:r>
+            <a:endParaRPr lang="en-US" sz="1150" dirty="0"/>
+          </a:p>
+        </p:txBody>
+      </p:sp>
+      <p:sp>
+        <p:nvSpPr>
+          <p:cNvPr id="3" name="Text 1"/>
+          <p:cNvSpPr txBox="1"/>
+          <p:nvPr/>
+        </p:nvSpPr>
+        <p:spPr>
+          <a:xfrm>
+            <a:off x="594360" y="731520"/>
+            <a:ext cx="10881360" cy="731520"/>
+          </a:xfrm>
+          <a:prstGeom prst="rect">
+            <a:avLst/>
+          </a:prstGeom>
+          <a:noFill/>
+          <a:ln/>
+        </p:spPr>
+        <p:txBody>
+          <a:bodyPr wrap="square" lIns="0" tIns="0" rIns="0" bIns="0" rtlCol="0" anchor="ctr"/>
+          <a:lstStyle/>
+          <a:p>
+            <a:pPr algn="l" indent="0" marL="0">
+              <a:buNone/>
+            </a:pPr>
+            <a:r>
+              <a:rPr lang="en-US" sz="3000" b="1" dirty="0">
+                <a:solidFill>
+                  <a:srgbClr val="0E3546"/>
+                </a:solidFill>
+                <a:latin typeface="Cambria" pitchFamily="34" charset="0"/>
+                <a:ea typeface="Cambria" pitchFamily="34" charset="-122"/>
+                <a:cs typeface="Cambria" pitchFamily="34" charset="-120"/>
+              </a:rPr>
+              <a:t>Économie d'eau attendue selon le mode d'irrigation</a:t>
+            </a:r>
+            <a:endParaRPr lang="en-US" sz="3000" dirty="0"/>
+          </a:p>
+        </p:txBody>
+      </p:sp>
+      <p:graphicFrame>
+        <p:nvGraphicFramePr>
+          <p:cNvPr id="4" name="Chart 0" descr=""/>
+          <p:cNvGraphicFramePr/>
+          <p:nvPr/>
+        </p:nvGraphicFramePr>
+        <p:xfrm>
+          <a:off x="594360" y="1783080"/>
+          <a:ext cx="7360920" cy="3977640"/>
+        </p:xfrm>
+        <a:graphic xmlns:a="http://schemas.openxmlformats.org/drawingml/2006/main">
+          <a:graphicData uri="http://schemas.openxmlformats.org/drawingml/2006/chart">
+            <c:chart xmlns:c="http://schemas.openxmlformats.org/drawingml/2006/chart" r:id="rId1"/>
+          </a:graphicData>
+        </a:graphic>
+      </p:graphicFrame>
+      <p:sp>
+        <p:nvSpPr>
+          <p:cNvPr id="5" name="Shape 2"/>
+          <p:cNvSpPr/>
+          <p:nvPr/>
+        </p:nvSpPr>
+        <p:spPr>
+          <a:xfrm>
+            <a:off x="8275320" y="1783080"/>
+            <a:ext cx="3291840" cy="3977640"/>
+          </a:xfrm>
+          <a:prstGeom prst="roundRect">
+            <a:avLst>
+              <a:gd name="adj" fmla="val 2778"/>
+            </a:avLst>
+          </a:prstGeom>
+          <a:solidFill>
+            <a:srgbClr val="EDF3F5"/>
+          </a:solidFill>
+          <a:ln w="9525">
+            <a:solidFill>
+              <a:srgbClr val="D6E2E7"/>
+            </a:solidFill>
+            <a:prstDash val="solid"/>
+          </a:ln>
+        </p:spPr>
+      </p:sp>
+      <p:sp>
+        <p:nvSpPr>
+          <p:cNvPr id="6" name="Text 3"/>
+          <p:cNvSpPr txBox="1"/>
+          <p:nvPr/>
+        </p:nvSpPr>
+        <p:spPr>
+          <a:xfrm>
+            <a:off x="8503920" y="2011680"/>
+            <a:ext cx="2834640" cy="457200"/>
+          </a:xfrm>
+          <a:prstGeom prst="rect">
+            <a:avLst/>
+          </a:prstGeom>
+          <a:noFill/>
+          <a:ln/>
+        </p:spPr>
+        <p:txBody>
+          <a:bodyPr wrap="square" lIns="0" tIns="0" rIns="0" bIns="0" rtlCol="0" anchor="ctr"/>
+          <a:lstStyle/>
+          <a:p>
+            <a:pPr algn="l" indent="0" marL="0">
+              <a:buNone/>
+            </a:pPr>
+            <a:r>
+              <a:rPr lang="en-US" sz="1300" b="1" dirty="0">
+                <a:solidFill>
+                  <a:srgbClr val="1C5A73"/>
+                </a:solidFill>
+                <a:latin typeface="Cambria" pitchFamily="34" charset="0"/>
+                <a:ea typeface="Cambria" pitchFamily="34" charset="-122"/>
+                <a:cs typeface="Cambria" pitchFamily="34" charset="-120"/>
+              </a:rPr>
+              <a:t>À lire avec prudence</a:t>
+            </a:r>
+            <a:endParaRPr lang="en-US" sz="1300" dirty="0"/>
+          </a:p>
+        </p:txBody>
+      </p:sp>
+      <p:sp>
+        <p:nvSpPr>
+          <p:cNvPr id="7" name="Text 4"/>
+          <p:cNvSpPr txBox="1"/>
+          <p:nvPr/>
+        </p:nvSpPr>
+        <p:spPr>
+          <a:xfrm>
+            <a:off x="8503920" y="2560320"/>
+            <a:ext cx="2834640" cy="3017520"/>
+          </a:xfrm>
+          <a:prstGeom prst="rect">
+            <a:avLst/>
+          </a:prstGeom>
+          <a:noFill/>
+          <a:ln/>
+        </p:spPr>
+        <p:txBody>
+          <a:bodyPr wrap="square" lIns="0" tIns="0" rIns="0" bIns="0" rtlCol="0" anchor="t"/>
+          <a:lstStyle/>
+          <a:p>
+            <a:pPr algn="l" indent="0" marL="0">
+              <a:lnSpc>
+                <a:spcPct val="125000"/>
+              </a:lnSpc>
+              <a:buNone/>
+            </a:pPr>
+            <a:r>
+              <a:rPr lang="en-US" sz="1200" dirty="0">
+                <a:solidFill>
+                  <a:srgbClr val="31424A"/>
+                </a:solidFill>
+                <a:latin typeface="Calibri" pitchFamily="34" charset="0"/>
+                <a:ea typeface="Calibri" pitchFamily="34" charset="-122"/>
+                <a:cs typeface="Calibri" pitchFamily="34" charset="-120"/>
+              </a:rPr>
+              <a:t>Ces fourchettes sont indicatives et fondées sur les gains documentés de nos hydro-rétenteurs.</a:t>
+            </a:r>
+            <a:endParaRPr lang="en-US" sz="1200" dirty="0"/>
+          </a:p>
+          <a:p>
+            <a:pPr algn="l" indent="0" marL="0">
+              <a:lnSpc>
+                <a:spcPct val="125000"/>
+              </a:lnSpc>
+              <a:buNone/>
+            </a:pPr>
+            <a:endParaRPr lang="en-US" sz="1200" dirty="0"/>
+          </a:p>
+          <a:p>
+            <a:pPr algn="l" indent="0" marL="0">
+              <a:lnSpc>
+                <a:spcPct val="125000"/>
+              </a:lnSpc>
+              <a:buNone/>
+            </a:pPr>
+            <a:r>
+              <a:rPr lang="en-US" sz="1200" dirty="0">
+                <a:solidFill>
+                  <a:srgbClr val="31424A"/>
+                </a:solidFill>
+                <a:latin typeface="Calibri" pitchFamily="34" charset="0"/>
+                <a:ea typeface="Calibri" pitchFamily="34" charset="-122"/>
+                <a:cs typeface="Calibri" pitchFamily="34" charset="-120"/>
+              </a:rPr>
+              <a:t>Le résultat réel dépend du sol, du climat et de la culture. Ces chiffres donnent un ordre de grandeur : ils ne constituent en aucun cas une valeur garantie, contractuelle ou absolue.</a:t>
+            </a:r>
+            <a:endParaRPr lang="en-US" sz="1200" dirty="0"/>
+          </a:p>
+        </p:txBody>
+      </p:sp>
+      <p:sp>
+        <p:nvSpPr>
+          <p:cNvPr id="8" name="Text 5"/>
+          <p:cNvSpPr txBox="1"/>
+          <p:nvPr/>
+        </p:nvSpPr>
+        <p:spPr>
+          <a:xfrm>
+            <a:off x="502920" y="6382512"/>
+            <a:ext cx="8229600" cy="274320"/>
+          </a:xfrm>
+          <a:prstGeom prst="rect">
+            <a:avLst/>
+          </a:prstGeom>
+          <a:noFill/>
+          <a:ln/>
+        </p:spPr>
+        <p:txBody>
+          <a:bodyPr wrap="square" lIns="0" tIns="0" rIns="0" bIns="0" rtlCol="0" anchor="ctr"/>
+          <a:lstStyle/>
+          <a:p>
+            <a:pPr algn="l" indent="0" marL="0">
+              <a:buNone/>
+            </a:pPr>
+            <a:r>
+              <a:rPr lang="en-US" sz="950" dirty="0">
+                <a:solidFill>
+                  <a:srgbClr val="6C8089">
+                    <a:alpha val="80000"/>
+                  </a:srgbClr>
+                </a:solidFill>
+                <a:latin typeface="Calibri" pitchFamily="34" charset="0"/>
+                <a:ea typeface="Calibri" pitchFamily="34" charset="-122"/>
+                <a:cs typeface="Calibri" pitchFamily="34" charset="-120"/>
+              </a:rPr>
+              <a:t>Green Solutions · Dossier marché Haïti</a:t>
+            </a:r>
+            <a:endParaRPr lang="en-US" sz="950" dirty="0"/>
+          </a:p>
+        </p:txBody>
+      </p:sp>
+      <p:sp>
+        <p:nvSpPr>
+          <p:cNvPr id="9" name="Text 6"/>
+          <p:cNvSpPr txBox="1"/>
+          <p:nvPr/>
+        </p:nvSpPr>
+        <p:spPr>
+          <a:xfrm>
+            <a:off x="11140135" y="6382512"/>
+            <a:ext cx="548640" cy="274320"/>
+          </a:xfrm>
+          <a:prstGeom prst="rect">
+            <a:avLst/>
+          </a:prstGeom>
+          <a:noFill/>
+          <a:ln/>
+        </p:spPr>
+        <p:txBody>
+          <a:bodyPr wrap="square" lIns="0" tIns="0" rIns="0" bIns="0" rtlCol="0" anchor="ctr"/>
+          <a:lstStyle/>
+          <a:p>
+            <a:pPr algn="r" indent="0" marL="0">
+              <a:buNone/>
+            </a:pPr>
+            <a:r>
+              <a:rPr lang="en-US" sz="950" dirty="0">
+                <a:solidFill>
+                  <a:srgbClr val="6C8089">
+                    <a:alpha val="80000"/>
+                  </a:srgbClr>
+                </a:solidFill>
+                <a:latin typeface="Calibri" pitchFamily="34" charset="0"/>
+                <a:ea typeface="Calibri" pitchFamily="34" charset="-122"/>
+                <a:cs typeface="Calibri" pitchFamily="34" charset="-120"/>
+              </a:rPr>
+              <a:t>11</a:t>
+            </a:r>
+            <a:endParaRPr lang="en-US" sz="950" dirty="0"/>
+          </a:p>
+        </p:txBody>
+      </p:sp>
+    </p:spTree>
+  </p:cSld>
+  <p:clrMapOvr>
+    <a:masterClrMapping/>
+  </p:clrMapOvr>
+</p:sld>
+</file>
+
+<file path=ppt/slides/slide13.xml><?xml version="1.0" encoding="utf-8"?>
+<p:sld xmlns:a="http://schemas.openxmlformats.org/drawingml/2006/main" xmlns:r="http://schemas.openxmlformats.org/officeDocument/2006/relationships" xmlns:p="http://schemas.openxmlformats.org/presentationml/2006/main">
+  <p:cSld name="Slide 13">
+    <p:bg>
+      <p:bgPr>
+        <a:solidFill>
+          <a:srgbClr val="FAFBFB"/>
+        </a:solidFill>
+      </p:bgPr>
+    </p:bg>
+    <p:spTree>
+      <p:nvGrpSpPr>
+        <p:cNvPr id="1" name=""/>
+        <p:cNvGrpSpPr/>
+        <p:nvPr/>
+      </p:nvGrpSpPr>
+      <p:grpSpPr>
+        <a:xfrm>
+          <a:off x="0" y="0"/>
+          <a:ext cx="0" cy="0"/>
+          <a:chOff x="0" y="0"/>
+          <a:chExt cx="0" cy="0"/>
+        </a:xfrm>
+      </p:grpSpPr>
+      <p:sp>
+        <p:nvSpPr>
+          <p:cNvPr id="2" name="Text 0"/>
+          <p:cNvSpPr txBox="1"/>
+          <p:nvPr/>
+        </p:nvSpPr>
+        <p:spPr>
+          <a:xfrm>
+            <a:off x="594360" y="411480"/>
+            <a:ext cx="10515600" cy="274320"/>
+          </a:xfrm>
+          <a:prstGeom prst="rect">
+            <a:avLst/>
+          </a:prstGeom>
+          <a:noFill/>
+          <a:ln/>
+        </p:spPr>
+        <p:txBody>
+          <a:bodyPr wrap="square" lIns="0" tIns="0" rIns="0" bIns="0" rtlCol="0" anchor="ctr"/>
+          <a:lstStyle/>
+          <a:p>
+            <a:pPr algn="l" indent="0" marL="0">
+              <a:buNone/>
+            </a:pPr>
+            <a:r>
+              <a:rPr lang="en-US" sz="1150" b="1" spc="200" kern="0" dirty="0">
+                <a:solidFill>
+                  <a:srgbClr val="E0A33E"/>
+                </a:solidFill>
+                <a:latin typeface="Calibri" pitchFamily="34" charset="0"/>
+                <a:ea typeface="Calibri" pitchFamily="34" charset="-122"/>
+                <a:cs typeface="Calibri" pitchFamily="34" charset="-120"/>
+              </a:rPr>
+              <a:t>TROIS TERRAINS PRIORITAIRES</a:t>
+            </a:r>
+            <a:endParaRPr lang="en-US" sz="1150" dirty="0"/>
+          </a:p>
+        </p:txBody>
+      </p:sp>
+      <p:sp>
+        <p:nvSpPr>
+          <p:cNvPr id="3" name="Text 1"/>
+          <p:cNvSpPr txBox="1"/>
+          <p:nvPr/>
+        </p:nvSpPr>
+        <p:spPr>
+          <a:xfrm>
+            <a:off x="594360" y="731520"/>
+            <a:ext cx="10881360" cy="731520"/>
+          </a:xfrm>
+          <a:prstGeom prst="rect">
+            <a:avLst/>
+          </a:prstGeom>
+          <a:noFill/>
+          <a:ln/>
+        </p:spPr>
+        <p:txBody>
+          <a:bodyPr wrap="square" lIns="0" tIns="0" rIns="0" bIns="0" rtlCol="0" anchor="ctr"/>
+          <a:lstStyle/>
+          <a:p>
+            <a:pPr algn="l" indent="0" marL="0">
+              <a:buNone/>
+            </a:pPr>
+            <a:r>
+              <a:rPr lang="en-US" sz="3000" b="1" dirty="0">
+                <a:solidFill>
+                  <a:srgbClr val="0E3546"/>
+                </a:solidFill>
+                <a:latin typeface="Cambria" pitchFamily="34" charset="0"/>
+                <a:ea typeface="Cambria" pitchFamily="34" charset="-122"/>
+                <a:cs typeface="Cambria" pitchFamily="34" charset="-120"/>
+              </a:rPr>
+              <a:t>Où engager les premiers essais</a:t>
+            </a:r>
+            <a:endParaRPr lang="en-US" sz="3000" dirty="0"/>
+          </a:p>
+        </p:txBody>
+      </p:sp>
+      <p:sp>
+        <p:nvSpPr>
+          <p:cNvPr id="4" name="Shape 2"/>
+          <p:cNvSpPr/>
+          <p:nvPr/>
+        </p:nvSpPr>
+        <p:spPr>
+          <a:xfrm>
+            <a:off x="594360" y="1783080"/>
+            <a:ext cx="3472586" cy="4069080"/>
+          </a:xfrm>
+          <a:prstGeom prst="roundRect">
+            <a:avLst>
+              <a:gd name="adj" fmla="val 2633"/>
+            </a:avLst>
+          </a:prstGeom>
+          <a:solidFill>
+            <a:srgbClr val="EDF3F5"/>
+          </a:solidFill>
+          <a:ln w="9525">
+            <a:solidFill>
+              <a:srgbClr val="D6E2E7"/>
+            </a:solidFill>
+            <a:prstDash val="solid"/>
+          </a:ln>
+        </p:spPr>
+      </p:sp>
+      <p:pic>
+        <p:nvPicPr>
+          <p:cNvPr id="5" name="Image 0" descr="preencoded.png">    </p:cNvPr>
+          <p:cNvPicPr>
+            <a:picLocks noChangeAspect="1"/>
+          </p:cNvPicPr>
+          <p:nvPr/>
+        </p:nvPicPr>
+        <p:blipFill>
+          <a:blip r:embed="rId1"/>
+          <a:stretch>
+            <a:fillRect/>
+          </a:stretch>
+        </p:blipFill>
+        <p:spPr>
+          <a:xfrm>
+            <a:off x="594360" y="1783080"/>
+            <a:ext cx="3472586" cy="1691640"/>
+          </a:xfrm>
+          <a:prstGeom prst="rect">
+            <a:avLst/>
+          </a:prstGeom>
+        </p:spPr>
+      </p:pic>
+      <p:sp>
+        <p:nvSpPr>
+          <p:cNvPr id="6" name="Text 3"/>
+          <p:cNvSpPr txBox="1"/>
+          <p:nvPr/>
+        </p:nvSpPr>
+        <p:spPr>
+          <a:xfrm>
+            <a:off x="795528" y="3639312"/>
+            <a:ext cx="3070250" cy="384048"/>
+          </a:xfrm>
+          <a:prstGeom prst="rect">
+            <a:avLst/>
+          </a:prstGeom>
+          <a:noFill/>
+          <a:ln/>
+        </p:spPr>
+        <p:txBody>
+          <a:bodyPr wrap="square" lIns="0" tIns="0" rIns="0" bIns="0" rtlCol="0" anchor="ctr"/>
+          <a:lstStyle/>
+          <a:p>
+            <a:pPr algn="l" indent="0" marL="0">
+              <a:buNone/>
+            </a:pPr>
+            <a:r>
+              <a:rPr lang="en-US" sz="1500" b="1" dirty="0">
+                <a:solidFill>
+                  <a:srgbClr val="1C5A73"/>
+                </a:solidFill>
+                <a:latin typeface="Cambria" pitchFamily="34" charset="0"/>
+                <a:ea typeface="Cambria" pitchFamily="34" charset="-122"/>
+                <a:cs typeface="Cambria" pitchFamily="34" charset="-120"/>
+              </a:rPr>
+              <a:t>Vallée de l'Artibonite</a:t>
+            </a:r>
+            <a:endParaRPr lang="en-US" sz="1500" dirty="0"/>
+          </a:p>
+        </p:txBody>
+      </p:sp>
+      <p:sp>
+        <p:nvSpPr>
+          <p:cNvPr id="7" name="Text 4"/>
+          <p:cNvSpPr txBox="1"/>
+          <p:nvPr/>
+        </p:nvSpPr>
+        <p:spPr>
+          <a:xfrm>
+            <a:off x="795528" y="4041648"/>
+            <a:ext cx="3070250" cy="329184"/>
+          </a:xfrm>
+          <a:prstGeom prst="rect">
+            <a:avLst/>
+          </a:prstGeom>
+          <a:noFill/>
+          <a:ln/>
+        </p:spPr>
+        <p:txBody>
+          <a:bodyPr wrap="square" lIns="0" tIns="0" rIns="0" bIns="0" rtlCol="0" anchor="ctr"/>
+          <a:lstStyle/>
+          <a:p>
+            <a:pPr algn="l" indent="0" marL="0">
+              <a:buNone/>
+            </a:pPr>
+            <a:r>
+              <a:rPr lang="en-US" sz="1250" b="1" dirty="0">
+                <a:solidFill>
+                  <a:srgbClr val="A3701A"/>
+                </a:solidFill>
+                <a:latin typeface="Calibri" pitchFamily="34" charset="0"/>
+                <a:ea typeface="Calibri" pitchFamily="34" charset="-122"/>
+                <a:cs typeface="Calibri" pitchFamily="34" charset="-120"/>
+              </a:rPr>
+              <a:t>Le grenier à riz du pays</a:t>
+            </a:r>
+            <a:endParaRPr lang="en-US" sz="1250" dirty="0"/>
+          </a:p>
+        </p:txBody>
+      </p:sp>
+      <p:sp>
+        <p:nvSpPr>
+          <p:cNvPr id="8" name="Text 5"/>
+          <p:cNvSpPr txBox="1"/>
+          <p:nvPr/>
+        </p:nvSpPr>
+        <p:spPr>
+          <a:xfrm>
+            <a:off x="795528" y="4407408"/>
+            <a:ext cx="3070250" cy="1280160"/>
+          </a:xfrm>
+          <a:prstGeom prst="rect">
+            <a:avLst/>
+          </a:prstGeom>
+          <a:noFill/>
+          <a:ln/>
+        </p:spPr>
+        <p:txBody>
+          <a:bodyPr wrap="square" lIns="0" tIns="0" rIns="0" bIns="0" rtlCol="0" anchor="t"/>
+          <a:lstStyle/>
+          <a:p>
+            <a:pPr algn="l" marL="342900" indent="-342900">
+              <a:lnSpc>
+                <a:spcPct val="116000"/>
+              </a:lnSpc>
+              <a:spcAft>
+                <a:spcPts val="700"/>
+              </a:spcAft>
+              <a:buSzPct val="100000"/>
+              <a:buChar char="•"/>
+            </a:pPr>
+            <a:r>
+              <a:rPr lang="en-US" sz="1150" dirty="0">
+                <a:solidFill>
+                  <a:srgbClr val="31424A"/>
+                </a:solidFill>
+                <a:latin typeface="Calibri" pitchFamily="34" charset="0"/>
+                <a:ea typeface="Calibri" pitchFamily="34" charset="-122"/>
+                <a:cs typeface="Calibri" pitchFamily="34" charset="-120"/>
+              </a:rPr>
+              <a:t>Le plus grand périmètre irrigué d'Haïti, alimenté par le fleuve Artibonite.</a:t>
+            </a:r>
+            <a:endParaRPr lang="en-US" sz="1150" dirty="0"/>
+          </a:p>
+          <a:p>
+            <a:pPr algn="l" marL="342900" indent="-342900">
+              <a:lnSpc>
+                <a:spcPct val="116000"/>
+              </a:lnSpc>
+              <a:spcAft>
+                <a:spcPts val="700"/>
+              </a:spcAft>
+              <a:buSzPct val="100000"/>
+              <a:buChar char="•"/>
+            </a:pPr>
+            <a:r>
+              <a:rPr lang="en-US" sz="1150" dirty="0">
+                <a:solidFill>
+                  <a:srgbClr val="31424A"/>
+                </a:solidFill>
+                <a:latin typeface="Calibri" pitchFamily="34" charset="0"/>
+                <a:ea typeface="Calibri" pitchFamily="34" charset="-122"/>
+                <a:cs typeface="Calibri" pitchFamily="34" charset="-120"/>
+              </a:rPr>
+              <a:t>Riz conduit en submersion : c'est le mode d'irrigation où la marge d'économie est la plus large.</a:t>
+            </a:r>
+            <a:endParaRPr lang="en-US" sz="1150" dirty="0"/>
+          </a:p>
+          <a:p>
+            <a:pPr algn="l" marL="342900" indent="-342900">
+              <a:lnSpc>
+                <a:spcPct val="116000"/>
+              </a:lnSpc>
+              <a:spcAft>
+                <a:spcPts val="700"/>
+              </a:spcAft>
+              <a:buSzPct val="100000"/>
+              <a:buChar char="•"/>
+            </a:pPr>
+            <a:r>
+              <a:rPr lang="en-US" sz="1150" dirty="0">
+                <a:solidFill>
+                  <a:srgbClr val="31424A"/>
+                </a:solidFill>
+                <a:latin typeface="Calibri" pitchFamily="34" charset="0"/>
+                <a:ea typeface="Calibri" pitchFamily="34" charset="-122"/>
+                <a:cs typeface="Calibri" pitchFamily="34" charset="-120"/>
+              </a:rPr>
+              <a:t>Réseau de canaux ancien et partiellement dégradé, d'où des inégalités d'accès à l'eau en bout de parcours.</a:t>
+            </a:r>
+            <a:endParaRPr lang="en-US" sz="1150" dirty="0"/>
+          </a:p>
+        </p:txBody>
+      </p:sp>
+      <p:sp>
+        <p:nvSpPr>
+          <p:cNvPr id="9" name="Shape 6"/>
+          <p:cNvSpPr/>
+          <p:nvPr/>
+        </p:nvSpPr>
+        <p:spPr>
+          <a:xfrm>
+            <a:off x="4359554" y="1783080"/>
+            <a:ext cx="3472586" cy="4069080"/>
+          </a:xfrm>
+          <a:prstGeom prst="roundRect">
+            <a:avLst>
+              <a:gd name="adj" fmla="val 2633"/>
+            </a:avLst>
+          </a:prstGeom>
+          <a:solidFill>
+            <a:srgbClr val="EDF3F5"/>
+          </a:solidFill>
+          <a:ln w="9525">
+            <a:solidFill>
+              <a:srgbClr val="D6E2E7"/>
+            </a:solidFill>
+            <a:prstDash val="solid"/>
+          </a:ln>
+        </p:spPr>
+      </p:sp>
+      <p:pic>
+        <p:nvPicPr>
+          <p:cNvPr id="10" name="Image 1" descr="preencoded.png">    </p:cNvPr>
+          <p:cNvPicPr>
+            <a:picLocks noChangeAspect="1"/>
+          </p:cNvPicPr>
+          <p:nvPr/>
+        </p:nvPicPr>
+        <p:blipFill>
+          <a:blip r:embed="rId2"/>
+          <a:stretch>
+            <a:fillRect/>
+          </a:stretch>
+        </p:blipFill>
+        <p:spPr>
+          <a:xfrm>
+            <a:off x="4359554" y="1783080"/>
+            <a:ext cx="3472586" cy="1691640"/>
+          </a:xfrm>
+          <a:prstGeom prst="rect">
+            <a:avLst/>
+          </a:prstGeom>
+        </p:spPr>
+      </p:pic>
+      <p:sp>
+        <p:nvSpPr>
+          <p:cNvPr id="11" name="Text 7"/>
+          <p:cNvSpPr txBox="1"/>
+          <p:nvPr/>
+        </p:nvSpPr>
+        <p:spPr>
+          <a:xfrm>
+            <a:off x="4560722" y="3639312"/>
+            <a:ext cx="3070250" cy="384048"/>
+          </a:xfrm>
+          <a:prstGeom prst="rect">
+            <a:avLst/>
+          </a:prstGeom>
+          <a:noFill/>
+          <a:ln/>
+        </p:spPr>
+        <p:txBody>
+          <a:bodyPr wrap="square" lIns="0" tIns="0" rIns="0" bIns="0" rtlCol="0" anchor="ctr"/>
+          <a:lstStyle/>
+          <a:p>
+            <a:pPr algn="l" indent="0" marL="0">
+              <a:buNone/>
+            </a:pPr>
+            <a:r>
+              <a:rPr lang="en-US" sz="1500" b="1" dirty="0">
+                <a:solidFill>
+                  <a:srgbClr val="1C5A73"/>
+                </a:solidFill>
+                <a:latin typeface="Cambria" pitchFamily="34" charset="0"/>
+                <a:ea typeface="Cambria" pitchFamily="34" charset="-122"/>
+                <a:cs typeface="Cambria" pitchFamily="34" charset="-120"/>
+              </a:rPr>
+              <a:t>Plateau Central</a:t>
+            </a:r>
+            <a:endParaRPr lang="en-US" sz="1500" dirty="0"/>
+          </a:p>
+        </p:txBody>
+      </p:sp>
+      <p:sp>
+        <p:nvSpPr>
+          <p:cNvPr id="12" name="Text 8"/>
+          <p:cNvSpPr txBox="1"/>
+          <p:nvPr/>
+        </p:nvSpPr>
+        <p:spPr>
+          <a:xfrm>
+            <a:off x="4560722" y="4041648"/>
+            <a:ext cx="3070250" cy="329184"/>
+          </a:xfrm>
+          <a:prstGeom prst="rect">
+            <a:avLst/>
+          </a:prstGeom>
+          <a:noFill/>
+          <a:ln/>
+        </p:spPr>
+        <p:txBody>
+          <a:bodyPr wrap="square" lIns="0" tIns="0" rIns="0" bIns="0" rtlCol="0" anchor="ctr"/>
+          <a:lstStyle/>
+          <a:p>
+            <a:pPr algn="l" indent="0" marL="0">
+              <a:buNone/>
+            </a:pPr>
+            <a:r>
+              <a:rPr lang="en-US" sz="1250" b="1" dirty="0">
+                <a:solidFill>
+                  <a:srgbClr val="A3701A"/>
+                </a:solidFill>
+                <a:latin typeface="Calibri" pitchFamily="34" charset="0"/>
+                <a:ea typeface="Calibri" pitchFamily="34" charset="-122"/>
+                <a:cs typeface="Calibri" pitchFamily="34" charset="-120"/>
+              </a:rPr>
+              <a:t>Vivrier et élevage</a:t>
+            </a:r>
+            <a:endParaRPr lang="en-US" sz="1250" dirty="0"/>
+          </a:p>
+        </p:txBody>
+      </p:sp>
+      <p:sp>
+        <p:nvSpPr>
+          <p:cNvPr id="13" name="Text 9"/>
+          <p:cNvSpPr txBox="1"/>
+          <p:nvPr/>
+        </p:nvSpPr>
+        <p:spPr>
+          <a:xfrm>
+            <a:off x="4560722" y="4407408"/>
+            <a:ext cx="3070250" cy="1280160"/>
+          </a:xfrm>
+          <a:prstGeom prst="rect">
+            <a:avLst/>
+          </a:prstGeom>
+          <a:noFill/>
+          <a:ln/>
+        </p:spPr>
+        <p:txBody>
+          <a:bodyPr wrap="square" lIns="0" tIns="0" rIns="0" bIns="0" rtlCol="0" anchor="t"/>
+          <a:lstStyle/>
+          <a:p>
+            <a:pPr algn="l" marL="342900" indent="-342900">
+              <a:lnSpc>
+                <a:spcPct val="116000"/>
+              </a:lnSpc>
+              <a:spcAft>
+                <a:spcPts val="700"/>
+              </a:spcAft>
+              <a:buSzPct val="100000"/>
+              <a:buChar char="•"/>
+            </a:pPr>
+            <a:r>
+              <a:rPr lang="en-US" sz="1150" dirty="0">
+                <a:solidFill>
+                  <a:srgbClr val="31424A"/>
+                </a:solidFill>
+                <a:latin typeface="Calibri" pitchFamily="34" charset="0"/>
+                <a:ea typeface="Calibri" pitchFamily="34" charset="-122"/>
+                <a:cs typeface="Calibri" pitchFamily="34" charset="-120"/>
+              </a:rPr>
+              <a:t>Maïs, haricot, manioc et sorgho conduits presque entièrement en pluvial.</a:t>
+            </a:r>
+            <a:endParaRPr lang="en-US" sz="1150" dirty="0"/>
+          </a:p>
+          <a:p>
+            <a:pPr algn="l" marL="342900" indent="-342900">
+              <a:lnSpc>
+                <a:spcPct val="116000"/>
+              </a:lnSpc>
+              <a:spcAft>
+                <a:spcPts val="700"/>
+              </a:spcAft>
+              <a:buSzPct val="100000"/>
+              <a:buChar char="•"/>
+            </a:pPr>
+            <a:r>
+              <a:rPr lang="en-US" sz="1150" dirty="0">
+                <a:solidFill>
+                  <a:srgbClr val="31424A"/>
+                </a:solidFill>
+                <a:latin typeface="Calibri" pitchFamily="34" charset="0"/>
+                <a:ea typeface="Calibri" pitchFamily="34" charset="-122"/>
+                <a:cs typeface="Calibri" pitchFamily="34" charset="-120"/>
+              </a:rPr>
+              <a:t>Saison sèche marquée : c'est exactement la séquence que l'hydro-rétenteur est fait pour franchir.</a:t>
+            </a:r>
+            <a:endParaRPr lang="en-US" sz="1150" dirty="0"/>
+          </a:p>
+          <a:p>
+            <a:pPr algn="l" marL="342900" indent="-342900">
+              <a:lnSpc>
+                <a:spcPct val="116000"/>
+              </a:lnSpc>
+              <a:spcAft>
+                <a:spcPts val="700"/>
+              </a:spcAft>
+              <a:buSzPct val="100000"/>
+              <a:buChar char="•"/>
+            </a:pPr>
+            <a:r>
+              <a:rPr lang="en-US" sz="1150" dirty="0">
+                <a:solidFill>
+                  <a:srgbClr val="31424A"/>
+                </a:solidFill>
+                <a:latin typeface="Calibri" pitchFamily="34" charset="0"/>
+                <a:ea typeface="Calibri" pitchFamily="34" charset="-122"/>
+                <a:cs typeface="Calibri" pitchFamily="34" charset="-120"/>
+              </a:rPr>
+              <a:t>Organisations paysannes structurées, capables de porter un essai groupé sur plusieurs parcelles.</a:t>
+            </a:r>
+            <a:endParaRPr lang="en-US" sz="1150" dirty="0"/>
+          </a:p>
+        </p:txBody>
+      </p:sp>
+      <p:sp>
+        <p:nvSpPr>
+          <p:cNvPr id="14" name="Shape 10"/>
+          <p:cNvSpPr/>
+          <p:nvPr/>
+        </p:nvSpPr>
+        <p:spPr>
+          <a:xfrm>
+            <a:off x="8124749" y="1783080"/>
+            <a:ext cx="3472586" cy="4069080"/>
+          </a:xfrm>
+          <a:prstGeom prst="roundRect">
+            <a:avLst>
+              <a:gd name="adj" fmla="val 2633"/>
+            </a:avLst>
+          </a:prstGeom>
+          <a:solidFill>
+            <a:srgbClr val="EDF3F5"/>
+          </a:solidFill>
+          <a:ln w="9525">
+            <a:solidFill>
+              <a:srgbClr val="D6E2E7"/>
+            </a:solidFill>
+            <a:prstDash val="solid"/>
+          </a:ln>
+        </p:spPr>
+      </p:sp>
+      <p:pic>
+        <p:nvPicPr>
+          <p:cNvPr id="15" name="Image 2" descr="preencoded.png">    </p:cNvPr>
+          <p:cNvPicPr>
+            <a:picLocks noChangeAspect="1"/>
+          </p:cNvPicPr>
+          <p:nvPr/>
+        </p:nvPicPr>
+        <p:blipFill>
+          <a:blip r:embed="rId3"/>
+          <a:stretch>
+            <a:fillRect/>
+          </a:stretch>
+        </p:blipFill>
+        <p:spPr>
+          <a:xfrm>
+            <a:off x="8124749" y="1783080"/>
+            <a:ext cx="3472586" cy="1691640"/>
+          </a:xfrm>
+          <a:prstGeom prst="rect">
+            <a:avLst/>
+          </a:prstGeom>
+        </p:spPr>
+      </p:pic>
+      <p:sp>
+        <p:nvSpPr>
+          <p:cNvPr id="16" name="Text 11"/>
+          <p:cNvSpPr txBox="1"/>
+          <p:nvPr/>
+        </p:nvSpPr>
+        <p:spPr>
+          <a:xfrm>
+            <a:off x="8325917" y="3639312"/>
+            <a:ext cx="3070250" cy="384048"/>
+          </a:xfrm>
+          <a:prstGeom prst="rect">
+            <a:avLst/>
+          </a:prstGeom>
+          <a:noFill/>
+          <a:ln/>
+        </p:spPr>
+        <p:txBody>
+          <a:bodyPr wrap="square" lIns="0" tIns="0" rIns="0" bIns="0" rtlCol="0" anchor="ctr"/>
+          <a:lstStyle/>
+          <a:p>
+            <a:pPr algn="l" indent="0" marL="0">
+              <a:buNone/>
+            </a:pPr>
+            <a:r>
+              <a:rPr lang="en-US" sz="1500" b="1" dirty="0">
+                <a:solidFill>
+                  <a:srgbClr val="1C5A73"/>
+                </a:solidFill>
+                <a:latin typeface="Cambria" pitchFamily="34" charset="0"/>
+                <a:ea typeface="Cambria" pitchFamily="34" charset="-122"/>
+                <a:cs typeface="Cambria" pitchFamily="34" charset="-120"/>
+              </a:rPr>
+              <a:t>Grand Sud — Grand'Anse</a:t>
+            </a:r>
+            <a:endParaRPr lang="en-US" sz="1500" dirty="0"/>
+          </a:p>
+        </p:txBody>
+      </p:sp>
+      <p:sp>
+        <p:nvSpPr>
+          <p:cNvPr id="17" name="Text 12"/>
+          <p:cNvSpPr txBox="1"/>
+          <p:nvPr/>
+        </p:nvSpPr>
+        <p:spPr>
+          <a:xfrm>
+            <a:off x="8325917" y="4041648"/>
+            <a:ext cx="3070250" cy="329184"/>
+          </a:xfrm>
+          <a:prstGeom prst="rect">
+            <a:avLst/>
+          </a:prstGeom>
+          <a:noFill/>
+          <a:ln/>
+        </p:spPr>
+        <p:txBody>
+          <a:bodyPr wrap="square" lIns="0" tIns="0" rIns="0" bIns="0" rtlCol="0" anchor="ctr"/>
+          <a:lstStyle/>
+          <a:p>
+            <a:pPr algn="l" indent="0" marL="0">
+              <a:buNone/>
+            </a:pPr>
+            <a:r>
+              <a:rPr lang="en-US" sz="1250" b="1" dirty="0">
+                <a:solidFill>
+                  <a:srgbClr val="A3701A"/>
+                </a:solidFill>
+                <a:latin typeface="Calibri" pitchFamily="34" charset="0"/>
+                <a:ea typeface="Calibri" pitchFamily="34" charset="-122"/>
+                <a:cs typeface="Calibri" pitchFamily="34" charset="-120"/>
+              </a:rPr>
+              <a:t>Café, cacao, mangue, vétiver</a:t>
+            </a:r>
+            <a:endParaRPr lang="en-US" sz="1250" dirty="0"/>
+          </a:p>
+        </p:txBody>
+      </p:sp>
+      <p:sp>
+        <p:nvSpPr>
+          <p:cNvPr id="18" name="Text 13"/>
+          <p:cNvSpPr txBox="1"/>
+          <p:nvPr/>
+        </p:nvSpPr>
+        <p:spPr>
+          <a:xfrm>
+            <a:off x="8325917" y="4407408"/>
+            <a:ext cx="3070250" cy="1280160"/>
+          </a:xfrm>
+          <a:prstGeom prst="rect">
+            <a:avLst/>
+          </a:prstGeom>
+          <a:noFill/>
+          <a:ln/>
+        </p:spPr>
+        <p:txBody>
+          <a:bodyPr wrap="square" lIns="0" tIns="0" rIns="0" bIns="0" rtlCol="0" anchor="t"/>
+          <a:lstStyle/>
+          <a:p>
+            <a:pPr algn="l" marL="342900" indent="-342900">
+              <a:lnSpc>
+                <a:spcPct val="116000"/>
+              </a:lnSpc>
+              <a:spcAft>
+                <a:spcPts val="700"/>
+              </a:spcAft>
+              <a:buSzPct val="100000"/>
+              <a:buChar char="•"/>
+            </a:pPr>
+            <a:r>
+              <a:rPr lang="en-US" sz="1150" dirty="0">
+                <a:solidFill>
+                  <a:srgbClr val="31424A"/>
+                </a:solidFill>
+                <a:latin typeface="Calibri" pitchFamily="34" charset="0"/>
+                <a:ea typeface="Calibri" pitchFamily="34" charset="-122"/>
+                <a:cs typeface="Calibri" pitchFamily="34" charset="-120"/>
+              </a:rPr>
+              <a:t>Cultures de rente destinées à l'export, seules à supporter une prime de certification biologique.</a:t>
+            </a:r>
+            <a:endParaRPr lang="en-US" sz="1150" dirty="0"/>
+          </a:p>
+          <a:p>
+            <a:pPr algn="l" marL="342900" indent="-342900">
+              <a:lnSpc>
+                <a:spcPct val="116000"/>
+              </a:lnSpc>
+              <a:spcAft>
+                <a:spcPts val="700"/>
+              </a:spcAft>
+              <a:buSzPct val="100000"/>
+              <a:buChar char="•"/>
+            </a:pPr>
+            <a:r>
+              <a:rPr lang="en-US" sz="1150" dirty="0">
+                <a:solidFill>
+                  <a:srgbClr val="31424A"/>
+                </a:solidFill>
+                <a:latin typeface="Calibri" pitchFamily="34" charset="0"/>
+                <a:ea typeface="Calibri" pitchFamily="34" charset="-122"/>
+                <a:cs typeface="Calibri" pitchFamily="34" charset="-120"/>
+              </a:rPr>
+              <a:t>Versants pentus et fortement érodés : chaque averse emporte du sol si rien ne le retient.</a:t>
+            </a:r>
+            <a:endParaRPr lang="en-US" sz="1150" dirty="0"/>
+          </a:p>
+          <a:p>
+            <a:pPr algn="l" marL="342900" indent="-342900">
+              <a:lnSpc>
+                <a:spcPct val="116000"/>
+              </a:lnSpc>
+              <a:spcAft>
+                <a:spcPts val="700"/>
+              </a:spcAft>
+              <a:buSzPct val="100000"/>
+              <a:buChar char="•"/>
+            </a:pPr>
+            <a:r>
+              <a:rPr lang="en-US" sz="1150" dirty="0">
+                <a:solidFill>
+                  <a:srgbClr val="31424A"/>
+                </a:solidFill>
+                <a:latin typeface="Calibri" pitchFamily="34" charset="0"/>
+                <a:ea typeface="Calibri" pitchFamily="34" charset="-122"/>
+                <a:cs typeface="Calibri" pitchFamily="34" charset="-120"/>
+              </a:rPr>
+              <a:t>Zone exposée aux cyclones, où la reprise des jeunes plants après sinistre est un enjeu récurrent.</a:t>
+            </a:r>
+            <a:endParaRPr lang="en-US" sz="1150" dirty="0"/>
+          </a:p>
+        </p:txBody>
+      </p:sp>
+      <p:sp>
+        <p:nvSpPr>
+          <p:cNvPr id="19" name="Text 14"/>
+          <p:cNvSpPr txBox="1"/>
+          <p:nvPr/>
+        </p:nvSpPr>
+        <p:spPr>
+          <a:xfrm>
+            <a:off x="502920" y="6382512"/>
+            <a:ext cx="8229600" cy="274320"/>
+          </a:xfrm>
+          <a:prstGeom prst="rect">
+            <a:avLst/>
+          </a:prstGeom>
+          <a:noFill/>
+          <a:ln/>
+        </p:spPr>
+        <p:txBody>
+          <a:bodyPr wrap="square" lIns="0" tIns="0" rIns="0" bIns="0" rtlCol="0" anchor="ctr"/>
+          <a:lstStyle/>
+          <a:p>
+            <a:pPr algn="l" indent="0" marL="0">
+              <a:buNone/>
+            </a:pPr>
+            <a:r>
+              <a:rPr lang="en-US" sz="950" dirty="0">
+                <a:solidFill>
+                  <a:srgbClr val="6C8089">
+                    <a:alpha val="80000"/>
+                  </a:srgbClr>
+                </a:solidFill>
+                <a:latin typeface="Calibri" pitchFamily="34" charset="0"/>
+                <a:ea typeface="Calibri" pitchFamily="34" charset="-122"/>
+                <a:cs typeface="Calibri" pitchFamily="34" charset="-120"/>
+              </a:rPr>
+              <a:t>Green Solutions · Dossier marché Haïti</a:t>
+            </a:r>
+            <a:endParaRPr lang="en-US" sz="950" dirty="0"/>
+          </a:p>
+        </p:txBody>
+      </p:sp>
+      <p:sp>
+        <p:nvSpPr>
+          <p:cNvPr id="20" name="Text 15"/>
+          <p:cNvSpPr txBox="1"/>
+          <p:nvPr/>
+        </p:nvSpPr>
+        <p:spPr>
+          <a:xfrm>
+            <a:off x="11140135" y="6382512"/>
+            <a:ext cx="548640" cy="274320"/>
+          </a:xfrm>
+          <a:prstGeom prst="rect">
+            <a:avLst/>
+          </a:prstGeom>
+          <a:noFill/>
+          <a:ln/>
+        </p:spPr>
+        <p:txBody>
+          <a:bodyPr wrap="square" lIns="0" tIns="0" rIns="0" bIns="0" rtlCol="0" anchor="ctr"/>
+          <a:lstStyle/>
+          <a:p>
+            <a:pPr algn="r" indent="0" marL="0">
+              <a:buNone/>
+            </a:pPr>
+            <a:r>
+              <a:rPr lang="en-US" sz="950" dirty="0">
+                <a:solidFill>
+                  <a:srgbClr val="6C8089">
+                    <a:alpha val="80000"/>
+                  </a:srgbClr>
+                </a:solidFill>
+                <a:latin typeface="Calibri" pitchFamily="34" charset="0"/>
+                <a:ea typeface="Calibri" pitchFamily="34" charset="-122"/>
+                <a:cs typeface="Calibri" pitchFamily="34" charset="-120"/>
+              </a:rPr>
+              <a:t>12</a:t>
+            </a:r>
+            <a:endParaRPr lang="en-US" sz="950" dirty="0"/>
+          </a:p>
+        </p:txBody>
+      </p:sp>
+    </p:spTree>
+  </p:cSld>
+  <p:clrMapOvr>
+    <a:masterClrMapping/>
+  </p:clrMapOvr>
+</p:sld>
+</file>
+
+<file path=ppt/slides/slide14.xml><?xml version="1.0" encoding="utf-8"?>
+<p:sld xmlns:a="http://schemas.openxmlformats.org/drawingml/2006/main" xmlns:r="http://schemas.openxmlformats.org/officeDocument/2006/relationships" xmlns:p="http://schemas.openxmlformats.org/presentationml/2006/main">
+  <p:cSld name="Slide 14">
+    <p:bg>
+      <p:bgPr>
+        <a:solidFill>
+          <a:srgbClr val="FAFBFB"/>
+        </a:solidFill>
+      </p:bgPr>
+    </p:bg>
+    <p:spTree>
+      <p:nvGrpSpPr>
+        <p:cNvPr id="1" name=""/>
+        <p:cNvGrpSpPr/>
+        <p:nvPr/>
+      </p:nvGrpSpPr>
+      <p:grpSpPr>
+        <a:xfrm>
+          <a:off x="0" y="0"/>
+          <a:ext cx="0" cy="0"/>
+          <a:chOff x="0" y="0"/>
+          <a:chExt cx="0" cy="0"/>
+        </a:xfrm>
+      </p:grpSpPr>
+      <p:sp>
+        <p:nvSpPr>
+          <p:cNvPr id="2" name="Text 0"/>
+          <p:cNvSpPr txBox="1"/>
+          <p:nvPr/>
+        </p:nvSpPr>
+        <p:spPr>
+          <a:xfrm>
+            <a:off x="594360" y="411480"/>
+            <a:ext cx="10515600" cy="274320"/>
+          </a:xfrm>
+          <a:prstGeom prst="rect">
+            <a:avLst/>
+          </a:prstGeom>
+          <a:noFill/>
+          <a:ln/>
+        </p:spPr>
+        <p:txBody>
+          <a:bodyPr wrap="square" lIns="0" tIns="0" rIns="0" bIns="0" rtlCol="0" anchor="ctr"/>
+          <a:lstStyle/>
+          <a:p>
+            <a:pPr algn="l" indent="0" marL="0">
+              <a:buNone/>
+            </a:pPr>
+            <a:r>
+              <a:rPr lang="en-US" sz="1150" b="1" spc="200" kern="0" dirty="0">
+                <a:solidFill>
+                  <a:srgbClr val="E0A33E"/>
+                </a:solidFill>
+                <a:latin typeface="Calibri" pitchFamily="34" charset="0"/>
+                <a:ea typeface="Calibri" pitchFamily="34" charset="-122"/>
+                <a:cs typeface="Calibri" pitchFamily="34" charset="-120"/>
+              </a:rPr>
+              <a:t>COMMENT NOUS PROCÉDONS</a:t>
+            </a:r>
+            <a:endParaRPr lang="en-US" sz="1150" dirty="0"/>
+          </a:p>
+        </p:txBody>
+      </p:sp>
+      <p:sp>
+        <p:nvSpPr>
+          <p:cNvPr id="3" name="Text 1"/>
+          <p:cNvSpPr txBox="1"/>
+          <p:nvPr/>
+        </p:nvSpPr>
+        <p:spPr>
+          <a:xfrm>
+            <a:off x="594360" y="731520"/>
+            <a:ext cx="10881360" cy="731520"/>
+          </a:xfrm>
+          <a:prstGeom prst="rect">
+            <a:avLst/>
+          </a:prstGeom>
+          <a:noFill/>
+          <a:ln/>
+        </p:spPr>
+        <p:txBody>
+          <a:bodyPr wrap="square" lIns="0" tIns="0" rIns="0" bIns="0" rtlCol="0" anchor="ctr"/>
+          <a:lstStyle/>
+          <a:p>
+            <a:pPr algn="l" indent="0" marL="0">
+              <a:buNone/>
+            </a:pPr>
+            <a:r>
+              <a:rPr lang="en-US" sz="3000" b="1" dirty="0">
+                <a:solidFill>
+                  <a:srgbClr val="0E3546"/>
+                </a:solidFill>
+                <a:latin typeface="Cambria" pitchFamily="34" charset="0"/>
+                <a:ea typeface="Cambria" pitchFamily="34" charset="-122"/>
+                <a:cs typeface="Cambria" pitchFamily="34" charset="-120"/>
+              </a:rPr>
+              <a:t>Un déploiement par étapes, mesuré à chaque palier</a:t>
+            </a:r>
+            <a:endParaRPr lang="en-US" sz="3000" dirty="0"/>
+          </a:p>
+        </p:txBody>
+      </p:sp>
+      <p:sp>
+        <p:nvSpPr>
+          <p:cNvPr id="4" name="Shape 2"/>
+          <p:cNvSpPr/>
+          <p:nvPr/>
+        </p:nvSpPr>
+        <p:spPr>
+          <a:xfrm>
+            <a:off x="594360" y="1874520"/>
+            <a:ext cx="2545004" cy="2834640"/>
+          </a:xfrm>
+          <a:prstGeom prst="roundRect">
+            <a:avLst>
+              <a:gd name="adj" fmla="val 3593"/>
+            </a:avLst>
+          </a:prstGeom>
+          <a:solidFill>
+            <a:srgbClr val="EDF3F5"/>
+          </a:solidFill>
+          <a:ln w="9525">
+            <a:solidFill>
+              <a:srgbClr val="D6E2E7"/>
+            </a:solidFill>
+            <a:prstDash val="solid"/>
+          </a:ln>
+        </p:spPr>
+      </p:sp>
+      <p:sp>
+        <p:nvSpPr>
+          <p:cNvPr id="5" name="Shape 3"/>
+          <p:cNvSpPr/>
+          <p:nvPr/>
+        </p:nvSpPr>
+        <p:spPr>
+          <a:xfrm>
+            <a:off x="822960" y="2103120"/>
+            <a:ext cx="566928" cy="566928"/>
+          </a:xfrm>
+          <a:prstGeom prst="ellipse">
+            <a:avLst/>
+          </a:prstGeom>
+          <a:solidFill>
+            <a:srgbClr val="1C5A73"/>
+          </a:solidFill>
+          <a:ln/>
+        </p:spPr>
+      </p:sp>
+      <p:sp>
+        <p:nvSpPr>
+          <p:cNvPr id="6" name="Text 4"/>
+          <p:cNvSpPr txBox="1"/>
+          <p:nvPr/>
+        </p:nvSpPr>
+        <p:spPr>
+          <a:xfrm>
+            <a:off x="822960" y="2103120"/>
+            <a:ext cx="566928" cy="566928"/>
+          </a:xfrm>
+          <a:prstGeom prst="rect">
+            <a:avLst/>
+          </a:prstGeom>
+          <a:noFill/>
+          <a:ln/>
+        </p:spPr>
+        <p:txBody>
+          <a:bodyPr wrap="square" lIns="0" tIns="0" rIns="0" bIns="0" rtlCol="0" anchor="ctr"/>
+          <a:lstStyle/>
+          <a:p>
+            <a:pPr algn="ctr" indent="0" marL="0">
+              <a:buNone/>
+            </a:pPr>
+            <a:r>
+              <a:rPr lang="en-US" sz="1600" b="1" dirty="0">
+                <a:solidFill>
+                  <a:srgbClr val="FFFFFF"/>
+                </a:solidFill>
+                <a:latin typeface="Cambria" pitchFamily="34" charset="0"/>
+                <a:ea typeface="Cambria" pitchFamily="34" charset="-122"/>
+                <a:cs typeface="Cambria" pitchFamily="34" charset="-120"/>
+              </a:rPr>
+              <a:t>1</a:t>
+            </a:r>
+            <a:endParaRPr lang="en-US" sz="1600" dirty="0"/>
+          </a:p>
+        </p:txBody>
+      </p:sp>
+      <p:sp>
+        <p:nvSpPr>
+          <p:cNvPr id="7" name="Text 5"/>
+          <p:cNvSpPr txBox="1"/>
+          <p:nvPr/>
+        </p:nvSpPr>
+        <p:spPr>
+          <a:xfrm>
+            <a:off x="822960" y="2788920"/>
+            <a:ext cx="2087804" cy="457200"/>
+          </a:xfrm>
+          <a:prstGeom prst="rect">
+            <a:avLst/>
+          </a:prstGeom>
+          <a:noFill/>
+          <a:ln/>
+        </p:spPr>
+        <p:txBody>
+          <a:bodyPr wrap="square" lIns="0" tIns="0" rIns="0" bIns="0" rtlCol="0" anchor="ctr"/>
+          <a:lstStyle/>
+          <a:p>
+            <a:pPr algn="l" indent="0" marL="0">
+              <a:buNone/>
+            </a:pPr>
+            <a:r>
+              <a:rPr lang="en-US" sz="1400" b="1" dirty="0">
+                <a:solidFill>
+                  <a:srgbClr val="1C5A73"/>
+                </a:solidFill>
+                <a:latin typeface="Cambria" pitchFamily="34" charset="0"/>
+                <a:ea typeface="Cambria" pitchFamily="34" charset="-122"/>
+                <a:cs typeface="Cambria" pitchFamily="34" charset="-120"/>
+              </a:rPr>
+              <a:t>Diagnostic</a:t>
+            </a:r>
+            <a:endParaRPr lang="en-US" sz="1400" dirty="0"/>
+          </a:p>
+        </p:txBody>
+      </p:sp>
+      <p:sp>
+        <p:nvSpPr>
+          <p:cNvPr id="8" name="Text 6"/>
+          <p:cNvSpPr txBox="1"/>
+          <p:nvPr/>
+        </p:nvSpPr>
+        <p:spPr>
+          <a:xfrm>
+            <a:off x="822960" y="3291840"/>
+            <a:ext cx="2087804" cy="1234440"/>
+          </a:xfrm>
+          <a:prstGeom prst="rect">
+            <a:avLst/>
+          </a:prstGeom>
+          <a:noFill/>
+          <a:ln/>
+        </p:spPr>
+        <p:txBody>
+          <a:bodyPr wrap="square" lIns="0" tIns="0" rIns="0" bIns="0" rtlCol="0" anchor="t"/>
+          <a:lstStyle/>
+          <a:p>
+            <a:pPr algn="l" indent="0" marL="0">
+              <a:lnSpc>
+                <a:spcPct val="120000"/>
+              </a:lnSpc>
+              <a:buNone/>
+            </a:pPr>
+            <a:r>
+              <a:rPr lang="en-US" sz="1200" dirty="0">
+                <a:solidFill>
+                  <a:srgbClr val="31424A"/>
+                </a:solidFill>
+                <a:latin typeface="Calibri" pitchFamily="34" charset="0"/>
+                <a:ea typeface="Calibri" pitchFamily="34" charset="-122"/>
+                <a:cs typeface="Calibri" pitchFamily="34" charset="-120"/>
+              </a:rPr>
+              <a:t>Analyse du sol, de la pente et de la culture. Aucun engagement à ce stade.</a:t>
+            </a:r>
+            <a:endParaRPr lang="en-US" sz="1200" dirty="0"/>
+          </a:p>
+        </p:txBody>
+      </p:sp>
+      <p:sp>
+        <p:nvSpPr>
+          <p:cNvPr id="9" name="Shape 7"/>
+          <p:cNvSpPr/>
+          <p:nvPr/>
+        </p:nvSpPr>
+        <p:spPr>
+          <a:xfrm>
+            <a:off x="3413684" y="1874520"/>
+            <a:ext cx="2545004" cy="2834640"/>
+          </a:xfrm>
+          <a:prstGeom prst="roundRect">
+            <a:avLst>
+              <a:gd name="adj" fmla="val 3593"/>
+            </a:avLst>
+          </a:prstGeom>
+          <a:solidFill>
+            <a:srgbClr val="EDF3F5"/>
+          </a:solidFill>
+          <a:ln w="9525">
+            <a:solidFill>
+              <a:srgbClr val="D6E2E7"/>
+            </a:solidFill>
+            <a:prstDash val="solid"/>
+          </a:ln>
+        </p:spPr>
+      </p:sp>
+      <p:sp>
+        <p:nvSpPr>
+          <p:cNvPr id="10" name="Shape 8"/>
+          <p:cNvSpPr/>
+          <p:nvPr/>
+        </p:nvSpPr>
+        <p:spPr>
+          <a:xfrm>
+            <a:off x="3642284" y="2103120"/>
+            <a:ext cx="566928" cy="566928"/>
+          </a:xfrm>
+          <a:prstGeom prst="ellipse">
+            <a:avLst/>
+          </a:prstGeom>
+          <a:solidFill>
+            <a:srgbClr val="1C5A73"/>
+          </a:solidFill>
+          <a:ln/>
+        </p:spPr>
+      </p:sp>
+      <p:sp>
+        <p:nvSpPr>
+          <p:cNvPr id="11" name="Text 9"/>
+          <p:cNvSpPr txBox="1"/>
+          <p:nvPr/>
+        </p:nvSpPr>
+        <p:spPr>
+          <a:xfrm>
+            <a:off x="3642284" y="2103120"/>
+            <a:ext cx="566928" cy="566928"/>
+          </a:xfrm>
+          <a:prstGeom prst="rect">
+            <a:avLst/>
+          </a:prstGeom>
+          <a:noFill/>
+          <a:ln/>
+        </p:spPr>
+        <p:txBody>
+          <a:bodyPr wrap="square" lIns="0" tIns="0" rIns="0" bIns="0" rtlCol="0" anchor="ctr"/>
+          <a:lstStyle/>
+          <a:p>
+            <a:pPr algn="ctr" indent="0" marL="0">
+              <a:buNone/>
+            </a:pPr>
+            <a:r>
+              <a:rPr lang="en-US" sz="1600" b="1" dirty="0">
+                <a:solidFill>
+                  <a:srgbClr val="FFFFFF"/>
+                </a:solidFill>
+                <a:latin typeface="Cambria" pitchFamily="34" charset="0"/>
+                <a:ea typeface="Cambria" pitchFamily="34" charset="-122"/>
+                <a:cs typeface="Cambria" pitchFamily="34" charset="-120"/>
+              </a:rPr>
+              <a:t>2</a:t>
+            </a:r>
+            <a:endParaRPr lang="en-US" sz="1600" dirty="0"/>
+          </a:p>
+        </p:txBody>
+      </p:sp>
+      <p:sp>
+        <p:nvSpPr>
+          <p:cNvPr id="12" name="Text 10"/>
+          <p:cNvSpPr txBox="1"/>
+          <p:nvPr/>
+        </p:nvSpPr>
+        <p:spPr>
+          <a:xfrm>
+            <a:off x="3642284" y="2788920"/>
+            <a:ext cx="2087804" cy="457200"/>
+          </a:xfrm>
+          <a:prstGeom prst="rect">
+            <a:avLst/>
+          </a:prstGeom>
+          <a:noFill/>
+          <a:ln/>
+        </p:spPr>
+        <p:txBody>
+          <a:bodyPr wrap="square" lIns="0" tIns="0" rIns="0" bIns="0" rtlCol="0" anchor="ctr"/>
+          <a:lstStyle/>
+          <a:p>
+            <a:pPr algn="l" indent="0" marL="0">
+              <a:buNone/>
+            </a:pPr>
+            <a:r>
+              <a:rPr lang="en-US" sz="1400" b="1" dirty="0">
+                <a:solidFill>
+                  <a:srgbClr val="1C5A73"/>
+                </a:solidFill>
+                <a:latin typeface="Cambria" pitchFamily="34" charset="0"/>
+                <a:ea typeface="Cambria" pitchFamily="34" charset="-122"/>
+                <a:cs typeface="Cambria" pitchFamily="34" charset="-120"/>
+              </a:rPr>
+              <a:t>Parcelle témoin</a:t>
+            </a:r>
+            <a:endParaRPr lang="en-US" sz="1400" dirty="0"/>
+          </a:p>
+        </p:txBody>
+      </p:sp>
+      <p:sp>
+        <p:nvSpPr>
+          <p:cNvPr id="13" name="Text 11"/>
+          <p:cNvSpPr txBox="1"/>
+          <p:nvPr/>
+        </p:nvSpPr>
+        <p:spPr>
+          <a:xfrm>
+            <a:off x="3642284" y="3291840"/>
+            <a:ext cx="2087804" cy="1234440"/>
+          </a:xfrm>
+          <a:prstGeom prst="rect">
+            <a:avLst/>
+          </a:prstGeom>
+          <a:noFill/>
+          <a:ln/>
+        </p:spPr>
+        <p:txBody>
+          <a:bodyPr wrap="square" lIns="0" tIns="0" rIns="0" bIns="0" rtlCol="0" anchor="t"/>
+          <a:lstStyle/>
+          <a:p>
+            <a:pPr algn="l" indent="0" marL="0">
+              <a:lnSpc>
+                <a:spcPct val="120000"/>
+              </a:lnSpc>
+              <a:buNone/>
+            </a:pPr>
+            <a:r>
+              <a:rPr lang="en-US" sz="1200" dirty="0">
+                <a:solidFill>
+                  <a:srgbClr val="31424A"/>
+                </a:solidFill>
+                <a:latin typeface="Calibri" pitchFamily="34" charset="0"/>
+                <a:ea typeface="Calibri" pitchFamily="34" charset="-122"/>
+                <a:cs typeface="Calibri" pitchFamily="34" charset="-120"/>
+              </a:rPr>
+              <a:t>Un essai comparatif sur une parcelle, avec parcelle témoin conduite à l'identique.</a:t>
+            </a:r>
+            <a:endParaRPr lang="en-US" sz="1200" dirty="0"/>
+          </a:p>
+        </p:txBody>
+      </p:sp>
+      <p:sp>
+        <p:nvSpPr>
+          <p:cNvPr id="14" name="Shape 12"/>
+          <p:cNvSpPr/>
+          <p:nvPr/>
+        </p:nvSpPr>
+        <p:spPr>
+          <a:xfrm>
+            <a:off x="6233008" y="1874520"/>
+            <a:ext cx="2545004" cy="2834640"/>
+          </a:xfrm>
+          <a:prstGeom prst="roundRect">
+            <a:avLst>
+              <a:gd name="adj" fmla="val 3593"/>
+            </a:avLst>
+          </a:prstGeom>
+          <a:solidFill>
+            <a:srgbClr val="EDF3F5"/>
+          </a:solidFill>
+          <a:ln w="9525">
+            <a:solidFill>
+              <a:srgbClr val="D6E2E7"/>
+            </a:solidFill>
+            <a:prstDash val="solid"/>
+          </a:ln>
+        </p:spPr>
+      </p:sp>
+      <p:sp>
+        <p:nvSpPr>
+          <p:cNvPr id="15" name="Shape 13"/>
+          <p:cNvSpPr/>
+          <p:nvPr/>
+        </p:nvSpPr>
+        <p:spPr>
+          <a:xfrm>
+            <a:off x="6461608" y="2103120"/>
+            <a:ext cx="566928" cy="566928"/>
+          </a:xfrm>
+          <a:prstGeom prst="ellipse">
+            <a:avLst/>
+          </a:prstGeom>
+          <a:solidFill>
+            <a:srgbClr val="1C5A73"/>
+          </a:solidFill>
+          <a:ln/>
+        </p:spPr>
+      </p:sp>
+      <p:sp>
+        <p:nvSpPr>
+          <p:cNvPr id="16" name="Text 14"/>
+          <p:cNvSpPr txBox="1"/>
+          <p:nvPr/>
+        </p:nvSpPr>
+        <p:spPr>
+          <a:xfrm>
+            <a:off x="6461608" y="2103120"/>
+            <a:ext cx="566928" cy="566928"/>
+          </a:xfrm>
+          <a:prstGeom prst="rect">
+            <a:avLst/>
+          </a:prstGeom>
+          <a:noFill/>
+          <a:ln/>
+        </p:spPr>
+        <p:txBody>
+          <a:bodyPr wrap="square" lIns="0" tIns="0" rIns="0" bIns="0" rtlCol="0" anchor="ctr"/>
+          <a:lstStyle/>
+          <a:p>
+            <a:pPr algn="ctr" indent="0" marL="0">
+              <a:buNone/>
+            </a:pPr>
+            <a:r>
+              <a:rPr lang="en-US" sz="1600" b="1" dirty="0">
+                <a:solidFill>
+                  <a:srgbClr val="FFFFFF"/>
+                </a:solidFill>
+                <a:latin typeface="Cambria" pitchFamily="34" charset="0"/>
+                <a:ea typeface="Cambria" pitchFamily="34" charset="-122"/>
+                <a:cs typeface="Cambria" pitchFamily="34" charset="-120"/>
+              </a:rPr>
+              <a:t>3</a:t>
+            </a:r>
+            <a:endParaRPr lang="en-US" sz="1600" dirty="0"/>
+          </a:p>
+        </p:txBody>
+      </p:sp>
+      <p:sp>
+        <p:nvSpPr>
+          <p:cNvPr id="17" name="Text 15"/>
+          <p:cNvSpPr txBox="1"/>
+          <p:nvPr/>
+        </p:nvSpPr>
+        <p:spPr>
+          <a:xfrm>
+            <a:off x="6461608" y="2788920"/>
+            <a:ext cx="2087804" cy="457200"/>
+          </a:xfrm>
+          <a:prstGeom prst="rect">
+            <a:avLst/>
+          </a:prstGeom>
+          <a:noFill/>
+          <a:ln/>
+        </p:spPr>
+        <p:txBody>
+          <a:bodyPr wrap="square" lIns="0" tIns="0" rIns="0" bIns="0" rtlCol="0" anchor="ctr"/>
+          <a:lstStyle/>
+          <a:p>
+            <a:pPr algn="l" indent="0" marL="0">
+              <a:buNone/>
+            </a:pPr>
+            <a:r>
+              <a:rPr lang="en-US" sz="1400" b="1" dirty="0">
+                <a:solidFill>
+                  <a:srgbClr val="1C5A73"/>
+                </a:solidFill>
+                <a:latin typeface="Cambria" pitchFamily="34" charset="0"/>
+                <a:ea typeface="Cambria" pitchFamily="34" charset="-122"/>
+                <a:cs typeface="Cambria" pitchFamily="34" charset="-120"/>
+              </a:rPr>
+              <a:t>Mesure</a:t>
+            </a:r>
+            <a:endParaRPr lang="en-US" sz="1400" dirty="0"/>
+          </a:p>
+        </p:txBody>
+      </p:sp>
+      <p:sp>
+        <p:nvSpPr>
+          <p:cNvPr id="18" name="Text 16"/>
+          <p:cNvSpPr txBox="1"/>
+          <p:nvPr/>
+        </p:nvSpPr>
+        <p:spPr>
+          <a:xfrm>
+            <a:off x="6461608" y="3291840"/>
+            <a:ext cx="2087804" cy="1234440"/>
+          </a:xfrm>
+          <a:prstGeom prst="rect">
+            <a:avLst/>
+          </a:prstGeom>
+          <a:noFill/>
+          <a:ln/>
+        </p:spPr>
+        <p:txBody>
+          <a:bodyPr wrap="square" lIns="0" tIns="0" rIns="0" bIns="0" rtlCol="0" anchor="t"/>
+          <a:lstStyle/>
+          <a:p>
+            <a:pPr algn="l" indent="0" marL="0">
+              <a:lnSpc>
+                <a:spcPct val="120000"/>
+              </a:lnSpc>
+              <a:buNone/>
+            </a:pPr>
+            <a:r>
+              <a:rPr lang="en-US" sz="1200" dirty="0">
+                <a:solidFill>
+                  <a:srgbClr val="31424A"/>
+                </a:solidFill>
+                <a:latin typeface="Calibri" pitchFamily="34" charset="0"/>
+                <a:ea typeface="Calibri" pitchFamily="34" charset="-122"/>
+                <a:cs typeface="Calibri" pitchFamily="34" charset="-120"/>
+              </a:rPr>
+              <a:t>Relevés de rendement et de reprise sur un cycle cultural complet.</a:t>
+            </a:r>
+            <a:endParaRPr lang="en-US" sz="1200" dirty="0"/>
+          </a:p>
+        </p:txBody>
+      </p:sp>
+      <p:sp>
+        <p:nvSpPr>
+          <p:cNvPr id="19" name="Shape 17"/>
+          <p:cNvSpPr/>
+          <p:nvPr/>
+        </p:nvSpPr>
+        <p:spPr>
+          <a:xfrm>
+            <a:off x="9052331" y="1874520"/>
+            <a:ext cx="2545004" cy="2834640"/>
+          </a:xfrm>
+          <a:prstGeom prst="roundRect">
+            <a:avLst>
+              <a:gd name="adj" fmla="val 3593"/>
+            </a:avLst>
+          </a:prstGeom>
+          <a:solidFill>
+            <a:srgbClr val="EDF3F5"/>
+          </a:solidFill>
+          <a:ln w="9525">
+            <a:solidFill>
+              <a:srgbClr val="D6E2E7"/>
+            </a:solidFill>
+            <a:prstDash val="solid"/>
+          </a:ln>
+        </p:spPr>
+      </p:sp>
+      <p:sp>
+        <p:nvSpPr>
+          <p:cNvPr id="20" name="Shape 18"/>
+          <p:cNvSpPr/>
+          <p:nvPr/>
+        </p:nvSpPr>
+        <p:spPr>
+          <a:xfrm>
+            <a:off x="9280931" y="2103120"/>
+            <a:ext cx="566928" cy="566928"/>
+          </a:xfrm>
+          <a:prstGeom prst="ellipse">
+            <a:avLst/>
+          </a:prstGeom>
+          <a:solidFill>
+            <a:srgbClr val="1C5A73"/>
+          </a:solidFill>
+          <a:ln/>
+        </p:spPr>
+      </p:sp>
+      <p:sp>
+        <p:nvSpPr>
+          <p:cNvPr id="21" name="Text 19"/>
+          <p:cNvSpPr txBox="1"/>
+          <p:nvPr/>
+        </p:nvSpPr>
+        <p:spPr>
+          <a:xfrm>
+            <a:off x="9280931" y="2103120"/>
+            <a:ext cx="566928" cy="566928"/>
+          </a:xfrm>
+          <a:prstGeom prst="rect">
+            <a:avLst/>
+          </a:prstGeom>
+          <a:noFill/>
+          <a:ln/>
+        </p:spPr>
+        <p:txBody>
+          <a:bodyPr wrap="square" lIns="0" tIns="0" rIns="0" bIns="0" rtlCol="0" anchor="ctr"/>
+          <a:lstStyle/>
+          <a:p>
+            <a:pPr algn="ctr" indent="0" marL="0">
+              <a:buNone/>
+            </a:pPr>
+            <a:r>
+              <a:rPr lang="en-US" sz="1600" b="1" dirty="0">
+                <a:solidFill>
+                  <a:srgbClr val="FFFFFF"/>
+                </a:solidFill>
+                <a:latin typeface="Cambria" pitchFamily="34" charset="0"/>
+                <a:ea typeface="Cambria" pitchFamily="34" charset="-122"/>
+                <a:cs typeface="Cambria" pitchFamily="34" charset="-120"/>
+              </a:rPr>
+              <a:t>4</a:t>
+            </a:r>
+            <a:endParaRPr lang="en-US" sz="1600" dirty="0"/>
+          </a:p>
+        </p:txBody>
+      </p:sp>
+      <p:sp>
+        <p:nvSpPr>
+          <p:cNvPr id="22" name="Text 20"/>
+          <p:cNvSpPr txBox="1"/>
+          <p:nvPr/>
+        </p:nvSpPr>
+        <p:spPr>
+          <a:xfrm>
+            <a:off x="9280931" y="2788920"/>
+            <a:ext cx="2087804" cy="457200"/>
+          </a:xfrm>
+          <a:prstGeom prst="rect">
+            <a:avLst/>
+          </a:prstGeom>
+          <a:noFill/>
+          <a:ln/>
+        </p:spPr>
+        <p:txBody>
+          <a:bodyPr wrap="square" lIns="0" tIns="0" rIns="0" bIns="0" rtlCol="0" anchor="ctr"/>
+          <a:lstStyle/>
+          <a:p>
+            <a:pPr algn="l" indent="0" marL="0">
+              <a:buNone/>
+            </a:pPr>
+            <a:r>
+              <a:rPr lang="en-US" sz="1400" b="1" dirty="0">
+                <a:solidFill>
+                  <a:srgbClr val="1C5A73"/>
+                </a:solidFill>
+                <a:latin typeface="Cambria" pitchFamily="34" charset="0"/>
+                <a:ea typeface="Cambria" pitchFamily="34" charset="-122"/>
+                <a:cs typeface="Cambria" pitchFamily="34" charset="-120"/>
+              </a:rPr>
+              <a:t>Extension</a:t>
+            </a:r>
+            <a:endParaRPr lang="en-US" sz="1400" dirty="0"/>
+          </a:p>
+        </p:txBody>
+      </p:sp>
+      <p:sp>
+        <p:nvSpPr>
+          <p:cNvPr id="23" name="Text 21"/>
+          <p:cNvSpPr txBox="1"/>
+          <p:nvPr/>
+        </p:nvSpPr>
+        <p:spPr>
+          <a:xfrm>
+            <a:off x="9280931" y="3291840"/>
+            <a:ext cx="2087804" cy="1234440"/>
+          </a:xfrm>
+          <a:prstGeom prst="rect">
+            <a:avLst/>
+          </a:prstGeom>
+          <a:noFill/>
+          <a:ln/>
+        </p:spPr>
+        <p:txBody>
+          <a:bodyPr wrap="square" lIns="0" tIns="0" rIns="0" bIns="0" rtlCol="0" anchor="t"/>
+          <a:lstStyle/>
+          <a:p>
+            <a:pPr algn="l" indent="0" marL="0">
+              <a:lnSpc>
+                <a:spcPct val="120000"/>
+              </a:lnSpc>
+              <a:buNone/>
+            </a:pPr>
+            <a:r>
+              <a:rPr lang="en-US" sz="1200" dirty="0">
+                <a:solidFill>
+                  <a:srgbClr val="31424A"/>
+                </a:solidFill>
+                <a:latin typeface="Calibri" pitchFamily="34" charset="0"/>
+                <a:ea typeface="Calibri" pitchFamily="34" charset="-122"/>
+                <a:cs typeface="Calibri" pitchFamily="34" charset="-120"/>
+              </a:rPr>
+              <a:t>Généralisation progressive par groupement de producteurs, sur la base des résultats.</a:t>
+            </a:r>
+            <a:endParaRPr lang="en-US" sz="1200" dirty="0"/>
+          </a:p>
+        </p:txBody>
+      </p:sp>
+      <p:sp>
+        <p:nvSpPr>
+          <p:cNvPr id="24" name="Text 22"/>
+          <p:cNvSpPr txBox="1"/>
+          <p:nvPr/>
+        </p:nvSpPr>
+        <p:spPr>
+          <a:xfrm>
+            <a:off x="594360" y="4983480"/>
+            <a:ext cx="11002975" cy="822960"/>
+          </a:xfrm>
+          <a:prstGeom prst="rect">
+            <a:avLst/>
+          </a:prstGeom>
+          <a:noFill/>
+          <a:ln/>
+        </p:spPr>
+        <p:txBody>
+          <a:bodyPr wrap="square" lIns="0" tIns="0" rIns="0" bIns="0" rtlCol="0" anchor="t"/>
+          <a:lstStyle/>
+          <a:p>
+            <a:pPr algn="l" indent="0" marL="0">
+              <a:lnSpc>
+                <a:spcPct val="125000"/>
+              </a:lnSpc>
+              <a:buNone/>
+            </a:pPr>
+            <a:r>
+              <a:rPr lang="en-US" sz="1250" i="1" dirty="0">
+                <a:solidFill>
+                  <a:srgbClr val="6C8089"/>
+                </a:solidFill>
+                <a:latin typeface="Calibri" pitchFamily="34" charset="0"/>
+                <a:ea typeface="Calibri" pitchFamily="34" charset="-122"/>
+                <a:cs typeface="Calibri" pitchFamily="34" charset="-120"/>
+              </a:rPr>
+              <a:t>Un essai est déjà en cours en Haïti avec l'Institut CEHPAPE, sur maraîchage, banane plantain et riz, avec ECOSORB®, ECOFERT®, EVERGREEN® et NAPEMA®. Les premiers relevés sont disponibles sur demande.</a:t>
+            </a:r>
+            <a:endParaRPr lang="en-US" sz="1250" dirty="0"/>
+          </a:p>
+        </p:txBody>
+      </p:sp>
+      <p:sp>
+        <p:nvSpPr>
+          <p:cNvPr id="25" name="Text 23"/>
+          <p:cNvSpPr txBox="1"/>
+          <p:nvPr/>
+        </p:nvSpPr>
+        <p:spPr>
+          <a:xfrm>
+            <a:off x="502920" y="6382512"/>
+            <a:ext cx="8229600" cy="274320"/>
+          </a:xfrm>
+          <a:prstGeom prst="rect">
+            <a:avLst/>
+          </a:prstGeom>
+          <a:noFill/>
+          <a:ln/>
+        </p:spPr>
+        <p:txBody>
+          <a:bodyPr wrap="square" lIns="0" tIns="0" rIns="0" bIns="0" rtlCol="0" anchor="ctr"/>
+          <a:lstStyle/>
+          <a:p>
+            <a:pPr algn="l" indent="0" marL="0">
+              <a:buNone/>
+            </a:pPr>
+            <a:r>
+              <a:rPr lang="en-US" sz="950" dirty="0">
+                <a:solidFill>
+                  <a:srgbClr val="6C8089">
+                    <a:alpha val="80000"/>
+                  </a:srgbClr>
+                </a:solidFill>
+                <a:latin typeface="Calibri" pitchFamily="34" charset="0"/>
+                <a:ea typeface="Calibri" pitchFamily="34" charset="-122"/>
+                <a:cs typeface="Calibri" pitchFamily="34" charset="-120"/>
+              </a:rPr>
+              <a:t>Green Solutions · Dossier marché Haïti</a:t>
+            </a:r>
+            <a:endParaRPr lang="en-US" sz="950" dirty="0"/>
+          </a:p>
+        </p:txBody>
+      </p:sp>
+      <p:sp>
+        <p:nvSpPr>
+          <p:cNvPr id="26" name="Text 24"/>
+          <p:cNvSpPr txBox="1"/>
+          <p:nvPr/>
+        </p:nvSpPr>
+        <p:spPr>
+          <a:xfrm>
+            <a:off x="11140135" y="6382512"/>
+            <a:ext cx="548640" cy="274320"/>
+          </a:xfrm>
+          <a:prstGeom prst="rect">
+            <a:avLst/>
+          </a:prstGeom>
+          <a:noFill/>
+          <a:ln/>
+        </p:spPr>
+        <p:txBody>
+          <a:bodyPr wrap="square" lIns="0" tIns="0" rIns="0" bIns="0" rtlCol="0" anchor="ctr"/>
+          <a:lstStyle/>
+          <a:p>
+            <a:pPr algn="r" indent="0" marL="0">
+              <a:buNone/>
+            </a:pPr>
+            <a:r>
+              <a:rPr lang="en-US" sz="950" dirty="0">
+                <a:solidFill>
+                  <a:srgbClr val="6C8089">
+                    <a:alpha val="80000"/>
+                  </a:srgbClr>
+                </a:solidFill>
+                <a:latin typeface="Calibri" pitchFamily="34" charset="0"/>
+                <a:ea typeface="Calibri" pitchFamily="34" charset="-122"/>
+                <a:cs typeface="Calibri" pitchFamily="34" charset="-120"/>
+              </a:rPr>
+              <a:t>13</a:t>
+            </a:r>
+            <a:endParaRPr lang="en-US" sz="950" dirty="0"/>
+          </a:p>
+        </p:txBody>
+      </p:sp>
+    </p:spTree>
+  </p:cSld>
+  <p:clrMapOvr>
+    <a:masterClrMapping/>
+  </p:clrMapOvr>
+</p:sld>
+</file>
+
+<file path=ppt/slides/slide15.xml><?xml version="1.0" encoding="utf-8"?>
+<p:sld xmlns:a="http://schemas.openxmlformats.org/drawingml/2006/main" xmlns:r="http://schemas.openxmlformats.org/officeDocument/2006/relationships" xmlns:p="http://schemas.openxmlformats.org/presentationml/2006/main">
+  <p:cSld name="Slide 15">
+    <p:bg>
+      <p:bgPr>
+        <a:solidFill>
+          <a:srgbClr val="FAFBFB"/>
+        </a:solidFill>
+      </p:bgPr>
+    </p:bg>
+    <p:spTree>
+      <p:nvGrpSpPr>
+        <p:cNvPr id="1" name=""/>
+        <p:cNvGrpSpPr/>
+        <p:nvPr/>
+      </p:nvGrpSpPr>
+      <p:grpSpPr>
+        <a:xfrm>
+          <a:off x="0" y="0"/>
+          <a:ext cx="0" cy="0"/>
+          <a:chOff x="0" y="0"/>
+          <a:chExt cx="0" cy="0"/>
+        </a:xfrm>
+      </p:grpSpPr>
+      <p:sp>
+        <p:nvSpPr>
+          <p:cNvPr id="2" name="Text 0"/>
+          <p:cNvSpPr txBox="1"/>
+          <p:nvPr/>
+        </p:nvSpPr>
+        <p:spPr>
+          <a:xfrm>
+            <a:off x="594360" y="411480"/>
+            <a:ext cx="10515600" cy="274320"/>
+          </a:xfrm>
+          <a:prstGeom prst="rect">
+            <a:avLst/>
+          </a:prstGeom>
+          <a:noFill/>
+          <a:ln/>
+        </p:spPr>
+        <p:txBody>
+          <a:bodyPr wrap="square" lIns="0" tIns="0" rIns="0" bIns="0" rtlCol="0" anchor="ctr"/>
+          <a:lstStyle/>
+          <a:p>
+            <a:pPr algn="l" indent="0" marL="0">
+              <a:buNone/>
+            </a:pPr>
+            <a:r>
+              <a:rPr lang="en-US" sz="1150" b="1" spc="200" kern="0" dirty="0">
+                <a:solidFill>
+                  <a:srgbClr val="E0A33E"/>
+                </a:solidFill>
+                <a:latin typeface="Calibri" pitchFamily="34" charset="0"/>
+                <a:ea typeface="Calibri" pitchFamily="34" charset="-122"/>
+                <a:cs typeface="Calibri" pitchFamily="34" charset="-120"/>
+              </a:rPr>
+              <a:t>Travailler ensemble</a:t>
+            </a:r>
+            <a:endParaRPr lang="en-US" sz="1150" dirty="0"/>
+          </a:p>
+        </p:txBody>
+      </p:sp>
+      <p:sp>
+        <p:nvSpPr>
+          <p:cNvPr id="3" name="Text 1"/>
+          <p:cNvSpPr txBox="1"/>
+          <p:nvPr/>
+        </p:nvSpPr>
+        <p:spPr>
+          <a:xfrm>
+            <a:off x="594360" y="731520"/>
+            <a:ext cx="10881360" cy="731520"/>
+          </a:xfrm>
+          <a:prstGeom prst="rect">
+            <a:avLst/>
+          </a:prstGeom>
+          <a:noFill/>
+          <a:ln/>
+        </p:spPr>
+        <p:txBody>
+          <a:bodyPr wrap="square" lIns="0" tIns="0" rIns="0" bIns="0" rtlCol="0" anchor="ctr"/>
+          <a:lstStyle/>
+          <a:p>
+            <a:pPr algn="l" indent="0" marL="0">
+              <a:buNone/>
+            </a:pPr>
+            <a:r>
+              <a:rPr lang="en-US" sz="3000" b="1" dirty="0">
+                <a:solidFill>
+                  <a:srgbClr val="0E3546"/>
+                </a:solidFill>
+                <a:latin typeface="Cambria" pitchFamily="34" charset="0"/>
+                <a:ea typeface="Cambria" pitchFamily="34" charset="-122"/>
+                <a:cs typeface="Cambria" pitchFamily="34" charset="-120"/>
+              </a:rPr>
+              <a:t>Un partenaire local pour Haïti</a:t>
+            </a:r>
+            <a:endParaRPr lang="en-US" sz="3000" dirty="0"/>
+          </a:p>
+        </p:txBody>
+      </p:sp>
+      <p:sp>
+        <p:nvSpPr>
+          <p:cNvPr id="4" name="Shape 2"/>
+          <p:cNvSpPr/>
+          <p:nvPr/>
+        </p:nvSpPr>
+        <p:spPr>
+          <a:xfrm>
+            <a:off x="594360" y="1874520"/>
+            <a:ext cx="2545004" cy="2834640"/>
+          </a:xfrm>
+          <a:prstGeom prst="roundRect">
+            <a:avLst>
+              <a:gd name="adj" fmla="val 3593"/>
+            </a:avLst>
+          </a:prstGeom>
+          <a:solidFill>
+            <a:srgbClr val="EDF3F5"/>
+          </a:solidFill>
+          <a:ln w="9525">
+            <a:solidFill>
+              <a:srgbClr val="D6E2E7"/>
+            </a:solidFill>
+            <a:prstDash val="solid"/>
+          </a:ln>
+        </p:spPr>
+      </p:sp>
+      <p:sp>
+        <p:nvSpPr>
+          <p:cNvPr id="5" name="Shape 3"/>
+          <p:cNvSpPr/>
+          <p:nvPr/>
+        </p:nvSpPr>
+        <p:spPr>
+          <a:xfrm>
+            <a:off x="822960" y="2103120"/>
+            <a:ext cx="566928" cy="566928"/>
+          </a:xfrm>
+          <a:prstGeom prst="ellipse">
+            <a:avLst/>
+          </a:prstGeom>
+          <a:solidFill>
+            <a:srgbClr val="1C5A73"/>
+          </a:solidFill>
+          <a:ln/>
+        </p:spPr>
+      </p:sp>
+      <p:sp>
+        <p:nvSpPr>
+          <p:cNvPr id="6" name="Text 4"/>
+          <p:cNvSpPr txBox="1"/>
+          <p:nvPr/>
+        </p:nvSpPr>
+        <p:spPr>
+          <a:xfrm>
+            <a:off x="822960" y="2103120"/>
+            <a:ext cx="566928" cy="566928"/>
+          </a:xfrm>
+          <a:prstGeom prst="rect">
+            <a:avLst/>
+          </a:prstGeom>
+          <a:noFill/>
+          <a:ln/>
+        </p:spPr>
+        <p:txBody>
+          <a:bodyPr wrap="square" lIns="0" tIns="0" rIns="0" bIns="0" rtlCol="0" anchor="ctr"/>
+          <a:lstStyle/>
+          <a:p>
+            <a:pPr algn="ctr" indent="0" marL="0">
+              <a:buNone/>
+            </a:pPr>
+            <a:r>
+              <a:rPr lang="en-US" sz="1600" b="1" dirty="0">
+                <a:solidFill>
+                  <a:srgbClr val="FFFFFF"/>
+                </a:solidFill>
+                <a:latin typeface="Cambria" pitchFamily="34" charset="0"/>
+                <a:ea typeface="Cambria" pitchFamily="34" charset="-122"/>
+                <a:cs typeface="Cambria" pitchFamily="34" charset="-120"/>
+              </a:rPr>
+              <a:t>1</a:t>
+            </a:r>
+            <a:endParaRPr lang="en-US" sz="1600" dirty="0"/>
+          </a:p>
+        </p:txBody>
+      </p:sp>
+      <p:sp>
+        <p:nvSpPr>
+          <p:cNvPr id="7" name="Text 5"/>
+          <p:cNvSpPr txBox="1"/>
+          <p:nvPr/>
+        </p:nvSpPr>
+        <p:spPr>
+          <a:xfrm>
+            <a:off x="822960" y="2788920"/>
+            <a:ext cx="2087804" cy="457200"/>
+          </a:xfrm>
+          <a:prstGeom prst="rect">
+            <a:avLst/>
+          </a:prstGeom>
+          <a:noFill/>
+          <a:ln/>
+        </p:spPr>
+        <p:txBody>
+          <a:bodyPr wrap="square" lIns="0" tIns="0" rIns="0" bIns="0" rtlCol="0" anchor="ctr"/>
+          <a:lstStyle/>
+          <a:p>
+            <a:pPr algn="l" indent="0" marL="0">
+              <a:buNone/>
+            </a:pPr>
+            <a:r>
+              <a:rPr lang="en-US" sz="1400" b="1" dirty="0">
+                <a:solidFill>
+                  <a:srgbClr val="1C5A73"/>
+                </a:solidFill>
+                <a:latin typeface="Cambria" pitchFamily="34" charset="0"/>
+                <a:ea typeface="Cambria" pitchFamily="34" charset="-122"/>
+                <a:cs typeface="Cambria" pitchFamily="34" charset="-120"/>
+              </a:rPr>
+              <a:t>Distribution</a:t>
+            </a:r>
+            <a:endParaRPr lang="en-US" sz="1400" dirty="0"/>
+          </a:p>
+        </p:txBody>
+      </p:sp>
+      <p:sp>
+        <p:nvSpPr>
+          <p:cNvPr id="8" name="Text 6"/>
+          <p:cNvSpPr txBox="1"/>
+          <p:nvPr/>
+        </p:nvSpPr>
+        <p:spPr>
+          <a:xfrm>
+            <a:off x="822960" y="3291840"/>
+            <a:ext cx="2087804" cy="1234440"/>
+          </a:xfrm>
+          <a:prstGeom prst="rect">
+            <a:avLst/>
+          </a:prstGeom>
+          <a:noFill/>
+          <a:ln/>
+        </p:spPr>
+        <p:txBody>
+          <a:bodyPr wrap="square" lIns="0" tIns="0" rIns="0" bIns="0" rtlCol="0" anchor="t"/>
+          <a:lstStyle/>
+          <a:p>
+            <a:pPr algn="l" indent="0" marL="0">
+              <a:lnSpc>
+                <a:spcPct val="120000"/>
+              </a:lnSpc>
+              <a:buNone/>
+            </a:pPr>
+            <a:r>
+              <a:rPr lang="en-US" sz="1200" dirty="0">
+                <a:solidFill>
+                  <a:srgbClr val="31424A"/>
+                </a:solidFill>
+                <a:latin typeface="Calibri" pitchFamily="34" charset="0"/>
+                <a:ea typeface="Calibri" pitchFamily="34" charset="-122"/>
+                <a:cs typeface="Calibri" pitchFamily="34" charset="-120"/>
+              </a:rPr>
+              <a:t>Exclusivité territoriale et stock de lancement pour la première saison commerciale.</a:t>
+            </a:r>
+            <a:endParaRPr lang="en-US" sz="1200" dirty="0"/>
+          </a:p>
+        </p:txBody>
+      </p:sp>
+      <p:sp>
+        <p:nvSpPr>
+          <p:cNvPr id="9" name="Shape 7"/>
+          <p:cNvSpPr/>
+          <p:nvPr/>
+        </p:nvSpPr>
+        <p:spPr>
+          <a:xfrm>
+            <a:off x="3413684" y="1874520"/>
+            <a:ext cx="2545004" cy="2834640"/>
+          </a:xfrm>
+          <a:prstGeom prst="roundRect">
+            <a:avLst>
+              <a:gd name="adj" fmla="val 3593"/>
+            </a:avLst>
+          </a:prstGeom>
+          <a:solidFill>
+            <a:srgbClr val="EDF3F5"/>
+          </a:solidFill>
+          <a:ln w="9525">
+            <a:solidFill>
+              <a:srgbClr val="D6E2E7"/>
+            </a:solidFill>
+            <a:prstDash val="solid"/>
+          </a:ln>
+        </p:spPr>
+      </p:sp>
+      <p:sp>
+        <p:nvSpPr>
+          <p:cNvPr id="10" name="Shape 8"/>
+          <p:cNvSpPr/>
+          <p:nvPr/>
+        </p:nvSpPr>
+        <p:spPr>
+          <a:xfrm>
+            <a:off x="3642284" y="2103120"/>
+            <a:ext cx="566928" cy="566928"/>
+          </a:xfrm>
+          <a:prstGeom prst="ellipse">
+            <a:avLst/>
+          </a:prstGeom>
+          <a:solidFill>
+            <a:srgbClr val="1C5A73"/>
+          </a:solidFill>
+          <a:ln/>
+        </p:spPr>
+      </p:sp>
+      <p:sp>
+        <p:nvSpPr>
+          <p:cNvPr id="11" name="Text 9"/>
+          <p:cNvSpPr txBox="1"/>
+          <p:nvPr/>
+        </p:nvSpPr>
+        <p:spPr>
+          <a:xfrm>
+            <a:off x="3642284" y="2103120"/>
+            <a:ext cx="566928" cy="566928"/>
+          </a:xfrm>
+          <a:prstGeom prst="rect">
+            <a:avLst/>
+          </a:prstGeom>
+          <a:noFill/>
+          <a:ln/>
+        </p:spPr>
+        <p:txBody>
+          <a:bodyPr wrap="square" lIns="0" tIns="0" rIns="0" bIns="0" rtlCol="0" anchor="ctr"/>
+          <a:lstStyle/>
+          <a:p>
+            <a:pPr algn="ctr" indent="0" marL="0">
+              <a:buNone/>
+            </a:pPr>
+            <a:r>
+              <a:rPr lang="en-US" sz="1600" b="1" dirty="0">
+                <a:solidFill>
+                  <a:srgbClr val="FFFFFF"/>
+                </a:solidFill>
+                <a:latin typeface="Cambria" pitchFamily="34" charset="0"/>
+                <a:ea typeface="Cambria" pitchFamily="34" charset="-122"/>
+                <a:cs typeface="Cambria" pitchFamily="34" charset="-120"/>
+              </a:rPr>
+              <a:t>2</a:t>
+            </a:r>
+            <a:endParaRPr lang="en-US" sz="1600" dirty="0"/>
+          </a:p>
+        </p:txBody>
+      </p:sp>
+      <p:sp>
+        <p:nvSpPr>
+          <p:cNvPr id="12" name="Text 10"/>
+          <p:cNvSpPr txBox="1"/>
+          <p:nvPr/>
+        </p:nvSpPr>
+        <p:spPr>
+          <a:xfrm>
+            <a:off x="3642284" y="2788920"/>
+            <a:ext cx="2087804" cy="457200"/>
+          </a:xfrm>
+          <a:prstGeom prst="rect">
+            <a:avLst/>
+          </a:prstGeom>
+          <a:noFill/>
+          <a:ln/>
+        </p:spPr>
+        <p:txBody>
+          <a:bodyPr wrap="square" lIns="0" tIns="0" rIns="0" bIns="0" rtlCol="0" anchor="ctr"/>
+          <a:lstStyle/>
+          <a:p>
+            <a:pPr algn="l" indent="0" marL="0">
+              <a:buNone/>
+            </a:pPr>
+            <a:r>
+              <a:rPr lang="en-US" sz="1400" b="1" dirty="0">
+                <a:solidFill>
+                  <a:srgbClr val="1C5A73"/>
+                </a:solidFill>
+                <a:latin typeface="Cambria" pitchFamily="34" charset="0"/>
+                <a:ea typeface="Cambria" pitchFamily="34" charset="-122"/>
+                <a:cs typeface="Cambria" pitchFamily="34" charset="-120"/>
+              </a:rPr>
+              <a:t>Formation</a:t>
+            </a:r>
+            <a:endParaRPr lang="en-US" sz="1400" dirty="0"/>
+          </a:p>
+        </p:txBody>
+      </p:sp>
+      <p:sp>
+        <p:nvSpPr>
+          <p:cNvPr id="13" name="Text 11"/>
+          <p:cNvSpPr txBox="1"/>
+          <p:nvPr/>
+        </p:nvSpPr>
+        <p:spPr>
+          <a:xfrm>
+            <a:off x="3642284" y="3291840"/>
+            <a:ext cx="2087804" cy="1234440"/>
+          </a:xfrm>
+          <a:prstGeom prst="rect">
+            <a:avLst/>
+          </a:prstGeom>
+          <a:noFill/>
+          <a:ln/>
+        </p:spPr>
+        <p:txBody>
+          <a:bodyPr wrap="square" lIns="0" tIns="0" rIns="0" bIns="0" rtlCol="0" anchor="t"/>
+          <a:lstStyle/>
+          <a:p>
+            <a:pPr algn="l" indent="0" marL="0">
+              <a:lnSpc>
+                <a:spcPct val="120000"/>
+              </a:lnSpc>
+              <a:buNone/>
+            </a:pPr>
+            <a:r>
+              <a:rPr lang="en-US" sz="1200" dirty="0">
+                <a:solidFill>
+                  <a:srgbClr val="31424A"/>
+                </a:solidFill>
+                <a:latin typeface="Calibri" pitchFamily="34" charset="0"/>
+                <a:ea typeface="Calibri" pitchFamily="34" charset="-122"/>
+                <a:cs typeface="Calibri" pitchFamily="34" charset="-120"/>
+              </a:rPr>
+              <a:t>Formation technique des équipes, protocoles de dosage et mises à jour à chaque saison.</a:t>
+            </a:r>
+            <a:endParaRPr lang="en-US" sz="1200" dirty="0"/>
+          </a:p>
+        </p:txBody>
+      </p:sp>
+      <p:sp>
+        <p:nvSpPr>
+          <p:cNvPr id="14" name="Shape 12"/>
+          <p:cNvSpPr/>
+          <p:nvPr/>
+        </p:nvSpPr>
+        <p:spPr>
+          <a:xfrm>
+            <a:off x="6233008" y="1874520"/>
+            <a:ext cx="2545004" cy="2834640"/>
+          </a:xfrm>
+          <a:prstGeom prst="roundRect">
+            <a:avLst>
+              <a:gd name="adj" fmla="val 3593"/>
+            </a:avLst>
+          </a:prstGeom>
+          <a:solidFill>
+            <a:srgbClr val="EDF3F5"/>
+          </a:solidFill>
+          <a:ln w="9525">
+            <a:solidFill>
+              <a:srgbClr val="D6E2E7"/>
+            </a:solidFill>
+            <a:prstDash val="solid"/>
+          </a:ln>
+        </p:spPr>
+      </p:sp>
+      <p:sp>
+        <p:nvSpPr>
+          <p:cNvPr id="15" name="Shape 13"/>
+          <p:cNvSpPr/>
+          <p:nvPr/>
+        </p:nvSpPr>
+        <p:spPr>
+          <a:xfrm>
+            <a:off x="6461608" y="2103120"/>
+            <a:ext cx="566928" cy="566928"/>
+          </a:xfrm>
+          <a:prstGeom prst="ellipse">
+            <a:avLst/>
+          </a:prstGeom>
+          <a:solidFill>
+            <a:srgbClr val="1C5A73"/>
+          </a:solidFill>
+          <a:ln/>
+        </p:spPr>
+      </p:sp>
+      <p:sp>
+        <p:nvSpPr>
+          <p:cNvPr id="16" name="Text 14"/>
+          <p:cNvSpPr txBox="1"/>
+          <p:nvPr/>
+        </p:nvSpPr>
+        <p:spPr>
+          <a:xfrm>
+            <a:off x="6461608" y="2103120"/>
+            <a:ext cx="566928" cy="566928"/>
+          </a:xfrm>
+          <a:prstGeom prst="rect">
+            <a:avLst/>
+          </a:prstGeom>
+          <a:noFill/>
+          <a:ln/>
+        </p:spPr>
+        <p:txBody>
+          <a:bodyPr wrap="square" lIns="0" tIns="0" rIns="0" bIns="0" rtlCol="0" anchor="ctr"/>
+          <a:lstStyle/>
+          <a:p>
+            <a:pPr algn="ctr" indent="0" marL="0">
+              <a:buNone/>
+            </a:pPr>
+            <a:r>
+              <a:rPr lang="en-US" sz="1600" b="1" dirty="0">
+                <a:solidFill>
+                  <a:srgbClr val="FFFFFF"/>
+                </a:solidFill>
+                <a:latin typeface="Cambria" pitchFamily="34" charset="0"/>
+                <a:ea typeface="Cambria" pitchFamily="34" charset="-122"/>
+                <a:cs typeface="Cambria" pitchFamily="34" charset="-120"/>
+              </a:rPr>
+              <a:t>3</a:t>
+            </a:r>
+            <a:endParaRPr lang="en-US" sz="1600" dirty="0"/>
+          </a:p>
+        </p:txBody>
+      </p:sp>
+      <p:sp>
+        <p:nvSpPr>
+          <p:cNvPr id="17" name="Text 15"/>
+          <p:cNvSpPr txBox="1"/>
+          <p:nvPr/>
+        </p:nvSpPr>
+        <p:spPr>
+          <a:xfrm>
+            <a:off x="6461608" y="2788920"/>
+            <a:ext cx="2087804" cy="457200"/>
+          </a:xfrm>
+          <a:prstGeom prst="rect">
+            <a:avLst/>
+          </a:prstGeom>
+          <a:noFill/>
+          <a:ln/>
+        </p:spPr>
+        <p:txBody>
+          <a:bodyPr wrap="square" lIns="0" tIns="0" rIns="0" bIns="0" rtlCol="0" anchor="ctr"/>
+          <a:lstStyle/>
+          <a:p>
+            <a:pPr algn="l" indent="0" marL="0">
+              <a:buNone/>
+            </a:pPr>
+            <a:r>
+              <a:rPr lang="en-US" sz="1400" b="1" dirty="0">
+                <a:solidFill>
+                  <a:srgbClr val="1C5A73"/>
+                </a:solidFill>
+                <a:latin typeface="Cambria" pitchFamily="34" charset="0"/>
+                <a:ea typeface="Cambria" pitchFamily="34" charset="-122"/>
+                <a:cs typeface="Cambria" pitchFamily="34" charset="-120"/>
+              </a:rPr>
+              <a:t>Essais conjoints</a:t>
+            </a:r>
+            <a:endParaRPr lang="en-US" sz="1400" dirty="0"/>
+          </a:p>
+        </p:txBody>
+      </p:sp>
+      <p:sp>
+        <p:nvSpPr>
+          <p:cNvPr id="18" name="Text 16"/>
+          <p:cNvSpPr txBox="1"/>
+          <p:nvPr/>
+        </p:nvSpPr>
+        <p:spPr>
+          <a:xfrm>
+            <a:off x="6461608" y="3291840"/>
+            <a:ext cx="2087804" cy="1234440"/>
+          </a:xfrm>
+          <a:prstGeom prst="rect">
+            <a:avLst/>
+          </a:prstGeom>
+          <a:noFill/>
+          <a:ln/>
+        </p:spPr>
+        <p:txBody>
+          <a:bodyPr wrap="square" lIns="0" tIns="0" rIns="0" bIns="0" rtlCol="0" anchor="t"/>
+          <a:lstStyle/>
+          <a:p>
+            <a:pPr algn="l" indent="0" marL="0">
+              <a:lnSpc>
+                <a:spcPct val="120000"/>
+              </a:lnSpc>
+              <a:buNone/>
+            </a:pPr>
+            <a:r>
+              <a:rPr lang="en-US" sz="1200" dirty="0">
+                <a:solidFill>
+                  <a:srgbClr val="31424A"/>
+                </a:solidFill>
+                <a:latin typeface="Calibri" pitchFamily="34" charset="0"/>
+                <a:ea typeface="Calibri" pitchFamily="34" charset="-122"/>
+                <a:cs typeface="Calibri" pitchFamily="34" charset="-120"/>
+              </a:rPr>
+              <a:t>Parcelles de démonstration avec témoin, résultats partagés avec les producteurs.</a:t>
+            </a:r>
+            <a:endParaRPr lang="en-US" sz="1200" dirty="0"/>
+          </a:p>
+        </p:txBody>
+      </p:sp>
+      <p:sp>
+        <p:nvSpPr>
+          <p:cNvPr id="19" name="Shape 17"/>
+          <p:cNvSpPr/>
+          <p:nvPr/>
+        </p:nvSpPr>
+        <p:spPr>
+          <a:xfrm>
+            <a:off x="9052331" y="1874520"/>
+            <a:ext cx="2545004" cy="2834640"/>
+          </a:xfrm>
+          <a:prstGeom prst="roundRect">
+            <a:avLst>
+              <a:gd name="adj" fmla="val 3593"/>
+            </a:avLst>
+          </a:prstGeom>
+          <a:solidFill>
+            <a:srgbClr val="EDF3F5"/>
+          </a:solidFill>
+          <a:ln w="9525">
+            <a:solidFill>
+              <a:srgbClr val="D6E2E7"/>
+            </a:solidFill>
+            <a:prstDash val="solid"/>
+          </a:ln>
+        </p:spPr>
+      </p:sp>
+      <p:sp>
+        <p:nvSpPr>
+          <p:cNvPr id="20" name="Shape 18"/>
+          <p:cNvSpPr/>
+          <p:nvPr/>
+        </p:nvSpPr>
+        <p:spPr>
+          <a:xfrm>
+            <a:off x="9280931" y="2103120"/>
+            <a:ext cx="566928" cy="566928"/>
+          </a:xfrm>
+          <a:prstGeom prst="ellipse">
+            <a:avLst/>
+          </a:prstGeom>
+          <a:solidFill>
+            <a:srgbClr val="1C5A73"/>
+          </a:solidFill>
+          <a:ln/>
+        </p:spPr>
+      </p:sp>
+      <p:sp>
+        <p:nvSpPr>
+          <p:cNvPr id="21" name="Text 19"/>
+          <p:cNvSpPr txBox="1"/>
+          <p:nvPr/>
+        </p:nvSpPr>
+        <p:spPr>
+          <a:xfrm>
+            <a:off x="9280931" y="2103120"/>
+            <a:ext cx="566928" cy="566928"/>
+          </a:xfrm>
+          <a:prstGeom prst="rect">
+            <a:avLst/>
+          </a:prstGeom>
+          <a:noFill/>
+          <a:ln/>
+        </p:spPr>
+        <p:txBody>
+          <a:bodyPr wrap="square" lIns="0" tIns="0" rIns="0" bIns="0" rtlCol="0" anchor="ctr"/>
+          <a:lstStyle/>
+          <a:p>
+            <a:pPr algn="ctr" indent="0" marL="0">
+              <a:buNone/>
+            </a:pPr>
+            <a:r>
+              <a:rPr lang="en-US" sz="1600" b="1" dirty="0">
+                <a:solidFill>
+                  <a:srgbClr val="FFFFFF"/>
+                </a:solidFill>
+                <a:latin typeface="Cambria" pitchFamily="34" charset="0"/>
+                <a:ea typeface="Cambria" pitchFamily="34" charset="-122"/>
+                <a:cs typeface="Cambria" pitchFamily="34" charset="-120"/>
+              </a:rPr>
+              <a:t>4</a:t>
+            </a:r>
+            <a:endParaRPr lang="en-US" sz="1600" dirty="0"/>
+          </a:p>
+        </p:txBody>
+      </p:sp>
+      <p:sp>
+        <p:nvSpPr>
+          <p:cNvPr id="22" name="Text 20"/>
+          <p:cNvSpPr txBox="1"/>
+          <p:nvPr/>
+        </p:nvSpPr>
+        <p:spPr>
+          <a:xfrm>
+            <a:off x="9280931" y="2788920"/>
+            <a:ext cx="2087804" cy="457200"/>
+          </a:xfrm>
+          <a:prstGeom prst="rect">
+            <a:avLst/>
+          </a:prstGeom>
+          <a:noFill/>
+          <a:ln/>
+        </p:spPr>
+        <p:txBody>
+          <a:bodyPr wrap="square" lIns="0" tIns="0" rIns="0" bIns="0" rtlCol="0" anchor="ctr"/>
+          <a:lstStyle/>
+          <a:p>
+            <a:pPr algn="l" indent="0" marL="0">
+              <a:buNone/>
+            </a:pPr>
+            <a:r>
+              <a:rPr lang="en-US" sz="1400" b="1" dirty="0">
+                <a:solidFill>
+                  <a:srgbClr val="1C5A73"/>
+                </a:solidFill>
+                <a:latin typeface="Cambria" pitchFamily="34" charset="0"/>
+                <a:ea typeface="Cambria" pitchFamily="34" charset="-122"/>
+                <a:cs typeface="Cambria" pitchFamily="34" charset="-120"/>
+              </a:rPr>
+              <a:t>Institutions</a:t>
+            </a:r>
+            <a:endParaRPr lang="en-US" sz="1400" dirty="0"/>
+          </a:p>
+        </p:txBody>
+      </p:sp>
+      <p:sp>
+        <p:nvSpPr>
+          <p:cNvPr id="23" name="Text 21"/>
+          <p:cNvSpPr txBox="1"/>
+          <p:nvPr/>
+        </p:nvSpPr>
+        <p:spPr>
+          <a:xfrm>
+            <a:off x="9280931" y="3291840"/>
+            <a:ext cx="2087804" cy="1234440"/>
+          </a:xfrm>
+          <a:prstGeom prst="rect">
+            <a:avLst/>
+          </a:prstGeom>
+          <a:noFill/>
+          <a:ln/>
+        </p:spPr>
+        <p:txBody>
+          <a:bodyPr wrap="square" lIns="0" tIns="0" rIns="0" bIns="0" rtlCol="0" anchor="t"/>
+          <a:lstStyle/>
+          <a:p>
+            <a:pPr algn="l" indent="0" marL="0">
+              <a:lnSpc>
+                <a:spcPct val="120000"/>
+              </a:lnSpc>
+              <a:buNone/>
+            </a:pPr>
+            <a:r>
+              <a:rPr lang="en-US" sz="1200" dirty="0">
+                <a:solidFill>
+                  <a:srgbClr val="31424A"/>
+                </a:solidFill>
+                <a:latin typeface="Calibri" pitchFamily="34" charset="0"/>
+                <a:ea typeface="Calibri" pitchFamily="34" charset="-122"/>
+                <a:cs typeface="Calibri" pitchFamily="34" charset="-120"/>
+              </a:rPr>
+              <a:t>Dialogue avec le ministère de l'Agriculture et les programmes de sécurité alimentaire.</a:t>
+            </a:r>
+            <a:endParaRPr lang="en-US" sz="1200" dirty="0"/>
+          </a:p>
+        </p:txBody>
+      </p:sp>
+      <p:sp>
+        <p:nvSpPr>
+          <p:cNvPr id="24" name="Text 22"/>
+          <p:cNvSpPr txBox="1"/>
+          <p:nvPr/>
+        </p:nvSpPr>
+        <p:spPr>
+          <a:xfrm>
+            <a:off x="594360" y="4983480"/>
+            <a:ext cx="11002975" cy="822960"/>
+          </a:xfrm>
+          <a:prstGeom prst="rect">
+            <a:avLst/>
+          </a:prstGeom>
+          <a:noFill/>
+          <a:ln/>
+        </p:spPr>
+        <p:txBody>
+          <a:bodyPr wrap="square" lIns="0" tIns="0" rIns="0" bIns="0" rtlCol="0" anchor="t"/>
+          <a:lstStyle/>
+          <a:p>
+            <a:pPr algn="l" indent="0" marL="0">
+              <a:lnSpc>
+                <a:spcPct val="125000"/>
+              </a:lnSpc>
+              <a:buNone/>
+            </a:pPr>
+            <a:r>
+              <a:rPr lang="en-US" sz="1250" i="1" dirty="0">
+                <a:solidFill>
+                  <a:srgbClr val="6C8089"/>
+                </a:solidFill>
+                <a:latin typeface="Calibri" pitchFamily="34" charset="0"/>
+                <a:ea typeface="Calibri" pitchFamily="34" charset="-122"/>
+                <a:cs typeface="Calibri" pitchFamily="34" charset="-120"/>
+              </a:rPr>
+              <a:t>Le cadre s'adapte au territoire : un importateur, un distributeur d'intrants ou un groupement de producteurs peut porter le partenariat.</a:t>
+            </a:r>
+            <a:endParaRPr lang="en-US" sz="1250" dirty="0"/>
+          </a:p>
+        </p:txBody>
+      </p:sp>
+      <p:sp>
+        <p:nvSpPr>
+          <p:cNvPr id="25" name="Text 23"/>
+          <p:cNvSpPr txBox="1"/>
+          <p:nvPr/>
+        </p:nvSpPr>
+        <p:spPr>
+          <a:xfrm>
+            <a:off x="502920" y="6382512"/>
+            <a:ext cx="8229600" cy="274320"/>
+          </a:xfrm>
+          <a:prstGeom prst="rect">
+            <a:avLst/>
+          </a:prstGeom>
+          <a:noFill/>
+          <a:ln/>
+        </p:spPr>
+        <p:txBody>
+          <a:bodyPr wrap="square" lIns="0" tIns="0" rIns="0" bIns="0" rtlCol="0" anchor="ctr"/>
+          <a:lstStyle/>
+          <a:p>
+            <a:pPr algn="l" indent="0" marL="0">
+              <a:buNone/>
+            </a:pPr>
+            <a:r>
+              <a:rPr lang="en-US" sz="950" dirty="0">
+                <a:solidFill>
+                  <a:srgbClr val="6C8089">
+                    <a:alpha val="80000"/>
+                  </a:srgbClr>
+                </a:solidFill>
+                <a:latin typeface="Calibri" pitchFamily="34" charset="0"/>
+                <a:ea typeface="Calibri" pitchFamily="34" charset="-122"/>
+                <a:cs typeface="Calibri" pitchFamily="34" charset="-120"/>
+              </a:rPr>
+              <a:t>Green Solutions · Dossier marché Haïti</a:t>
+            </a:r>
+            <a:endParaRPr lang="en-US" sz="950" dirty="0"/>
+          </a:p>
+        </p:txBody>
+      </p:sp>
+      <p:sp>
+        <p:nvSpPr>
+          <p:cNvPr id="26" name="Text 24"/>
+          <p:cNvSpPr txBox="1"/>
+          <p:nvPr/>
+        </p:nvSpPr>
+        <p:spPr>
+          <a:xfrm>
+            <a:off x="11140135" y="6382512"/>
+            <a:ext cx="548640" cy="274320"/>
+          </a:xfrm>
+          <a:prstGeom prst="rect">
+            <a:avLst/>
+          </a:prstGeom>
+          <a:noFill/>
+          <a:ln/>
+        </p:spPr>
+        <p:txBody>
+          <a:bodyPr wrap="square" lIns="0" tIns="0" rIns="0" bIns="0" rtlCol="0" anchor="ctr"/>
+          <a:lstStyle/>
+          <a:p>
+            <a:pPr algn="r" indent="0" marL="0">
+              <a:buNone/>
+            </a:pPr>
+            <a:r>
+              <a:rPr lang="en-US" sz="950" dirty="0">
+                <a:solidFill>
+                  <a:srgbClr val="6C8089">
+                    <a:alpha val="80000"/>
+                  </a:srgbClr>
+                </a:solidFill>
+                <a:latin typeface="Calibri" pitchFamily="34" charset="0"/>
+                <a:ea typeface="Calibri" pitchFamily="34" charset="-122"/>
+                <a:cs typeface="Calibri" pitchFamily="34" charset="-120"/>
+              </a:rPr>
+              <a:t>14</a:t>
+            </a:r>
+            <a:endParaRPr lang="en-US" sz="950" dirty="0"/>
+          </a:p>
+        </p:txBody>
+      </p:sp>
+    </p:spTree>
+  </p:cSld>
+  <p:clrMapOvr>
+    <a:masterClrMapping/>
+  </p:clrMapOvr>
+</p:sld>
+</file>
+
+<file path=ppt/slides/slide16.xml><?xml version="1.0" encoding="utf-8"?>
+<p:sld xmlns:a="http://schemas.openxmlformats.org/drawingml/2006/main" xmlns:r="http://schemas.openxmlformats.org/officeDocument/2006/relationships" xmlns:p="http://schemas.openxmlformats.org/presentationml/2006/main">
+  <p:cSld name="Slide 16">
+    <p:bg>
+      <p:bgPr>
+        <a:solidFill>
+          <a:srgbClr val="FAFBFB"/>
+        </a:solidFill>
+      </p:bgPr>
+    </p:bg>
+    <p:spTree>
+      <p:nvGrpSpPr>
+        <p:cNvPr id="1" name=""/>
+        <p:cNvGrpSpPr/>
+        <p:nvPr/>
+      </p:nvGrpSpPr>
+      <p:grpSpPr>
+        <a:xfrm>
+          <a:off x="0" y="0"/>
+          <a:ext cx="0" cy="0"/>
+          <a:chOff x="0" y="0"/>
+          <a:chExt cx="0" cy="0"/>
+        </a:xfrm>
+      </p:grpSpPr>
+      <p:sp>
+        <p:nvSpPr>
+          <p:cNvPr id="2" name="Text 0"/>
+          <p:cNvSpPr txBox="1"/>
+          <p:nvPr/>
+        </p:nvSpPr>
+        <p:spPr>
+          <a:xfrm>
+            <a:off x="594360" y="411480"/>
+            <a:ext cx="10515600" cy="274320"/>
+          </a:xfrm>
+          <a:prstGeom prst="rect">
+            <a:avLst/>
+          </a:prstGeom>
+          <a:noFill/>
+          <a:ln/>
+        </p:spPr>
+        <p:txBody>
+          <a:bodyPr wrap="square" lIns="0" tIns="0" rIns="0" bIns="0" rtlCol="0" anchor="ctr"/>
+          <a:lstStyle/>
+          <a:p>
+            <a:pPr algn="l" indent="0" marL="0">
+              <a:buNone/>
+            </a:pPr>
+            <a:r>
+              <a:rPr lang="en-US" sz="1150" b="1" spc="200" kern="0" dirty="0">
+                <a:solidFill>
+                  <a:srgbClr val="E0A33E"/>
+                </a:solidFill>
+                <a:latin typeface="Calibri" pitchFamily="34" charset="0"/>
+                <a:ea typeface="Calibri" pitchFamily="34" charset="-122"/>
+                <a:cs typeface="Calibri" pitchFamily="34" charset="-120"/>
+              </a:rPr>
+              <a:t>CE QU'IL FAUT ANTICIPER</a:t>
+            </a:r>
+            <a:endParaRPr lang="en-US" sz="1150" dirty="0"/>
+          </a:p>
+        </p:txBody>
+      </p:sp>
+      <p:sp>
+        <p:nvSpPr>
+          <p:cNvPr id="3" name="Text 1"/>
+          <p:cNvSpPr txBox="1"/>
+          <p:nvPr/>
+        </p:nvSpPr>
+        <p:spPr>
+          <a:xfrm>
+            <a:off x="594360" y="731520"/>
+            <a:ext cx="10881360" cy="731520"/>
+          </a:xfrm>
+          <a:prstGeom prst="rect">
+            <a:avLst/>
+          </a:prstGeom>
+          <a:noFill/>
+          <a:ln/>
+        </p:spPr>
+        <p:txBody>
+          <a:bodyPr wrap="square" lIns="0" tIns="0" rIns="0" bIns="0" rtlCol="0" anchor="ctr"/>
+          <a:lstStyle/>
+          <a:p>
+            <a:pPr algn="l" indent="0" marL="0">
+              <a:buNone/>
+            </a:pPr>
+            <a:r>
+              <a:rPr lang="en-US" sz="3000" b="1" dirty="0">
+                <a:solidFill>
+                  <a:srgbClr val="0E3546"/>
+                </a:solidFill>
+                <a:latin typeface="Cambria" pitchFamily="34" charset="0"/>
+                <a:ea typeface="Cambria" pitchFamily="34" charset="-122"/>
+                <a:cs typeface="Cambria" pitchFamily="34" charset="-120"/>
+              </a:rPr>
+              <a:t>Risques identifiés et réponses</a:t>
+            </a:r>
+            <a:endParaRPr lang="en-US" sz="3000" dirty="0"/>
+          </a:p>
+        </p:txBody>
+      </p:sp>
+      <p:sp>
+        <p:nvSpPr>
+          <p:cNvPr id="4" name="Text 2"/>
+          <p:cNvSpPr txBox="1"/>
+          <p:nvPr/>
+        </p:nvSpPr>
+        <p:spPr>
+          <a:xfrm>
+            <a:off x="594360" y="1783080"/>
+            <a:ext cx="5227168" cy="411480"/>
+          </a:xfrm>
+          <a:prstGeom prst="rect">
+            <a:avLst/>
+          </a:prstGeom>
+          <a:noFill/>
+          <a:ln/>
+        </p:spPr>
+        <p:txBody>
+          <a:bodyPr wrap="square" lIns="0" tIns="0" rIns="0" bIns="0" rtlCol="0" anchor="ctr"/>
+          <a:lstStyle/>
+          <a:p>
+            <a:pPr algn="l" indent="0" marL="0">
+              <a:buNone/>
+            </a:pPr>
+            <a:r>
+              <a:rPr lang="en-US" sz="1600" b="1" dirty="0">
+                <a:solidFill>
+                  <a:srgbClr val="1C5A73"/>
+                </a:solidFill>
+                <a:latin typeface="Cambria" pitchFamily="34" charset="0"/>
+                <a:ea typeface="Cambria" pitchFamily="34" charset="-122"/>
+                <a:cs typeface="Cambria" pitchFamily="34" charset="-120"/>
+              </a:rPr>
+              <a:t>Risques</a:t>
+            </a:r>
+            <a:endParaRPr lang="en-US" sz="1600" dirty="0"/>
+          </a:p>
+        </p:txBody>
+      </p:sp>
+      <p:sp>
+        <p:nvSpPr>
+          <p:cNvPr id="5" name="Text 3"/>
+          <p:cNvSpPr txBox="1"/>
+          <p:nvPr/>
+        </p:nvSpPr>
+        <p:spPr>
+          <a:xfrm>
+            <a:off x="594360" y="2286000"/>
+            <a:ext cx="5227168" cy="2468880"/>
+          </a:xfrm>
+          <a:prstGeom prst="rect">
+            <a:avLst/>
+          </a:prstGeom>
+          <a:noFill/>
+          <a:ln/>
+        </p:spPr>
+        <p:txBody>
+          <a:bodyPr wrap="square" lIns="0" tIns="0" rIns="0" bIns="0" rtlCol="0" anchor="t"/>
+          <a:lstStyle/>
+          <a:p>
+            <a:pPr algn="l" marL="342900" indent="-342900">
+              <a:lnSpc>
+                <a:spcPct val="122000"/>
+              </a:lnSpc>
+              <a:spcAft>
+                <a:spcPts val="1000"/>
+              </a:spcAft>
+              <a:buSzPct val="100000"/>
+              <a:buChar char="•"/>
+            </a:pPr>
+            <a:r>
+              <a:rPr lang="en-US" sz="1350" dirty="0">
+                <a:solidFill>
+                  <a:srgbClr val="31424A"/>
+                </a:solidFill>
+                <a:latin typeface="Calibri" pitchFamily="34" charset="0"/>
+                <a:ea typeface="Calibri" pitchFamily="34" charset="-122"/>
+                <a:cs typeface="Calibri" pitchFamily="34" charset="-120"/>
+              </a:rPr>
+              <a:t>Morcellement extrême du foncier : la décision d'achat est dispersée sur des milliers de très petites exploitations.</a:t>
+            </a:r>
+            <a:endParaRPr lang="en-US" sz="1350" dirty="0"/>
+          </a:p>
+          <a:p>
+            <a:pPr algn="l" marL="342900" indent="-342900">
+              <a:lnSpc>
+                <a:spcPct val="122000"/>
+              </a:lnSpc>
+              <a:spcAft>
+                <a:spcPts val="1000"/>
+              </a:spcAft>
+              <a:buSzPct val="100000"/>
+              <a:buChar char="•"/>
+            </a:pPr>
+            <a:r>
+              <a:rPr lang="en-US" sz="1350" dirty="0">
+                <a:solidFill>
+                  <a:srgbClr val="31424A"/>
+                </a:solidFill>
+                <a:latin typeface="Calibri" pitchFamily="34" charset="0"/>
+                <a:ea typeface="Calibri" pitchFamily="34" charset="-122"/>
+                <a:cs typeface="Calibri" pitchFamily="34" charset="-120"/>
+              </a:rPr>
+              <a:t>Capacité de trésorerie limitée des producteurs, qui rend tout achat d'intrant difficile à engager seul.</a:t>
+            </a:r>
+            <a:endParaRPr lang="en-US" sz="1350" dirty="0"/>
+          </a:p>
+          <a:p>
+            <a:pPr algn="l" marL="342900" indent="-342900">
+              <a:lnSpc>
+                <a:spcPct val="122000"/>
+              </a:lnSpc>
+              <a:spcAft>
+                <a:spcPts val="1000"/>
+              </a:spcAft>
+              <a:buSzPct val="100000"/>
+              <a:buChar char="•"/>
+            </a:pPr>
+            <a:r>
+              <a:rPr lang="en-US" sz="1350" dirty="0">
+                <a:solidFill>
+                  <a:srgbClr val="31424A"/>
+                </a:solidFill>
+                <a:latin typeface="Calibri" pitchFamily="34" charset="0"/>
+                <a:ea typeface="Calibri" pitchFamily="34" charset="-122"/>
+                <a:cs typeface="Calibri" pitchFamily="34" charset="-120"/>
+              </a:rPr>
+              <a:t>Aléa cyclonique : une tempête peut effacer les résultats d'un essai en cours de campagne.</a:t>
+            </a:r>
+            <a:endParaRPr lang="en-US" sz="1350" dirty="0"/>
+          </a:p>
+          <a:p>
+            <a:pPr algn="l" marL="342900" indent="-342900">
+              <a:lnSpc>
+                <a:spcPct val="122000"/>
+              </a:lnSpc>
+              <a:spcAft>
+                <a:spcPts val="1000"/>
+              </a:spcAft>
+              <a:buSzPct val="100000"/>
+              <a:buChar char="•"/>
+            </a:pPr>
+            <a:r>
+              <a:rPr lang="en-US" sz="1350" dirty="0">
+                <a:solidFill>
+                  <a:srgbClr val="31424A"/>
+                </a:solidFill>
+                <a:latin typeface="Calibri" pitchFamily="34" charset="0"/>
+                <a:ea typeface="Calibri" pitchFamily="34" charset="-122"/>
+                <a:cs typeface="Calibri" pitchFamily="34" charset="-120"/>
+              </a:rPr>
+              <a:t>Logistique intérieure et sécurité des déplacements, qui compliquent le suivi agronomique de terrain.</a:t>
+            </a:r>
+            <a:endParaRPr lang="en-US" sz="1350" dirty="0"/>
+          </a:p>
+        </p:txBody>
+      </p:sp>
+      <p:sp>
+        <p:nvSpPr>
+          <p:cNvPr id="6" name="Text 4"/>
+          <p:cNvSpPr txBox="1"/>
+          <p:nvPr/>
+        </p:nvSpPr>
+        <p:spPr>
+          <a:xfrm>
+            <a:off x="6370168" y="1783080"/>
+            <a:ext cx="5227168" cy="411480"/>
+          </a:xfrm>
+          <a:prstGeom prst="rect">
+            <a:avLst/>
+          </a:prstGeom>
+          <a:noFill/>
+          <a:ln/>
+        </p:spPr>
+        <p:txBody>
+          <a:bodyPr wrap="square" lIns="0" tIns="0" rIns="0" bIns="0" rtlCol="0" anchor="ctr"/>
+          <a:lstStyle/>
+          <a:p>
+            <a:pPr algn="l" indent="0" marL="0">
+              <a:buNone/>
+            </a:pPr>
+            <a:r>
+              <a:rPr lang="en-US" sz="1600" b="1" dirty="0">
+                <a:solidFill>
+                  <a:srgbClr val="1C5A73"/>
+                </a:solidFill>
+                <a:latin typeface="Cambria" pitchFamily="34" charset="0"/>
+                <a:ea typeface="Cambria" pitchFamily="34" charset="-122"/>
+                <a:cs typeface="Cambria" pitchFamily="34" charset="-120"/>
+              </a:rPr>
+              <a:t>Réponses</a:t>
+            </a:r>
+            <a:endParaRPr lang="en-US" sz="1600" dirty="0"/>
+          </a:p>
+        </p:txBody>
+      </p:sp>
+      <p:sp>
+        <p:nvSpPr>
+          <p:cNvPr id="7" name="Text 5"/>
+          <p:cNvSpPr txBox="1"/>
+          <p:nvPr/>
+        </p:nvSpPr>
+        <p:spPr>
+          <a:xfrm>
+            <a:off x="6370168" y="2286000"/>
+            <a:ext cx="5227168" cy="2468880"/>
+          </a:xfrm>
+          <a:prstGeom prst="rect">
+            <a:avLst/>
+          </a:prstGeom>
+          <a:noFill/>
+          <a:ln/>
+        </p:spPr>
+        <p:txBody>
+          <a:bodyPr wrap="square" lIns="0" tIns="0" rIns="0" bIns="0" rtlCol="0" anchor="t"/>
+          <a:lstStyle/>
+          <a:p>
+            <a:pPr algn="l" marL="342900" indent="-342900">
+              <a:lnSpc>
+                <a:spcPct val="122000"/>
+              </a:lnSpc>
+              <a:spcAft>
+                <a:spcPts val="1000"/>
+              </a:spcAft>
+              <a:buSzPct val="100000"/>
+              <a:buChar char="•"/>
+            </a:pPr>
+            <a:r>
+              <a:rPr lang="en-US" sz="1350" dirty="0">
+                <a:solidFill>
+                  <a:srgbClr val="31424A"/>
+                </a:solidFill>
+                <a:latin typeface="Calibri" pitchFamily="34" charset="0"/>
+                <a:ea typeface="Calibri" pitchFamily="34" charset="-122"/>
+                <a:cs typeface="Calibri" pitchFamily="34" charset="-120"/>
+              </a:rPr>
+              <a:t>Passer par les organisations de producteurs et les coopératives plutôt que par l'exploitation individuelle.</a:t>
+            </a:r>
+            <a:endParaRPr lang="en-US" sz="1350" dirty="0"/>
+          </a:p>
+          <a:p>
+            <a:pPr algn="l" marL="342900" indent="-342900">
+              <a:lnSpc>
+                <a:spcPct val="122000"/>
+              </a:lnSpc>
+              <a:spcAft>
+                <a:spcPts val="1000"/>
+              </a:spcAft>
+              <a:buSzPct val="100000"/>
+              <a:buChar char="•"/>
+            </a:pPr>
+            <a:r>
+              <a:rPr lang="en-US" sz="1350" dirty="0">
+                <a:solidFill>
+                  <a:srgbClr val="31424A"/>
+                </a:solidFill>
+                <a:latin typeface="Calibri" pitchFamily="34" charset="0"/>
+                <a:ea typeface="Calibri" pitchFamily="34" charset="-122"/>
+                <a:cs typeface="Calibri" pitchFamily="34" charset="-120"/>
+              </a:rPr>
+              <a:t>Adosser les premiers déploiements aux programmes de développement agricole et aux bailleurs déjà présents.</a:t>
+            </a:r>
+            <a:endParaRPr lang="en-US" sz="1350" dirty="0"/>
+          </a:p>
+          <a:p>
+            <a:pPr algn="l" marL="342900" indent="-342900">
+              <a:lnSpc>
+                <a:spcPct val="122000"/>
+              </a:lnSpc>
+              <a:spcAft>
+                <a:spcPts val="1000"/>
+              </a:spcAft>
+              <a:buSzPct val="100000"/>
+              <a:buChar char="•"/>
+            </a:pPr>
+            <a:r>
+              <a:rPr lang="en-US" sz="1350" dirty="0">
+                <a:solidFill>
+                  <a:srgbClr val="31424A"/>
+                </a:solidFill>
+                <a:latin typeface="Calibri" pitchFamily="34" charset="0"/>
+                <a:ea typeface="Calibri" pitchFamily="34" charset="-122"/>
+                <a:cs typeface="Calibri" pitchFamily="34" charset="-120"/>
+              </a:rPr>
+              <a:t>Conduire les essais sur deux cycles, pour que l'aléa d'une campagne ne décide pas seul du résultat.</a:t>
+            </a:r>
+            <a:endParaRPr lang="en-US" sz="1350" dirty="0"/>
+          </a:p>
+          <a:p>
+            <a:pPr algn="l" marL="342900" indent="-342900">
+              <a:lnSpc>
+                <a:spcPct val="122000"/>
+              </a:lnSpc>
+              <a:spcAft>
+                <a:spcPts val="1000"/>
+              </a:spcAft>
+              <a:buSzPct val="100000"/>
+              <a:buChar char="•"/>
+            </a:pPr>
+            <a:r>
+              <a:rPr lang="en-US" sz="1350" dirty="0">
+                <a:solidFill>
+                  <a:srgbClr val="31424A"/>
+                </a:solidFill>
+                <a:latin typeface="Calibri" pitchFamily="34" charset="0"/>
+                <a:ea typeface="Calibri" pitchFamily="34" charset="-122"/>
+                <a:cs typeface="Calibri" pitchFamily="34" charset="-120"/>
+              </a:rPr>
+              <a:t>S'appuyer sur l'essai CEHPAPE en cours et sur un relais local établi pour le suivi des parcelles.</a:t>
+            </a:r>
+            <a:endParaRPr lang="en-US" sz="1350" dirty="0"/>
+          </a:p>
+        </p:txBody>
+      </p:sp>
+      <p:sp>
+        <p:nvSpPr>
+          <p:cNvPr id="8" name="Shape 6"/>
+          <p:cNvSpPr/>
+          <p:nvPr/>
+        </p:nvSpPr>
+        <p:spPr>
+          <a:xfrm>
+            <a:off x="594360" y="4846320"/>
+            <a:ext cx="11002975" cy="960120"/>
+          </a:xfrm>
+          <a:prstGeom prst="roundRect">
+            <a:avLst>
+              <a:gd name="adj" fmla="val 7619"/>
+            </a:avLst>
+          </a:prstGeom>
+          <a:solidFill>
+            <a:srgbClr val="EDF3F5"/>
+          </a:solidFill>
+          <a:ln w="9525">
+            <a:solidFill>
+              <a:srgbClr val="D6E2E7"/>
+            </a:solidFill>
+            <a:prstDash val="solid"/>
+          </a:ln>
+        </p:spPr>
+      </p:sp>
+      <p:sp>
+        <p:nvSpPr>
+          <p:cNvPr id="9" name="Text 7"/>
+          <p:cNvSpPr txBox="1"/>
+          <p:nvPr/>
+        </p:nvSpPr>
+        <p:spPr>
+          <a:xfrm>
+            <a:off x="822960" y="4983480"/>
+            <a:ext cx="10545775" cy="713232"/>
+          </a:xfrm>
+          <a:prstGeom prst="rect">
+            <a:avLst/>
+          </a:prstGeom>
+          <a:noFill/>
+          <a:ln/>
+        </p:spPr>
+        <p:txBody>
+          <a:bodyPr wrap="square" lIns="0" tIns="0" rIns="0" bIns="0" rtlCol="0" anchor="t"/>
+          <a:lstStyle/>
+          <a:p>
+            <a:pPr algn="l" indent="0" marL="0">
+              <a:lnSpc>
+                <a:spcPct val="118000"/>
+              </a:lnSpc>
+              <a:buNone/>
+            </a:pPr>
+            <a:r>
+              <a:rPr lang="en-US" sz="1100" dirty="0">
+                <a:solidFill>
+                  <a:srgbClr val="6C8089"/>
+                </a:solidFill>
+                <a:latin typeface="Calibri" pitchFamily="34" charset="0"/>
+                <a:ea typeface="Calibri" pitchFamily="34" charset="-122"/>
+                <a:cs typeface="Calibri" pitchFamily="34" charset="-120"/>
+              </a:rPr>
+              <a:t>Analyse acrylamide (laboratoire Polymex, ISO 9001, teneur inférieure à 3,0 µg/g), screening REACH / SVHC (SGS) et certificat SOHISCERT valable jusqu'au 4 septembre 2027 : disponibles sur demande.</a:t>
+            </a:r>
+            <a:endParaRPr lang="en-US" sz="1100" dirty="0"/>
+          </a:p>
+        </p:txBody>
+      </p:sp>
+      <p:sp>
+        <p:nvSpPr>
+          <p:cNvPr id="10" name="Text 8"/>
+          <p:cNvSpPr txBox="1"/>
+          <p:nvPr/>
+        </p:nvSpPr>
+        <p:spPr>
+          <a:xfrm>
+            <a:off x="502920" y="6382512"/>
+            <a:ext cx="8229600" cy="274320"/>
+          </a:xfrm>
+          <a:prstGeom prst="rect">
+            <a:avLst/>
+          </a:prstGeom>
+          <a:noFill/>
+          <a:ln/>
+        </p:spPr>
+        <p:txBody>
+          <a:bodyPr wrap="square" lIns="0" tIns="0" rIns="0" bIns="0" rtlCol="0" anchor="ctr"/>
+          <a:lstStyle/>
+          <a:p>
+            <a:pPr algn="l" indent="0" marL="0">
+              <a:buNone/>
+            </a:pPr>
+            <a:r>
+              <a:rPr lang="en-US" sz="950" dirty="0">
+                <a:solidFill>
+                  <a:srgbClr val="6C8089">
+                    <a:alpha val="80000"/>
+                  </a:srgbClr>
+                </a:solidFill>
+                <a:latin typeface="Calibri" pitchFamily="34" charset="0"/>
+                <a:ea typeface="Calibri" pitchFamily="34" charset="-122"/>
+                <a:cs typeface="Calibri" pitchFamily="34" charset="-120"/>
+              </a:rPr>
+              <a:t>Green Solutions · Dossier marché Haïti</a:t>
+            </a:r>
+            <a:endParaRPr lang="en-US" sz="950" dirty="0"/>
+          </a:p>
+        </p:txBody>
+      </p:sp>
+      <p:sp>
+        <p:nvSpPr>
+          <p:cNvPr id="11" name="Text 9"/>
+          <p:cNvSpPr txBox="1"/>
+          <p:nvPr/>
+        </p:nvSpPr>
+        <p:spPr>
+          <a:xfrm>
+            <a:off x="11140135" y="6382512"/>
+            <a:ext cx="548640" cy="274320"/>
+          </a:xfrm>
+          <a:prstGeom prst="rect">
+            <a:avLst/>
+          </a:prstGeom>
+          <a:noFill/>
+          <a:ln/>
+        </p:spPr>
+        <p:txBody>
+          <a:bodyPr wrap="square" lIns="0" tIns="0" rIns="0" bIns="0" rtlCol="0" anchor="ctr"/>
+          <a:lstStyle/>
+          <a:p>
+            <a:pPr algn="r" indent="0" marL="0">
+              <a:buNone/>
+            </a:pPr>
+            <a:r>
+              <a:rPr lang="en-US" sz="950" dirty="0">
+                <a:solidFill>
+                  <a:srgbClr val="6C8089">
+                    <a:alpha val="80000"/>
+                  </a:srgbClr>
+                </a:solidFill>
+                <a:latin typeface="Calibri" pitchFamily="34" charset="0"/>
+                <a:ea typeface="Calibri" pitchFamily="34" charset="-122"/>
+                <a:cs typeface="Calibri" pitchFamily="34" charset="-120"/>
+              </a:rPr>
+              <a:t>15</a:t>
+            </a:r>
+            <a:endParaRPr lang="en-US" sz="950" dirty="0"/>
+          </a:p>
+        </p:txBody>
+      </p:sp>
+    </p:spTree>
+  </p:cSld>
+  <p:clrMapOvr>
+    <a:masterClrMapping/>
+  </p:clrMapOvr>
+</p:sld>
+</file>
+
+<file path=ppt/slides/slide17.xml><?xml version="1.0" encoding="utf-8"?>
+<p:sld xmlns:a="http://schemas.openxmlformats.org/drawingml/2006/main" xmlns:r="http://schemas.openxmlformats.org/officeDocument/2006/relationships" xmlns:p="http://schemas.openxmlformats.org/presentationml/2006/main">
+  <p:cSld name="Slide 17">
+    <p:bg>
+      <p:bgPr>
+        <a:solidFill>
+          <a:srgbClr val="FAFBFB"/>
+        </a:solidFill>
+      </p:bgPr>
+    </p:bg>
+    <p:spTree>
+      <p:nvGrpSpPr>
+        <p:cNvPr id="1" name=""/>
+        <p:cNvGrpSpPr/>
+        <p:nvPr/>
+      </p:nvGrpSpPr>
+      <p:grpSpPr>
+        <a:xfrm>
+          <a:off x="0" y="0"/>
+          <a:ext cx="0" cy="0"/>
+          <a:chOff x="0" y="0"/>
+          <a:chExt cx="0" cy="0"/>
+        </a:xfrm>
+      </p:grpSpPr>
+      <p:sp>
+        <p:nvSpPr>
+          <p:cNvPr id="2" name="Text 0"/>
+          <p:cNvSpPr txBox="1"/>
+          <p:nvPr/>
+        </p:nvSpPr>
+        <p:spPr>
+          <a:xfrm>
+            <a:off x="594360" y="411480"/>
+            <a:ext cx="10515600" cy="274320"/>
+          </a:xfrm>
+          <a:prstGeom prst="rect">
+            <a:avLst/>
+          </a:prstGeom>
+          <a:noFill/>
+          <a:ln/>
+        </p:spPr>
+        <p:txBody>
+          <a:bodyPr wrap="square" lIns="0" tIns="0" rIns="0" bIns="0" rtlCol="0" anchor="ctr"/>
+          <a:lstStyle/>
+          <a:p>
+            <a:pPr algn="l" indent="0" marL="0">
+              <a:buNone/>
+            </a:pPr>
+            <a:r>
+              <a:rPr lang="en-US" sz="1150" b="1" spc="200" kern="0" dirty="0">
+                <a:solidFill>
+                  <a:srgbClr val="E0A33E"/>
+                </a:solidFill>
+                <a:latin typeface="Calibri" pitchFamily="34" charset="0"/>
+                <a:ea typeface="Calibri" pitchFamily="34" charset="-122"/>
+                <a:cs typeface="Calibri" pitchFamily="34" charset="-120"/>
+              </a:rPr>
+              <a:t>Sources</a:t>
+            </a:r>
+            <a:endParaRPr lang="en-US" sz="1150" dirty="0"/>
+          </a:p>
+        </p:txBody>
+      </p:sp>
+      <p:sp>
+        <p:nvSpPr>
+          <p:cNvPr id="3" name="Text 1"/>
+          <p:cNvSpPr txBox="1"/>
+          <p:nvPr/>
+        </p:nvSpPr>
+        <p:spPr>
+          <a:xfrm>
+            <a:off x="594360" y="731520"/>
+            <a:ext cx="10881360" cy="731520"/>
+          </a:xfrm>
+          <a:prstGeom prst="rect">
+            <a:avLst/>
+          </a:prstGeom>
+          <a:noFill/>
+          <a:ln/>
+        </p:spPr>
+        <p:txBody>
+          <a:bodyPr wrap="square" lIns="0" tIns="0" rIns="0" bIns="0" rtlCol="0" anchor="ctr"/>
+          <a:lstStyle/>
+          <a:p>
+            <a:pPr algn="l" indent="0" marL="0">
+              <a:buNone/>
+            </a:pPr>
+            <a:r>
+              <a:rPr lang="en-US" sz="3000" b="1" dirty="0">
+                <a:solidFill>
+                  <a:srgbClr val="0E3546"/>
+                </a:solidFill>
+                <a:latin typeface="Cambria" pitchFamily="34" charset="0"/>
+                <a:ea typeface="Cambria" pitchFamily="34" charset="-122"/>
+                <a:cs typeface="Cambria" pitchFamily="34" charset="-120"/>
+              </a:rPr>
+              <a:t>Sources et hypothèses de travail</a:t>
+            </a:r>
+            <a:endParaRPr lang="en-US" sz="3000" dirty="0"/>
+          </a:p>
+        </p:txBody>
+      </p:sp>
+      <p:sp>
+        <p:nvSpPr>
+          <p:cNvPr id="4" name="Text 2"/>
+          <p:cNvSpPr txBox="1"/>
+          <p:nvPr/>
+        </p:nvSpPr>
+        <p:spPr>
+          <a:xfrm>
+            <a:off x="594360" y="1783080"/>
+            <a:ext cx="5227168" cy="411480"/>
+          </a:xfrm>
+          <a:prstGeom prst="rect">
+            <a:avLst/>
+          </a:prstGeom>
+          <a:noFill/>
+          <a:ln/>
+        </p:spPr>
+        <p:txBody>
+          <a:bodyPr wrap="square" lIns="0" tIns="0" rIns="0" bIns="0" rtlCol="0" anchor="ctr"/>
+          <a:lstStyle/>
+          <a:p>
+            <a:pPr algn="l" indent="0" marL="0">
+              <a:buNone/>
+            </a:pPr>
+            <a:r>
+              <a:rPr lang="en-US" sz="1600" b="1" dirty="0">
+                <a:solidFill>
+                  <a:srgbClr val="1C5A73"/>
+                </a:solidFill>
+                <a:latin typeface="Cambria" pitchFamily="34" charset="0"/>
+                <a:ea typeface="Cambria" pitchFamily="34" charset="-122"/>
+                <a:cs typeface="Cambria" pitchFamily="34" charset="-120"/>
+              </a:rPr>
+              <a:t>Sources principales</a:t>
+            </a:r>
+            <a:endParaRPr lang="en-US" sz="1600" dirty="0"/>
+          </a:p>
+        </p:txBody>
+      </p:sp>
+      <p:sp>
+        <p:nvSpPr>
+          <p:cNvPr id="5" name="Text 3"/>
+          <p:cNvSpPr txBox="1"/>
+          <p:nvPr/>
+        </p:nvSpPr>
+        <p:spPr>
+          <a:xfrm>
+            <a:off x="594360" y="2286000"/>
+            <a:ext cx="5227168" cy="2468880"/>
+          </a:xfrm>
+          <a:prstGeom prst="rect">
+            <a:avLst/>
+          </a:prstGeom>
+          <a:noFill/>
+          <a:ln/>
+        </p:spPr>
+        <p:txBody>
+          <a:bodyPr wrap="square" lIns="0" tIns="0" rIns="0" bIns="0" rtlCol="0" anchor="t"/>
+          <a:lstStyle/>
+          <a:p>
+            <a:pPr algn="l" marL="342900" indent="-342900">
+              <a:lnSpc>
+                <a:spcPct val="122000"/>
+              </a:lnSpc>
+              <a:spcAft>
+                <a:spcPts val="1000"/>
+              </a:spcAft>
+              <a:buSzPct val="100000"/>
+              <a:buChar char="•"/>
+            </a:pPr>
+            <a:r>
+              <a:rPr lang="en-US" sz="1350" dirty="0">
+                <a:solidFill>
+                  <a:srgbClr val="31424A"/>
+                </a:solidFill>
+                <a:latin typeface="Calibri" pitchFamily="34" charset="0"/>
+                <a:ea typeface="Calibri" pitchFamily="34" charset="-122"/>
+                <a:cs typeface="Calibri" pitchFamily="34" charset="-120"/>
+              </a:rPr>
+              <a:t>Institut haïtien de statistique et d'informatique (IHSI) : comptes nationaux.</a:t>
+            </a:r>
+            <a:endParaRPr lang="en-US" sz="1350" dirty="0"/>
+          </a:p>
+          <a:p>
+            <a:pPr algn="l" marL="342900" indent="-342900">
+              <a:lnSpc>
+                <a:spcPct val="122000"/>
+              </a:lnSpc>
+              <a:spcAft>
+                <a:spcPts val="1000"/>
+              </a:spcAft>
+              <a:buSzPct val="100000"/>
+              <a:buChar char="•"/>
+            </a:pPr>
+            <a:r>
+              <a:rPr lang="en-US" sz="1350" dirty="0">
+                <a:solidFill>
+                  <a:srgbClr val="31424A"/>
+                </a:solidFill>
+                <a:latin typeface="Calibri" pitchFamily="34" charset="0"/>
+                <a:ea typeface="Calibri" pitchFamily="34" charset="-122"/>
+                <a:cs typeface="Calibri" pitchFamily="34" charset="-120"/>
+              </a:rPr>
+              <a:t>Coordination nationale de la sécurité alimentaire (CNSA) et analyses IPC.</a:t>
+            </a:r>
+            <a:endParaRPr lang="en-US" sz="1350" dirty="0"/>
+          </a:p>
+          <a:p>
+            <a:pPr algn="l" marL="342900" indent="-342900">
+              <a:lnSpc>
+                <a:spcPct val="122000"/>
+              </a:lnSpc>
+              <a:spcAft>
+                <a:spcPts val="1000"/>
+              </a:spcAft>
+              <a:buSzPct val="100000"/>
+              <a:buChar char="•"/>
+            </a:pPr>
+            <a:r>
+              <a:rPr lang="en-US" sz="1350" dirty="0">
+                <a:solidFill>
+                  <a:srgbClr val="31424A"/>
+                </a:solidFill>
+                <a:latin typeface="Calibri" pitchFamily="34" charset="0"/>
+                <a:ea typeface="Calibri" pitchFamily="34" charset="-122"/>
+                <a:cs typeface="Calibri" pitchFamily="34" charset="-120"/>
+              </a:rPr>
+              <a:t>Ministère de l'Agriculture, des Ressources naturelles et du Développement rural (MARNDR).</a:t>
+            </a:r>
+            <a:endParaRPr lang="en-US" sz="1350" dirty="0"/>
+          </a:p>
+          <a:p>
+            <a:pPr algn="l" marL="342900" indent="-342900">
+              <a:lnSpc>
+                <a:spcPct val="122000"/>
+              </a:lnSpc>
+              <a:spcAft>
+                <a:spcPts val="1000"/>
+              </a:spcAft>
+              <a:buSzPct val="100000"/>
+              <a:buChar char="•"/>
+            </a:pPr>
+            <a:r>
+              <a:rPr lang="en-US" sz="1350" dirty="0">
+                <a:solidFill>
+                  <a:srgbClr val="31424A"/>
+                </a:solidFill>
+                <a:latin typeface="Calibri" pitchFamily="34" charset="0"/>
+                <a:ea typeface="Calibri" pitchFamily="34" charset="-122"/>
+                <a:cs typeface="Calibri" pitchFamily="34" charset="-120"/>
+              </a:rPr>
+              <a:t>FAO (FAOSTAT, AQUASTAT) et Banque mondiale (WDI).</a:t>
+            </a:r>
+            <a:endParaRPr lang="en-US" sz="1350" dirty="0"/>
+          </a:p>
+        </p:txBody>
+      </p:sp>
+      <p:sp>
+        <p:nvSpPr>
+          <p:cNvPr id="6" name="Text 4"/>
+          <p:cNvSpPr txBox="1"/>
+          <p:nvPr/>
+        </p:nvSpPr>
+        <p:spPr>
+          <a:xfrm>
+            <a:off x="6370168" y="1783080"/>
+            <a:ext cx="5227168" cy="411480"/>
+          </a:xfrm>
+          <a:prstGeom prst="rect">
+            <a:avLst/>
+          </a:prstGeom>
+          <a:noFill/>
+          <a:ln/>
+        </p:spPr>
+        <p:txBody>
+          <a:bodyPr wrap="square" lIns="0" tIns="0" rIns="0" bIns="0" rtlCol="0" anchor="ctr"/>
+          <a:lstStyle/>
+          <a:p>
+            <a:pPr algn="l" indent="0" marL="0">
+              <a:buNone/>
+            </a:pPr>
+            <a:r>
+              <a:rPr lang="en-US" sz="1600" b="1" dirty="0">
+                <a:solidFill>
+                  <a:srgbClr val="1C5A73"/>
+                </a:solidFill>
+                <a:latin typeface="Cambria" pitchFamily="34" charset="0"/>
+                <a:ea typeface="Cambria" pitchFamily="34" charset="-122"/>
+                <a:cs typeface="Cambria" pitchFamily="34" charset="-120"/>
+              </a:rPr>
+              <a:t>Hypothèses de travail</a:t>
+            </a:r>
+            <a:endParaRPr lang="en-US" sz="1600" dirty="0"/>
+          </a:p>
+        </p:txBody>
+      </p:sp>
+      <p:sp>
+        <p:nvSpPr>
+          <p:cNvPr id="7" name="Text 5"/>
+          <p:cNvSpPr txBox="1"/>
+          <p:nvPr/>
+        </p:nvSpPr>
+        <p:spPr>
+          <a:xfrm>
+            <a:off x="6370168" y="2286000"/>
+            <a:ext cx="5227168" cy="2468880"/>
+          </a:xfrm>
+          <a:prstGeom prst="rect">
+            <a:avLst/>
+          </a:prstGeom>
+          <a:noFill/>
+          <a:ln/>
+        </p:spPr>
+        <p:txBody>
+          <a:bodyPr wrap="square" lIns="0" tIns="0" rIns="0" bIns="0" rtlCol="0" anchor="t"/>
+          <a:lstStyle/>
+          <a:p>
+            <a:pPr algn="l" marL="342900" indent="-342900">
+              <a:lnSpc>
+                <a:spcPct val="122000"/>
+              </a:lnSpc>
+              <a:spcAft>
+                <a:spcPts val="1000"/>
+              </a:spcAft>
+              <a:buSzPct val="100000"/>
+              <a:buChar char="•"/>
+            </a:pPr>
+            <a:r>
+              <a:rPr lang="en-US" sz="1350" dirty="0">
+                <a:solidFill>
+                  <a:srgbClr val="31424A"/>
+                </a:solidFill>
+                <a:latin typeface="Calibri" pitchFamily="34" charset="0"/>
+                <a:ea typeface="Calibri" pitchFamily="34" charset="-122"/>
+                <a:cs typeface="Calibri" pitchFamily="34" charset="-120"/>
+              </a:rPr>
+              <a:t>Les chiffres sont des ordres de grandeur arrondis, tirés des dernières données publiques disponibles.</a:t>
+            </a:r>
+            <a:endParaRPr lang="en-US" sz="1350" dirty="0"/>
+          </a:p>
+          <a:p>
+            <a:pPr algn="l" marL="342900" indent="-342900">
+              <a:lnSpc>
+                <a:spcPct val="122000"/>
+              </a:lnSpc>
+              <a:spcAft>
+                <a:spcPts val="1000"/>
+              </a:spcAft>
+              <a:buSzPct val="100000"/>
+              <a:buChar char="•"/>
+            </a:pPr>
+            <a:r>
+              <a:rPr lang="en-US" sz="1350" dirty="0">
+                <a:solidFill>
+                  <a:srgbClr val="31424A"/>
+                </a:solidFill>
+                <a:latin typeface="Calibri" pitchFamily="34" charset="0"/>
+                <a:ea typeface="Calibri" pitchFamily="34" charset="-122"/>
+                <a:cs typeface="Calibri" pitchFamily="34" charset="-120"/>
+              </a:rPr>
+              <a:t>Les gains d'eau et de rendement sont indicatifs et varient selon le sol, le climat et la culture.</a:t>
+            </a:r>
+            <a:endParaRPr lang="en-US" sz="1350" dirty="0"/>
+          </a:p>
+          <a:p>
+            <a:pPr algn="l" marL="342900" indent="-342900">
+              <a:lnSpc>
+                <a:spcPct val="122000"/>
+              </a:lnSpc>
+              <a:spcAft>
+                <a:spcPts val="1000"/>
+              </a:spcAft>
+              <a:buSzPct val="100000"/>
+              <a:buChar char="•"/>
+            </a:pPr>
+            <a:r>
+              <a:rPr lang="en-US" sz="1350" dirty="0">
+                <a:solidFill>
+                  <a:srgbClr val="31424A"/>
+                </a:solidFill>
+                <a:latin typeface="Calibri" pitchFamily="34" charset="0"/>
+                <a:ea typeface="Calibri" pitchFamily="34" charset="-122"/>
+                <a:cs typeface="Calibri" pitchFamily="34" charset="-120"/>
+              </a:rPr>
+              <a:t>Document de travail commercial : chiffres à actualiser avant toute soumission officielle.</a:t>
+            </a:r>
+            <a:endParaRPr lang="en-US" sz="1350" dirty="0"/>
+          </a:p>
+        </p:txBody>
+      </p:sp>
+      <p:sp>
+        <p:nvSpPr>
+          <p:cNvPr id="8" name="Shape 6"/>
+          <p:cNvSpPr/>
+          <p:nvPr/>
+        </p:nvSpPr>
+        <p:spPr>
+          <a:xfrm>
+            <a:off x="594360" y="4846320"/>
+            <a:ext cx="11002975" cy="960120"/>
+          </a:xfrm>
+          <a:prstGeom prst="roundRect">
+            <a:avLst>
+              <a:gd name="adj" fmla="val 7619"/>
+            </a:avLst>
+          </a:prstGeom>
+          <a:solidFill>
+            <a:srgbClr val="EDF3F5"/>
+          </a:solidFill>
+          <a:ln w="9525">
+            <a:solidFill>
+              <a:srgbClr val="D6E2E7"/>
+            </a:solidFill>
+            <a:prstDash val="solid"/>
+          </a:ln>
+        </p:spPr>
+      </p:sp>
+      <p:sp>
+        <p:nvSpPr>
+          <p:cNvPr id="9" name="Text 7"/>
+          <p:cNvSpPr txBox="1"/>
+          <p:nvPr/>
+        </p:nvSpPr>
+        <p:spPr>
+          <a:xfrm>
+            <a:off x="822960" y="4983480"/>
+            <a:ext cx="10545775" cy="713232"/>
+          </a:xfrm>
+          <a:prstGeom prst="rect">
+            <a:avLst/>
+          </a:prstGeom>
+          <a:noFill/>
+          <a:ln/>
+        </p:spPr>
+        <p:txBody>
+          <a:bodyPr wrap="square" lIns="0" tIns="0" rIns="0" bIns="0" rtlCol="0" anchor="t"/>
+          <a:lstStyle/>
+          <a:p>
+            <a:pPr algn="l" indent="0" marL="0">
+              <a:lnSpc>
+                <a:spcPct val="118000"/>
+              </a:lnSpc>
+              <a:buNone/>
+            </a:pPr>
+            <a:r>
+              <a:rPr lang="en-US" sz="1100" dirty="0">
+                <a:solidFill>
+                  <a:srgbClr val="6C8089"/>
+                </a:solidFill>
+                <a:latin typeface="Calibri" pitchFamily="34" charset="0"/>
+                <a:ea typeface="Calibri" pitchFamily="34" charset="-122"/>
+                <a:cs typeface="Calibri" pitchFamily="34" charset="-120"/>
+              </a:rPr>
+              <a:t>Rapports d'essais, certificats (SOHISCERT, analyses Polymex et SGS) et fiches techniques : disponibles sur demande.</a:t>
+            </a:r>
+            <a:endParaRPr lang="en-US" sz="1100" dirty="0"/>
+          </a:p>
+        </p:txBody>
+      </p:sp>
+      <p:sp>
+        <p:nvSpPr>
+          <p:cNvPr id="10" name="Text 8"/>
+          <p:cNvSpPr txBox="1"/>
+          <p:nvPr/>
+        </p:nvSpPr>
+        <p:spPr>
+          <a:xfrm>
+            <a:off x="502920" y="6382512"/>
+            <a:ext cx="8229600" cy="274320"/>
+          </a:xfrm>
+          <a:prstGeom prst="rect">
+            <a:avLst/>
+          </a:prstGeom>
+          <a:noFill/>
+          <a:ln/>
+        </p:spPr>
+        <p:txBody>
+          <a:bodyPr wrap="square" lIns="0" tIns="0" rIns="0" bIns="0" rtlCol="0" anchor="ctr"/>
+          <a:lstStyle/>
+          <a:p>
+            <a:pPr algn="l" indent="0" marL="0">
+              <a:buNone/>
+            </a:pPr>
+            <a:r>
+              <a:rPr lang="en-US" sz="950" dirty="0">
+                <a:solidFill>
+                  <a:srgbClr val="6C8089">
+                    <a:alpha val="80000"/>
+                  </a:srgbClr>
+                </a:solidFill>
+                <a:latin typeface="Calibri" pitchFamily="34" charset="0"/>
+                <a:ea typeface="Calibri" pitchFamily="34" charset="-122"/>
+                <a:cs typeface="Calibri" pitchFamily="34" charset="-120"/>
+              </a:rPr>
+              <a:t>Green Solutions · Dossier marché Haïti</a:t>
+            </a:r>
+            <a:endParaRPr lang="en-US" sz="950" dirty="0"/>
+          </a:p>
+        </p:txBody>
+      </p:sp>
+      <p:sp>
+        <p:nvSpPr>
+          <p:cNvPr id="11" name="Text 9"/>
+          <p:cNvSpPr txBox="1"/>
+          <p:nvPr/>
+        </p:nvSpPr>
+        <p:spPr>
+          <a:xfrm>
+            <a:off x="11140135" y="6382512"/>
+            <a:ext cx="548640" cy="274320"/>
+          </a:xfrm>
+          <a:prstGeom prst="rect">
+            <a:avLst/>
+          </a:prstGeom>
+          <a:noFill/>
+          <a:ln/>
+        </p:spPr>
+        <p:txBody>
+          <a:bodyPr wrap="square" lIns="0" tIns="0" rIns="0" bIns="0" rtlCol="0" anchor="ctr"/>
+          <a:lstStyle/>
+          <a:p>
+            <a:pPr algn="r" indent="0" marL="0">
+              <a:buNone/>
+            </a:pPr>
+            <a:r>
+              <a:rPr lang="en-US" sz="950" dirty="0">
+                <a:solidFill>
+                  <a:srgbClr val="6C8089">
+                    <a:alpha val="80000"/>
+                  </a:srgbClr>
+                </a:solidFill>
+                <a:latin typeface="Calibri" pitchFamily="34" charset="0"/>
+                <a:ea typeface="Calibri" pitchFamily="34" charset="-122"/>
+                <a:cs typeface="Calibri" pitchFamily="34" charset="-120"/>
+              </a:rPr>
+              <a:t>16</a:t>
+            </a:r>
+            <a:endParaRPr lang="en-US" sz="950" dirty="0"/>
+          </a:p>
+        </p:txBody>
+      </p:sp>
+    </p:spTree>
+  </p:cSld>
+  <p:clrMapOvr>
+    <a:masterClrMapping/>
+  </p:clrMapOvr>
+</p:sld>
+</file>
+
+<file path=ppt/slides/slide18.xml><?xml version="1.0" encoding="utf-8"?>
+<p:sld xmlns:a="http://schemas.openxmlformats.org/drawingml/2006/main" xmlns:r="http://schemas.openxmlformats.org/officeDocument/2006/relationships" xmlns:p="http://schemas.openxmlformats.org/presentationml/2006/main">
+  <p:cSld name="Slide 18">
     <p:spTree>
       <p:nvGrpSpPr>
         <p:cNvPr id="1" name=""/>
@@ -3944,7 +9643,7 @@
                 <a:ea typeface="Calibri" pitchFamily="34" charset="-122"/>
                 <a:cs typeface="Calibri" pitchFamily="34" charset="-120"/>
               </a:rPr>
-              <a:t>10</a:t>
+              <a:t>17</a:t>
             </a:r>
             <a:endParaRPr lang="en-US" sz="950" dirty="0"/>
           </a:p>
@@ -5423,7 +11122,7 @@
                 <a:ea typeface="Calibri" pitchFamily="34" charset="-122"/>
                 <a:cs typeface="Calibri" pitchFamily="34" charset="-120"/>
               </a:rPr>
-              <a:t>LES CULTURES</a:t>
+              <a:t>ÉCONOMIE ET SÉCURITÉ ALIMENTAIRE</a:t>
             </a:r>
             <a:endParaRPr lang="en-US" sz="1150" dirty="0"/>
           </a:p>
@@ -5462,42 +11161,26 @@
                 <a:ea typeface="Cambria" pitchFamily="34" charset="-122"/>
                 <a:cs typeface="Cambria" pitchFamily="34" charset="-120"/>
               </a:rPr>
-              <a:t>Cinq productions structurent les campagnes</a:t>
+              <a:t>Un pays agricole qui importe la moitié de sa nourriture</a:t>
             </a:r>
             <a:endParaRPr lang="en-US" sz="3000" dirty="0"/>
           </a:p>
         </p:txBody>
       </p:sp>
-      <p:graphicFrame>
-        <p:nvGraphicFramePr>
-          <p:cNvPr id="4" name="Chart 0" descr=""/>
-          <p:cNvGraphicFramePr/>
-          <p:nvPr/>
-        </p:nvGraphicFramePr>
-        <p:xfrm>
-          <a:off x="594360" y="1783080"/>
-          <a:ext cx="7360920" cy="3977640"/>
-        </p:xfrm>
-        <a:graphic xmlns:a="http://schemas.openxmlformats.org/drawingml/2006/main">
-          <a:graphicData uri="http://schemas.openxmlformats.org/drawingml/2006/chart">
-            <c:chart xmlns:c="http://schemas.openxmlformats.org/drawingml/2006/chart" r:id="rId1"/>
-          </a:graphicData>
-        </a:graphic>
-      </p:graphicFrame>
-      <p:sp>
-        <p:nvSpPr>
-          <p:cNvPr id="5" name="Shape 2"/>
+      <p:sp>
+        <p:nvSpPr>
+          <p:cNvPr id="4" name="Shape 2"/>
           <p:cNvSpPr/>
           <p:nvPr/>
         </p:nvSpPr>
         <p:spPr>
           <a:xfrm>
-            <a:off x="8275320" y="1783080"/>
-            <a:ext cx="3291840" cy="3977640"/>
+            <a:off x="594360" y="1874520"/>
+            <a:ext cx="2545004" cy="2514600"/>
           </a:xfrm>
           <a:prstGeom prst="roundRect">
             <a:avLst>
-              <a:gd name="adj" fmla="val 2778"/>
+              <a:gd name="adj" fmla="val 3636"/>
             </a:avLst>
           </a:prstGeom>
           <a:solidFill>
@@ -5513,14 +11196,14 @@
       </p:sp>
       <p:sp>
         <p:nvSpPr>
-          <p:cNvPr id="6" name="Text 3"/>
-          <p:cNvSpPr txBox="1"/>
-          <p:nvPr/>
-        </p:nvSpPr>
-        <p:spPr>
-          <a:xfrm>
-            <a:off x="8503920" y="2011680"/>
-            <a:ext cx="2834640" cy="457200"/>
+          <p:cNvPr id="5" name="Text 3"/>
+          <p:cNvSpPr txBox="1"/>
+          <p:nvPr/>
+        </p:nvSpPr>
+        <p:spPr>
+          <a:xfrm>
+            <a:off x="777240" y="2148840"/>
+            <a:ext cx="2179244" cy="960120"/>
           </a:xfrm>
           <a:prstGeom prst="rect">
             <a:avLst/>
@@ -5532,11 +11215,11 @@
           <a:bodyPr wrap="square" lIns="0" tIns="0" rIns="0" bIns="0" rtlCol="0" anchor="ctr"/>
           <a:lstStyle/>
           <a:p>
-            <a:pPr algn="l" indent="0" marL="0">
-              <a:buNone/>
-            </a:pPr>
-            <a:r>
-              <a:rPr lang="en-US" sz="1300" b="1" dirty="0">
+            <a:pPr algn="ctr" indent="0" marL="0">
+              <a:buNone/>
+            </a:pPr>
+            <a:r>
+              <a:rPr lang="en-US" sz="3800" b="1" dirty="0">
                 <a:solidFill>
                   <a:srgbClr val="1C5A73"/>
                 </a:solidFill>
@@ -5544,22 +11227,388 @@
                 <a:ea typeface="Cambria" pitchFamily="34" charset="-122"/>
                 <a:cs typeface="Cambria" pitchFamily="34" charset="-120"/>
               </a:rPr>
-              <a:t>Lecture</a:t>
-            </a:r>
-            <a:endParaRPr lang="en-US" sz="1300" dirty="0"/>
-          </a:p>
-        </p:txBody>
-      </p:sp>
-      <p:sp>
-        <p:nvSpPr>
-          <p:cNvPr id="7" name="Text 4"/>
-          <p:cNvSpPr txBox="1"/>
-          <p:nvPr/>
-        </p:nvSpPr>
-        <p:spPr>
-          <a:xfrm>
-            <a:off x="8503920" y="2560320"/>
-            <a:ext cx="2834640" cy="3017520"/>
+              <a:t>≈ 50 %</a:t>
+            </a:r>
+            <a:endParaRPr lang="en-US" sz="3800" dirty="0"/>
+          </a:p>
+        </p:txBody>
+      </p:sp>
+      <p:sp>
+        <p:nvSpPr>
+          <p:cNvPr id="6" name="Text 4"/>
+          <p:cNvSpPr txBox="1"/>
+          <p:nvPr/>
+        </p:nvSpPr>
+        <p:spPr>
+          <a:xfrm>
+            <a:off x="795528" y="3154680"/>
+            <a:ext cx="2142668" cy="1051560"/>
+          </a:xfrm>
+          <a:prstGeom prst="rect">
+            <a:avLst/>
+          </a:prstGeom>
+          <a:noFill/>
+          <a:ln/>
+        </p:spPr>
+        <p:txBody>
+          <a:bodyPr wrap="square" lIns="0" tIns="0" rIns="0" bIns="0" rtlCol="0" anchor="t"/>
+          <a:lstStyle/>
+          <a:p>
+            <a:pPr algn="ctr" indent="0" marL="0">
+              <a:lnSpc>
+                <a:spcPct val="118000"/>
+              </a:lnSpc>
+              <a:buNone/>
+            </a:pPr>
+            <a:r>
+              <a:rPr lang="en-US" sz="1250" dirty="0">
+                <a:solidFill>
+                  <a:srgbClr val="31424A"/>
+                </a:solidFill>
+                <a:latin typeface="Calibri" pitchFamily="34" charset="0"/>
+                <a:ea typeface="Calibri" pitchFamily="34" charset="-122"/>
+                <a:cs typeface="Calibri" pitchFamily="34" charset="-120"/>
+              </a:rPr>
+              <a:t>de la nourriture consommée est importée</a:t>
+            </a:r>
+            <a:endParaRPr lang="en-US" sz="1250" dirty="0"/>
+          </a:p>
+        </p:txBody>
+      </p:sp>
+      <p:sp>
+        <p:nvSpPr>
+          <p:cNvPr id="7" name="Shape 5"/>
+          <p:cNvSpPr/>
+          <p:nvPr/>
+        </p:nvSpPr>
+        <p:spPr>
+          <a:xfrm>
+            <a:off x="3413684" y="1874520"/>
+            <a:ext cx="2545004" cy="2514600"/>
+          </a:xfrm>
+          <a:prstGeom prst="roundRect">
+            <a:avLst>
+              <a:gd name="adj" fmla="val 3636"/>
+            </a:avLst>
+          </a:prstGeom>
+          <a:solidFill>
+            <a:srgbClr val="EDF3F5"/>
+          </a:solidFill>
+          <a:ln w="9525">
+            <a:solidFill>
+              <a:srgbClr val="D6E2E7"/>
+            </a:solidFill>
+            <a:prstDash val="solid"/>
+          </a:ln>
+        </p:spPr>
+      </p:sp>
+      <p:sp>
+        <p:nvSpPr>
+          <p:cNvPr id="8" name="Text 6"/>
+          <p:cNvSpPr txBox="1"/>
+          <p:nvPr/>
+        </p:nvSpPr>
+        <p:spPr>
+          <a:xfrm>
+            <a:off x="3596564" y="2148840"/>
+            <a:ext cx="2179244" cy="960120"/>
+          </a:xfrm>
+          <a:prstGeom prst="rect">
+            <a:avLst/>
+          </a:prstGeom>
+          <a:noFill/>
+          <a:ln/>
+        </p:spPr>
+        <p:txBody>
+          <a:bodyPr wrap="square" lIns="0" tIns="0" rIns="0" bIns="0" rtlCol="0" anchor="ctr"/>
+          <a:lstStyle/>
+          <a:p>
+            <a:pPr algn="ctr" indent="0" marL="0">
+              <a:buNone/>
+            </a:pPr>
+            <a:r>
+              <a:rPr lang="en-US" sz="3800" b="1" dirty="0">
+                <a:solidFill>
+                  <a:srgbClr val="1C5A73"/>
+                </a:solidFill>
+                <a:latin typeface="Cambria" pitchFamily="34" charset="0"/>
+                <a:ea typeface="Cambria" pitchFamily="34" charset="-122"/>
+                <a:cs typeface="Cambria" pitchFamily="34" charset="-120"/>
+              </a:rPr>
+              <a:t>≈ 80 %</a:t>
+            </a:r>
+            <a:endParaRPr lang="en-US" sz="3800" dirty="0"/>
+          </a:p>
+        </p:txBody>
+      </p:sp>
+      <p:sp>
+        <p:nvSpPr>
+          <p:cNvPr id="9" name="Text 7"/>
+          <p:cNvSpPr txBox="1"/>
+          <p:nvPr/>
+        </p:nvSpPr>
+        <p:spPr>
+          <a:xfrm>
+            <a:off x="3614852" y="3154680"/>
+            <a:ext cx="2142668" cy="1051560"/>
+          </a:xfrm>
+          <a:prstGeom prst="rect">
+            <a:avLst/>
+          </a:prstGeom>
+          <a:noFill/>
+          <a:ln/>
+        </p:spPr>
+        <p:txBody>
+          <a:bodyPr wrap="square" lIns="0" tIns="0" rIns="0" bIns="0" rtlCol="0" anchor="t"/>
+          <a:lstStyle/>
+          <a:p>
+            <a:pPr algn="ctr" indent="0" marL="0">
+              <a:lnSpc>
+                <a:spcPct val="118000"/>
+              </a:lnSpc>
+              <a:buNone/>
+            </a:pPr>
+            <a:r>
+              <a:rPr lang="en-US" sz="1250" dirty="0">
+                <a:solidFill>
+                  <a:srgbClr val="31424A"/>
+                </a:solidFill>
+                <a:latin typeface="Calibri" pitchFamily="34" charset="0"/>
+                <a:ea typeface="Calibri" pitchFamily="34" charset="-122"/>
+                <a:cs typeface="Calibri" pitchFamily="34" charset="-120"/>
+              </a:rPr>
+              <a:t>du riz consommé vient de l'étranger</a:t>
+            </a:r>
+            <a:endParaRPr lang="en-US" sz="1250" dirty="0"/>
+          </a:p>
+        </p:txBody>
+      </p:sp>
+      <p:sp>
+        <p:nvSpPr>
+          <p:cNvPr id="10" name="Shape 8"/>
+          <p:cNvSpPr/>
+          <p:nvPr/>
+        </p:nvSpPr>
+        <p:spPr>
+          <a:xfrm>
+            <a:off x="6233008" y="1874520"/>
+            <a:ext cx="2545004" cy="2514600"/>
+          </a:xfrm>
+          <a:prstGeom prst="roundRect">
+            <a:avLst>
+              <a:gd name="adj" fmla="val 3636"/>
+            </a:avLst>
+          </a:prstGeom>
+          <a:solidFill>
+            <a:srgbClr val="EDF3F5"/>
+          </a:solidFill>
+          <a:ln w="9525">
+            <a:solidFill>
+              <a:srgbClr val="D6E2E7"/>
+            </a:solidFill>
+            <a:prstDash val="solid"/>
+          </a:ln>
+        </p:spPr>
+      </p:sp>
+      <p:sp>
+        <p:nvSpPr>
+          <p:cNvPr id="11" name="Text 9"/>
+          <p:cNvSpPr txBox="1"/>
+          <p:nvPr/>
+        </p:nvSpPr>
+        <p:spPr>
+          <a:xfrm>
+            <a:off x="6415888" y="2148840"/>
+            <a:ext cx="2179244" cy="960120"/>
+          </a:xfrm>
+          <a:prstGeom prst="rect">
+            <a:avLst/>
+          </a:prstGeom>
+          <a:noFill/>
+          <a:ln/>
+        </p:spPr>
+        <p:txBody>
+          <a:bodyPr wrap="square" lIns="0" tIns="0" rIns="0" bIns="0" rtlCol="0" anchor="ctr"/>
+          <a:lstStyle/>
+          <a:p>
+            <a:pPr algn="ctr" indent="0" marL="0">
+              <a:buNone/>
+            </a:pPr>
+            <a:r>
+              <a:rPr lang="en-US" sz="3800" b="1" dirty="0">
+                <a:solidFill>
+                  <a:srgbClr val="1C5A73"/>
+                </a:solidFill>
+                <a:latin typeface="Cambria" pitchFamily="34" charset="0"/>
+                <a:ea typeface="Cambria" pitchFamily="34" charset="-122"/>
+                <a:cs typeface="Cambria" pitchFamily="34" charset="-120"/>
+              </a:rPr>
+              <a:t>≈ 5 M</a:t>
+            </a:r>
+            <a:endParaRPr lang="en-US" sz="3800" dirty="0"/>
+          </a:p>
+        </p:txBody>
+      </p:sp>
+      <p:sp>
+        <p:nvSpPr>
+          <p:cNvPr id="12" name="Text 10"/>
+          <p:cNvSpPr txBox="1"/>
+          <p:nvPr/>
+        </p:nvSpPr>
+        <p:spPr>
+          <a:xfrm>
+            <a:off x="6434176" y="3154680"/>
+            <a:ext cx="2142668" cy="1051560"/>
+          </a:xfrm>
+          <a:prstGeom prst="rect">
+            <a:avLst/>
+          </a:prstGeom>
+          <a:noFill/>
+          <a:ln/>
+        </p:spPr>
+        <p:txBody>
+          <a:bodyPr wrap="square" lIns="0" tIns="0" rIns="0" bIns="0" rtlCol="0" anchor="t"/>
+          <a:lstStyle/>
+          <a:p>
+            <a:pPr algn="ctr" indent="0" marL="0">
+              <a:lnSpc>
+                <a:spcPct val="118000"/>
+              </a:lnSpc>
+              <a:buNone/>
+            </a:pPr>
+            <a:r>
+              <a:rPr lang="en-US" sz="1250" dirty="0">
+                <a:solidFill>
+                  <a:srgbClr val="31424A"/>
+                </a:solidFill>
+                <a:latin typeface="Calibri" pitchFamily="34" charset="0"/>
+                <a:ea typeface="Calibri" pitchFamily="34" charset="-122"/>
+                <a:cs typeface="Calibri" pitchFamily="34" charset="-120"/>
+              </a:rPr>
+              <a:t>d'Haïtiens en insécurité alimentaire aiguë selon l'IPC</a:t>
+            </a:r>
+            <a:endParaRPr lang="en-US" sz="1250" dirty="0"/>
+          </a:p>
+        </p:txBody>
+      </p:sp>
+      <p:sp>
+        <p:nvSpPr>
+          <p:cNvPr id="13" name="Shape 11"/>
+          <p:cNvSpPr/>
+          <p:nvPr/>
+        </p:nvSpPr>
+        <p:spPr>
+          <a:xfrm>
+            <a:off x="9052331" y="1874520"/>
+            <a:ext cx="2545004" cy="2514600"/>
+          </a:xfrm>
+          <a:prstGeom prst="roundRect">
+            <a:avLst>
+              <a:gd name="adj" fmla="val 3636"/>
+            </a:avLst>
+          </a:prstGeom>
+          <a:solidFill>
+            <a:srgbClr val="EDF3F5"/>
+          </a:solidFill>
+          <a:ln w="9525">
+            <a:solidFill>
+              <a:srgbClr val="D6E2E7"/>
+            </a:solidFill>
+            <a:prstDash val="solid"/>
+          </a:ln>
+        </p:spPr>
+      </p:sp>
+      <p:sp>
+        <p:nvSpPr>
+          <p:cNvPr id="14" name="Text 12"/>
+          <p:cNvSpPr txBox="1"/>
+          <p:nvPr/>
+        </p:nvSpPr>
+        <p:spPr>
+          <a:xfrm>
+            <a:off x="9235211" y="2148840"/>
+            <a:ext cx="2179244" cy="960120"/>
+          </a:xfrm>
+          <a:prstGeom prst="rect">
+            <a:avLst/>
+          </a:prstGeom>
+          <a:noFill/>
+          <a:ln/>
+        </p:spPr>
+        <p:txBody>
+          <a:bodyPr wrap="square" lIns="0" tIns="0" rIns="0" bIns="0" rtlCol="0" anchor="ctr"/>
+          <a:lstStyle/>
+          <a:p>
+            <a:pPr algn="ctr" indent="0" marL="0">
+              <a:buNone/>
+            </a:pPr>
+            <a:r>
+              <a:rPr lang="en-US" sz="3800" b="1" dirty="0">
+                <a:solidFill>
+                  <a:srgbClr val="1C5A73"/>
+                </a:solidFill>
+                <a:latin typeface="Cambria" pitchFamily="34" charset="0"/>
+                <a:ea typeface="Cambria" pitchFamily="34" charset="-122"/>
+                <a:cs typeface="Cambria" pitchFamily="34" charset="-120"/>
+              </a:rPr>
+              <a:t>1er</a:t>
+            </a:r>
+            <a:endParaRPr lang="en-US" sz="3800" dirty="0"/>
+          </a:p>
+        </p:txBody>
+      </p:sp>
+      <p:sp>
+        <p:nvSpPr>
+          <p:cNvPr id="15" name="Text 13"/>
+          <p:cNvSpPr txBox="1"/>
+          <p:nvPr/>
+        </p:nvSpPr>
+        <p:spPr>
+          <a:xfrm>
+            <a:off x="9253499" y="3154680"/>
+            <a:ext cx="2142668" cy="1051560"/>
+          </a:xfrm>
+          <a:prstGeom prst="rect">
+            <a:avLst/>
+          </a:prstGeom>
+          <a:noFill/>
+          <a:ln/>
+        </p:spPr>
+        <p:txBody>
+          <a:bodyPr wrap="square" lIns="0" tIns="0" rIns="0" bIns="0" rtlCol="0" anchor="t"/>
+          <a:lstStyle/>
+          <a:p>
+            <a:pPr algn="ctr" indent="0" marL="0">
+              <a:lnSpc>
+                <a:spcPct val="118000"/>
+              </a:lnSpc>
+              <a:buNone/>
+            </a:pPr>
+            <a:r>
+              <a:rPr lang="en-US" sz="1250" dirty="0">
+                <a:solidFill>
+                  <a:srgbClr val="31424A"/>
+                </a:solidFill>
+                <a:latin typeface="Calibri" pitchFamily="34" charset="0"/>
+                <a:ea typeface="Calibri" pitchFamily="34" charset="-122"/>
+                <a:cs typeface="Calibri" pitchFamily="34" charset="-120"/>
+              </a:rPr>
+              <a:t>producteur mondial d'huile essentielle de vétiver</a:t>
+            </a:r>
+            <a:endParaRPr lang="en-US" sz="1250" dirty="0"/>
+          </a:p>
+        </p:txBody>
+      </p:sp>
+      <p:sp>
+        <p:nvSpPr>
+          <p:cNvPr id="16" name="Text 14"/>
+          <p:cNvSpPr txBox="1"/>
+          <p:nvPr/>
+        </p:nvSpPr>
+        <p:spPr>
+          <a:xfrm>
+            <a:off x="594360" y="4709160"/>
+            <a:ext cx="11002975" cy="1097280"/>
           </a:xfrm>
           <a:prstGeom prst="rect">
             <a:avLst/>
@@ -5573,12 +11622,12 @@
           <a:p>
             <a:pPr algn="l" indent="0" marL="0">
               <a:lnSpc>
-                <a:spcPct val="125000"/>
+                <a:spcPct val="130000"/>
               </a:lnSpc>
               <a:buNone/>
             </a:pPr>
             <a:r>
-              <a:rPr lang="en-US" sz="1200" dirty="0">
+              <a:rPr lang="en-US" sz="1350" dirty="0">
                 <a:solidFill>
                   <a:srgbClr val="31424A"/>
                 </a:solidFill>
@@ -5586,44 +11635,15 @@
                 <a:ea typeface="Calibri" pitchFamily="34" charset="-122"/>
                 <a:cs typeface="Calibri" pitchFamily="34" charset="-120"/>
               </a:rPr>
-              <a:t>Ces cinq cultures sont d'abord destinées au marché intérieur : chaque tonne gagnée remplace une tonne importée.</a:t>
-            </a:r>
-            <a:endParaRPr lang="en-US" sz="1200" dirty="0"/>
-          </a:p>
-          <a:p>
-            <a:pPr algn="l" indent="0" marL="0">
-              <a:lnSpc>
-                <a:spcPct val="125000"/>
-              </a:lnSpc>
-              <a:buNone/>
-            </a:pPr>
-            <a:endParaRPr lang="en-US" sz="1200" dirty="0"/>
-          </a:p>
-          <a:p>
-            <a:pPr algn="l" indent="0" marL="0">
-              <a:lnSpc>
-                <a:spcPct val="125000"/>
-              </a:lnSpc>
-              <a:buNone/>
-            </a:pPr>
-            <a:r>
-              <a:rPr lang="en-US" sz="1200" dirty="0">
-                <a:solidFill>
-                  <a:srgbClr val="31424A"/>
-                </a:solidFill>
-                <a:latin typeface="Calibri" pitchFamily="34" charset="0"/>
-                <a:ea typeface="Calibri" pitchFamily="34" charset="-122"/>
-                <a:cs typeface="Calibri" pitchFamily="34" charset="-120"/>
-              </a:rPr>
-              <a:t>À côté, les cultures de rente — café, cacao, mangue Francique, vétiver — pèsent peu en volume mais portent l'essentiel des devises agricoles.</a:t>
-            </a:r>
-            <a:endParaRPr lang="en-US" sz="1200" dirty="0"/>
-          </a:p>
-        </p:txBody>
-      </p:sp>
-      <p:sp>
-        <p:nvSpPr>
-          <p:cNvPr id="8" name="Text 5"/>
+              <a:t>L'insécurité, l'état des routes et la hausse des prix pèsent sur les campagnes autant que sur les villes. Les filières d'exportation — mangue Francisque, cacao, café, vétiver — restent les rares sources de devises agricoles, et chaque récolte perdue se ressent directement dans le revenu des familles.</a:t>
+            </a:r>
+            <a:endParaRPr lang="en-US" sz="1350" dirty="0"/>
+          </a:p>
+        </p:txBody>
+      </p:sp>
+      <p:sp>
+        <p:nvSpPr>
+          <p:cNvPr id="17" name="Text 15"/>
           <p:cNvSpPr txBox="1"/>
           <p:nvPr/>
         </p:nvSpPr>
@@ -5664,7 +11684,7 @@
       </p:sp>
       <p:sp>
         <p:nvSpPr>
-          <p:cNvPr id="9" name="Text 6"/>
+          <p:cNvPr id="18" name="Text 16"/>
           <p:cNvSpPr txBox="1"/>
           <p:nvPr/>
         </p:nvSpPr>
@@ -5768,7 +11788,7 @@
                 <a:ea typeface="Calibri" pitchFamily="34" charset="-122"/>
                 <a:cs typeface="Calibri" pitchFamily="34" charset="-120"/>
               </a:rPr>
-              <a:t>NOTRE RÉPONSE</a:t>
+              <a:t>LES CULTURES</a:t>
             </a:r>
             <a:endParaRPr lang="en-US" sz="1150" dirty="0"/>
           </a:p>
@@ -5807,340 +11827,42 @@
                 <a:ea typeface="Cambria" pitchFamily="34" charset="-122"/>
                 <a:cs typeface="Cambria" pitchFamily="34" charset="-120"/>
               </a:rPr>
-              <a:t>Deux technologies, deux contraintes différentes</a:t>
+              <a:t>Cinq productions structurent les campagnes</a:t>
             </a:r>
             <a:endParaRPr lang="en-US" sz="3000" dirty="0"/>
           </a:p>
         </p:txBody>
       </p:sp>
-      <p:sp>
-        <p:nvSpPr>
-          <p:cNvPr id="4" name="Text 2"/>
-          <p:cNvSpPr txBox="1"/>
-          <p:nvPr/>
-        </p:nvSpPr>
-        <p:spPr>
-          <a:xfrm>
-            <a:off x="594360" y="1783080"/>
-            <a:ext cx="5227168" cy="411480"/>
-          </a:xfrm>
-          <a:prstGeom prst="rect">
-            <a:avLst/>
-          </a:prstGeom>
-          <a:noFill/>
-          <a:ln/>
-        </p:spPr>
-        <p:txBody>
-          <a:bodyPr wrap="square" lIns="0" tIns="0" rIns="0" bIns="0" rtlCol="0" anchor="ctr"/>
-          <a:lstStyle/>
-          <a:p>
-            <a:pPr algn="l" indent="0" marL="0">
-              <a:buNone/>
-            </a:pPr>
-            <a:r>
-              <a:rPr lang="en-US" sz="1600" b="1" dirty="0">
-                <a:solidFill>
-                  <a:srgbClr val="1C5A73"/>
-                </a:solidFill>
-                <a:latin typeface="Cambria" pitchFamily="34" charset="0"/>
-                <a:ea typeface="Cambria" pitchFamily="34" charset="-122"/>
-                <a:cs typeface="Cambria" pitchFamily="34" charset="-120"/>
-              </a:rPr>
-              <a:t>EVERGREEN® — retenir l'eau</a:t>
-            </a:r>
-            <a:endParaRPr lang="en-US" sz="1600" dirty="0"/>
-          </a:p>
-        </p:txBody>
-      </p:sp>
-      <p:sp>
-        <p:nvSpPr>
-          <p:cNvPr id="5" name="Text 3"/>
-          <p:cNvSpPr txBox="1"/>
-          <p:nvPr/>
-        </p:nvSpPr>
-        <p:spPr>
-          <a:xfrm>
-            <a:off x="594360" y="2286000"/>
-            <a:ext cx="5227168" cy="2468880"/>
-          </a:xfrm>
-          <a:prstGeom prst="rect">
-            <a:avLst/>
-          </a:prstGeom>
-          <a:noFill/>
-          <a:ln/>
-        </p:spPr>
-        <p:txBody>
-          <a:bodyPr wrap="square" lIns="0" tIns="0" rIns="0" bIns="0" rtlCol="0" anchor="t"/>
-          <a:lstStyle/>
-          <a:p>
-            <a:pPr algn="l" marL="342900" indent="-342900">
-              <a:lnSpc>
-                <a:spcPct val="122000"/>
-              </a:lnSpc>
-              <a:spcAft>
-                <a:spcPts val="1000"/>
-              </a:spcAft>
-              <a:buSzPct val="100000"/>
-              <a:buChar char="•"/>
-            </a:pPr>
-            <a:r>
-              <a:rPr lang="en-US" sz="1350" dirty="0">
-                <a:solidFill>
-                  <a:srgbClr val="31424A"/>
-                </a:solidFill>
-                <a:latin typeface="Calibri" pitchFamily="34" charset="0"/>
-                <a:ea typeface="Calibri" pitchFamily="34" charset="-122"/>
-                <a:cs typeface="Calibri" pitchFamily="34" charset="-120"/>
-              </a:rPr>
-              <a:t>Hydro-rétenteur à base de potassium, placé dans la zone racinaire à la plantation ou à la reprise.</a:t>
-            </a:r>
-            <a:endParaRPr lang="en-US" sz="1350" dirty="0"/>
-          </a:p>
-          <a:p>
-            <a:pPr algn="l" marL="342900" indent="-342900">
-              <a:lnSpc>
-                <a:spcPct val="122000"/>
-              </a:lnSpc>
-              <a:spcAft>
-                <a:spcPts val="1000"/>
-              </a:spcAft>
-              <a:buSzPct val="100000"/>
-              <a:buChar char="•"/>
-            </a:pPr>
-            <a:r>
-              <a:rPr lang="en-US" sz="1350" dirty="0">
-                <a:solidFill>
-                  <a:srgbClr val="31424A"/>
-                </a:solidFill>
-                <a:latin typeface="Calibri" pitchFamily="34" charset="0"/>
-                <a:ea typeface="Calibri" pitchFamily="34" charset="-122"/>
-                <a:cs typeface="Calibri" pitchFamily="34" charset="-120"/>
-              </a:rPr>
-              <a:t>Capte l'eau de pluie avant qu'elle ne ruisselle et la restitue à la plante pendant les séquences sèches entre deux saisons.</a:t>
-            </a:r>
-            <a:endParaRPr lang="en-US" sz="1350" dirty="0"/>
-          </a:p>
-          <a:p>
-            <a:pPr algn="l" marL="342900" indent="-342900">
-              <a:lnSpc>
-                <a:spcPct val="122000"/>
-              </a:lnSpc>
-              <a:spcAft>
-                <a:spcPts val="1000"/>
-              </a:spcAft>
-              <a:buSzPct val="100000"/>
-              <a:buChar char="•"/>
-            </a:pPr>
-            <a:r>
-              <a:rPr lang="en-US" sz="1350" dirty="0">
-                <a:solidFill>
-                  <a:srgbClr val="31424A"/>
-                </a:solidFill>
-                <a:latin typeface="Calibri" pitchFamily="34" charset="0"/>
-                <a:ea typeface="Calibri" pitchFamily="34" charset="-122"/>
-                <a:cs typeface="Calibri" pitchFamily="34" charset="-120"/>
-              </a:rPr>
-              <a:t>Capacité d'absorption de l'ordre de 300 fois son poids ; durée d'effet utile de 3 à 4 ans dans le sol.</a:t>
-            </a:r>
-            <a:endParaRPr lang="en-US" sz="1350" dirty="0"/>
-          </a:p>
-          <a:p>
-            <a:pPr algn="l" marL="342900" indent="-342900">
-              <a:lnSpc>
-                <a:spcPct val="122000"/>
-              </a:lnSpc>
-              <a:spcAft>
-                <a:spcPts val="1000"/>
-              </a:spcAft>
-              <a:buSzPct val="100000"/>
-              <a:buChar char="•"/>
-            </a:pPr>
-            <a:r>
-              <a:rPr lang="en-US" sz="1350" dirty="0">
-                <a:solidFill>
-                  <a:srgbClr val="31424A"/>
-                </a:solidFill>
-                <a:latin typeface="Calibri" pitchFamily="34" charset="0"/>
-                <a:ea typeface="Calibri" pitchFamily="34" charset="-122"/>
-                <a:cs typeface="Calibri" pitchFamily="34" charset="-120"/>
-              </a:rPr>
-              <a:t>Sur parcelle en pente, il agit là où l'aménagement anti-érosif seul ne suffit pas : à l'intérieur du sol.</a:t>
-            </a:r>
-            <a:endParaRPr lang="en-US" sz="1350" dirty="0"/>
-          </a:p>
-        </p:txBody>
-      </p:sp>
-      <p:sp>
-        <p:nvSpPr>
-          <p:cNvPr id="6" name="Text 4"/>
-          <p:cNvSpPr txBox="1"/>
-          <p:nvPr/>
-        </p:nvSpPr>
-        <p:spPr>
-          <a:xfrm>
-            <a:off x="6370168" y="1783080"/>
-            <a:ext cx="5227168" cy="411480"/>
-          </a:xfrm>
-          <a:prstGeom prst="rect">
-            <a:avLst/>
-          </a:prstGeom>
-          <a:noFill/>
-          <a:ln/>
-        </p:spPr>
-        <p:txBody>
-          <a:bodyPr wrap="square" lIns="0" tIns="0" rIns="0" bIns="0" rtlCol="0" anchor="ctr"/>
-          <a:lstStyle/>
-          <a:p>
-            <a:pPr algn="l" indent="0" marL="0">
-              <a:buNone/>
-            </a:pPr>
-            <a:r>
-              <a:rPr lang="en-US" sz="1600" b="1" dirty="0">
-                <a:solidFill>
-                  <a:srgbClr val="1C5A73"/>
-                </a:solidFill>
-                <a:latin typeface="Cambria" pitchFamily="34" charset="0"/>
-                <a:ea typeface="Cambria" pitchFamily="34" charset="-122"/>
-                <a:cs typeface="Cambria" pitchFamily="34" charset="-120"/>
-              </a:rPr>
-              <a:t>ECOFERT® — nourrir sans épuiser</a:t>
-            </a:r>
-            <a:endParaRPr lang="en-US" sz="1600" dirty="0"/>
-          </a:p>
-        </p:txBody>
-      </p:sp>
-      <p:sp>
-        <p:nvSpPr>
-          <p:cNvPr id="7" name="Text 5"/>
-          <p:cNvSpPr txBox="1"/>
-          <p:nvPr/>
-        </p:nvSpPr>
-        <p:spPr>
-          <a:xfrm>
-            <a:off x="6370168" y="2286000"/>
-            <a:ext cx="5227168" cy="2468880"/>
-          </a:xfrm>
-          <a:prstGeom prst="rect">
-            <a:avLst/>
-          </a:prstGeom>
-          <a:noFill/>
-          <a:ln/>
-        </p:spPr>
-        <p:txBody>
-          <a:bodyPr wrap="square" lIns="0" tIns="0" rIns="0" bIns="0" rtlCol="0" anchor="t"/>
-          <a:lstStyle/>
-          <a:p>
-            <a:pPr algn="l" marL="342900" indent="-342900">
-              <a:lnSpc>
-                <a:spcPct val="122000"/>
-              </a:lnSpc>
-              <a:spcAft>
-                <a:spcPts val="1000"/>
-              </a:spcAft>
-              <a:buSzPct val="100000"/>
-              <a:buChar char="•"/>
-            </a:pPr>
-            <a:r>
-              <a:rPr lang="en-US" sz="1350" dirty="0">
-                <a:solidFill>
-                  <a:srgbClr val="31424A"/>
-                </a:solidFill>
-                <a:latin typeface="Calibri" pitchFamily="34" charset="0"/>
-                <a:ea typeface="Calibri" pitchFamily="34" charset="-122"/>
-                <a:cs typeface="Calibri" pitchFamily="34" charset="-120"/>
-              </a:rPr>
-              <a:t>Fertilisant en microdoses d'acides aminés, azote, phosphore et potassium, issu de ressources renouvelables.</a:t>
-            </a:r>
-            <a:endParaRPr lang="en-US" sz="1350" dirty="0"/>
-          </a:p>
-          <a:p>
-            <a:pPr algn="l" marL="342900" indent="-342900">
-              <a:lnSpc>
-                <a:spcPct val="122000"/>
-              </a:lnSpc>
-              <a:spcAft>
-                <a:spcPts val="1000"/>
-              </a:spcAft>
-              <a:buSzPct val="100000"/>
-              <a:buChar char="•"/>
-            </a:pPr>
-            <a:r>
-              <a:rPr lang="en-US" sz="1350" dirty="0">
-                <a:solidFill>
-                  <a:srgbClr val="31424A"/>
-                </a:solidFill>
-                <a:latin typeface="Calibri" pitchFamily="34" charset="0"/>
-                <a:ea typeface="Calibri" pitchFamily="34" charset="-122"/>
-                <a:cs typeface="Calibri" pitchFamily="34" charset="-120"/>
-              </a:rPr>
-              <a:t>Non chélatant : il n'appauvrit pas le complexe argilo-humique, déjà très entamé sur les sols décapés.</a:t>
-            </a:r>
-            <a:endParaRPr lang="en-US" sz="1350" dirty="0"/>
-          </a:p>
-          <a:p>
-            <a:pPr algn="l" marL="342900" indent="-342900">
-              <a:lnSpc>
-                <a:spcPct val="122000"/>
-              </a:lnSpc>
-              <a:spcAft>
-                <a:spcPts val="1000"/>
-              </a:spcAft>
-              <a:buSzPct val="100000"/>
-              <a:buChar char="•"/>
-            </a:pPr>
-            <a:r>
-              <a:rPr lang="en-US" sz="1350" dirty="0">
-                <a:solidFill>
-                  <a:srgbClr val="31424A"/>
-                </a:solidFill>
-                <a:latin typeface="Calibri" pitchFamily="34" charset="0"/>
-                <a:ea typeface="Calibri" pitchFamily="34" charset="-122"/>
-                <a:cs typeface="Calibri" pitchFamily="34" charset="-120"/>
-              </a:rPr>
-              <a:t>Certifié SOHISCERT et EU Bio — utile pour les filières café et cacao qui visent les primes de certification.</a:t>
-            </a:r>
-            <a:endParaRPr lang="en-US" sz="1350" dirty="0"/>
-          </a:p>
-          <a:p>
-            <a:pPr algn="l" marL="342900" indent="-342900">
-              <a:lnSpc>
-                <a:spcPct val="122000"/>
-              </a:lnSpc>
-              <a:spcAft>
-                <a:spcPts val="1000"/>
-              </a:spcAft>
-              <a:buSzPct val="100000"/>
-              <a:buChar char="•"/>
-            </a:pPr>
-            <a:r>
-              <a:rPr lang="en-US" sz="1350" dirty="0">
-                <a:solidFill>
-                  <a:srgbClr val="31424A"/>
-                </a:solidFill>
-                <a:latin typeface="Calibri" pitchFamily="34" charset="0"/>
-                <a:ea typeface="Calibri" pitchFamily="34" charset="-122"/>
-                <a:cs typeface="Calibri" pitchFamily="34" charset="-120"/>
-              </a:rPr>
-              <a:t>1 à 4 flacons de 140 ml par hectare : un format transportable, compatible avec le morcellement des parcelles.</a:t>
-            </a:r>
-            <a:endParaRPr lang="en-US" sz="1350" dirty="0"/>
-          </a:p>
-        </p:txBody>
-      </p:sp>
-      <p:sp>
-        <p:nvSpPr>
-          <p:cNvPr id="8" name="Shape 6"/>
+      <p:graphicFrame>
+        <p:nvGraphicFramePr>
+          <p:cNvPr id="4" name="Chart 0" descr=""/>
+          <p:cNvGraphicFramePr/>
+          <p:nvPr/>
+        </p:nvGraphicFramePr>
+        <p:xfrm>
+          <a:off x="594360" y="1783080"/>
+          <a:ext cx="7360920" cy="3977640"/>
+        </p:xfrm>
+        <a:graphic xmlns:a="http://schemas.openxmlformats.org/drawingml/2006/main">
+          <a:graphicData uri="http://schemas.openxmlformats.org/drawingml/2006/chart">
+            <c:chart xmlns:c="http://schemas.openxmlformats.org/drawingml/2006/chart" r:id="rId1"/>
+          </a:graphicData>
+        </a:graphic>
+      </p:graphicFrame>
+      <p:sp>
+        <p:nvSpPr>
+          <p:cNvPr id="5" name="Shape 2"/>
           <p:cNvSpPr/>
           <p:nvPr/>
         </p:nvSpPr>
         <p:spPr>
           <a:xfrm>
-            <a:off x="594360" y="4846320"/>
-            <a:ext cx="11002975" cy="960120"/>
+            <a:off x="8275320" y="1783080"/>
+            <a:ext cx="3291840" cy="3977640"/>
           </a:xfrm>
           <a:prstGeom prst="roundRect">
             <a:avLst>
-              <a:gd name="adj" fmla="val 7619"/>
+              <a:gd name="adj" fmla="val 2778"/>
             </a:avLst>
           </a:prstGeom>
           <a:solidFill>
@@ -6156,14 +11878,53 @@
       </p:sp>
       <p:sp>
         <p:nvSpPr>
-          <p:cNvPr id="9" name="Text 7"/>
-          <p:cNvSpPr txBox="1"/>
-          <p:nvPr/>
-        </p:nvSpPr>
-        <p:spPr>
-          <a:xfrm>
-            <a:off x="822960" y="4983480"/>
-            <a:ext cx="10545775" cy="713232"/>
+          <p:cNvPr id="6" name="Text 3"/>
+          <p:cNvSpPr txBox="1"/>
+          <p:nvPr/>
+        </p:nvSpPr>
+        <p:spPr>
+          <a:xfrm>
+            <a:off x="8503920" y="2011680"/>
+            <a:ext cx="2834640" cy="457200"/>
+          </a:xfrm>
+          <a:prstGeom prst="rect">
+            <a:avLst/>
+          </a:prstGeom>
+          <a:noFill/>
+          <a:ln/>
+        </p:spPr>
+        <p:txBody>
+          <a:bodyPr wrap="square" lIns="0" tIns="0" rIns="0" bIns="0" rtlCol="0" anchor="ctr"/>
+          <a:lstStyle/>
+          <a:p>
+            <a:pPr algn="l" indent="0" marL="0">
+              <a:buNone/>
+            </a:pPr>
+            <a:r>
+              <a:rPr lang="en-US" sz="1300" b="1" dirty="0">
+                <a:solidFill>
+                  <a:srgbClr val="1C5A73"/>
+                </a:solidFill>
+                <a:latin typeface="Cambria" pitchFamily="34" charset="0"/>
+                <a:ea typeface="Cambria" pitchFamily="34" charset="-122"/>
+                <a:cs typeface="Cambria" pitchFamily="34" charset="-120"/>
+              </a:rPr>
+              <a:t>Lecture</a:t>
+            </a:r>
+            <a:endParaRPr lang="en-US" sz="1300" dirty="0"/>
+          </a:p>
+        </p:txBody>
+      </p:sp>
+      <p:sp>
+        <p:nvSpPr>
+          <p:cNvPr id="7" name="Text 4"/>
+          <p:cNvSpPr txBox="1"/>
+          <p:nvPr/>
+        </p:nvSpPr>
+        <p:spPr>
+          <a:xfrm>
+            <a:off x="8503920" y="2560320"/>
+            <a:ext cx="2834640" cy="3017520"/>
           </a:xfrm>
           <a:prstGeom prst="rect">
             <a:avLst/>
@@ -6177,28 +11938,57 @@
           <a:p>
             <a:pPr algn="l" indent="0" marL="0">
               <a:lnSpc>
-                <a:spcPct val="118000"/>
+                <a:spcPct val="125000"/>
               </a:lnSpc>
               <a:buNone/>
             </a:pPr>
             <a:r>
-              <a:rPr lang="en-US" sz="1100" dirty="0">
-                <a:solidFill>
-                  <a:srgbClr val="6C8089"/>
-                </a:solidFill>
-                <a:latin typeface="Calibri" pitchFamily="34" charset="0"/>
-                <a:ea typeface="Calibri" pitchFamily="34" charset="-122"/>
-                <a:cs typeface="Calibri" pitchFamily="34" charset="-120"/>
-              </a:rPr>
-              <a:t>Les deux produits se vendent séparément mais ont été conçus pour se renforcer : l'hydro-rétenteur prolonge la disponibilité de l'eau, le fertilisant valorise cette eau disponible sans dégrader davantage un sol déjà fragile.</a:t>
-            </a:r>
-            <a:endParaRPr lang="en-US" sz="1100" dirty="0"/>
-          </a:p>
-        </p:txBody>
-      </p:sp>
-      <p:sp>
-        <p:nvSpPr>
-          <p:cNvPr id="10" name="Text 8"/>
+              <a:rPr lang="en-US" sz="1200" dirty="0">
+                <a:solidFill>
+                  <a:srgbClr val="31424A"/>
+                </a:solidFill>
+                <a:latin typeface="Calibri" pitchFamily="34" charset="0"/>
+                <a:ea typeface="Calibri" pitchFamily="34" charset="-122"/>
+                <a:cs typeface="Calibri" pitchFamily="34" charset="-120"/>
+              </a:rPr>
+              <a:t>Ces cinq cultures sont d'abord destinées au marché intérieur : chaque tonne gagnée remplace une tonne importée.</a:t>
+            </a:r>
+            <a:endParaRPr lang="en-US" sz="1200" dirty="0"/>
+          </a:p>
+          <a:p>
+            <a:pPr algn="l" indent="0" marL="0">
+              <a:lnSpc>
+                <a:spcPct val="125000"/>
+              </a:lnSpc>
+              <a:buNone/>
+            </a:pPr>
+            <a:endParaRPr lang="en-US" sz="1200" dirty="0"/>
+          </a:p>
+          <a:p>
+            <a:pPr algn="l" indent="0" marL="0">
+              <a:lnSpc>
+                <a:spcPct val="125000"/>
+              </a:lnSpc>
+              <a:buNone/>
+            </a:pPr>
+            <a:r>
+              <a:rPr lang="en-US" sz="1200" dirty="0">
+                <a:solidFill>
+                  <a:srgbClr val="31424A"/>
+                </a:solidFill>
+                <a:latin typeface="Calibri" pitchFamily="34" charset="0"/>
+                <a:ea typeface="Calibri" pitchFamily="34" charset="-122"/>
+                <a:cs typeface="Calibri" pitchFamily="34" charset="-120"/>
+              </a:rPr>
+              <a:t>À côté, les cultures de rente — café, cacao, mangue Francique, vétiver — pèsent peu en volume mais portent l'essentiel des devises agricoles.</a:t>
+            </a:r>
+            <a:endParaRPr lang="en-US" sz="1200" dirty="0"/>
+          </a:p>
+        </p:txBody>
+      </p:sp>
+      <p:sp>
+        <p:nvSpPr>
+          <p:cNvPr id="8" name="Text 5"/>
           <p:cNvSpPr txBox="1"/>
           <p:nvPr/>
         </p:nvSpPr>
@@ -6239,7 +12029,7 @@
       </p:sp>
       <p:sp>
         <p:nvSpPr>
-          <p:cNvPr id="11" name="Text 9"/>
+          <p:cNvPr id="9" name="Text 6"/>
           <p:cNvSpPr txBox="1"/>
           <p:nvPr/>
         </p:nvSpPr>
@@ -6343,7 +12133,7 @@
                 <a:ea typeface="Calibri" pitchFamily="34" charset="-122"/>
                 <a:cs typeface="Calibri" pitchFamily="34" charset="-120"/>
               </a:rPr>
-              <a:t>ORDRES DE GRANDEUR</a:t>
+              <a:t>PREMIÈRE FILIÈRE</a:t>
             </a:r>
             <a:endParaRPr lang="en-US" sz="1150" dirty="0"/>
           </a:p>
@@ -6382,168 +12172,181 @@
                 <a:ea typeface="Cambria" pitchFamily="34" charset="-122"/>
                 <a:cs typeface="Cambria" pitchFamily="34" charset="-120"/>
               </a:rPr>
-              <a:t>Économie d'eau attendue selon le mode d'irrigation</a:t>
+              <a:t>Mangue Francisque et cacao : des devises à protéger</a:t>
             </a:r>
             <a:endParaRPr lang="en-US" sz="3000" dirty="0"/>
           </a:p>
         </p:txBody>
       </p:sp>
-      <p:graphicFrame>
-        <p:nvGraphicFramePr>
-          <p:cNvPr id="4" name="Chart 0" descr=""/>
-          <p:cNvGraphicFramePr/>
-          <p:nvPr/>
-        </p:nvGraphicFramePr>
-        <p:xfrm>
-          <a:off x="594360" y="1783080"/>
-          <a:ext cx="7360920" cy="3977640"/>
-        </p:xfrm>
-        <a:graphic xmlns:a="http://schemas.openxmlformats.org/drawingml/2006/main">
-          <a:graphicData uri="http://schemas.openxmlformats.org/drawingml/2006/chart">
-            <c:chart xmlns:c="http://schemas.openxmlformats.org/drawingml/2006/chart" r:id="rId1"/>
-          </a:graphicData>
-        </a:graphic>
-      </p:graphicFrame>
-      <p:sp>
-        <p:nvSpPr>
-          <p:cNvPr id="5" name="Shape 2"/>
-          <p:cNvSpPr/>
-          <p:nvPr/>
-        </p:nvSpPr>
-        <p:spPr>
-          <a:xfrm>
-            <a:off x="8275320" y="1783080"/>
-            <a:ext cx="3291840" cy="3977640"/>
-          </a:xfrm>
-          <a:prstGeom prst="roundRect">
-            <a:avLst>
-              <a:gd name="adj" fmla="val 2778"/>
-            </a:avLst>
-          </a:prstGeom>
-          <a:solidFill>
-            <a:srgbClr val="EDF3F5"/>
-          </a:solidFill>
-          <a:ln w="9525">
-            <a:solidFill>
-              <a:srgbClr val="D6E2E7"/>
-            </a:solidFill>
-            <a:prstDash val="solid"/>
-          </a:ln>
-        </p:spPr>
+      <p:pic>
+        <p:nvPicPr>
+          <p:cNvPr id="4" name="Image 0" descr="preencoded.png">    </p:cNvPr>
+          <p:cNvPicPr>
+            <a:picLocks noChangeAspect="1"/>
+          </p:cNvPicPr>
+          <p:nvPr/>
+        </p:nvPicPr>
+        <p:blipFill>
+          <a:blip r:embed="rId1"/>
+          <a:stretch>
+            <a:fillRect/>
+          </a:stretch>
+        </p:blipFill>
+        <p:spPr>
+          <a:xfrm>
+            <a:off x="6522415" y="1783080"/>
+            <a:ext cx="5074920" cy="3794760"/>
+          </a:xfrm>
+          <a:prstGeom prst="rect">
+            <a:avLst/>
+          </a:prstGeom>
+        </p:spPr>
+      </p:pic>
+      <p:sp>
+        <p:nvSpPr>
+          <p:cNvPr id="5" name="Text 2"/>
+          <p:cNvSpPr txBox="1"/>
+          <p:nvPr/>
+        </p:nvSpPr>
+        <p:spPr>
+          <a:xfrm>
+            <a:off x="594360" y="1783080"/>
+            <a:ext cx="5379415" cy="4251960"/>
+          </a:xfrm>
+          <a:prstGeom prst="rect">
+            <a:avLst/>
+          </a:prstGeom>
+          <a:noFill/>
+          <a:ln/>
+        </p:spPr>
+        <p:txBody>
+          <a:bodyPr wrap="square" lIns="0" tIns="0" rIns="0" bIns="0" rtlCol="0" anchor="t"/>
+          <a:lstStyle/>
+          <a:p>
+            <a:pPr algn="l" marL="342900" indent="-342900">
+              <a:lnSpc>
+                <a:spcPct val="122000"/>
+              </a:lnSpc>
+              <a:spcAft>
+                <a:spcPts val="1100"/>
+              </a:spcAft>
+              <a:buSzPct val="100000"/>
+              <a:buChar char="•"/>
+            </a:pPr>
+            <a:r>
+              <a:rPr lang="en-US" sz="1400" dirty="0">
+                <a:solidFill>
+                  <a:srgbClr val="31424A"/>
+                </a:solidFill>
+                <a:latin typeface="Calibri" pitchFamily="34" charset="0"/>
+                <a:ea typeface="Calibri" pitchFamily="34" charset="-122"/>
+                <a:cs typeface="Calibri" pitchFamily="34" charset="-120"/>
+              </a:rPr>
+              <a:t>La mangue Francisque, exportée surtout vers les États-Unis, vient de vergers souvent anciens et dispersés.</a:t>
+            </a:r>
+            <a:endParaRPr lang="en-US" sz="1400" dirty="0"/>
+          </a:p>
+          <a:p>
+            <a:pPr algn="l" marL="342900" indent="-342900">
+              <a:lnSpc>
+                <a:spcPct val="122000"/>
+              </a:lnSpc>
+              <a:spcAft>
+                <a:spcPts val="1100"/>
+              </a:spcAft>
+              <a:buSzPct val="100000"/>
+              <a:buChar char="•"/>
+            </a:pPr>
+            <a:r>
+              <a:rPr lang="en-US" sz="1400" dirty="0">
+                <a:solidFill>
+                  <a:srgbClr val="31424A"/>
+                </a:solidFill>
+                <a:latin typeface="Calibri" pitchFamily="34" charset="0"/>
+                <a:ea typeface="Calibri" pitchFamily="34" charset="-122"/>
+                <a:cs typeface="Calibri" pitchFamily="34" charset="-120"/>
+              </a:rPr>
+              <a:t>Le cacao du Nord et de la Grand'Anse gagne des marchés de qualité, notamment en filière biologique.</a:t>
+            </a:r>
+            <a:endParaRPr lang="en-US" sz="1400" dirty="0"/>
+          </a:p>
+          <a:p>
+            <a:pPr algn="l" marL="342900" indent="-342900">
+              <a:lnSpc>
+                <a:spcPct val="122000"/>
+              </a:lnSpc>
+              <a:spcAft>
+                <a:spcPts val="1100"/>
+              </a:spcAft>
+              <a:buSzPct val="100000"/>
+              <a:buChar char="•"/>
+            </a:pPr>
+            <a:r>
+              <a:rPr lang="en-US" sz="1400" dirty="0">
+                <a:solidFill>
+                  <a:srgbClr val="31424A"/>
+                </a:solidFill>
+                <a:latin typeface="Calibri" pitchFamily="34" charset="0"/>
+                <a:ea typeface="Calibri" pitchFamily="34" charset="-122"/>
+                <a:cs typeface="Calibri" pitchFamily="34" charset="-120"/>
+              </a:rPr>
+              <a:t>Les arbres subissent des sécheresses de plus en plus marquées entre deux saisons des pluies.</a:t>
+            </a:r>
+            <a:endParaRPr lang="en-US" sz="1400" dirty="0"/>
+          </a:p>
+          <a:p>
+            <a:pPr algn="l" marL="342900" indent="-342900">
+              <a:lnSpc>
+                <a:spcPct val="122000"/>
+              </a:lnSpc>
+              <a:spcAft>
+                <a:spcPts val="1100"/>
+              </a:spcAft>
+              <a:buSzPct val="100000"/>
+              <a:buChar char="•"/>
+            </a:pPr>
+            <a:r>
+              <a:rPr lang="en-US" sz="1400" dirty="0">
+                <a:solidFill>
+                  <a:srgbClr val="31424A"/>
+                </a:solidFill>
+                <a:latin typeface="Calibri" pitchFamily="34" charset="0"/>
+                <a:ea typeface="Calibri" pitchFamily="34" charset="-122"/>
+                <a:cs typeface="Calibri" pitchFamily="34" charset="-120"/>
+              </a:rPr>
+              <a:t>Les exigences sanitaires à l'export imposent une protection sans résidu : NAPEMA® y répond.</a:t>
+            </a:r>
+            <a:endParaRPr lang="en-US" sz="1400" dirty="0"/>
+          </a:p>
+          <a:p>
+            <a:pPr algn="l" marL="342900" indent="-342900">
+              <a:lnSpc>
+                <a:spcPct val="122000"/>
+              </a:lnSpc>
+              <a:spcAft>
+                <a:spcPts val="1100"/>
+              </a:spcAft>
+              <a:buSzPct val="100000"/>
+              <a:buChar char="•"/>
+            </a:pPr>
+            <a:r>
+              <a:rPr lang="en-US" sz="1400" dirty="0">
+                <a:solidFill>
+                  <a:srgbClr val="31424A"/>
+                </a:solidFill>
+                <a:latin typeface="Calibri" pitchFamily="34" charset="0"/>
+                <a:ea typeface="Calibri" pitchFamily="34" charset="-122"/>
+                <a:cs typeface="Calibri" pitchFamily="34" charset="-120"/>
+              </a:rPr>
+              <a:t>Planter les jeunes arbres avec EVERGREEN® améliore leur survie pendant la première saison sèche.</a:t>
+            </a:r>
+            <a:endParaRPr lang="en-US" sz="1400" dirty="0"/>
+          </a:p>
+        </p:txBody>
       </p:sp>
       <p:sp>
         <p:nvSpPr>
           <p:cNvPr id="6" name="Text 3"/>
-          <p:cNvSpPr txBox="1"/>
-          <p:nvPr/>
-        </p:nvSpPr>
-        <p:spPr>
-          <a:xfrm>
-            <a:off x="8503920" y="2011680"/>
-            <a:ext cx="2834640" cy="457200"/>
-          </a:xfrm>
-          <a:prstGeom prst="rect">
-            <a:avLst/>
-          </a:prstGeom>
-          <a:noFill/>
-          <a:ln/>
-        </p:spPr>
-        <p:txBody>
-          <a:bodyPr wrap="square" lIns="0" tIns="0" rIns="0" bIns="0" rtlCol="0" anchor="ctr"/>
-          <a:lstStyle/>
-          <a:p>
-            <a:pPr algn="l" indent="0" marL="0">
-              <a:buNone/>
-            </a:pPr>
-            <a:r>
-              <a:rPr lang="en-US" sz="1300" b="1" dirty="0">
-                <a:solidFill>
-                  <a:srgbClr val="1C5A73"/>
-                </a:solidFill>
-                <a:latin typeface="Cambria" pitchFamily="34" charset="0"/>
-                <a:ea typeface="Cambria" pitchFamily="34" charset="-122"/>
-                <a:cs typeface="Cambria" pitchFamily="34" charset="-120"/>
-              </a:rPr>
-              <a:t>À lire avec prudence</a:t>
-            </a:r>
-            <a:endParaRPr lang="en-US" sz="1300" dirty="0"/>
-          </a:p>
-        </p:txBody>
-      </p:sp>
-      <p:sp>
-        <p:nvSpPr>
-          <p:cNvPr id="7" name="Text 4"/>
-          <p:cNvSpPr txBox="1"/>
-          <p:nvPr/>
-        </p:nvSpPr>
-        <p:spPr>
-          <a:xfrm>
-            <a:off x="8503920" y="2560320"/>
-            <a:ext cx="2834640" cy="3017520"/>
-          </a:xfrm>
-          <a:prstGeom prst="rect">
-            <a:avLst/>
-          </a:prstGeom>
-          <a:noFill/>
-          <a:ln/>
-        </p:spPr>
-        <p:txBody>
-          <a:bodyPr wrap="square" lIns="0" tIns="0" rIns="0" bIns="0" rtlCol="0" anchor="t"/>
-          <a:lstStyle/>
-          <a:p>
-            <a:pPr algn="l" indent="0" marL="0">
-              <a:lnSpc>
-                <a:spcPct val="125000"/>
-              </a:lnSpc>
-              <a:buNone/>
-            </a:pPr>
-            <a:r>
-              <a:rPr lang="en-US" sz="1200" dirty="0">
-                <a:solidFill>
-                  <a:srgbClr val="31424A"/>
-                </a:solidFill>
-                <a:latin typeface="Calibri" pitchFamily="34" charset="0"/>
-                <a:ea typeface="Calibri" pitchFamily="34" charset="-122"/>
-                <a:cs typeface="Calibri" pitchFamily="34" charset="-120"/>
-              </a:rPr>
-              <a:t>Ces fourchettes sont indicatives et fondées sur les gains documentés de nos hydro-rétenteurs.</a:t>
-            </a:r>
-            <a:endParaRPr lang="en-US" sz="1200" dirty="0"/>
-          </a:p>
-          <a:p>
-            <a:pPr algn="l" indent="0" marL="0">
-              <a:lnSpc>
-                <a:spcPct val="125000"/>
-              </a:lnSpc>
-              <a:buNone/>
-            </a:pPr>
-            <a:endParaRPr lang="en-US" sz="1200" dirty="0"/>
-          </a:p>
-          <a:p>
-            <a:pPr algn="l" indent="0" marL="0">
-              <a:lnSpc>
-                <a:spcPct val="125000"/>
-              </a:lnSpc>
-              <a:buNone/>
-            </a:pPr>
-            <a:r>
-              <a:rPr lang="en-US" sz="1200" dirty="0">
-                <a:solidFill>
-                  <a:srgbClr val="31424A"/>
-                </a:solidFill>
-                <a:latin typeface="Calibri" pitchFamily="34" charset="0"/>
-                <a:ea typeface="Calibri" pitchFamily="34" charset="-122"/>
-                <a:cs typeface="Calibri" pitchFamily="34" charset="-120"/>
-              </a:rPr>
-              <a:t>Le résultat réel dépend du sol, du climat et de la culture. Ces chiffres donnent un ordre de grandeur : ils ne constituent en aucun cas une valeur garantie, contractuelle ou absolue.</a:t>
-            </a:r>
-            <a:endParaRPr lang="en-US" sz="1200" dirty="0"/>
-          </a:p>
-        </p:txBody>
-      </p:sp>
-      <p:sp>
-        <p:nvSpPr>
-          <p:cNvPr id="8" name="Text 5"/>
           <p:cNvSpPr txBox="1"/>
           <p:nvPr/>
         </p:nvSpPr>
@@ -6584,7 +12387,7 @@
       </p:sp>
       <p:sp>
         <p:nvSpPr>
-          <p:cNvPr id="9" name="Text 6"/>
+          <p:cNvPr id="7" name="Text 4"/>
           <p:cNvSpPr txBox="1"/>
           <p:nvPr/>
         </p:nvSpPr>
@@ -6688,7 +12491,7 @@
                 <a:ea typeface="Calibri" pitchFamily="34" charset="-122"/>
                 <a:cs typeface="Calibri" pitchFamily="34" charset="-120"/>
               </a:rPr>
-              <a:t>TROIS TERRAINS PRIORITAIRES</a:t>
+              <a:t>DEUXIÈME FILIÈRE</a:t>
             </a:r>
             <a:endParaRPr lang="en-US" sz="1150" dirty="0"/>
           </a:p>
@@ -6727,42 +12530,15 @@
                 <a:ea typeface="Cambria" pitchFamily="34" charset="-122"/>
                 <a:cs typeface="Cambria" pitchFamily="34" charset="-120"/>
               </a:rPr>
-              <a:t>Où engager les premiers essais</a:t>
+              <a:t>Mornes dénudés : retenir l'eau et le sol sur les pentes</a:t>
             </a:r>
             <a:endParaRPr lang="en-US" sz="3000" dirty="0"/>
           </a:p>
         </p:txBody>
-      </p:sp>
-      <p:sp>
-        <p:nvSpPr>
-          <p:cNvPr id="4" name="Shape 2"/>
-          <p:cNvSpPr/>
-          <p:nvPr/>
-        </p:nvSpPr>
-        <p:spPr>
-          <a:xfrm>
-            <a:off x="594360" y="1783080"/>
-            <a:ext cx="3472586" cy="4069080"/>
-          </a:xfrm>
-          <a:prstGeom prst="roundRect">
-            <a:avLst>
-              <a:gd name="adj" fmla="val 2633"/>
-            </a:avLst>
-          </a:prstGeom>
-          <a:solidFill>
-            <a:srgbClr val="EDF3F5"/>
-          </a:solidFill>
-          <a:ln w="9525">
-            <a:solidFill>
-              <a:srgbClr val="D6E2E7"/>
-            </a:solidFill>
-            <a:prstDash val="solid"/>
-          </a:ln>
-        </p:spPr>
       </p:sp>
       <p:pic>
         <p:nvPicPr>
-          <p:cNvPr id="5" name="Image 0" descr="preencoded.png">    </p:cNvPr>
+          <p:cNvPr id="4" name="Image 0" descr="preencoded.png">    </p:cNvPr>
           <p:cNvPicPr>
             <a:picLocks noChangeAspect="1"/>
           </p:cNvPicPr>
@@ -6777,7 +12553,7 @@
         <p:spPr>
           <a:xfrm>
             <a:off x="594360" y="1783080"/>
-            <a:ext cx="3472586" cy="1691640"/>
+            <a:ext cx="5074920" cy="3794760"/>
           </a:xfrm>
           <a:prstGeom prst="rect">
             <a:avLst/>
@@ -6786,92 +12562,14 @@
       </p:pic>
       <p:sp>
         <p:nvSpPr>
-          <p:cNvPr id="6" name="Text 3"/>
-          <p:cNvSpPr txBox="1"/>
-          <p:nvPr/>
-        </p:nvSpPr>
-        <p:spPr>
-          <a:xfrm>
-            <a:off x="795528" y="3639312"/>
-            <a:ext cx="3070250" cy="384048"/>
-          </a:xfrm>
-          <a:prstGeom prst="rect">
-            <a:avLst/>
-          </a:prstGeom>
-          <a:noFill/>
-          <a:ln/>
-        </p:spPr>
-        <p:txBody>
-          <a:bodyPr wrap="square" lIns="0" tIns="0" rIns="0" bIns="0" rtlCol="0" anchor="ctr"/>
-          <a:lstStyle/>
-          <a:p>
-            <a:pPr algn="l" indent="0" marL="0">
-              <a:buNone/>
-            </a:pPr>
-            <a:r>
-              <a:rPr lang="en-US" sz="1500" b="1" dirty="0">
-                <a:solidFill>
-                  <a:srgbClr val="1C5A73"/>
-                </a:solidFill>
-                <a:latin typeface="Cambria" pitchFamily="34" charset="0"/>
-                <a:ea typeface="Cambria" pitchFamily="34" charset="-122"/>
-                <a:cs typeface="Cambria" pitchFamily="34" charset="-120"/>
-              </a:rPr>
-              <a:t>Vallée de l'Artibonite</a:t>
-            </a:r>
-            <a:endParaRPr lang="en-US" sz="1500" dirty="0"/>
-          </a:p>
-        </p:txBody>
-      </p:sp>
-      <p:sp>
-        <p:nvSpPr>
-          <p:cNvPr id="7" name="Text 4"/>
-          <p:cNvSpPr txBox="1"/>
-          <p:nvPr/>
-        </p:nvSpPr>
-        <p:spPr>
-          <a:xfrm>
-            <a:off x="795528" y="4041648"/>
-            <a:ext cx="3070250" cy="329184"/>
-          </a:xfrm>
-          <a:prstGeom prst="rect">
-            <a:avLst/>
-          </a:prstGeom>
-          <a:noFill/>
-          <a:ln/>
-        </p:spPr>
-        <p:txBody>
-          <a:bodyPr wrap="square" lIns="0" tIns="0" rIns="0" bIns="0" rtlCol="0" anchor="ctr"/>
-          <a:lstStyle/>
-          <a:p>
-            <a:pPr algn="l" indent="0" marL="0">
-              <a:buNone/>
-            </a:pPr>
-            <a:r>
-              <a:rPr lang="en-US" sz="1250" b="1" dirty="0">
-                <a:solidFill>
-                  <a:srgbClr val="A3701A"/>
-                </a:solidFill>
-                <a:latin typeface="Calibri" pitchFamily="34" charset="0"/>
-                <a:ea typeface="Calibri" pitchFamily="34" charset="-122"/>
-                <a:cs typeface="Calibri" pitchFamily="34" charset="-120"/>
-              </a:rPr>
-              <a:t>Le grenier à riz du pays</a:t>
-            </a:r>
-            <a:endParaRPr lang="en-US" sz="1250" dirty="0"/>
-          </a:p>
-        </p:txBody>
-      </p:sp>
-      <p:sp>
-        <p:nvSpPr>
-          <p:cNvPr id="8" name="Text 5"/>
-          <p:cNvSpPr txBox="1"/>
-          <p:nvPr/>
-        </p:nvSpPr>
-        <p:spPr>
-          <a:xfrm>
-            <a:off x="795528" y="4407408"/>
-            <a:ext cx="3070250" cy="1280160"/>
+          <p:cNvPr id="5" name="Text 2"/>
+          <p:cNvSpPr txBox="1"/>
+          <p:nvPr/>
+        </p:nvSpPr>
+        <p:spPr>
+          <a:xfrm>
+            <a:off x="6217920" y="1783080"/>
+            <a:ext cx="5379415" cy="4251960"/>
           </a:xfrm>
           <a:prstGeom prst="rect">
             <a:avLst/>
@@ -6885,16 +12583,16 @@
           <a:p>
             <a:pPr algn="l" marL="342900" indent="-342900">
               <a:lnSpc>
-                <a:spcPct val="116000"/>
+                <a:spcPct val="122000"/>
               </a:lnSpc>
               <a:spcAft>
-                <a:spcPts val="700"/>
+                <a:spcPts val="1100"/>
               </a:spcAft>
               <a:buSzPct val="100000"/>
               <a:buChar char="•"/>
             </a:pPr>
             <a:r>
-              <a:rPr lang="en-US" sz="1150" dirty="0">
+              <a:rPr lang="en-US" sz="1400" dirty="0">
                 <a:solidFill>
                   <a:srgbClr val="31424A"/>
                 </a:solidFill>
@@ -6902,23 +12600,23 @@
                 <a:ea typeface="Calibri" pitchFamily="34" charset="-122"/>
                 <a:cs typeface="Calibri" pitchFamily="34" charset="-120"/>
               </a:rPr>
-              <a:t>Le plus grand périmètre irrigué d'Haïti, alimenté par le fleuve Artibonite.</a:t>
-            </a:r>
-            <a:endParaRPr lang="en-US" sz="1150" dirty="0"/>
+              <a:t>Une grande partie des terres cultivées est en pente, où maïs, haricot et pois congo sont semés sur sol nu.</a:t>
+            </a:r>
+            <a:endParaRPr lang="en-US" sz="1400" dirty="0"/>
           </a:p>
           <a:p>
             <a:pPr algn="l" marL="342900" indent="-342900">
               <a:lnSpc>
-                <a:spcPct val="116000"/>
+                <a:spcPct val="122000"/>
               </a:lnSpc>
               <a:spcAft>
-                <a:spcPts val="700"/>
+                <a:spcPts val="1100"/>
               </a:spcAft>
               <a:buSzPct val="100000"/>
               <a:buChar char="•"/>
             </a:pPr>
             <a:r>
-              <a:rPr lang="en-US" sz="1150" dirty="0">
+              <a:rPr lang="en-US" sz="1400" dirty="0">
                 <a:solidFill>
                   <a:srgbClr val="31424A"/>
                 </a:solidFill>
@@ -6926,23 +12624,23 @@
                 <a:ea typeface="Calibri" pitchFamily="34" charset="-122"/>
                 <a:cs typeface="Calibri" pitchFamily="34" charset="-120"/>
               </a:rPr>
-              <a:t>Riz conduit en submersion : c'est le mode d'irrigation où la marge d'économie est la plus large.</a:t>
-            </a:r>
-            <a:endParaRPr lang="en-US" sz="1150" dirty="0"/>
+              <a:t>La déforestation expose les sols : chaque averse emporte de la terre fertile vers les rivières et la mer.</a:t>
+            </a:r>
+            <a:endParaRPr lang="en-US" sz="1400" dirty="0"/>
           </a:p>
           <a:p>
             <a:pPr algn="l" marL="342900" indent="-342900">
               <a:lnSpc>
-                <a:spcPct val="116000"/>
+                <a:spcPct val="122000"/>
               </a:lnSpc>
               <a:spcAft>
-                <a:spcPts val="700"/>
+                <a:spcPts val="1100"/>
               </a:spcAft>
               <a:buSzPct val="100000"/>
               <a:buChar char="•"/>
             </a:pPr>
             <a:r>
-              <a:rPr lang="en-US" sz="1150" dirty="0">
+              <a:rPr lang="en-US" sz="1400" dirty="0">
                 <a:solidFill>
                   <a:srgbClr val="31424A"/>
                 </a:solidFill>
@@ -6950,174 +12648,23 @@
                 <a:ea typeface="Calibri" pitchFamily="34" charset="-122"/>
                 <a:cs typeface="Calibri" pitchFamily="34" charset="-120"/>
               </a:rPr>
-              <a:t>Réseau de canaux ancien et partiellement dégradé, d'où des inégalités d'accès à l'eau en bout de parcours.</a:t>
-            </a:r>
-            <a:endParaRPr lang="en-US" sz="1150" dirty="0"/>
-          </a:p>
-        </p:txBody>
-      </p:sp>
-      <p:sp>
-        <p:nvSpPr>
-          <p:cNvPr id="9" name="Shape 6"/>
-          <p:cNvSpPr/>
-          <p:nvPr/>
-        </p:nvSpPr>
-        <p:spPr>
-          <a:xfrm>
-            <a:off x="4359554" y="1783080"/>
-            <a:ext cx="3472586" cy="4069080"/>
-          </a:xfrm>
-          <a:prstGeom prst="roundRect">
-            <a:avLst>
-              <a:gd name="adj" fmla="val 2633"/>
-            </a:avLst>
-          </a:prstGeom>
-          <a:solidFill>
-            <a:srgbClr val="EDF3F5"/>
-          </a:solidFill>
-          <a:ln w="9525">
-            <a:solidFill>
-              <a:srgbClr val="D6E2E7"/>
-            </a:solidFill>
-            <a:prstDash val="solid"/>
-          </a:ln>
-        </p:spPr>
-      </p:sp>
-      <p:pic>
-        <p:nvPicPr>
-          <p:cNvPr id="10" name="Image 1" descr="preencoded.png">    </p:cNvPr>
-          <p:cNvPicPr>
-            <a:picLocks noChangeAspect="1"/>
-          </p:cNvPicPr>
-          <p:nvPr/>
-        </p:nvPicPr>
-        <p:blipFill>
-          <a:blip r:embed="rId2"/>
-          <a:stretch>
-            <a:fillRect/>
-          </a:stretch>
-        </p:blipFill>
-        <p:spPr>
-          <a:xfrm>
-            <a:off x="4359554" y="1783080"/>
-            <a:ext cx="3472586" cy="1691640"/>
-          </a:xfrm>
-          <a:prstGeom prst="rect">
-            <a:avLst/>
-          </a:prstGeom>
-        </p:spPr>
-      </p:pic>
-      <p:sp>
-        <p:nvSpPr>
-          <p:cNvPr id="11" name="Text 7"/>
-          <p:cNvSpPr txBox="1"/>
-          <p:nvPr/>
-        </p:nvSpPr>
-        <p:spPr>
-          <a:xfrm>
-            <a:off x="4560722" y="3639312"/>
-            <a:ext cx="3070250" cy="384048"/>
-          </a:xfrm>
-          <a:prstGeom prst="rect">
-            <a:avLst/>
-          </a:prstGeom>
-          <a:noFill/>
-          <a:ln/>
-        </p:spPr>
-        <p:txBody>
-          <a:bodyPr wrap="square" lIns="0" tIns="0" rIns="0" bIns="0" rtlCol="0" anchor="ctr"/>
-          <a:lstStyle/>
-          <a:p>
-            <a:pPr algn="l" indent="0" marL="0">
-              <a:buNone/>
-            </a:pPr>
-            <a:r>
-              <a:rPr lang="en-US" sz="1500" b="1" dirty="0">
-                <a:solidFill>
-                  <a:srgbClr val="1C5A73"/>
-                </a:solidFill>
-                <a:latin typeface="Cambria" pitchFamily="34" charset="0"/>
-                <a:ea typeface="Cambria" pitchFamily="34" charset="-122"/>
-                <a:cs typeface="Cambria" pitchFamily="34" charset="-120"/>
-              </a:rPr>
-              <a:t>Plateau Central</a:t>
-            </a:r>
-            <a:endParaRPr lang="en-US" sz="1500" dirty="0"/>
-          </a:p>
-        </p:txBody>
-      </p:sp>
-      <p:sp>
-        <p:nvSpPr>
-          <p:cNvPr id="12" name="Text 8"/>
-          <p:cNvSpPr txBox="1"/>
-          <p:nvPr/>
-        </p:nvSpPr>
-        <p:spPr>
-          <a:xfrm>
-            <a:off x="4560722" y="4041648"/>
-            <a:ext cx="3070250" cy="329184"/>
-          </a:xfrm>
-          <a:prstGeom prst="rect">
-            <a:avLst/>
-          </a:prstGeom>
-          <a:noFill/>
-          <a:ln/>
-        </p:spPr>
-        <p:txBody>
-          <a:bodyPr wrap="square" lIns="0" tIns="0" rIns="0" bIns="0" rtlCol="0" anchor="ctr"/>
-          <a:lstStyle/>
-          <a:p>
-            <a:pPr algn="l" indent="0" marL="0">
-              <a:buNone/>
-            </a:pPr>
-            <a:r>
-              <a:rPr lang="en-US" sz="1250" b="1" dirty="0">
-                <a:solidFill>
-                  <a:srgbClr val="A3701A"/>
-                </a:solidFill>
-                <a:latin typeface="Calibri" pitchFamily="34" charset="0"/>
-                <a:ea typeface="Calibri" pitchFamily="34" charset="-122"/>
-                <a:cs typeface="Calibri" pitchFamily="34" charset="-120"/>
-              </a:rPr>
-              <a:t>Vivrier et élevage</a:t>
-            </a:r>
-            <a:endParaRPr lang="en-US" sz="1250" dirty="0"/>
-          </a:p>
-        </p:txBody>
-      </p:sp>
-      <p:sp>
-        <p:nvSpPr>
-          <p:cNvPr id="13" name="Text 9"/>
-          <p:cNvSpPr txBox="1"/>
-          <p:nvPr/>
-        </p:nvSpPr>
-        <p:spPr>
-          <a:xfrm>
-            <a:off x="4560722" y="4407408"/>
-            <a:ext cx="3070250" cy="1280160"/>
-          </a:xfrm>
-          <a:prstGeom prst="rect">
-            <a:avLst/>
-          </a:prstGeom>
-          <a:noFill/>
-          <a:ln/>
-        </p:spPr>
-        <p:txBody>
-          <a:bodyPr wrap="square" lIns="0" tIns="0" rIns="0" bIns="0" rtlCol="0" anchor="t"/>
-          <a:lstStyle/>
+              <a:t>Il pleut assez sur l'année, mais l'eau ruisselle au lieu de s'infiltrer, puis manque en saison sèche.</a:t>
+            </a:r>
+            <a:endParaRPr lang="en-US" sz="1400" dirty="0"/>
+          </a:p>
           <a:p>
             <a:pPr algn="l" marL="342900" indent="-342900">
               <a:lnSpc>
-                <a:spcPct val="116000"/>
+                <a:spcPct val="122000"/>
               </a:lnSpc>
               <a:spcAft>
-                <a:spcPts val="700"/>
+                <a:spcPts val="1100"/>
               </a:spcAft>
               <a:buSzPct val="100000"/>
               <a:buChar char="•"/>
             </a:pPr>
             <a:r>
-              <a:rPr lang="en-US" sz="1150" dirty="0">
+              <a:rPr lang="en-US" sz="1400" dirty="0">
                 <a:solidFill>
                   <a:srgbClr val="31424A"/>
                 </a:solidFill>
@@ -7125,23 +12672,23 @@
                 <a:ea typeface="Calibri" pitchFamily="34" charset="-122"/>
                 <a:cs typeface="Calibri" pitchFamily="34" charset="-120"/>
               </a:rPr>
-              <a:t>Maïs, haricot, manioc et sorgho conduits presque entièrement en pluvial.</a:t>
-            </a:r>
-            <a:endParaRPr lang="en-US" sz="1150" dirty="0"/>
+              <a:t>Des haies et des arbres comme le Paulownia tiennent les sols tout en produisant du bois et du miel.</a:t>
+            </a:r>
+            <a:endParaRPr lang="en-US" sz="1400" dirty="0"/>
           </a:p>
           <a:p>
             <a:pPr algn="l" marL="342900" indent="-342900">
               <a:lnSpc>
-                <a:spcPct val="116000"/>
+                <a:spcPct val="122000"/>
               </a:lnSpc>
               <a:spcAft>
-                <a:spcPts val="700"/>
+                <a:spcPts val="1100"/>
               </a:spcAft>
               <a:buSzPct val="100000"/>
               <a:buChar char="•"/>
             </a:pPr>
             <a:r>
-              <a:rPr lang="en-US" sz="1150" dirty="0">
+              <a:rPr lang="en-US" sz="1400" dirty="0">
                 <a:solidFill>
                   <a:srgbClr val="31424A"/>
                 </a:solidFill>
@@ -7149,262 +12696,15 @@
                 <a:ea typeface="Calibri" pitchFamily="34" charset="-122"/>
                 <a:cs typeface="Calibri" pitchFamily="34" charset="-120"/>
               </a:rPr>
-              <a:t>Saison sèche marquée : c'est exactement la séquence que l'hydro-rétenteur est fait pour franchir.</a:t>
-            </a:r>
-            <a:endParaRPr lang="en-US" sz="1150" dirty="0"/>
-          </a:p>
-          <a:p>
-            <a:pPr algn="l" marL="342900" indent="-342900">
-              <a:lnSpc>
-                <a:spcPct val="116000"/>
-              </a:lnSpc>
-              <a:spcAft>
-                <a:spcPts val="700"/>
-              </a:spcAft>
-              <a:buSzPct val="100000"/>
-              <a:buChar char="•"/>
-            </a:pPr>
-            <a:r>
-              <a:rPr lang="en-US" sz="1150" dirty="0">
-                <a:solidFill>
-                  <a:srgbClr val="31424A"/>
-                </a:solidFill>
-                <a:latin typeface="Calibri" pitchFamily="34" charset="0"/>
-                <a:ea typeface="Calibri" pitchFamily="34" charset="-122"/>
-                <a:cs typeface="Calibri" pitchFamily="34" charset="-120"/>
-              </a:rPr>
-              <a:t>Organisations paysannes structurées, capables de porter un essai groupé sur plusieurs parcelles.</a:t>
-            </a:r>
-            <a:endParaRPr lang="en-US" sz="1150" dirty="0"/>
-          </a:p>
-        </p:txBody>
-      </p:sp>
-      <p:sp>
-        <p:nvSpPr>
-          <p:cNvPr id="14" name="Shape 10"/>
-          <p:cNvSpPr/>
-          <p:nvPr/>
-        </p:nvSpPr>
-        <p:spPr>
-          <a:xfrm>
-            <a:off x="8124749" y="1783080"/>
-            <a:ext cx="3472586" cy="4069080"/>
-          </a:xfrm>
-          <a:prstGeom prst="roundRect">
-            <a:avLst>
-              <a:gd name="adj" fmla="val 2633"/>
-            </a:avLst>
-          </a:prstGeom>
-          <a:solidFill>
-            <a:srgbClr val="EDF3F5"/>
-          </a:solidFill>
-          <a:ln w="9525">
-            <a:solidFill>
-              <a:srgbClr val="D6E2E7"/>
-            </a:solidFill>
-            <a:prstDash val="solid"/>
-          </a:ln>
-        </p:spPr>
-      </p:sp>
-      <p:pic>
-        <p:nvPicPr>
-          <p:cNvPr id="15" name="Image 2" descr="preencoded.png">    </p:cNvPr>
-          <p:cNvPicPr>
-            <a:picLocks noChangeAspect="1"/>
-          </p:cNvPicPr>
-          <p:nvPr/>
-        </p:nvPicPr>
-        <p:blipFill>
-          <a:blip r:embed="rId3"/>
-          <a:stretch>
-            <a:fillRect/>
-          </a:stretch>
-        </p:blipFill>
-        <p:spPr>
-          <a:xfrm>
-            <a:off x="8124749" y="1783080"/>
-            <a:ext cx="3472586" cy="1691640"/>
-          </a:xfrm>
-          <a:prstGeom prst="rect">
-            <a:avLst/>
-          </a:prstGeom>
-        </p:spPr>
-      </p:pic>
-      <p:sp>
-        <p:nvSpPr>
-          <p:cNvPr id="16" name="Text 11"/>
-          <p:cNvSpPr txBox="1"/>
-          <p:nvPr/>
-        </p:nvSpPr>
-        <p:spPr>
-          <a:xfrm>
-            <a:off x="8325917" y="3639312"/>
-            <a:ext cx="3070250" cy="384048"/>
-          </a:xfrm>
-          <a:prstGeom prst="rect">
-            <a:avLst/>
-          </a:prstGeom>
-          <a:noFill/>
-          <a:ln/>
-        </p:spPr>
-        <p:txBody>
-          <a:bodyPr wrap="square" lIns="0" tIns="0" rIns="0" bIns="0" rtlCol="0" anchor="ctr"/>
-          <a:lstStyle/>
-          <a:p>
-            <a:pPr algn="l" indent="0" marL="0">
-              <a:buNone/>
-            </a:pPr>
-            <a:r>
-              <a:rPr lang="en-US" sz="1500" b="1" dirty="0">
-                <a:solidFill>
-                  <a:srgbClr val="1C5A73"/>
-                </a:solidFill>
-                <a:latin typeface="Cambria" pitchFamily="34" charset="0"/>
-                <a:ea typeface="Cambria" pitchFamily="34" charset="-122"/>
-                <a:cs typeface="Cambria" pitchFamily="34" charset="-120"/>
-              </a:rPr>
-              <a:t>Grand Sud — Grand'Anse</a:t>
-            </a:r>
-            <a:endParaRPr lang="en-US" sz="1500" dirty="0"/>
-          </a:p>
-        </p:txBody>
-      </p:sp>
-      <p:sp>
-        <p:nvSpPr>
-          <p:cNvPr id="17" name="Text 12"/>
-          <p:cNvSpPr txBox="1"/>
-          <p:nvPr/>
-        </p:nvSpPr>
-        <p:spPr>
-          <a:xfrm>
-            <a:off x="8325917" y="4041648"/>
-            <a:ext cx="3070250" cy="329184"/>
-          </a:xfrm>
-          <a:prstGeom prst="rect">
-            <a:avLst/>
-          </a:prstGeom>
-          <a:noFill/>
-          <a:ln/>
-        </p:spPr>
-        <p:txBody>
-          <a:bodyPr wrap="square" lIns="0" tIns="0" rIns="0" bIns="0" rtlCol="0" anchor="ctr"/>
-          <a:lstStyle/>
-          <a:p>
-            <a:pPr algn="l" indent="0" marL="0">
-              <a:buNone/>
-            </a:pPr>
-            <a:r>
-              <a:rPr lang="en-US" sz="1250" b="1" dirty="0">
-                <a:solidFill>
-                  <a:srgbClr val="A3701A"/>
-                </a:solidFill>
-                <a:latin typeface="Calibri" pitchFamily="34" charset="0"/>
-                <a:ea typeface="Calibri" pitchFamily="34" charset="-122"/>
-                <a:cs typeface="Calibri" pitchFamily="34" charset="-120"/>
-              </a:rPr>
-              <a:t>Café, cacao, mangue, vétiver</a:t>
-            </a:r>
-            <a:endParaRPr lang="en-US" sz="1250" dirty="0"/>
-          </a:p>
-        </p:txBody>
-      </p:sp>
-      <p:sp>
-        <p:nvSpPr>
-          <p:cNvPr id="18" name="Text 13"/>
-          <p:cNvSpPr txBox="1"/>
-          <p:nvPr/>
-        </p:nvSpPr>
-        <p:spPr>
-          <a:xfrm>
-            <a:off x="8325917" y="4407408"/>
-            <a:ext cx="3070250" cy="1280160"/>
-          </a:xfrm>
-          <a:prstGeom prst="rect">
-            <a:avLst/>
-          </a:prstGeom>
-          <a:noFill/>
-          <a:ln/>
-        </p:spPr>
-        <p:txBody>
-          <a:bodyPr wrap="square" lIns="0" tIns="0" rIns="0" bIns="0" rtlCol="0" anchor="t"/>
-          <a:lstStyle/>
-          <a:p>
-            <a:pPr algn="l" marL="342900" indent="-342900">
-              <a:lnSpc>
-                <a:spcPct val="116000"/>
-              </a:lnSpc>
-              <a:spcAft>
-                <a:spcPts val="700"/>
-              </a:spcAft>
-              <a:buSzPct val="100000"/>
-              <a:buChar char="•"/>
-            </a:pPr>
-            <a:r>
-              <a:rPr lang="en-US" sz="1150" dirty="0">
-                <a:solidFill>
-                  <a:srgbClr val="31424A"/>
-                </a:solidFill>
-                <a:latin typeface="Calibri" pitchFamily="34" charset="0"/>
-                <a:ea typeface="Calibri" pitchFamily="34" charset="-122"/>
-                <a:cs typeface="Calibri" pitchFamily="34" charset="-120"/>
-              </a:rPr>
-              <a:t>Cultures de rente destinées à l'export, seules à supporter une prime de certification biologique.</a:t>
-            </a:r>
-            <a:endParaRPr lang="en-US" sz="1150" dirty="0"/>
-          </a:p>
-          <a:p>
-            <a:pPr algn="l" marL="342900" indent="-342900">
-              <a:lnSpc>
-                <a:spcPct val="116000"/>
-              </a:lnSpc>
-              <a:spcAft>
-                <a:spcPts val="700"/>
-              </a:spcAft>
-              <a:buSzPct val="100000"/>
-              <a:buChar char="•"/>
-            </a:pPr>
-            <a:r>
-              <a:rPr lang="en-US" sz="1150" dirty="0">
-                <a:solidFill>
-                  <a:srgbClr val="31424A"/>
-                </a:solidFill>
-                <a:latin typeface="Calibri" pitchFamily="34" charset="0"/>
-                <a:ea typeface="Calibri" pitchFamily="34" charset="-122"/>
-                <a:cs typeface="Calibri" pitchFamily="34" charset="-120"/>
-              </a:rPr>
-              <a:t>Versants pentus et fortement érodés : chaque averse emporte du sol si rien ne le retient.</a:t>
-            </a:r>
-            <a:endParaRPr lang="en-US" sz="1150" dirty="0"/>
-          </a:p>
-          <a:p>
-            <a:pPr algn="l" marL="342900" indent="-342900">
-              <a:lnSpc>
-                <a:spcPct val="116000"/>
-              </a:lnSpc>
-              <a:spcAft>
-                <a:spcPts val="700"/>
-              </a:spcAft>
-              <a:buSzPct val="100000"/>
-              <a:buChar char="•"/>
-            </a:pPr>
-            <a:r>
-              <a:rPr lang="en-US" sz="1150" dirty="0">
-                <a:solidFill>
-                  <a:srgbClr val="31424A"/>
-                </a:solidFill>
-                <a:latin typeface="Calibri" pitchFamily="34" charset="0"/>
-                <a:ea typeface="Calibri" pitchFamily="34" charset="-122"/>
-                <a:cs typeface="Calibri" pitchFamily="34" charset="-120"/>
-              </a:rPr>
-              <a:t>Zone exposée aux cyclones, où la reprise des jeunes plants après sinistre est un enjeu récurrent.</a:t>
-            </a:r>
-            <a:endParaRPr lang="en-US" sz="1150" dirty="0"/>
-          </a:p>
-        </p:txBody>
-      </p:sp>
-      <p:sp>
-        <p:nvSpPr>
-          <p:cNvPr id="19" name="Text 14"/>
+              <a:t>Un hydro-rétenteur au pied des plants garde l'eau de pluie là où les racines peuvent la prendre.</a:t>
+            </a:r>
+            <a:endParaRPr lang="en-US" sz="1400" dirty="0"/>
+          </a:p>
+        </p:txBody>
+      </p:sp>
+      <p:sp>
+        <p:nvSpPr>
+          <p:cNvPr id="6" name="Text 3"/>
           <p:cNvSpPr txBox="1"/>
           <p:nvPr/>
         </p:nvSpPr>
@@ -7445,7 +12745,7 @@
       </p:sp>
       <p:sp>
         <p:nvSpPr>
-          <p:cNvPr id="20" name="Text 15"/>
+          <p:cNvPr id="7" name="Text 4"/>
           <p:cNvSpPr txBox="1"/>
           <p:nvPr/>
         </p:nvSpPr>
@@ -7549,7 +12849,7 @@
                 <a:ea typeface="Calibri" pitchFamily="34" charset="-122"/>
                 <a:cs typeface="Calibri" pitchFamily="34" charset="-120"/>
               </a:rPr>
-              <a:t>COMMENT NOUS PROCÉDONS</a:t>
+              <a:t>Potentiel de rendement</a:t>
             </a:r>
             <a:endParaRPr lang="en-US" sz="1150" dirty="0"/>
           </a:p>
@@ -7588,26 +12888,42 @@
                 <a:ea typeface="Cambria" pitchFamily="34" charset="-122"/>
                 <a:cs typeface="Cambria" pitchFamily="34" charset="-120"/>
               </a:rPr>
-              <a:t>Un déploiement par étapes, mesuré à chaque palier</a:t>
+              <a:t>Gain de rendement attendu par culture</a:t>
             </a:r>
             <a:endParaRPr lang="en-US" sz="3000" dirty="0"/>
           </a:p>
         </p:txBody>
       </p:sp>
-      <p:sp>
-        <p:nvSpPr>
-          <p:cNvPr id="4" name="Shape 2"/>
+      <p:graphicFrame>
+        <p:nvGraphicFramePr>
+          <p:cNvPr id="4" name="Chart 0" descr=""/>
+          <p:cNvGraphicFramePr/>
+          <p:nvPr/>
+        </p:nvGraphicFramePr>
+        <p:xfrm>
+          <a:off x="594360" y="1783080"/>
+          <a:ext cx="7360920" cy="3977640"/>
+        </p:xfrm>
+        <a:graphic xmlns:a="http://schemas.openxmlformats.org/drawingml/2006/main">
+          <a:graphicData uri="http://schemas.openxmlformats.org/drawingml/2006/chart">
+            <c:chart xmlns:c="http://schemas.openxmlformats.org/drawingml/2006/chart" r:id="rId1"/>
+          </a:graphicData>
+        </a:graphic>
+      </p:graphicFrame>
+      <p:sp>
+        <p:nvSpPr>
+          <p:cNvPr id="5" name="Shape 2"/>
           <p:cNvSpPr/>
           <p:nvPr/>
         </p:nvSpPr>
         <p:spPr>
           <a:xfrm>
-            <a:off x="594360" y="1874520"/>
-            <a:ext cx="2545004" cy="2834640"/>
+            <a:off x="8275320" y="1783080"/>
+            <a:ext cx="3291840" cy="3977640"/>
           </a:xfrm>
           <a:prstGeom prst="roundRect">
             <a:avLst>
-              <a:gd name="adj" fmla="val 3593"/>
+              <a:gd name="adj" fmla="val 2778"/>
             </a:avLst>
           </a:prstGeom>
           <a:solidFill>
@@ -7623,34 +12939,14 @@
       </p:sp>
       <p:sp>
         <p:nvSpPr>
-          <p:cNvPr id="5" name="Shape 3"/>
-          <p:cNvSpPr/>
-          <p:nvPr/>
-        </p:nvSpPr>
-        <p:spPr>
-          <a:xfrm>
-            <a:off x="822960" y="2103120"/>
-            <a:ext cx="566928" cy="566928"/>
-          </a:xfrm>
-          <a:prstGeom prst="ellipse">
-            <a:avLst/>
-          </a:prstGeom>
-          <a:solidFill>
-            <a:srgbClr val="1C5A73"/>
-          </a:solidFill>
-          <a:ln/>
-        </p:spPr>
-      </p:sp>
-      <p:sp>
-        <p:nvSpPr>
-          <p:cNvPr id="6" name="Text 4"/>
-          <p:cNvSpPr txBox="1"/>
-          <p:nvPr/>
-        </p:nvSpPr>
-        <p:spPr>
-          <a:xfrm>
-            <a:off x="822960" y="2103120"/>
-            <a:ext cx="566928" cy="566928"/>
+          <p:cNvPr id="6" name="Text 3"/>
+          <p:cNvSpPr txBox="1"/>
+          <p:nvPr/>
+        </p:nvSpPr>
+        <p:spPr>
+          <a:xfrm>
+            <a:off x="8503920" y="2011680"/>
+            <a:ext cx="2834640" cy="457200"/>
           </a:xfrm>
           <a:prstGeom prst="rect">
             <a:avLst/>
@@ -7662,616 +12958,34 @@
           <a:bodyPr wrap="square" lIns="0" tIns="0" rIns="0" bIns="0" rtlCol="0" anchor="ctr"/>
           <a:lstStyle/>
           <a:p>
-            <a:pPr algn="ctr" indent="0" marL="0">
-              <a:buNone/>
-            </a:pPr>
-            <a:r>
-              <a:rPr lang="en-US" sz="1600" b="1" dirty="0">
-                <a:solidFill>
-                  <a:srgbClr val="FFFFFF"/>
+            <a:pPr algn="l" indent="0" marL="0">
+              <a:buNone/>
+            </a:pPr>
+            <a:r>
+              <a:rPr lang="en-US" sz="1300" b="1" dirty="0">
+                <a:solidFill>
+                  <a:srgbClr val="1C5A73"/>
                 </a:solidFill>
                 <a:latin typeface="Cambria" pitchFamily="34" charset="0"/>
                 <a:ea typeface="Cambria" pitchFamily="34" charset="-122"/>
                 <a:cs typeface="Cambria" pitchFamily="34" charset="-120"/>
               </a:rPr>
-              <a:t>1</a:t>
-            </a:r>
-            <a:endParaRPr lang="en-US" sz="1600" dirty="0"/>
-          </a:p>
-        </p:txBody>
-      </p:sp>
-      <p:sp>
-        <p:nvSpPr>
-          <p:cNvPr id="7" name="Text 5"/>
-          <p:cNvSpPr txBox="1"/>
-          <p:nvPr/>
-        </p:nvSpPr>
-        <p:spPr>
-          <a:xfrm>
-            <a:off x="822960" y="2788920"/>
-            <a:ext cx="2087804" cy="457200"/>
-          </a:xfrm>
-          <a:prstGeom prst="rect">
-            <a:avLst/>
-          </a:prstGeom>
-          <a:noFill/>
-          <a:ln/>
-        </p:spPr>
-        <p:txBody>
-          <a:bodyPr wrap="square" lIns="0" tIns="0" rIns="0" bIns="0" rtlCol="0" anchor="ctr"/>
-          <a:lstStyle/>
-          <a:p>
-            <a:pPr algn="l" indent="0" marL="0">
-              <a:buNone/>
-            </a:pPr>
-            <a:r>
-              <a:rPr lang="en-US" sz="1400" b="1" dirty="0">
-                <a:solidFill>
-                  <a:srgbClr val="1C5A73"/>
-                </a:solidFill>
-                <a:latin typeface="Cambria" pitchFamily="34" charset="0"/>
-                <a:ea typeface="Cambria" pitchFamily="34" charset="-122"/>
-                <a:cs typeface="Cambria" pitchFamily="34" charset="-120"/>
-              </a:rPr>
-              <a:t>Diagnostic</a:t>
-            </a:r>
-            <a:endParaRPr lang="en-US" sz="1400" dirty="0"/>
-          </a:p>
-        </p:txBody>
-      </p:sp>
-      <p:sp>
-        <p:nvSpPr>
-          <p:cNvPr id="8" name="Text 6"/>
-          <p:cNvSpPr txBox="1"/>
-          <p:nvPr/>
-        </p:nvSpPr>
-        <p:spPr>
-          <a:xfrm>
-            <a:off x="822960" y="3291840"/>
-            <a:ext cx="2087804" cy="1234440"/>
-          </a:xfrm>
-          <a:prstGeom prst="rect">
-            <a:avLst/>
-          </a:prstGeom>
-          <a:noFill/>
-          <a:ln/>
-        </p:spPr>
-        <p:txBody>
-          <a:bodyPr wrap="square" lIns="0" tIns="0" rIns="0" bIns="0" rtlCol="0" anchor="t"/>
-          <a:lstStyle/>
-          <a:p>
-            <a:pPr algn="l" indent="0" marL="0">
-              <a:lnSpc>
-                <a:spcPct val="120000"/>
-              </a:lnSpc>
-              <a:buNone/>
-            </a:pPr>
-            <a:r>
-              <a:rPr lang="en-US" sz="1200" dirty="0">
-                <a:solidFill>
-                  <a:srgbClr val="31424A"/>
-                </a:solidFill>
-                <a:latin typeface="Calibri" pitchFamily="34" charset="0"/>
-                <a:ea typeface="Calibri" pitchFamily="34" charset="-122"/>
-                <a:cs typeface="Calibri" pitchFamily="34" charset="-120"/>
-              </a:rPr>
-              <a:t>Analyse du sol, de la pente et de la culture. Aucun engagement à ce stade.</a:t>
-            </a:r>
-            <a:endParaRPr lang="en-US" sz="1200" dirty="0"/>
-          </a:p>
-        </p:txBody>
-      </p:sp>
-      <p:sp>
-        <p:nvSpPr>
-          <p:cNvPr id="9" name="Shape 7"/>
-          <p:cNvSpPr/>
-          <p:nvPr/>
-        </p:nvSpPr>
-        <p:spPr>
-          <a:xfrm>
-            <a:off x="3413684" y="1874520"/>
-            <a:ext cx="2545004" cy="2834640"/>
-          </a:xfrm>
-          <a:prstGeom prst="roundRect">
-            <a:avLst>
-              <a:gd name="adj" fmla="val 3593"/>
-            </a:avLst>
-          </a:prstGeom>
-          <a:solidFill>
-            <a:srgbClr val="EDF3F5"/>
-          </a:solidFill>
-          <a:ln w="9525">
-            <a:solidFill>
-              <a:srgbClr val="D6E2E7"/>
-            </a:solidFill>
-            <a:prstDash val="solid"/>
-          </a:ln>
-        </p:spPr>
-      </p:sp>
-      <p:sp>
-        <p:nvSpPr>
-          <p:cNvPr id="10" name="Shape 8"/>
-          <p:cNvSpPr/>
-          <p:nvPr/>
-        </p:nvSpPr>
-        <p:spPr>
-          <a:xfrm>
-            <a:off x="3642284" y="2103120"/>
-            <a:ext cx="566928" cy="566928"/>
-          </a:xfrm>
-          <a:prstGeom prst="ellipse">
-            <a:avLst/>
-          </a:prstGeom>
-          <a:solidFill>
-            <a:srgbClr val="1C5A73"/>
-          </a:solidFill>
-          <a:ln/>
-        </p:spPr>
-      </p:sp>
-      <p:sp>
-        <p:nvSpPr>
-          <p:cNvPr id="11" name="Text 9"/>
-          <p:cNvSpPr txBox="1"/>
-          <p:nvPr/>
-        </p:nvSpPr>
-        <p:spPr>
-          <a:xfrm>
-            <a:off x="3642284" y="2103120"/>
-            <a:ext cx="566928" cy="566928"/>
-          </a:xfrm>
-          <a:prstGeom prst="rect">
-            <a:avLst/>
-          </a:prstGeom>
-          <a:noFill/>
-          <a:ln/>
-        </p:spPr>
-        <p:txBody>
-          <a:bodyPr wrap="square" lIns="0" tIns="0" rIns="0" bIns="0" rtlCol="0" anchor="ctr"/>
-          <a:lstStyle/>
-          <a:p>
-            <a:pPr algn="ctr" indent="0" marL="0">
-              <a:buNone/>
-            </a:pPr>
-            <a:r>
-              <a:rPr lang="en-US" sz="1600" b="1" dirty="0">
-                <a:solidFill>
-                  <a:srgbClr val="FFFFFF"/>
-                </a:solidFill>
-                <a:latin typeface="Cambria" pitchFamily="34" charset="0"/>
-                <a:ea typeface="Cambria" pitchFamily="34" charset="-122"/>
-                <a:cs typeface="Cambria" pitchFamily="34" charset="-120"/>
-              </a:rPr>
-              <a:t>2</a:t>
-            </a:r>
-            <a:endParaRPr lang="en-US" sz="1600" dirty="0"/>
-          </a:p>
-        </p:txBody>
-      </p:sp>
-      <p:sp>
-        <p:nvSpPr>
-          <p:cNvPr id="12" name="Text 10"/>
-          <p:cNvSpPr txBox="1"/>
-          <p:nvPr/>
-        </p:nvSpPr>
-        <p:spPr>
-          <a:xfrm>
-            <a:off x="3642284" y="2788920"/>
-            <a:ext cx="2087804" cy="457200"/>
-          </a:xfrm>
-          <a:prstGeom prst="rect">
-            <a:avLst/>
-          </a:prstGeom>
-          <a:noFill/>
-          <a:ln/>
-        </p:spPr>
-        <p:txBody>
-          <a:bodyPr wrap="square" lIns="0" tIns="0" rIns="0" bIns="0" rtlCol="0" anchor="ctr"/>
-          <a:lstStyle/>
-          <a:p>
-            <a:pPr algn="l" indent="0" marL="0">
-              <a:buNone/>
-            </a:pPr>
-            <a:r>
-              <a:rPr lang="en-US" sz="1400" b="1" dirty="0">
-                <a:solidFill>
-                  <a:srgbClr val="1C5A73"/>
-                </a:solidFill>
-                <a:latin typeface="Cambria" pitchFamily="34" charset="0"/>
-                <a:ea typeface="Cambria" pitchFamily="34" charset="-122"/>
-                <a:cs typeface="Cambria" pitchFamily="34" charset="-120"/>
-              </a:rPr>
-              <a:t>Parcelle témoin</a:t>
-            </a:r>
-            <a:endParaRPr lang="en-US" sz="1400" dirty="0"/>
-          </a:p>
-        </p:txBody>
-      </p:sp>
-      <p:sp>
-        <p:nvSpPr>
-          <p:cNvPr id="13" name="Text 11"/>
-          <p:cNvSpPr txBox="1"/>
-          <p:nvPr/>
-        </p:nvSpPr>
-        <p:spPr>
-          <a:xfrm>
-            <a:off x="3642284" y="3291840"/>
-            <a:ext cx="2087804" cy="1234440"/>
-          </a:xfrm>
-          <a:prstGeom prst="rect">
-            <a:avLst/>
-          </a:prstGeom>
-          <a:noFill/>
-          <a:ln/>
-        </p:spPr>
-        <p:txBody>
-          <a:bodyPr wrap="square" lIns="0" tIns="0" rIns="0" bIns="0" rtlCol="0" anchor="t"/>
-          <a:lstStyle/>
-          <a:p>
-            <a:pPr algn="l" indent="0" marL="0">
-              <a:lnSpc>
-                <a:spcPct val="120000"/>
-              </a:lnSpc>
-              <a:buNone/>
-            </a:pPr>
-            <a:r>
-              <a:rPr lang="en-US" sz="1200" dirty="0">
-                <a:solidFill>
-                  <a:srgbClr val="31424A"/>
-                </a:solidFill>
-                <a:latin typeface="Calibri" pitchFamily="34" charset="0"/>
-                <a:ea typeface="Calibri" pitchFamily="34" charset="-122"/>
-                <a:cs typeface="Calibri" pitchFamily="34" charset="-120"/>
-              </a:rPr>
-              <a:t>Un essai comparatif sur une parcelle, avec parcelle témoin conduite à l'identique.</a:t>
-            </a:r>
-            <a:endParaRPr lang="en-US" sz="1200" dirty="0"/>
-          </a:p>
-        </p:txBody>
-      </p:sp>
-      <p:sp>
-        <p:nvSpPr>
-          <p:cNvPr id="14" name="Shape 12"/>
-          <p:cNvSpPr/>
-          <p:nvPr/>
-        </p:nvSpPr>
-        <p:spPr>
-          <a:xfrm>
-            <a:off x="6233008" y="1874520"/>
-            <a:ext cx="2545004" cy="2834640"/>
-          </a:xfrm>
-          <a:prstGeom prst="roundRect">
-            <a:avLst>
-              <a:gd name="adj" fmla="val 3593"/>
-            </a:avLst>
-          </a:prstGeom>
-          <a:solidFill>
-            <a:srgbClr val="EDF3F5"/>
-          </a:solidFill>
-          <a:ln w="9525">
-            <a:solidFill>
-              <a:srgbClr val="D6E2E7"/>
-            </a:solidFill>
-            <a:prstDash val="solid"/>
-          </a:ln>
-        </p:spPr>
-      </p:sp>
-      <p:sp>
-        <p:nvSpPr>
-          <p:cNvPr id="15" name="Shape 13"/>
-          <p:cNvSpPr/>
-          <p:nvPr/>
-        </p:nvSpPr>
-        <p:spPr>
-          <a:xfrm>
-            <a:off x="6461608" y="2103120"/>
-            <a:ext cx="566928" cy="566928"/>
-          </a:xfrm>
-          <a:prstGeom prst="ellipse">
-            <a:avLst/>
-          </a:prstGeom>
-          <a:solidFill>
-            <a:srgbClr val="1C5A73"/>
-          </a:solidFill>
-          <a:ln/>
-        </p:spPr>
-      </p:sp>
-      <p:sp>
-        <p:nvSpPr>
-          <p:cNvPr id="16" name="Text 14"/>
-          <p:cNvSpPr txBox="1"/>
-          <p:nvPr/>
-        </p:nvSpPr>
-        <p:spPr>
-          <a:xfrm>
-            <a:off x="6461608" y="2103120"/>
-            <a:ext cx="566928" cy="566928"/>
-          </a:xfrm>
-          <a:prstGeom prst="rect">
-            <a:avLst/>
-          </a:prstGeom>
-          <a:noFill/>
-          <a:ln/>
-        </p:spPr>
-        <p:txBody>
-          <a:bodyPr wrap="square" lIns="0" tIns="0" rIns="0" bIns="0" rtlCol="0" anchor="ctr"/>
-          <a:lstStyle/>
-          <a:p>
-            <a:pPr algn="ctr" indent="0" marL="0">
-              <a:buNone/>
-            </a:pPr>
-            <a:r>
-              <a:rPr lang="en-US" sz="1600" b="1" dirty="0">
-                <a:solidFill>
-                  <a:srgbClr val="FFFFFF"/>
-                </a:solidFill>
-                <a:latin typeface="Cambria" pitchFamily="34" charset="0"/>
-                <a:ea typeface="Cambria" pitchFamily="34" charset="-122"/>
-                <a:cs typeface="Cambria" pitchFamily="34" charset="-120"/>
-              </a:rPr>
-              <a:t>3</a:t>
-            </a:r>
-            <a:endParaRPr lang="en-US" sz="1600" dirty="0"/>
-          </a:p>
-        </p:txBody>
-      </p:sp>
-      <p:sp>
-        <p:nvSpPr>
-          <p:cNvPr id="17" name="Text 15"/>
-          <p:cNvSpPr txBox="1"/>
-          <p:nvPr/>
-        </p:nvSpPr>
-        <p:spPr>
-          <a:xfrm>
-            <a:off x="6461608" y="2788920"/>
-            <a:ext cx="2087804" cy="457200"/>
-          </a:xfrm>
-          <a:prstGeom prst="rect">
-            <a:avLst/>
-          </a:prstGeom>
-          <a:noFill/>
-          <a:ln/>
-        </p:spPr>
-        <p:txBody>
-          <a:bodyPr wrap="square" lIns="0" tIns="0" rIns="0" bIns="0" rtlCol="0" anchor="ctr"/>
-          <a:lstStyle/>
-          <a:p>
-            <a:pPr algn="l" indent="0" marL="0">
-              <a:buNone/>
-            </a:pPr>
-            <a:r>
-              <a:rPr lang="en-US" sz="1400" b="1" dirty="0">
-                <a:solidFill>
-                  <a:srgbClr val="1C5A73"/>
-                </a:solidFill>
-                <a:latin typeface="Cambria" pitchFamily="34" charset="0"/>
-                <a:ea typeface="Cambria" pitchFamily="34" charset="-122"/>
-                <a:cs typeface="Cambria" pitchFamily="34" charset="-120"/>
-              </a:rPr>
-              <a:t>Mesure</a:t>
-            </a:r>
-            <a:endParaRPr lang="en-US" sz="1400" dirty="0"/>
-          </a:p>
-        </p:txBody>
-      </p:sp>
-      <p:sp>
-        <p:nvSpPr>
-          <p:cNvPr id="18" name="Text 16"/>
-          <p:cNvSpPr txBox="1"/>
-          <p:nvPr/>
-        </p:nvSpPr>
-        <p:spPr>
-          <a:xfrm>
-            <a:off x="6461608" y="3291840"/>
-            <a:ext cx="2087804" cy="1234440"/>
-          </a:xfrm>
-          <a:prstGeom prst="rect">
-            <a:avLst/>
-          </a:prstGeom>
-          <a:noFill/>
-          <a:ln/>
-        </p:spPr>
-        <p:txBody>
-          <a:bodyPr wrap="square" lIns="0" tIns="0" rIns="0" bIns="0" rtlCol="0" anchor="t"/>
-          <a:lstStyle/>
-          <a:p>
-            <a:pPr algn="l" indent="0" marL="0">
-              <a:lnSpc>
-                <a:spcPct val="120000"/>
-              </a:lnSpc>
-              <a:buNone/>
-            </a:pPr>
-            <a:r>
-              <a:rPr lang="en-US" sz="1200" dirty="0">
-                <a:solidFill>
-                  <a:srgbClr val="31424A"/>
-                </a:solidFill>
-                <a:latin typeface="Calibri" pitchFamily="34" charset="0"/>
-                <a:ea typeface="Calibri" pitchFamily="34" charset="-122"/>
-                <a:cs typeface="Calibri" pitchFamily="34" charset="-120"/>
-              </a:rPr>
-              <a:t>Relevés de rendement et de reprise sur un cycle cultural complet.</a:t>
-            </a:r>
-            <a:endParaRPr lang="en-US" sz="1200" dirty="0"/>
-          </a:p>
-        </p:txBody>
-      </p:sp>
-      <p:sp>
-        <p:nvSpPr>
-          <p:cNvPr id="19" name="Shape 17"/>
-          <p:cNvSpPr/>
-          <p:nvPr/>
-        </p:nvSpPr>
-        <p:spPr>
-          <a:xfrm>
-            <a:off x="9052331" y="1874520"/>
-            <a:ext cx="2545004" cy="2834640"/>
-          </a:xfrm>
-          <a:prstGeom prst="roundRect">
-            <a:avLst>
-              <a:gd name="adj" fmla="val 3593"/>
-            </a:avLst>
-          </a:prstGeom>
-          <a:solidFill>
-            <a:srgbClr val="EDF3F5"/>
-          </a:solidFill>
-          <a:ln w="9525">
-            <a:solidFill>
-              <a:srgbClr val="D6E2E7"/>
-            </a:solidFill>
-            <a:prstDash val="solid"/>
-          </a:ln>
-        </p:spPr>
-      </p:sp>
-      <p:sp>
-        <p:nvSpPr>
-          <p:cNvPr id="20" name="Shape 18"/>
-          <p:cNvSpPr/>
-          <p:nvPr/>
-        </p:nvSpPr>
-        <p:spPr>
-          <a:xfrm>
-            <a:off x="9280931" y="2103120"/>
-            <a:ext cx="566928" cy="566928"/>
-          </a:xfrm>
-          <a:prstGeom prst="ellipse">
-            <a:avLst/>
-          </a:prstGeom>
-          <a:solidFill>
-            <a:srgbClr val="1C5A73"/>
-          </a:solidFill>
-          <a:ln/>
-        </p:spPr>
-      </p:sp>
-      <p:sp>
-        <p:nvSpPr>
-          <p:cNvPr id="21" name="Text 19"/>
-          <p:cNvSpPr txBox="1"/>
-          <p:nvPr/>
-        </p:nvSpPr>
-        <p:spPr>
-          <a:xfrm>
-            <a:off x="9280931" y="2103120"/>
-            <a:ext cx="566928" cy="566928"/>
-          </a:xfrm>
-          <a:prstGeom prst="rect">
-            <a:avLst/>
-          </a:prstGeom>
-          <a:noFill/>
-          <a:ln/>
-        </p:spPr>
-        <p:txBody>
-          <a:bodyPr wrap="square" lIns="0" tIns="0" rIns="0" bIns="0" rtlCol="0" anchor="ctr"/>
-          <a:lstStyle/>
-          <a:p>
-            <a:pPr algn="ctr" indent="0" marL="0">
-              <a:buNone/>
-            </a:pPr>
-            <a:r>
-              <a:rPr lang="en-US" sz="1600" b="1" dirty="0">
-                <a:solidFill>
-                  <a:srgbClr val="FFFFFF"/>
-                </a:solidFill>
-                <a:latin typeface="Cambria" pitchFamily="34" charset="0"/>
-                <a:ea typeface="Cambria" pitchFamily="34" charset="-122"/>
-                <a:cs typeface="Cambria" pitchFamily="34" charset="-120"/>
-              </a:rPr>
-              <a:t>4</a:t>
-            </a:r>
-            <a:endParaRPr lang="en-US" sz="1600" dirty="0"/>
-          </a:p>
-        </p:txBody>
-      </p:sp>
-      <p:sp>
-        <p:nvSpPr>
-          <p:cNvPr id="22" name="Text 20"/>
-          <p:cNvSpPr txBox="1"/>
-          <p:nvPr/>
-        </p:nvSpPr>
-        <p:spPr>
-          <a:xfrm>
-            <a:off x="9280931" y="2788920"/>
-            <a:ext cx="2087804" cy="457200"/>
-          </a:xfrm>
-          <a:prstGeom prst="rect">
-            <a:avLst/>
-          </a:prstGeom>
-          <a:noFill/>
-          <a:ln/>
-        </p:spPr>
-        <p:txBody>
-          <a:bodyPr wrap="square" lIns="0" tIns="0" rIns="0" bIns="0" rtlCol="0" anchor="ctr"/>
-          <a:lstStyle/>
-          <a:p>
-            <a:pPr algn="l" indent="0" marL="0">
-              <a:buNone/>
-            </a:pPr>
-            <a:r>
-              <a:rPr lang="en-US" sz="1400" b="1" dirty="0">
-                <a:solidFill>
-                  <a:srgbClr val="1C5A73"/>
-                </a:solidFill>
-                <a:latin typeface="Cambria" pitchFamily="34" charset="0"/>
-                <a:ea typeface="Cambria" pitchFamily="34" charset="-122"/>
-                <a:cs typeface="Cambria" pitchFamily="34" charset="-120"/>
-              </a:rPr>
-              <a:t>Extension</a:t>
-            </a:r>
-            <a:endParaRPr lang="en-US" sz="1400" dirty="0"/>
-          </a:p>
-        </p:txBody>
-      </p:sp>
-      <p:sp>
-        <p:nvSpPr>
-          <p:cNvPr id="23" name="Text 21"/>
-          <p:cNvSpPr txBox="1"/>
-          <p:nvPr/>
-        </p:nvSpPr>
-        <p:spPr>
-          <a:xfrm>
-            <a:off x="9280931" y="3291840"/>
-            <a:ext cx="2087804" cy="1234440"/>
-          </a:xfrm>
-          <a:prstGeom prst="rect">
-            <a:avLst/>
-          </a:prstGeom>
-          <a:noFill/>
-          <a:ln/>
-        </p:spPr>
-        <p:txBody>
-          <a:bodyPr wrap="square" lIns="0" tIns="0" rIns="0" bIns="0" rtlCol="0" anchor="t"/>
-          <a:lstStyle/>
-          <a:p>
-            <a:pPr algn="l" indent="0" marL="0">
-              <a:lnSpc>
-                <a:spcPct val="120000"/>
-              </a:lnSpc>
-              <a:buNone/>
-            </a:pPr>
-            <a:r>
-              <a:rPr lang="en-US" sz="1200" dirty="0">
-                <a:solidFill>
-                  <a:srgbClr val="31424A"/>
-                </a:solidFill>
-                <a:latin typeface="Calibri" pitchFamily="34" charset="0"/>
-                <a:ea typeface="Calibri" pitchFamily="34" charset="-122"/>
-                <a:cs typeface="Calibri" pitchFamily="34" charset="-120"/>
-              </a:rPr>
-              <a:t>Généralisation progressive par groupement de producteurs, sur la base des résultats.</a:t>
-            </a:r>
-            <a:endParaRPr lang="en-US" sz="1200" dirty="0"/>
-          </a:p>
-        </p:txBody>
-      </p:sp>
-      <p:sp>
-        <p:nvSpPr>
-          <p:cNvPr id="24" name="Text 22"/>
-          <p:cNvSpPr txBox="1"/>
-          <p:nvPr/>
-        </p:nvSpPr>
-        <p:spPr>
-          <a:xfrm>
-            <a:off x="594360" y="4983480"/>
-            <a:ext cx="11002975" cy="822960"/>
+              <a:t>À lire avec prudence</a:t>
+            </a:r>
+            <a:endParaRPr lang="en-US" sz="1300" dirty="0"/>
+          </a:p>
+        </p:txBody>
+      </p:sp>
+      <p:sp>
+        <p:nvSpPr>
+          <p:cNvPr id="7" name="Text 4"/>
+          <p:cNvSpPr txBox="1"/>
+          <p:nvPr/>
+        </p:nvSpPr>
+        <p:spPr>
+          <a:xfrm>
+            <a:off x="8503920" y="2560320"/>
+            <a:ext cx="2834640" cy="3017520"/>
           </a:xfrm>
           <a:prstGeom prst="rect">
             <a:avLst/>
@@ -8290,23 +13004,52 @@
               <a:buNone/>
             </a:pPr>
             <a:r>
-              <a:rPr lang="en-US" sz="1250" i="1" dirty="0">
-                <a:solidFill>
-                  <a:srgbClr val="6C8089"/>
-                </a:solidFill>
-                <a:latin typeface="Calibri" pitchFamily="34" charset="0"/>
-                <a:ea typeface="Calibri" pitchFamily="34" charset="-122"/>
-                <a:cs typeface="Calibri" pitchFamily="34" charset="-120"/>
-              </a:rPr>
-              <a:t>Un essai est déjà en cours en Haïti avec l'Institut CEHPAPE, sur maraîchage, banane plantain et riz, avec ECOSORB®, ECOFERT®, EVERGREEN® et NAPEMA®. Les premiers relevés sont disponibles sur demande.</a:t>
-            </a:r>
-            <a:endParaRPr lang="en-US" sz="1250" dirty="0"/>
-          </a:p>
-        </p:txBody>
-      </p:sp>
-      <p:sp>
-        <p:nvSpPr>
-          <p:cNvPr id="25" name="Text 23"/>
+              <a:rPr lang="en-US" sz="1200" dirty="0">
+                <a:solidFill>
+                  <a:srgbClr val="31424A"/>
+                </a:solidFill>
+                <a:latin typeface="Calibri" pitchFamily="34" charset="0"/>
+                <a:ea typeface="Calibri" pitchFamily="34" charset="-122"/>
+                <a:cs typeface="Calibri" pitchFamily="34" charset="-120"/>
+              </a:rPr>
+              <a:t>Fourchettes retenues par notre calculateur de dose, pour une culture conduite normalement avec EVERGREEN® à la plantation.</a:t>
+            </a:r>
+            <a:endParaRPr lang="en-US" sz="1200" dirty="0"/>
+          </a:p>
+          <a:p>
+            <a:pPr algn="l" indent="0" marL="0">
+              <a:lnSpc>
+                <a:spcPct val="125000"/>
+              </a:lnSpc>
+              <a:buNone/>
+            </a:pPr>
+            <a:endParaRPr lang="en-US" sz="1200" dirty="0"/>
+          </a:p>
+          <a:p>
+            <a:pPr algn="l" indent="0" marL="0">
+              <a:lnSpc>
+                <a:spcPct val="125000"/>
+              </a:lnSpc>
+              <a:buNone/>
+            </a:pPr>
+            <a:r>
+              <a:rPr lang="en-US" sz="1200" dirty="0">
+                <a:solidFill>
+                  <a:srgbClr val="31424A"/>
+                </a:solidFill>
+                <a:latin typeface="Calibri" pitchFamily="34" charset="0"/>
+                <a:ea typeface="Calibri" pitchFamily="34" charset="-122"/>
+                <a:cs typeface="Calibri" pitchFamily="34" charset="-120"/>
+              </a:rPr>
+              <a:t>Le résultat réel dépend du sol, du climat et de la conduite. Pour les céréales, aucun gain n'est avancé sans essai de terrain.</a:t>
+            </a:r>
+            <a:endParaRPr lang="en-US" sz="1200" dirty="0"/>
+          </a:p>
+        </p:txBody>
+      </p:sp>
+      <p:sp>
+        <p:nvSpPr>
+          <p:cNvPr id="8" name="Text 5"/>
           <p:cNvSpPr txBox="1"/>
           <p:nvPr/>
         </p:nvSpPr>
@@ -8347,7 +13090,7 @@
       </p:sp>
       <p:sp>
         <p:nvSpPr>
-          <p:cNvPr id="26" name="Text 24"/>
+          <p:cNvPr id="9" name="Text 6"/>
           <p:cNvSpPr txBox="1"/>
           <p:nvPr/>
         </p:nvSpPr>

--- a/public/documents/countries/haiti.pptx
+++ b/public/documents/countries/haiti.pptx
@@ -124,7 +124,7 @@
 </p:presentation>
 </file>
 
-<file path=ppt/charts/chart5.xml><?xml version="1.0" encoding="utf-8"?>
+<file path=ppt/charts/chart37.xml><?xml version="1.0" encoding="utf-8"?>
 <c:chartSpace xmlns:c="http://schemas.openxmlformats.org/drawingml/2006/chart" xmlns:a="http://schemas.openxmlformats.org/drawingml/2006/main" xmlns:r="http://schemas.openxmlformats.org/officeDocument/2006/relationships">
   <c:date1904 val="0"/>
   <c:roundedCorners val="1"/>
@@ -369,7 +369,7 @@
 </c:chartSpace>
 </file>
 
-<file path=ppt/charts/chart6.xml><?xml version="1.0" encoding="utf-8"?>
+<file path=ppt/charts/chart38.xml><?xml version="1.0" encoding="utf-8"?>
 <c:chartSpace xmlns:c="http://schemas.openxmlformats.org/drawingml/2006/chart" xmlns:a="http://schemas.openxmlformats.org/drawingml/2006/main" xmlns:r="http://schemas.openxmlformats.org/officeDocument/2006/relationships">
   <c:date1904 val="0"/>
   <c:roundedCorners val="1"/>
@@ -677,7 +677,7 @@
 </c:chartSpace>
 </file>
 
-<file path=ppt/charts/chart7.xml><?xml version="1.0" encoding="utf-8"?>
+<file path=ppt/charts/chart39.xml><?xml version="1.0" encoding="utf-8"?>
 <c:chartSpace xmlns:c="http://schemas.openxmlformats.org/drawingml/2006/chart" xmlns:a="http://schemas.openxmlformats.org/drawingml/2006/main" xmlns:r="http://schemas.openxmlformats.org/officeDocument/2006/relationships">
   <c:date1904 val="0"/>
   <c:roundedCorners val="1"/>
@@ -1042,7 +1042,7 @@
 </c:chartSpace>
 </file>
 
-<file path=ppt/charts/chart8.xml><?xml version="1.0" encoding="utf-8"?>
+<file path=ppt/charts/chart40.xml><?xml version="1.0" encoding="utf-8"?>
 <c:chartSpace xmlns:c="http://schemas.openxmlformats.org/drawingml/2006/chart" xmlns:a="http://schemas.openxmlformats.org/drawingml/2006/main" xmlns:r="http://schemas.openxmlformats.org/officeDocument/2006/relationships">
   <c:date1904 val="0"/>
   <c:roundedCorners val="1"/>
@@ -3744,7 +3744,7 @@
       </p:sp>
       <p:pic>
         <p:nvPicPr>
-          <p:cNvPr id="5" name="Image 1" descr="C:\Users\Utilisateur\dev\green-solutions-web\public\images\logo-icon.png">    </p:cNvPr>
+          <p:cNvPr id="5" name="Image 1" descr="C:\Users\Utilisateur\dev\gsw-dossiers\public\images\logo-icon.png">    </p:cNvPr>
           <p:cNvPicPr>
             <a:picLocks noChangeAspect="1"/>
           </p:cNvPicPr>
@@ -3768,7 +3768,7 @@
       </p:pic>
       <p:pic>
         <p:nvPicPr>
-          <p:cNvPr id="6" name="Image 2" descr="C:\Users\Utilisateur\dev\green-solutions-web\scripts\dossiers\drapeaux\haiti.png">    </p:cNvPr>
+          <p:cNvPr id="6" name="Image 2" descr="C:\Users\Utilisateur\dev\gsw-dossiers\scripts\dossiers\drapeaux\haiti.png">    </p:cNvPr>
           <p:cNvPicPr>
             <a:picLocks noChangeAspect="1"/>
           </p:cNvPicPr>
@@ -9535,7 +9535,7 @@
                 <a:ea typeface="Calibri" pitchFamily="34" charset="-122"/>
                 <a:cs typeface="Calibri" pitchFamily="34" charset="-120"/>
               </a:rPr>
-              <a:t>contact@evergreen-ecosorb.com · 821 Chemin des Clapiers, 83220 Le Pradet, France</a:t>
+              <a:t>contact@evergreen-ecosorb.com · Green Solutions Groupe AIM SA, 46, route de la Condémine, 1475 Forel, Suisse</a:t>
             </a:r>
             <a:endParaRPr lang="en-US" sz="1400" dirty="0"/>
           </a:p>
@@ -9543,7 +9543,7 @@
       </p:sp>
       <p:pic>
         <p:nvPicPr>
-          <p:cNvPr id="6" name="Image 1" descr="C:\Users\Utilisateur\dev\green-solutions-web\scripts\dossiers\sceau-aim-clair.png">    </p:cNvPr>
+          <p:cNvPr id="6" name="Image 1" descr="C:\Users\Utilisateur\dev\gsw-dossiers\scripts\dossiers\sceau-aim-clair.png">    </p:cNvPr>
           <p:cNvPicPr>
             <a:picLocks noChangeAspect="1"/>
           </p:cNvPicPr>

--- a/public/documents/countries/haiti.pptx
+++ b/public/documents/countries/haiti.pptx
@@ -124,7 +124,7 @@
 </p:presentation>
 </file>
 
-<file path=ppt/charts/chart37.xml><?xml version="1.0" encoding="utf-8"?>
+<file path=ppt/charts/chart13.xml><?xml version="1.0" encoding="utf-8"?>
 <c:chartSpace xmlns:c="http://schemas.openxmlformats.org/drawingml/2006/chart" xmlns:a="http://schemas.openxmlformats.org/drawingml/2006/main" xmlns:r="http://schemas.openxmlformats.org/officeDocument/2006/relationships">
   <c:date1904 val="0"/>
   <c:roundedCorners val="1"/>
@@ -369,7 +369,7 @@
 </c:chartSpace>
 </file>
 
-<file path=ppt/charts/chart38.xml><?xml version="1.0" encoding="utf-8"?>
+<file path=ppt/charts/chart14.xml><?xml version="1.0" encoding="utf-8"?>
 <c:chartSpace xmlns:c="http://schemas.openxmlformats.org/drawingml/2006/chart" xmlns:a="http://schemas.openxmlformats.org/drawingml/2006/main" xmlns:r="http://schemas.openxmlformats.org/officeDocument/2006/relationships">
   <c:date1904 val="0"/>
   <c:roundedCorners val="1"/>
@@ -677,7 +677,7 @@
 </c:chartSpace>
 </file>
 
-<file path=ppt/charts/chart39.xml><?xml version="1.0" encoding="utf-8"?>
+<file path=ppt/charts/chart15.xml><?xml version="1.0" encoding="utf-8"?>
 <c:chartSpace xmlns:c="http://schemas.openxmlformats.org/drawingml/2006/chart" xmlns:a="http://schemas.openxmlformats.org/drawingml/2006/main" xmlns:r="http://schemas.openxmlformats.org/officeDocument/2006/relationships">
   <c:date1904 val="0"/>
   <c:roundedCorners val="1"/>
@@ -1042,7 +1042,7 @@
 </c:chartSpace>
 </file>
 
-<file path=ppt/charts/chart40.xml><?xml version="1.0" encoding="utf-8"?>
+<file path=ppt/charts/chart16.xml><?xml version="1.0" encoding="utf-8"?>
 <c:chartSpace xmlns:c="http://schemas.openxmlformats.org/drawingml/2006/chart" xmlns:a="http://schemas.openxmlformats.org/drawingml/2006/main" xmlns:r="http://schemas.openxmlformats.org/officeDocument/2006/relationships">
   <c:date1904 val="0"/>
   <c:roundedCorners val="1"/>
@@ -3782,8 +3782,8 @@
         </p:blipFill>
         <p:spPr>
           <a:xfrm>
-            <a:off x="3648456" y="1389888"/>
-            <a:ext cx="1965960" cy="1310640"/>
+            <a:off x="3648456" y="1455420"/>
+            <a:ext cx="1965960" cy="1179576"/>
           </a:xfrm>
           <a:prstGeom prst="rect">
             <a:avLst/>
@@ -3798,8 +3798,8 @@
         </p:nvSpPr>
         <p:spPr>
           <a:xfrm>
-            <a:off x="3648456" y="1389888"/>
-            <a:ext cx="1965960" cy="1310640"/>
+            <a:off x="3648456" y="1455420"/>
+            <a:ext cx="1965960" cy="1179576"/>
           </a:xfrm>
           <a:prstGeom prst="rect">
             <a:avLst/>

--- a/public/documents/countries/haiti.pptx
+++ b/public/documents/countries/haiti.pptx
@@ -124,7 +124,7 @@
 </p:presentation>
 </file>
 
-<file path=ppt/charts/chart13.xml><?xml version="1.0" encoding="utf-8"?>
+<file path=ppt/charts/chart37.xml><?xml version="1.0" encoding="utf-8"?>
 <c:chartSpace xmlns:c="http://schemas.openxmlformats.org/drawingml/2006/chart" xmlns:a="http://schemas.openxmlformats.org/drawingml/2006/main" xmlns:r="http://schemas.openxmlformats.org/officeDocument/2006/relationships">
   <c:date1904 val="0"/>
   <c:roundedCorners val="1"/>
@@ -369,7 +369,7 @@
 </c:chartSpace>
 </file>
 
-<file path=ppt/charts/chart14.xml><?xml version="1.0" encoding="utf-8"?>
+<file path=ppt/charts/chart38.xml><?xml version="1.0" encoding="utf-8"?>
 <c:chartSpace xmlns:c="http://schemas.openxmlformats.org/drawingml/2006/chart" xmlns:a="http://schemas.openxmlformats.org/drawingml/2006/main" xmlns:r="http://schemas.openxmlformats.org/officeDocument/2006/relationships">
   <c:date1904 val="0"/>
   <c:roundedCorners val="1"/>
@@ -677,7 +677,7 @@
 </c:chartSpace>
 </file>
 
-<file path=ppt/charts/chart15.xml><?xml version="1.0" encoding="utf-8"?>
+<file path=ppt/charts/chart39.xml><?xml version="1.0" encoding="utf-8"?>
 <c:chartSpace xmlns:c="http://schemas.openxmlformats.org/drawingml/2006/chart" xmlns:a="http://schemas.openxmlformats.org/drawingml/2006/main" xmlns:r="http://schemas.openxmlformats.org/officeDocument/2006/relationships">
   <c:date1904 val="0"/>
   <c:roundedCorners val="1"/>
@@ -1042,7 +1042,7 @@
 </c:chartSpace>
 </file>
 
-<file path=ppt/charts/chart16.xml><?xml version="1.0" encoding="utf-8"?>
+<file path=ppt/charts/chart40.xml><?xml version="1.0" encoding="utf-8"?>
 <c:chartSpace xmlns:c="http://schemas.openxmlformats.org/drawingml/2006/chart" xmlns:a="http://schemas.openxmlformats.org/drawingml/2006/main" xmlns:r="http://schemas.openxmlformats.org/officeDocument/2006/relationships">
   <c:date1904 val="0"/>
   <c:roundedCorners val="1"/>
@@ -3744,7 +3744,7 @@
       </p:sp>
       <p:pic>
         <p:nvPicPr>
-          <p:cNvPr id="5" name="Image 1" descr="C:\Users\Utilisateur\dev\gsw-dossiers\public\images\logo-icon.png">    </p:cNvPr>
+          <p:cNvPr id="5" name="Image 1" descr="C:\Users\Utilisateur\dev\green-solutions-web\public\images\logo-icon.png">    </p:cNvPr>
           <p:cNvPicPr>
             <a:picLocks noChangeAspect="1"/>
           </p:cNvPicPr>
@@ -3768,7 +3768,7 @@
       </p:pic>
       <p:pic>
         <p:nvPicPr>
-          <p:cNvPr id="6" name="Image 2" descr="C:\Users\Utilisateur\dev\gsw-dossiers\scripts\dossiers\drapeaux\haiti.png">    </p:cNvPr>
+          <p:cNvPr id="6" name="Image 2" descr="C:\Users\Utilisateur\dev\green-solutions-web\scripts\dossiers\drapeaux\haiti.png">    </p:cNvPr>
           <p:cNvPicPr>
             <a:picLocks noChangeAspect="1"/>
           </p:cNvPicPr>
@@ -9053,6 +9053,30 @@
             </a:r>
             <a:endParaRPr lang="en-US" sz="1350" dirty="0"/>
           </a:p>
+          <a:p>
+            <a:pPr algn="l" marL="342900" indent="-342900">
+              <a:lnSpc>
+                <a:spcPct val="122000"/>
+              </a:lnSpc>
+              <a:spcAft>
+                <a:spcPts val="1000"/>
+              </a:spcAft>
+              <a:buSzPct val="100000"/>
+              <a:buChar char="•"/>
+            </a:pPr>
+            <a:r>
+              <a:rPr lang="en-US" sz="1350" dirty="0">
+                <a:solidFill>
+                  <a:srgbClr val="31424A"/>
+                </a:solidFill>
+                <a:latin typeface="Calibri" pitchFamily="34" charset="0"/>
+                <a:ea typeface="Calibri" pitchFamily="34" charset="-122"/>
+                <a:cs typeface="Calibri" pitchFamily="34" charset="-120"/>
+              </a:rPr>
+              <a:t>Photographies : USAID U.S. Agency for International Development (Public domain), Jlanghurst (CC BY-SA 3.0) — via Wikimedia Commons.</a:t>
+            </a:r>
+            <a:endParaRPr lang="en-US" sz="1350" dirty="0"/>
+          </a:p>
         </p:txBody>
       </p:sp>
       <p:sp>
@@ -9543,7 +9567,7 @@
       </p:sp>
       <p:pic>
         <p:nvPicPr>
-          <p:cNvPr id="6" name="Image 1" descr="C:\Users\Utilisateur\dev\gsw-dossiers\scripts\dossiers\sceau-aim-clair.png">    </p:cNvPr>
+          <p:cNvPr id="6" name="Image 1" descr="C:\Users\Utilisateur\dev\green-solutions-web\scripts\dossiers\sceau-aim-clair.png">    </p:cNvPr>
           <p:cNvPicPr>
             <a:picLocks noChangeAspect="1"/>
           </p:cNvPicPr>

--- a/public/documents/countries/haiti.pptx
+++ b/public/documents/countries/haiti.pptx
@@ -23,9 +23,10 @@
     <p:sldId id="271" r:id="rId17"/>
     <p:sldId id="272" r:id="rId18"/>
     <p:sldId id="273" r:id="rId19"/>
+    <p:sldId id="274" r:id="rId20"/>
   </p:sldIdLst>
   <p:notesMasterIdLst>
-    <p:notesMasterId r:id="rId20"/>
+    <p:notesMasterId r:id="rId21"/>
   </p:notesMasterIdLst>
   <p:sldSz cx="12192000" cy="6858000"/>
   <p:notesSz cx="6858000" cy="12192000"/>
@@ -124,7 +125,266 @@
 </p:presentation>
 </file>
 
-<file path=ppt/charts/chart37.xml><?xml version="1.0" encoding="utf-8"?>
+<file path=ppt/charts/chart59.xml><?xml version="1.0" encoding="utf-8"?>
+<c:chartSpace xmlns:c="http://schemas.openxmlformats.org/drawingml/2006/chart" xmlns:a="http://schemas.openxmlformats.org/drawingml/2006/main" xmlns:r="http://schemas.openxmlformats.org/officeDocument/2006/relationships">
+  <c:date1904 val="0"/>
+  <c:roundedCorners val="1"/>
+  <c:chart>
+    <c:autoTitleDeleted val="1"/>
+    <c:plotArea>
+      <c:layout/>
+      <c:barChart>
+        <c:barDir val="col"/>
+        <c:grouping val="clustered"/>
+        <c:varyColors val="0"/>
+        <c:ser>
+          <c:idx val="0"/>
+          <c:order val="0"/>
+          <c:tx>
+            <c:strRef>
+              <c:f>Sheet1!$B$1</c:f>
+              <c:strCache>
+                <c:ptCount val="1"/>
+                <c:pt idx="0">
+                  <c:v>Indice mondial du nombre et de la durée des sécheresses</c:v>
+                </c:pt>
+              </c:strCache>
+            </c:strRef>
+          </c:tx>
+          <c:spPr>
+            <a:solidFill>
+              <a:srgbClr val="1C5A73"/>
+            </a:solidFill>
+            <a:effectLst/>
+          </c:spPr>
+          <c:invertIfNegative val="0"/>
+          <c:dLbls>
+            <c:numFmt formatCode="[$-40C]0" sourceLinked="0"/>
+            <c:txPr>
+              <a:bodyPr/>
+              <a:lstStyle/>
+              <a:p>
+                <a:pPr>
+                  <a:defRPr b="0" i="0" strike="noStrike" sz="1100" u="none">
+                    <a:solidFill>
+                      <a:srgbClr val="0E3546"/>
+                    </a:solidFill>
+                    <a:latin typeface="Calibri"/>
+                  </a:defRPr>
+                </a:pPr>
+              </a:p>
+            </c:txPr>
+            <c:showLegendKey val="0"/>
+            <c:showVal val="1"/>
+            <c:showCatName val="0"/>
+            <c:showSerName val="0"/>
+            <c:showPercent val="0"/>
+            <c:showBubbleSize val="0"/>
+            <c:showLeaderLines val="0"/>
+          </c:dLbls>
+          <c:dPt>
+            <c:idx val="0"/>
+            <c:invertIfNegative val="0"/>
+            <c:bubble3D val="0"/>
+            <c:spPr>
+              <a:solidFill>
+                <a:srgbClr val="1C5A73"/>
+              </a:solidFill>
+              <a:effectLst/>
+            </c:spPr>
+          </c:dPt>
+          <c:dPt>
+            <c:idx val="1"/>
+            <c:invertIfNegative val="0"/>
+            <c:bubble3D val="0"/>
+            <c:spPr>
+              <a:solidFill>
+                <a:srgbClr val="E0A33E"/>
+              </a:solidFill>
+              <a:effectLst/>
+            </c:spPr>
+          </c:dPt>
+          <c:cat>
+            <c:multiLvlStrRef>
+              <c:f>Sheet1!$A$2:$A$3</c:f>
+              <c:multiLvlStrCache>
+                <c:ptCount val="2"/>
+                <c:lvl>
+                  <c:pt idx="0">
+                    <c:v>1980–1999</c:v>
+                  </c:pt>
+                  <c:pt idx="1">
+                    <c:v>Depuis 2000</c:v>
+                  </c:pt>
+                </c:lvl>
+              </c:multiLvlStrCache>
+            </c:multiLvlStrRef>
+          </c:cat>
+          <c:val>
+            <c:numRef>
+              <c:f>Sheet1!$B$2:$B$3</c:f>
+              <c:numCache>
+                <c:formatCode>General</c:formatCode>
+                <c:ptCount val="2"/>
+                <c:pt idx="0">
+                  <c:v>100</c:v>
+                </c:pt>
+                <c:pt idx="1">
+                  <c:v>129</c:v>
+                </c:pt>
+              </c:numCache>
+            </c:numRef>
+          </c:val>
+        </c:ser>
+        <c:dLbls>
+          <c:numFmt formatCode="[$-40C]0" sourceLinked="0"/>
+          <c:txPr>
+            <a:bodyPr/>
+            <a:lstStyle/>
+            <a:p>
+              <a:pPr>
+                <a:defRPr b="0" i="0" strike="noStrike" sz="1100" u="none">
+                  <a:solidFill>
+                    <a:srgbClr val="0E3546"/>
+                  </a:solidFill>
+                  <a:latin typeface="Calibri"/>
+                </a:defRPr>
+              </a:pPr>
+            </a:p>
+          </c:txPr>
+          <c:showLegendKey val="0"/>
+          <c:showVal val="1"/>
+          <c:showCatName val="0"/>
+          <c:showSerName val="0"/>
+          <c:showPercent val="0"/>
+          <c:showBubbleSize val="0"/>
+          <c:showLeaderLines val="0"/>
+        </c:dLbls>
+        <c:gapWidth val="150"/>
+        <c:overlap val="0"/>
+        <c:axId val="2094734554"/>
+        <c:axId val="2094734552"/>
+        <c:axId val="2094734556"/>
+      </c:barChart>
+      <c:catAx>
+        <c:axId val="2094734554"/>
+        <c:scaling>
+          <c:orientation val="minMax"/>
+        </c:scaling>
+        <c:delete val="0"/>
+        <c:axPos val="b"/>
+        <c:numFmt formatCode="General" sourceLinked="1"/>
+        <c:majorTickMark val="out"/>
+        <c:minorTickMark val="none"/>
+        <c:tickLblPos val="low"/>
+        <c:spPr>
+          <a:ln w="12700" cap="flat">
+            <a:solidFill>
+              <a:srgbClr val="888888"/>
+            </a:solidFill>
+            <a:prstDash val="solid"/>
+            <a:round/>
+          </a:ln>
+        </c:spPr>
+        <c:txPr>
+          <a:bodyPr/>
+          <a:lstStyle/>
+          <a:p>
+            <a:pPr>
+              <a:defRPr sz="1100" b="0" i="0" u="none" strike="noStrike">
+                <a:solidFill>
+                  <a:srgbClr val="6C8089"/>
+                </a:solidFill>
+                <a:latin typeface="Calibri"/>
+              </a:defRPr>
+            </a:pPr>
+            <a:endParaRPr lang="en-US"/>
+          </a:p>
+        </c:txPr>
+        <c:crossAx val="2094734552"/>
+        <c:crosses val="autoZero"/>
+        <c:auto val="1"/>
+        <c:lblAlgn val="ctr"/>
+        <c:noMultiLvlLbl val="1"/>
+      </c:catAx>
+      <c:valAx>
+        <c:axId val="2094734552"/>
+        <c:scaling>
+          <c:orientation val="minMax"/>
+          <c:max val="140"/>
+          <c:min val="0"/>
+        </c:scaling>
+        <c:delete val="0"/>
+        <c:axPos val="l"/>
+        <c:majorGridlines>
+          <c:spPr>
+            <a:ln w="9525" cap="flat">
+              <a:solidFill>
+                <a:srgbClr val="D6E2E7"/>
+              </a:solidFill>
+              <a:prstDash val="solid"/>
+              <a:round/>
+            </a:ln>
+          </c:spPr>
+        </c:majorGridlines>
+        <c:numFmt formatCode="General" sourceLinked="0"/>
+        <c:majorTickMark val="out"/>
+        <c:minorTickMark val="none"/>
+        <c:tickLblPos val="nextTo"/>
+        <c:spPr>
+          <a:ln w="12700" cap="flat">
+            <a:solidFill>
+              <a:srgbClr val="888888"/>
+            </a:solidFill>
+            <a:prstDash val="solid"/>
+            <a:round/>
+          </a:ln>
+        </c:spPr>
+        <c:txPr>
+          <a:bodyPr/>
+          <a:lstStyle/>
+          <a:p>
+            <a:pPr>
+              <a:defRPr sz="1100" b="0" i="0" u="none" strike="noStrike">
+                <a:solidFill>
+                  <a:srgbClr val="6C8089"/>
+                </a:solidFill>
+                <a:latin typeface="Calibri"/>
+              </a:defRPr>
+            </a:pPr>
+            <a:endParaRPr lang="en-US"/>
+          </a:p>
+        </c:txPr>
+        <c:crossAx val="2094734554"/>
+        <c:crosses val="autoZero"/>
+        <c:crossBetween val="between"/>
+        <c:majorUnit val="20"/>
+      </c:valAx>
+      <c:spPr>
+        <a:noFill/>
+        <a:ln>
+          <a:noFill/>
+        </a:ln>
+        <a:effectLst/>
+      </c:spPr>
+    </c:plotArea>
+    <c:plotVisOnly val="1"/>
+    <c:dispBlanksAs val="span"/>
+  </c:chart>
+  <c:spPr>
+    <a:noFill/>
+    <a:ln>
+      <a:noFill/>
+    </a:ln>
+    <a:effectLst/>
+  </c:spPr>
+  <c:externalData r:id="rId1">
+    <c:autoUpdate val="0"/>
+  </c:externalData>
+</c:chartSpace>
+</file>
+
+<file path=ppt/charts/chart60.xml><?xml version="1.0" encoding="utf-8"?>
 <c:chartSpace xmlns:c="http://schemas.openxmlformats.org/drawingml/2006/chart" xmlns:a="http://schemas.openxmlformats.org/drawingml/2006/main" xmlns:r="http://schemas.openxmlformats.org/officeDocument/2006/relationships">
   <c:date1904 val="0"/>
   <c:roundedCorners val="1"/>
@@ -369,7 +629,7 @@
 </c:chartSpace>
 </file>
 
-<file path=ppt/charts/chart38.xml><?xml version="1.0" encoding="utf-8"?>
+<file path=ppt/charts/chart61.xml><?xml version="1.0" encoding="utf-8"?>
 <c:chartSpace xmlns:c="http://schemas.openxmlformats.org/drawingml/2006/chart" xmlns:a="http://schemas.openxmlformats.org/drawingml/2006/main" xmlns:r="http://schemas.openxmlformats.org/officeDocument/2006/relationships">
   <c:date1904 val="0"/>
   <c:roundedCorners val="1"/>
@@ -677,7 +937,7 @@
 </c:chartSpace>
 </file>
 
-<file path=ppt/charts/chart39.xml><?xml version="1.0" encoding="utf-8"?>
+<file path=ppt/charts/chart62.xml><?xml version="1.0" encoding="utf-8"?>
 <c:chartSpace xmlns:c="http://schemas.openxmlformats.org/drawingml/2006/chart" xmlns:a="http://schemas.openxmlformats.org/drawingml/2006/main" xmlns:r="http://schemas.openxmlformats.org/officeDocument/2006/relationships">
   <c:date1904 val="0"/>
   <c:roundedCorners val="1"/>
@@ -1042,7 +1302,7 @@
 </c:chartSpace>
 </file>
 
-<file path=ppt/charts/chart40.xml><?xml version="1.0" encoding="utf-8"?>
+<file path=ppt/charts/chart63.xml><?xml version="1.0" encoding="utf-8"?>
 <c:chartSpace xmlns:c="http://schemas.openxmlformats.org/drawingml/2006/chart" xmlns:a="http://schemas.openxmlformats.org/drawingml/2006/main" xmlns:r="http://schemas.openxmlformats.org/officeDocument/2006/relationships">
   <c:date1904 val="0"/>
   <c:roundedCorners val="1"/>
@@ -2606,6 +2866,94 @@
             <a:fld id="{F7021451-1387-4CA6-816F-3879F97B5CBC}" type="slidenum">
               <a:rPr lang="en-US"/>
               <a:t>18</a:t>
+            </a:fld>
+            <a:endParaRPr lang="en-US"/>
+          </a:p>
+        </p:txBody>
+      </p:sp>
+    </p:spTree>
+    <p:extLst>
+      <p:ext uri="{BB962C8B-B14F-4D97-AF65-F5344CB8AC3E}">
+        <p14:creationId xmlns:p14="http://schemas.microsoft.com/office/powerpoint/2010/main" val="1024086991"/>
+      </p:ext>
+    </p:extLst>
+  </p:cSld>
+  <p:clrMapOvr>
+    <a:masterClrMapping/>
+  </p:clrMapOvr>
+</p:notes>
+</file>
+
+<file path=ppt/notesSlides/notesSlide19.xml><?xml version="1.0" encoding="utf-8"?>
+<p:notes xmlns:a="http://schemas.openxmlformats.org/drawingml/2006/main" xmlns:r="http://schemas.openxmlformats.org/officeDocument/2006/relationships" xmlns:p="http://schemas.openxmlformats.org/presentationml/2006/main">
+  <p:cSld>
+    <p:spTree>
+      <p:nvGrpSpPr>
+        <p:cNvPr id="1" name=""/>
+        <p:cNvGrpSpPr/>
+        <p:nvPr/>
+      </p:nvGrpSpPr>
+      <p:grpSpPr>
+        <a:xfrm>
+          <a:off x="0" y="0"/>
+          <a:ext cx="0" cy="0"/>
+          <a:chOff x="0" y="0"/>
+          <a:chExt cx="0" cy="0"/>
+        </a:xfrm>
+      </p:grpSpPr>
+      <p:sp>
+        <p:nvSpPr>
+          <p:cNvPr id="2" name="Slide Image Placeholder 1"/>
+          <p:cNvSpPr>
+            <a:spLocks noGrp="1" noRot="1" noChangeAspect="1"/>
+          </p:cNvSpPr>
+          <p:nvPr>
+            <p:ph type="sldImg"/>
+          </p:nvPr>
+        </p:nvSpPr>
+        <p:spPr/>
+      </p:sp>
+      <p:sp>
+        <p:nvSpPr>
+          <p:cNvPr id="3" name="Notes Placeholder 2"/>
+          <p:cNvSpPr>
+            <a:spLocks noGrp="1"/>
+          </p:cNvSpPr>
+          <p:nvPr>
+            <p:ph type="body" idx="1"/>
+          </p:nvPr>
+        </p:nvSpPr>
+        <p:spPr/>
+        <p:txBody>
+          <a:bodyPr/>
+          <a:lstStyle/>
+          <a:p>
+            <a:r>
+              <a:rPr lang="en-US" dirty="0"/>
+              <a:t/>
+            </a:r>
+            <a:endParaRPr lang="en-US" dirty="0"/>
+          </a:p>
+        </p:txBody>
+      </p:sp>
+      <p:sp>
+        <p:nvSpPr>
+          <p:cNvPr id="4" name="Slide Number Placeholder 3"/>
+          <p:cNvSpPr>
+            <a:spLocks noGrp="1"/>
+          </p:cNvSpPr>
+          <p:nvPr>
+            <p:ph type="sldNum" sz="quarter" idx="10"/>
+          </p:nvPr>
+        </p:nvSpPr>
+        <p:spPr/>
+        <p:txBody>
+          <a:bodyPr/>
+          <a:lstStyle/>
+          <a:p>
+            <a:fld id="{F7021451-1387-4CA6-816F-3879F97B5CBC}" type="slidenum">
+              <a:rPr lang="en-US"/>
+              <a:t>19</a:t>
             </a:fld>
             <a:endParaRPr lang="en-US"/>
           </a:p>
@@ -3744,7 +4092,7 @@
       </p:sp>
       <p:pic>
         <p:nvPicPr>
-          <p:cNvPr id="5" name="Image 1" descr="C:\Users\Utilisateur\dev\green-solutions-web\public\images\logo-icon.png">    </p:cNvPr>
+          <p:cNvPr id="5" name="Image 1" descr="/workspace/scratch/50eb4f7d8e13/green-solutions-web/public/images/logo-icon.png">    </p:cNvPr>
           <p:cNvPicPr>
             <a:picLocks noChangeAspect="1"/>
           </p:cNvPicPr>
@@ -3768,7 +4116,7 @@
       </p:pic>
       <p:pic>
         <p:nvPicPr>
-          <p:cNvPr id="6" name="Image 2" descr="C:\Users\Utilisateur\dev\green-solutions-web\scripts\dossiers\drapeaux\haiti.png">    </p:cNvPr>
+          <p:cNvPr id="6" name="Image 2" descr="/workspace/scratch/50eb4f7d8e13/green-solutions-web/scripts/dossiers/drapeaux/haiti.png">    </p:cNvPr>
           <p:cNvPicPr>
             <a:picLocks noChangeAspect="1"/>
           </p:cNvPicPr>
@@ -4118,7 +4466,7 @@
                 <a:ea typeface="Calibri" pitchFamily="34" charset="-122"/>
                 <a:cs typeface="Calibri" pitchFamily="34" charset="-120"/>
               </a:rPr>
-              <a:t>NOTRE RÉPONSE</a:t>
+              <a:t>Potentiel de rendement</a:t>
             </a:r>
             <a:endParaRPr lang="en-US" sz="1150" dirty="0"/>
           </a:p>
@@ -4157,340 +4505,42 @@
                 <a:ea typeface="Cambria" pitchFamily="34" charset="-122"/>
                 <a:cs typeface="Cambria" pitchFamily="34" charset="-120"/>
               </a:rPr>
-              <a:t>Deux technologies, deux contraintes différentes</a:t>
+              <a:t>Gain de rendement attendu par culture</a:t>
             </a:r>
             <a:endParaRPr lang="en-US" sz="3000" dirty="0"/>
           </a:p>
         </p:txBody>
       </p:sp>
-      <p:sp>
-        <p:nvSpPr>
-          <p:cNvPr id="4" name="Text 2"/>
-          <p:cNvSpPr txBox="1"/>
-          <p:nvPr/>
-        </p:nvSpPr>
-        <p:spPr>
-          <a:xfrm>
-            <a:off x="594360" y="1783080"/>
-            <a:ext cx="5227168" cy="411480"/>
-          </a:xfrm>
-          <a:prstGeom prst="rect">
-            <a:avLst/>
-          </a:prstGeom>
-          <a:noFill/>
-          <a:ln/>
-        </p:spPr>
-        <p:txBody>
-          <a:bodyPr wrap="square" lIns="0" tIns="0" rIns="0" bIns="0" rtlCol="0" anchor="ctr"/>
-          <a:lstStyle/>
-          <a:p>
-            <a:pPr algn="l" indent="0" marL="0">
-              <a:buNone/>
-            </a:pPr>
-            <a:r>
-              <a:rPr lang="en-US" sz="1600" b="1" dirty="0">
-                <a:solidFill>
-                  <a:srgbClr val="1C5A73"/>
-                </a:solidFill>
-                <a:latin typeface="Cambria" pitchFamily="34" charset="0"/>
-                <a:ea typeface="Cambria" pitchFamily="34" charset="-122"/>
-                <a:cs typeface="Cambria" pitchFamily="34" charset="-120"/>
-              </a:rPr>
-              <a:t>EVERGREEN® — retenir l'eau</a:t>
-            </a:r>
-            <a:endParaRPr lang="en-US" sz="1600" dirty="0"/>
-          </a:p>
-        </p:txBody>
-      </p:sp>
-      <p:sp>
-        <p:nvSpPr>
-          <p:cNvPr id="5" name="Text 3"/>
-          <p:cNvSpPr txBox="1"/>
-          <p:nvPr/>
-        </p:nvSpPr>
-        <p:spPr>
-          <a:xfrm>
-            <a:off x="594360" y="2286000"/>
-            <a:ext cx="5227168" cy="2468880"/>
-          </a:xfrm>
-          <a:prstGeom prst="rect">
-            <a:avLst/>
-          </a:prstGeom>
-          <a:noFill/>
-          <a:ln/>
-        </p:spPr>
-        <p:txBody>
-          <a:bodyPr wrap="square" lIns="0" tIns="0" rIns="0" bIns="0" rtlCol="0" anchor="t"/>
-          <a:lstStyle/>
-          <a:p>
-            <a:pPr algn="l" marL="342900" indent="-342900">
-              <a:lnSpc>
-                <a:spcPct val="122000"/>
-              </a:lnSpc>
-              <a:spcAft>
-                <a:spcPts val="1000"/>
-              </a:spcAft>
-              <a:buSzPct val="100000"/>
-              <a:buChar char="•"/>
-            </a:pPr>
-            <a:r>
-              <a:rPr lang="en-US" sz="1350" dirty="0">
-                <a:solidFill>
-                  <a:srgbClr val="31424A"/>
-                </a:solidFill>
-                <a:latin typeface="Calibri" pitchFamily="34" charset="0"/>
-                <a:ea typeface="Calibri" pitchFamily="34" charset="-122"/>
-                <a:cs typeface="Calibri" pitchFamily="34" charset="-120"/>
-              </a:rPr>
-              <a:t>Hydro-rétenteur à base de potassium, placé dans la zone racinaire à la plantation ou à la reprise.</a:t>
-            </a:r>
-            <a:endParaRPr lang="en-US" sz="1350" dirty="0"/>
-          </a:p>
-          <a:p>
-            <a:pPr algn="l" marL="342900" indent="-342900">
-              <a:lnSpc>
-                <a:spcPct val="122000"/>
-              </a:lnSpc>
-              <a:spcAft>
-                <a:spcPts val="1000"/>
-              </a:spcAft>
-              <a:buSzPct val="100000"/>
-              <a:buChar char="•"/>
-            </a:pPr>
-            <a:r>
-              <a:rPr lang="en-US" sz="1350" dirty="0">
-                <a:solidFill>
-                  <a:srgbClr val="31424A"/>
-                </a:solidFill>
-                <a:latin typeface="Calibri" pitchFamily="34" charset="0"/>
-                <a:ea typeface="Calibri" pitchFamily="34" charset="-122"/>
-                <a:cs typeface="Calibri" pitchFamily="34" charset="-120"/>
-              </a:rPr>
-              <a:t>Capte l'eau de pluie avant qu'elle ne ruisselle et la restitue à la plante pendant les séquences sèches entre deux saisons.</a:t>
-            </a:r>
-            <a:endParaRPr lang="en-US" sz="1350" dirty="0"/>
-          </a:p>
-          <a:p>
-            <a:pPr algn="l" marL="342900" indent="-342900">
-              <a:lnSpc>
-                <a:spcPct val="122000"/>
-              </a:lnSpc>
-              <a:spcAft>
-                <a:spcPts val="1000"/>
-              </a:spcAft>
-              <a:buSzPct val="100000"/>
-              <a:buChar char="•"/>
-            </a:pPr>
-            <a:r>
-              <a:rPr lang="en-US" sz="1350" dirty="0">
-                <a:solidFill>
-                  <a:srgbClr val="31424A"/>
-                </a:solidFill>
-                <a:latin typeface="Calibri" pitchFamily="34" charset="0"/>
-                <a:ea typeface="Calibri" pitchFamily="34" charset="-122"/>
-                <a:cs typeface="Calibri" pitchFamily="34" charset="-120"/>
-              </a:rPr>
-              <a:t>Capacité d'absorption de l'ordre de 300 fois son poids ; durée d'effet utile de 3 à 4 ans dans le sol.</a:t>
-            </a:r>
-            <a:endParaRPr lang="en-US" sz="1350" dirty="0"/>
-          </a:p>
-          <a:p>
-            <a:pPr algn="l" marL="342900" indent="-342900">
-              <a:lnSpc>
-                <a:spcPct val="122000"/>
-              </a:lnSpc>
-              <a:spcAft>
-                <a:spcPts val="1000"/>
-              </a:spcAft>
-              <a:buSzPct val="100000"/>
-              <a:buChar char="•"/>
-            </a:pPr>
-            <a:r>
-              <a:rPr lang="en-US" sz="1350" dirty="0">
-                <a:solidFill>
-                  <a:srgbClr val="31424A"/>
-                </a:solidFill>
-                <a:latin typeface="Calibri" pitchFamily="34" charset="0"/>
-                <a:ea typeface="Calibri" pitchFamily="34" charset="-122"/>
-                <a:cs typeface="Calibri" pitchFamily="34" charset="-120"/>
-              </a:rPr>
-              <a:t>Sur parcelle en pente, il agit là où l'aménagement anti-érosif seul ne suffit pas : à l'intérieur du sol.</a:t>
-            </a:r>
-            <a:endParaRPr lang="en-US" sz="1350" dirty="0"/>
-          </a:p>
-        </p:txBody>
-      </p:sp>
-      <p:sp>
-        <p:nvSpPr>
-          <p:cNvPr id="6" name="Text 4"/>
-          <p:cNvSpPr txBox="1"/>
-          <p:nvPr/>
-        </p:nvSpPr>
-        <p:spPr>
-          <a:xfrm>
-            <a:off x="6370168" y="1783080"/>
-            <a:ext cx="5227168" cy="411480"/>
-          </a:xfrm>
-          <a:prstGeom prst="rect">
-            <a:avLst/>
-          </a:prstGeom>
-          <a:noFill/>
-          <a:ln/>
-        </p:spPr>
-        <p:txBody>
-          <a:bodyPr wrap="square" lIns="0" tIns="0" rIns="0" bIns="0" rtlCol="0" anchor="ctr"/>
-          <a:lstStyle/>
-          <a:p>
-            <a:pPr algn="l" indent="0" marL="0">
-              <a:buNone/>
-            </a:pPr>
-            <a:r>
-              <a:rPr lang="en-US" sz="1600" b="1" dirty="0">
-                <a:solidFill>
-                  <a:srgbClr val="1C5A73"/>
-                </a:solidFill>
-                <a:latin typeface="Cambria" pitchFamily="34" charset="0"/>
-                <a:ea typeface="Cambria" pitchFamily="34" charset="-122"/>
-                <a:cs typeface="Cambria" pitchFamily="34" charset="-120"/>
-              </a:rPr>
-              <a:t>ECOFERT® — nourrir sans épuiser</a:t>
-            </a:r>
-            <a:endParaRPr lang="en-US" sz="1600" dirty="0"/>
-          </a:p>
-        </p:txBody>
-      </p:sp>
-      <p:sp>
-        <p:nvSpPr>
-          <p:cNvPr id="7" name="Text 5"/>
-          <p:cNvSpPr txBox="1"/>
-          <p:nvPr/>
-        </p:nvSpPr>
-        <p:spPr>
-          <a:xfrm>
-            <a:off x="6370168" y="2286000"/>
-            <a:ext cx="5227168" cy="2468880"/>
-          </a:xfrm>
-          <a:prstGeom prst="rect">
-            <a:avLst/>
-          </a:prstGeom>
-          <a:noFill/>
-          <a:ln/>
-        </p:spPr>
-        <p:txBody>
-          <a:bodyPr wrap="square" lIns="0" tIns="0" rIns="0" bIns="0" rtlCol="0" anchor="t"/>
-          <a:lstStyle/>
-          <a:p>
-            <a:pPr algn="l" marL="342900" indent="-342900">
-              <a:lnSpc>
-                <a:spcPct val="122000"/>
-              </a:lnSpc>
-              <a:spcAft>
-                <a:spcPts val="1000"/>
-              </a:spcAft>
-              <a:buSzPct val="100000"/>
-              <a:buChar char="•"/>
-            </a:pPr>
-            <a:r>
-              <a:rPr lang="en-US" sz="1350" dirty="0">
-                <a:solidFill>
-                  <a:srgbClr val="31424A"/>
-                </a:solidFill>
-                <a:latin typeface="Calibri" pitchFamily="34" charset="0"/>
-                <a:ea typeface="Calibri" pitchFamily="34" charset="-122"/>
-                <a:cs typeface="Calibri" pitchFamily="34" charset="-120"/>
-              </a:rPr>
-              <a:t>Fertilisant en microdoses d'acides aminés, azote, phosphore et potassium, issu de ressources renouvelables.</a:t>
-            </a:r>
-            <a:endParaRPr lang="en-US" sz="1350" dirty="0"/>
-          </a:p>
-          <a:p>
-            <a:pPr algn="l" marL="342900" indent="-342900">
-              <a:lnSpc>
-                <a:spcPct val="122000"/>
-              </a:lnSpc>
-              <a:spcAft>
-                <a:spcPts val="1000"/>
-              </a:spcAft>
-              <a:buSzPct val="100000"/>
-              <a:buChar char="•"/>
-            </a:pPr>
-            <a:r>
-              <a:rPr lang="en-US" sz="1350" dirty="0">
-                <a:solidFill>
-                  <a:srgbClr val="31424A"/>
-                </a:solidFill>
-                <a:latin typeface="Calibri" pitchFamily="34" charset="0"/>
-                <a:ea typeface="Calibri" pitchFamily="34" charset="-122"/>
-                <a:cs typeface="Calibri" pitchFamily="34" charset="-120"/>
-              </a:rPr>
-              <a:t>Non chélatant : il n'appauvrit pas le complexe argilo-humique, déjà très entamé sur les sols décapés.</a:t>
-            </a:r>
-            <a:endParaRPr lang="en-US" sz="1350" dirty="0"/>
-          </a:p>
-          <a:p>
-            <a:pPr algn="l" marL="342900" indent="-342900">
-              <a:lnSpc>
-                <a:spcPct val="122000"/>
-              </a:lnSpc>
-              <a:spcAft>
-                <a:spcPts val="1000"/>
-              </a:spcAft>
-              <a:buSzPct val="100000"/>
-              <a:buChar char="•"/>
-            </a:pPr>
-            <a:r>
-              <a:rPr lang="en-US" sz="1350" dirty="0">
-                <a:solidFill>
-                  <a:srgbClr val="31424A"/>
-                </a:solidFill>
-                <a:latin typeface="Calibri" pitchFamily="34" charset="0"/>
-                <a:ea typeface="Calibri" pitchFamily="34" charset="-122"/>
-                <a:cs typeface="Calibri" pitchFamily="34" charset="-120"/>
-              </a:rPr>
-              <a:t>Certifié SOHISCERT et EU Bio — utile pour les filières café et cacao qui visent les primes de certification.</a:t>
-            </a:r>
-            <a:endParaRPr lang="en-US" sz="1350" dirty="0"/>
-          </a:p>
-          <a:p>
-            <a:pPr algn="l" marL="342900" indent="-342900">
-              <a:lnSpc>
-                <a:spcPct val="122000"/>
-              </a:lnSpc>
-              <a:spcAft>
-                <a:spcPts val="1000"/>
-              </a:spcAft>
-              <a:buSzPct val="100000"/>
-              <a:buChar char="•"/>
-            </a:pPr>
-            <a:r>
-              <a:rPr lang="en-US" sz="1350" dirty="0">
-                <a:solidFill>
-                  <a:srgbClr val="31424A"/>
-                </a:solidFill>
-                <a:latin typeface="Calibri" pitchFamily="34" charset="0"/>
-                <a:ea typeface="Calibri" pitchFamily="34" charset="-122"/>
-                <a:cs typeface="Calibri" pitchFamily="34" charset="-120"/>
-              </a:rPr>
-              <a:t>1 à 4 flacons de 140 ml par hectare : un format transportable, compatible avec le morcellement des parcelles.</a:t>
-            </a:r>
-            <a:endParaRPr lang="en-US" sz="1350" dirty="0"/>
-          </a:p>
-        </p:txBody>
-      </p:sp>
-      <p:sp>
-        <p:nvSpPr>
-          <p:cNvPr id="8" name="Shape 6"/>
+      <p:graphicFrame>
+        <p:nvGraphicFramePr>
+          <p:cNvPr id="4" name="Chart 0" descr=""/>
+          <p:cNvGraphicFramePr/>
+          <p:nvPr/>
+        </p:nvGraphicFramePr>
+        <p:xfrm>
+          <a:off x="594360" y="1783080"/>
+          <a:ext cx="7360920" cy="3977640"/>
+        </p:xfrm>
+        <a:graphic xmlns:a="http://schemas.openxmlformats.org/drawingml/2006/main">
+          <a:graphicData uri="http://schemas.openxmlformats.org/drawingml/2006/chart">
+            <c:chart xmlns:c="http://schemas.openxmlformats.org/drawingml/2006/chart" r:id="rId1"/>
+          </a:graphicData>
+        </a:graphic>
+      </p:graphicFrame>
+      <p:sp>
+        <p:nvSpPr>
+          <p:cNvPr id="5" name="Shape 2"/>
           <p:cNvSpPr/>
           <p:nvPr/>
         </p:nvSpPr>
         <p:spPr>
           <a:xfrm>
-            <a:off x="594360" y="4846320"/>
-            <a:ext cx="11002975" cy="960120"/>
+            <a:off x="8275320" y="1783080"/>
+            <a:ext cx="3291840" cy="3977640"/>
           </a:xfrm>
           <a:prstGeom prst="roundRect">
             <a:avLst>
-              <a:gd name="adj" fmla="val 7619"/>
+              <a:gd name="adj" fmla="val 2778"/>
             </a:avLst>
           </a:prstGeom>
           <a:solidFill>
@@ -4506,14 +4556,53 @@
       </p:sp>
       <p:sp>
         <p:nvSpPr>
-          <p:cNvPr id="9" name="Text 7"/>
-          <p:cNvSpPr txBox="1"/>
-          <p:nvPr/>
-        </p:nvSpPr>
-        <p:spPr>
-          <a:xfrm>
-            <a:off x="822960" y="4983480"/>
-            <a:ext cx="10545775" cy="713232"/>
+          <p:cNvPr id="6" name="Text 3"/>
+          <p:cNvSpPr txBox="1"/>
+          <p:nvPr/>
+        </p:nvSpPr>
+        <p:spPr>
+          <a:xfrm>
+            <a:off x="8503920" y="2011680"/>
+            <a:ext cx="2834640" cy="457200"/>
+          </a:xfrm>
+          <a:prstGeom prst="rect">
+            <a:avLst/>
+          </a:prstGeom>
+          <a:noFill/>
+          <a:ln/>
+        </p:spPr>
+        <p:txBody>
+          <a:bodyPr wrap="square" lIns="0" tIns="0" rIns="0" bIns="0" rtlCol="0" anchor="ctr"/>
+          <a:lstStyle/>
+          <a:p>
+            <a:pPr algn="l" indent="0" marL="0">
+              <a:buNone/>
+            </a:pPr>
+            <a:r>
+              <a:rPr lang="en-US" sz="1300" b="1" dirty="0">
+                <a:solidFill>
+                  <a:srgbClr val="1C5A73"/>
+                </a:solidFill>
+                <a:latin typeface="Cambria" pitchFamily="34" charset="0"/>
+                <a:ea typeface="Cambria" pitchFamily="34" charset="-122"/>
+                <a:cs typeface="Cambria" pitchFamily="34" charset="-120"/>
+              </a:rPr>
+              <a:t>À lire avec prudence</a:t>
+            </a:r>
+            <a:endParaRPr lang="en-US" sz="1300" dirty="0"/>
+          </a:p>
+        </p:txBody>
+      </p:sp>
+      <p:sp>
+        <p:nvSpPr>
+          <p:cNvPr id="7" name="Text 4"/>
+          <p:cNvSpPr txBox="1"/>
+          <p:nvPr/>
+        </p:nvSpPr>
+        <p:spPr>
+          <a:xfrm>
+            <a:off x="8503920" y="2560320"/>
+            <a:ext cx="2834640" cy="3017520"/>
           </a:xfrm>
           <a:prstGeom prst="rect">
             <a:avLst/>
@@ -4527,28 +4616,57 @@
           <a:p>
             <a:pPr algn="l" indent="0" marL="0">
               <a:lnSpc>
-                <a:spcPct val="118000"/>
+                <a:spcPct val="125000"/>
               </a:lnSpc>
               <a:buNone/>
             </a:pPr>
             <a:r>
-              <a:rPr lang="en-US" sz="1100" dirty="0">
-                <a:solidFill>
-                  <a:srgbClr val="6C8089"/>
-                </a:solidFill>
-                <a:latin typeface="Calibri" pitchFamily="34" charset="0"/>
-                <a:ea typeface="Calibri" pitchFamily="34" charset="-122"/>
-                <a:cs typeface="Calibri" pitchFamily="34" charset="-120"/>
-              </a:rPr>
-              <a:t>Les deux produits se vendent séparément mais ont été conçus pour se renforcer : l'hydro-rétenteur prolonge la disponibilité de l'eau, le fertilisant valorise cette eau disponible sans dégrader davantage un sol déjà fragile.</a:t>
-            </a:r>
-            <a:endParaRPr lang="en-US" sz="1100" dirty="0"/>
-          </a:p>
-        </p:txBody>
-      </p:sp>
-      <p:sp>
-        <p:nvSpPr>
-          <p:cNvPr id="10" name="Text 8"/>
+              <a:rPr lang="en-US" sz="1200" dirty="0">
+                <a:solidFill>
+                  <a:srgbClr val="31424A"/>
+                </a:solidFill>
+                <a:latin typeface="Calibri" pitchFamily="34" charset="0"/>
+                <a:ea typeface="Calibri" pitchFamily="34" charset="-122"/>
+                <a:cs typeface="Calibri" pitchFamily="34" charset="-120"/>
+              </a:rPr>
+              <a:t>Fourchettes retenues par notre calculateur de dose, pour une culture conduite normalement avec EVERGREEN® à la plantation.</a:t>
+            </a:r>
+            <a:endParaRPr lang="en-US" sz="1200" dirty="0"/>
+          </a:p>
+          <a:p>
+            <a:pPr algn="l" indent="0" marL="0">
+              <a:lnSpc>
+                <a:spcPct val="125000"/>
+              </a:lnSpc>
+              <a:buNone/>
+            </a:pPr>
+            <a:endParaRPr lang="en-US" sz="1200" dirty="0"/>
+          </a:p>
+          <a:p>
+            <a:pPr algn="l" indent="0" marL="0">
+              <a:lnSpc>
+                <a:spcPct val="125000"/>
+              </a:lnSpc>
+              <a:buNone/>
+            </a:pPr>
+            <a:r>
+              <a:rPr lang="en-US" sz="1200" dirty="0">
+                <a:solidFill>
+                  <a:srgbClr val="31424A"/>
+                </a:solidFill>
+                <a:latin typeface="Calibri" pitchFamily="34" charset="0"/>
+                <a:ea typeface="Calibri" pitchFamily="34" charset="-122"/>
+                <a:cs typeface="Calibri" pitchFamily="34" charset="-120"/>
+              </a:rPr>
+              <a:t>Le résultat réel dépend du sol, du climat et de la conduite. Pour les céréales, aucun gain n'est avancé sans essai de terrain.</a:t>
+            </a:r>
+            <a:endParaRPr lang="en-US" sz="1200" dirty="0"/>
+          </a:p>
+        </p:txBody>
+      </p:sp>
+      <p:sp>
+        <p:nvSpPr>
+          <p:cNvPr id="8" name="Text 5"/>
           <p:cNvSpPr txBox="1"/>
           <p:nvPr/>
         </p:nvSpPr>
@@ -4589,7 +4707,7 @@
       </p:sp>
       <p:sp>
         <p:nvSpPr>
-          <p:cNvPr id="11" name="Text 9"/>
+          <p:cNvPr id="9" name="Text 6"/>
           <p:cNvSpPr txBox="1"/>
           <p:nvPr/>
         </p:nvSpPr>
@@ -4693,7 +4811,7 @@
                 <a:ea typeface="Calibri" pitchFamily="34" charset="-122"/>
                 <a:cs typeface="Calibri" pitchFamily="34" charset="-120"/>
               </a:rPr>
-              <a:t>Le reste de la gamme</a:t>
+              <a:t>NOTRE RÉPONSE</a:t>
             </a:r>
             <a:endParaRPr lang="en-US" sz="1150" dirty="0"/>
           </a:p>
@@ -4732,7 +4850,7 @@
                 <a:ea typeface="Cambria" pitchFamily="34" charset="-122"/>
                 <a:cs typeface="Cambria" pitchFamily="34" charset="-120"/>
               </a:rPr>
-              <a:t>Protéger les cultures, fixer les sols</a:t>
+              <a:t>Deux technologies, deux contraintes différentes</a:t>
             </a:r>
             <a:endParaRPr lang="en-US" sz="3000" dirty="0"/>
           </a:p>
@@ -4771,7 +4889,7 @@
                 <a:ea typeface="Cambria" pitchFamily="34" charset="-122"/>
                 <a:cs typeface="Cambria" pitchFamily="34" charset="-120"/>
               </a:rPr>
-              <a:t>NAPEMA® — protéger sans résidu</a:t>
+              <a:t>EVERGREEN® — retenir l'eau</a:t>
             </a:r>
             <a:endParaRPr lang="en-US" sz="1600" dirty="0"/>
           </a:p>
@@ -4817,7 +4935,7 @@
                 <a:ea typeface="Calibri" pitchFamily="34" charset="-122"/>
                 <a:cs typeface="Calibri" pitchFamily="34" charset="-120"/>
               </a:rPr>
-              <a:t>Lutte contre maladies, parasites, champignons et ravageurs, sans molécule de synthèse.</a:t>
+              <a:t>Hydro-rétenteur à base de potassium, placé dans la zone racinaire à la plantation ou à la reprise.</a:t>
             </a:r>
             <a:endParaRPr lang="en-US" sz="1350" dirty="0"/>
           </a:p>
@@ -4841,7 +4959,7 @@
                 <a:ea typeface="Calibri" pitchFamily="34" charset="-122"/>
                 <a:cs typeface="Calibri" pitchFamily="34" charset="-120"/>
               </a:rPr>
-              <a:t>Pulvérisation foliaire et racinaire, à effet préventif comme curatif.</a:t>
+              <a:t>Capte l'eau de pluie avant qu'elle ne ruisselle et la restitue à la plante pendant les séquences sèches entre deux saisons.</a:t>
             </a:r>
             <a:endParaRPr lang="en-US" sz="1350" dirty="0"/>
           </a:p>
@@ -4865,7 +4983,7 @@
                 <a:ea typeface="Calibri" pitchFamily="34" charset="-122"/>
                 <a:cs typeface="Calibri" pitchFamily="34" charset="-120"/>
               </a:rPr>
-              <a:t>Aucun résidu dans le sol, la plante ou l'air : pollinisateurs et auxiliaires préservés.</a:t>
+              <a:t>Capacité d'absorption de l'ordre de 300 fois son poids ; durée d'effet utile de 3 à 4 ans dans le sol.</a:t>
             </a:r>
             <a:endParaRPr lang="en-US" sz="1350" dirty="0"/>
           </a:p>
@@ -4889,7 +5007,7 @@
                 <a:ea typeface="Calibri" pitchFamily="34" charset="-122"/>
                 <a:cs typeface="Calibri" pitchFamily="34" charset="-120"/>
               </a:rPr>
-              <a:t>Formulé sur mesure pour un problème précis : cochenille, HLB des agrumes, nématodes.</a:t>
+              <a:t>Sur parcelle en pente, il agit là où l'aménagement anti-érosif seul ne suffit pas : à l'intérieur du sol.</a:t>
             </a:r>
             <a:endParaRPr lang="en-US" sz="1350" dirty="0"/>
           </a:p>
@@ -4928,7 +5046,7 @@
                 <a:ea typeface="Cambria" pitchFamily="34" charset="-122"/>
                 <a:cs typeface="Cambria" pitchFamily="34" charset="-120"/>
               </a:rPr>
-              <a:t>Paulownia ALTIFOLIA® — l'arbre des régions chaudes</a:t>
+              <a:t>ECOFERT® — nourrir sans épuiser</a:t>
             </a:r>
             <a:endParaRPr lang="en-US" sz="1600" dirty="0"/>
           </a:p>
@@ -4974,7 +5092,7 @@
                 <a:ea typeface="Calibri" pitchFamily="34" charset="-122"/>
                 <a:cs typeface="Calibri" pitchFamily="34" charset="-120"/>
               </a:rPr>
-              <a:t>13 à 15 m en six à huit ans, avec un tronc de gros diamètre.</a:t>
+              <a:t>Fertilisant en microdoses d'acides aminés, azote, phosphore et potassium, issu de ressources renouvelables.</a:t>
             </a:r>
             <a:endParaRPr lang="en-US" sz="1350" dirty="0"/>
           </a:p>
@@ -4998,7 +5116,7 @@
                 <a:ea typeface="Calibri" pitchFamily="34" charset="-122"/>
                 <a:cs typeface="Calibri" pitchFamily="34" charset="-120"/>
               </a:rPr>
-              <a:t>Associé à 100 g d'EVERGREEN® par plant, l'irrigation nécessaire diminue de 50 %.</a:t>
+              <a:t>Non chélatant : il n'appauvrit pas le complexe argilo-humique, déjà très entamé sur les sols décapés.</a:t>
             </a:r>
             <a:endParaRPr lang="en-US" sz="1350" dirty="0"/>
           </a:p>
@@ -5022,7 +5140,7 @@
                 <a:ea typeface="Calibri" pitchFamily="34" charset="-122"/>
                 <a:cs typeface="Calibri" pitchFamily="34" charset="-120"/>
               </a:rPr>
-              <a:t>Résiste de −25 °C à +45 °C ; son bois ne s'enflamme qu'à partir de 426 °C.</a:t>
+              <a:t>Certifié SOHISCERT et EU Bio — utile pour les filières café et cacao qui visent les primes de certification.</a:t>
             </a:r>
             <a:endParaRPr lang="en-US" sz="1350" dirty="0"/>
           </a:p>
@@ -5046,7 +5164,7 @@
                 <a:ea typeface="Calibri" pitchFamily="34" charset="-122"/>
                 <a:cs typeface="Calibri" pitchFamily="34" charset="-120"/>
               </a:rPr>
-              <a:t>Brise-vent, protection des sols contre l'érosion, 400 à 700 kg de miel par hectare.</a:t>
+              <a:t>1 à 4 flacons de 140 ml par hectare : un format transportable, compatible avec le morcellement des parcelles.</a:t>
             </a:r>
             <a:endParaRPr lang="en-US" sz="1350" dirty="0"/>
           </a:p>
@@ -5115,7 +5233,7 @@
                 <a:ea typeface="Calibri" pitchFamily="34" charset="-122"/>
                 <a:cs typeface="Calibri" pitchFamily="34" charset="-120"/>
               </a:rPr>
-              <a:t>Plants livrés en pot (25 à 30 cm), certifiés indemnes de maladies et remplacés sous garantie en cas de perte. Première coupe à la fin de la sixième année, bois valorisé autour de 400 à 450 € le m³.</a:t>
+              <a:t>Les deux produits se vendent séparément mais ont été conçus pour se renforcer : l'hydro-rétenteur prolonge la disponibilité de l'eau, le fertilisant valorise cette eau disponible sans dégrader davantage un sol déjà fragile.</a:t>
             </a:r>
             <a:endParaRPr lang="en-US" sz="1100" dirty="0"/>
           </a:p>
@@ -5268,7 +5386,7 @@
                 <a:ea typeface="Calibri" pitchFamily="34" charset="-122"/>
                 <a:cs typeface="Calibri" pitchFamily="34" charset="-120"/>
               </a:rPr>
-              <a:t>ORDRES DE GRANDEUR</a:t>
+              <a:t>Le reste de la gamme</a:t>
             </a:r>
             <a:endParaRPr lang="en-US" sz="1150" dirty="0"/>
           </a:p>
@@ -5307,42 +5425,340 @@
                 <a:ea typeface="Cambria" pitchFamily="34" charset="-122"/>
                 <a:cs typeface="Cambria" pitchFamily="34" charset="-120"/>
               </a:rPr>
-              <a:t>Économie d'eau attendue selon le mode d'irrigation</a:t>
+              <a:t>Protéger les cultures, fixer les sols</a:t>
             </a:r>
             <a:endParaRPr lang="en-US" sz="3000" dirty="0"/>
           </a:p>
         </p:txBody>
       </p:sp>
-      <p:graphicFrame>
-        <p:nvGraphicFramePr>
-          <p:cNvPr id="4" name="Chart 0" descr=""/>
-          <p:cNvGraphicFramePr/>
-          <p:nvPr/>
-        </p:nvGraphicFramePr>
-        <p:xfrm>
-          <a:off x="594360" y="1783080"/>
-          <a:ext cx="7360920" cy="3977640"/>
-        </p:xfrm>
-        <a:graphic xmlns:a="http://schemas.openxmlformats.org/drawingml/2006/main">
-          <a:graphicData uri="http://schemas.openxmlformats.org/drawingml/2006/chart">
-            <c:chart xmlns:c="http://schemas.openxmlformats.org/drawingml/2006/chart" r:id="rId1"/>
-          </a:graphicData>
-        </a:graphic>
-      </p:graphicFrame>
-      <p:sp>
-        <p:nvSpPr>
-          <p:cNvPr id="5" name="Shape 2"/>
+      <p:sp>
+        <p:nvSpPr>
+          <p:cNvPr id="4" name="Text 2"/>
+          <p:cNvSpPr txBox="1"/>
+          <p:nvPr/>
+        </p:nvSpPr>
+        <p:spPr>
+          <a:xfrm>
+            <a:off x="594360" y="1783080"/>
+            <a:ext cx="5227168" cy="411480"/>
+          </a:xfrm>
+          <a:prstGeom prst="rect">
+            <a:avLst/>
+          </a:prstGeom>
+          <a:noFill/>
+          <a:ln/>
+        </p:spPr>
+        <p:txBody>
+          <a:bodyPr wrap="square" lIns="0" tIns="0" rIns="0" bIns="0" rtlCol="0" anchor="ctr"/>
+          <a:lstStyle/>
+          <a:p>
+            <a:pPr algn="l" indent="0" marL="0">
+              <a:buNone/>
+            </a:pPr>
+            <a:r>
+              <a:rPr lang="en-US" sz="1600" b="1" dirty="0">
+                <a:solidFill>
+                  <a:srgbClr val="1C5A73"/>
+                </a:solidFill>
+                <a:latin typeface="Cambria" pitchFamily="34" charset="0"/>
+                <a:ea typeface="Cambria" pitchFamily="34" charset="-122"/>
+                <a:cs typeface="Cambria" pitchFamily="34" charset="-120"/>
+              </a:rPr>
+              <a:t>NAPEMA® — protéger sans résidu</a:t>
+            </a:r>
+            <a:endParaRPr lang="en-US" sz="1600" dirty="0"/>
+          </a:p>
+        </p:txBody>
+      </p:sp>
+      <p:sp>
+        <p:nvSpPr>
+          <p:cNvPr id="5" name="Text 3"/>
+          <p:cNvSpPr txBox="1"/>
+          <p:nvPr/>
+        </p:nvSpPr>
+        <p:spPr>
+          <a:xfrm>
+            <a:off x="594360" y="2286000"/>
+            <a:ext cx="5227168" cy="2468880"/>
+          </a:xfrm>
+          <a:prstGeom prst="rect">
+            <a:avLst/>
+          </a:prstGeom>
+          <a:noFill/>
+          <a:ln/>
+        </p:spPr>
+        <p:txBody>
+          <a:bodyPr wrap="square" lIns="0" tIns="0" rIns="0" bIns="0" rtlCol="0" anchor="t"/>
+          <a:lstStyle/>
+          <a:p>
+            <a:pPr algn="l" marL="342900" indent="-342900">
+              <a:lnSpc>
+                <a:spcPct val="122000"/>
+              </a:lnSpc>
+              <a:spcAft>
+                <a:spcPts val="1000"/>
+              </a:spcAft>
+              <a:buSzPct val="100000"/>
+              <a:buChar char="•"/>
+            </a:pPr>
+            <a:r>
+              <a:rPr lang="en-US" sz="1350" dirty="0">
+                <a:solidFill>
+                  <a:srgbClr val="31424A"/>
+                </a:solidFill>
+                <a:latin typeface="Calibri" pitchFamily="34" charset="0"/>
+                <a:ea typeface="Calibri" pitchFamily="34" charset="-122"/>
+                <a:cs typeface="Calibri" pitchFamily="34" charset="-120"/>
+              </a:rPr>
+              <a:t>Lutte contre maladies, parasites, champignons et ravageurs, sans molécule de synthèse.</a:t>
+            </a:r>
+            <a:endParaRPr lang="en-US" sz="1350" dirty="0"/>
+          </a:p>
+          <a:p>
+            <a:pPr algn="l" marL="342900" indent="-342900">
+              <a:lnSpc>
+                <a:spcPct val="122000"/>
+              </a:lnSpc>
+              <a:spcAft>
+                <a:spcPts val="1000"/>
+              </a:spcAft>
+              <a:buSzPct val="100000"/>
+              <a:buChar char="•"/>
+            </a:pPr>
+            <a:r>
+              <a:rPr lang="en-US" sz="1350" dirty="0">
+                <a:solidFill>
+                  <a:srgbClr val="31424A"/>
+                </a:solidFill>
+                <a:latin typeface="Calibri" pitchFamily="34" charset="0"/>
+                <a:ea typeface="Calibri" pitchFamily="34" charset="-122"/>
+                <a:cs typeface="Calibri" pitchFamily="34" charset="-120"/>
+              </a:rPr>
+              <a:t>Pulvérisation foliaire et racinaire, à effet préventif comme curatif.</a:t>
+            </a:r>
+            <a:endParaRPr lang="en-US" sz="1350" dirty="0"/>
+          </a:p>
+          <a:p>
+            <a:pPr algn="l" marL="342900" indent="-342900">
+              <a:lnSpc>
+                <a:spcPct val="122000"/>
+              </a:lnSpc>
+              <a:spcAft>
+                <a:spcPts val="1000"/>
+              </a:spcAft>
+              <a:buSzPct val="100000"/>
+              <a:buChar char="•"/>
+            </a:pPr>
+            <a:r>
+              <a:rPr lang="en-US" sz="1350" dirty="0">
+                <a:solidFill>
+                  <a:srgbClr val="31424A"/>
+                </a:solidFill>
+                <a:latin typeface="Calibri" pitchFamily="34" charset="0"/>
+                <a:ea typeface="Calibri" pitchFamily="34" charset="-122"/>
+                <a:cs typeface="Calibri" pitchFamily="34" charset="-120"/>
+              </a:rPr>
+              <a:t>Aucun résidu dans le sol, la plante ou l'air : pollinisateurs et auxiliaires préservés.</a:t>
+            </a:r>
+            <a:endParaRPr lang="en-US" sz="1350" dirty="0"/>
+          </a:p>
+          <a:p>
+            <a:pPr algn="l" marL="342900" indent="-342900">
+              <a:lnSpc>
+                <a:spcPct val="122000"/>
+              </a:lnSpc>
+              <a:spcAft>
+                <a:spcPts val="1000"/>
+              </a:spcAft>
+              <a:buSzPct val="100000"/>
+              <a:buChar char="•"/>
+            </a:pPr>
+            <a:r>
+              <a:rPr lang="en-US" sz="1350" dirty="0">
+                <a:solidFill>
+                  <a:srgbClr val="31424A"/>
+                </a:solidFill>
+                <a:latin typeface="Calibri" pitchFamily="34" charset="0"/>
+                <a:ea typeface="Calibri" pitchFamily="34" charset="-122"/>
+                <a:cs typeface="Calibri" pitchFamily="34" charset="-120"/>
+              </a:rPr>
+              <a:t>Formulé sur mesure pour un problème précis : cochenille, HLB des agrumes, nématodes.</a:t>
+            </a:r>
+            <a:endParaRPr lang="en-US" sz="1350" dirty="0"/>
+          </a:p>
+        </p:txBody>
+      </p:sp>
+      <p:sp>
+        <p:nvSpPr>
+          <p:cNvPr id="6" name="Text 4"/>
+          <p:cNvSpPr txBox="1"/>
+          <p:nvPr/>
+        </p:nvSpPr>
+        <p:spPr>
+          <a:xfrm>
+            <a:off x="6370168" y="1783080"/>
+            <a:ext cx="5227168" cy="411480"/>
+          </a:xfrm>
+          <a:prstGeom prst="rect">
+            <a:avLst/>
+          </a:prstGeom>
+          <a:noFill/>
+          <a:ln/>
+        </p:spPr>
+        <p:txBody>
+          <a:bodyPr wrap="square" lIns="0" tIns="0" rIns="0" bIns="0" rtlCol="0" anchor="ctr"/>
+          <a:lstStyle/>
+          <a:p>
+            <a:pPr algn="l" indent="0" marL="0">
+              <a:buNone/>
+            </a:pPr>
+            <a:r>
+              <a:rPr lang="en-US" sz="1600" b="1" dirty="0">
+                <a:solidFill>
+                  <a:srgbClr val="1C5A73"/>
+                </a:solidFill>
+                <a:latin typeface="Cambria" pitchFamily="34" charset="0"/>
+                <a:ea typeface="Cambria" pitchFamily="34" charset="-122"/>
+                <a:cs typeface="Cambria" pitchFamily="34" charset="-120"/>
+              </a:rPr>
+              <a:t>Paulownia ALTIFOLIA® — l'arbre des régions chaudes</a:t>
+            </a:r>
+            <a:endParaRPr lang="en-US" sz="1600" dirty="0"/>
+          </a:p>
+        </p:txBody>
+      </p:sp>
+      <p:sp>
+        <p:nvSpPr>
+          <p:cNvPr id="7" name="Text 5"/>
+          <p:cNvSpPr txBox="1"/>
+          <p:nvPr/>
+        </p:nvSpPr>
+        <p:spPr>
+          <a:xfrm>
+            <a:off x="6370168" y="2286000"/>
+            <a:ext cx="5227168" cy="2468880"/>
+          </a:xfrm>
+          <a:prstGeom prst="rect">
+            <a:avLst/>
+          </a:prstGeom>
+          <a:noFill/>
+          <a:ln/>
+        </p:spPr>
+        <p:txBody>
+          <a:bodyPr wrap="square" lIns="0" tIns="0" rIns="0" bIns="0" rtlCol="0" anchor="t"/>
+          <a:lstStyle/>
+          <a:p>
+            <a:pPr algn="l" marL="342900" indent="-342900">
+              <a:lnSpc>
+                <a:spcPct val="122000"/>
+              </a:lnSpc>
+              <a:spcAft>
+                <a:spcPts val="1000"/>
+              </a:spcAft>
+              <a:buSzPct val="100000"/>
+              <a:buChar char="•"/>
+            </a:pPr>
+            <a:r>
+              <a:rPr lang="en-US" sz="1350" dirty="0">
+                <a:solidFill>
+                  <a:srgbClr val="31424A"/>
+                </a:solidFill>
+                <a:latin typeface="Calibri" pitchFamily="34" charset="0"/>
+                <a:ea typeface="Calibri" pitchFamily="34" charset="-122"/>
+                <a:cs typeface="Calibri" pitchFamily="34" charset="-120"/>
+              </a:rPr>
+              <a:t>13 à 15 m en six à huit ans, avec un tronc de gros diamètre.</a:t>
+            </a:r>
+            <a:endParaRPr lang="en-US" sz="1350" dirty="0"/>
+          </a:p>
+          <a:p>
+            <a:pPr algn="l" marL="342900" indent="-342900">
+              <a:lnSpc>
+                <a:spcPct val="122000"/>
+              </a:lnSpc>
+              <a:spcAft>
+                <a:spcPts val="1000"/>
+              </a:spcAft>
+              <a:buSzPct val="100000"/>
+              <a:buChar char="•"/>
+            </a:pPr>
+            <a:r>
+              <a:rPr lang="en-US" sz="1350" dirty="0">
+                <a:solidFill>
+                  <a:srgbClr val="31424A"/>
+                </a:solidFill>
+                <a:latin typeface="Calibri" pitchFamily="34" charset="0"/>
+                <a:ea typeface="Calibri" pitchFamily="34" charset="-122"/>
+                <a:cs typeface="Calibri" pitchFamily="34" charset="-120"/>
+              </a:rPr>
+              <a:t>Associé à 100 g d'EVERGREEN® par plant, l'irrigation nécessaire diminue de 50 %.</a:t>
+            </a:r>
+            <a:endParaRPr lang="en-US" sz="1350" dirty="0"/>
+          </a:p>
+          <a:p>
+            <a:pPr algn="l" marL="342900" indent="-342900">
+              <a:lnSpc>
+                <a:spcPct val="122000"/>
+              </a:lnSpc>
+              <a:spcAft>
+                <a:spcPts val="1000"/>
+              </a:spcAft>
+              <a:buSzPct val="100000"/>
+              <a:buChar char="•"/>
+            </a:pPr>
+            <a:r>
+              <a:rPr lang="en-US" sz="1350" dirty="0">
+                <a:solidFill>
+                  <a:srgbClr val="31424A"/>
+                </a:solidFill>
+                <a:latin typeface="Calibri" pitchFamily="34" charset="0"/>
+                <a:ea typeface="Calibri" pitchFamily="34" charset="-122"/>
+                <a:cs typeface="Calibri" pitchFamily="34" charset="-120"/>
+              </a:rPr>
+              <a:t>Résiste de −25 °C à +45 °C ; son bois ne s'enflamme qu'à partir de 426 °C.</a:t>
+            </a:r>
+            <a:endParaRPr lang="en-US" sz="1350" dirty="0"/>
+          </a:p>
+          <a:p>
+            <a:pPr algn="l" marL="342900" indent="-342900">
+              <a:lnSpc>
+                <a:spcPct val="122000"/>
+              </a:lnSpc>
+              <a:spcAft>
+                <a:spcPts val="1000"/>
+              </a:spcAft>
+              <a:buSzPct val="100000"/>
+              <a:buChar char="•"/>
+            </a:pPr>
+            <a:r>
+              <a:rPr lang="en-US" sz="1350" dirty="0">
+                <a:solidFill>
+                  <a:srgbClr val="31424A"/>
+                </a:solidFill>
+                <a:latin typeface="Calibri" pitchFamily="34" charset="0"/>
+                <a:ea typeface="Calibri" pitchFamily="34" charset="-122"/>
+                <a:cs typeface="Calibri" pitchFamily="34" charset="-120"/>
+              </a:rPr>
+              <a:t>Brise-vent, protection des sols contre l'érosion, 400 à 700 kg de miel par hectare.</a:t>
+            </a:r>
+            <a:endParaRPr lang="en-US" sz="1350" dirty="0"/>
+          </a:p>
+        </p:txBody>
+      </p:sp>
+      <p:sp>
+        <p:nvSpPr>
+          <p:cNvPr id="8" name="Shape 6"/>
           <p:cNvSpPr/>
           <p:nvPr/>
         </p:nvSpPr>
         <p:spPr>
           <a:xfrm>
-            <a:off x="8275320" y="1783080"/>
-            <a:ext cx="3291840" cy="3977640"/>
+            <a:off x="594360" y="4846320"/>
+            <a:ext cx="11002975" cy="960120"/>
           </a:xfrm>
           <a:prstGeom prst="roundRect">
             <a:avLst>
-              <a:gd name="adj" fmla="val 2778"/>
+              <a:gd name="adj" fmla="val 7619"/>
             </a:avLst>
           </a:prstGeom>
           <a:solidFill>
@@ -5358,53 +5774,14 @@
       </p:sp>
       <p:sp>
         <p:nvSpPr>
-          <p:cNvPr id="6" name="Text 3"/>
-          <p:cNvSpPr txBox="1"/>
-          <p:nvPr/>
-        </p:nvSpPr>
-        <p:spPr>
-          <a:xfrm>
-            <a:off x="8503920" y="2011680"/>
-            <a:ext cx="2834640" cy="457200"/>
-          </a:xfrm>
-          <a:prstGeom prst="rect">
-            <a:avLst/>
-          </a:prstGeom>
-          <a:noFill/>
-          <a:ln/>
-        </p:spPr>
-        <p:txBody>
-          <a:bodyPr wrap="square" lIns="0" tIns="0" rIns="0" bIns="0" rtlCol="0" anchor="ctr"/>
-          <a:lstStyle/>
-          <a:p>
-            <a:pPr algn="l" indent="0" marL="0">
-              <a:buNone/>
-            </a:pPr>
-            <a:r>
-              <a:rPr lang="en-US" sz="1300" b="1" dirty="0">
-                <a:solidFill>
-                  <a:srgbClr val="1C5A73"/>
-                </a:solidFill>
-                <a:latin typeface="Cambria" pitchFamily="34" charset="0"/>
-                <a:ea typeface="Cambria" pitchFamily="34" charset="-122"/>
-                <a:cs typeface="Cambria" pitchFamily="34" charset="-120"/>
-              </a:rPr>
-              <a:t>À lire avec prudence</a:t>
-            </a:r>
-            <a:endParaRPr lang="en-US" sz="1300" dirty="0"/>
-          </a:p>
-        </p:txBody>
-      </p:sp>
-      <p:sp>
-        <p:nvSpPr>
-          <p:cNvPr id="7" name="Text 4"/>
-          <p:cNvSpPr txBox="1"/>
-          <p:nvPr/>
-        </p:nvSpPr>
-        <p:spPr>
-          <a:xfrm>
-            <a:off x="8503920" y="2560320"/>
-            <a:ext cx="2834640" cy="3017520"/>
+          <p:cNvPr id="9" name="Text 7"/>
+          <p:cNvSpPr txBox="1"/>
+          <p:nvPr/>
+        </p:nvSpPr>
+        <p:spPr>
+          <a:xfrm>
+            <a:off x="822960" y="4983480"/>
+            <a:ext cx="10545775" cy="713232"/>
           </a:xfrm>
           <a:prstGeom prst="rect">
             <a:avLst/>
@@ -5418,57 +5795,28 @@
           <a:p>
             <a:pPr algn="l" indent="0" marL="0">
               <a:lnSpc>
-                <a:spcPct val="125000"/>
+                <a:spcPct val="118000"/>
               </a:lnSpc>
               <a:buNone/>
             </a:pPr>
             <a:r>
-              <a:rPr lang="en-US" sz="1200" dirty="0">
-                <a:solidFill>
-                  <a:srgbClr val="31424A"/>
-                </a:solidFill>
-                <a:latin typeface="Calibri" pitchFamily="34" charset="0"/>
-                <a:ea typeface="Calibri" pitchFamily="34" charset="-122"/>
-                <a:cs typeface="Calibri" pitchFamily="34" charset="-120"/>
-              </a:rPr>
-              <a:t>Ces fourchettes sont indicatives et fondées sur les gains documentés de nos hydro-rétenteurs.</a:t>
-            </a:r>
-            <a:endParaRPr lang="en-US" sz="1200" dirty="0"/>
-          </a:p>
-          <a:p>
-            <a:pPr algn="l" indent="0" marL="0">
-              <a:lnSpc>
-                <a:spcPct val="125000"/>
-              </a:lnSpc>
-              <a:buNone/>
-            </a:pPr>
-            <a:endParaRPr lang="en-US" sz="1200" dirty="0"/>
-          </a:p>
-          <a:p>
-            <a:pPr algn="l" indent="0" marL="0">
-              <a:lnSpc>
-                <a:spcPct val="125000"/>
-              </a:lnSpc>
-              <a:buNone/>
-            </a:pPr>
-            <a:r>
-              <a:rPr lang="en-US" sz="1200" dirty="0">
-                <a:solidFill>
-                  <a:srgbClr val="31424A"/>
-                </a:solidFill>
-                <a:latin typeface="Calibri" pitchFamily="34" charset="0"/>
-                <a:ea typeface="Calibri" pitchFamily="34" charset="-122"/>
-                <a:cs typeface="Calibri" pitchFamily="34" charset="-120"/>
-              </a:rPr>
-              <a:t>Le résultat réel dépend du sol, du climat et de la culture. Ces chiffres donnent un ordre de grandeur : ils ne constituent en aucun cas une valeur garantie, contractuelle ou absolue.</a:t>
-            </a:r>
-            <a:endParaRPr lang="en-US" sz="1200" dirty="0"/>
-          </a:p>
-        </p:txBody>
-      </p:sp>
-      <p:sp>
-        <p:nvSpPr>
-          <p:cNvPr id="8" name="Text 5"/>
+              <a:rPr lang="en-US" sz="1100" dirty="0">
+                <a:solidFill>
+                  <a:srgbClr val="6C8089"/>
+                </a:solidFill>
+                <a:latin typeface="Calibri" pitchFamily="34" charset="0"/>
+                <a:ea typeface="Calibri" pitchFamily="34" charset="-122"/>
+                <a:cs typeface="Calibri" pitchFamily="34" charset="-120"/>
+              </a:rPr>
+              <a:t>Plants livrés en pot (25 à 30 cm), certifiés indemnes de maladies et remplacés sous garantie en cas de perte. Première coupe à la fin de la sixième année, bois valorisé autour de 400 à 450 € le m³.</a:t>
+            </a:r>
+            <a:endParaRPr lang="en-US" sz="1100" dirty="0"/>
+          </a:p>
+        </p:txBody>
+      </p:sp>
+      <p:sp>
+        <p:nvSpPr>
+          <p:cNvPr id="10" name="Text 8"/>
           <p:cNvSpPr txBox="1"/>
           <p:nvPr/>
         </p:nvSpPr>
@@ -5509,7 +5857,7 @@
       </p:sp>
       <p:sp>
         <p:nvSpPr>
-          <p:cNvPr id="9" name="Text 6"/>
+          <p:cNvPr id="11" name="Text 9"/>
           <p:cNvSpPr txBox="1"/>
           <p:nvPr/>
         </p:nvSpPr>
@@ -5613,7 +5961,7 @@
                 <a:ea typeface="Calibri" pitchFamily="34" charset="-122"/>
                 <a:cs typeface="Calibri" pitchFamily="34" charset="-120"/>
               </a:rPr>
-              <a:t>TROIS TERRAINS PRIORITAIRES</a:t>
+              <a:t>ORDRES DE GRANDEUR</a:t>
             </a:r>
             <a:endParaRPr lang="en-US" sz="1150" dirty="0"/>
           </a:p>
@@ -5652,26 +6000,42 @@
                 <a:ea typeface="Cambria" pitchFamily="34" charset="-122"/>
                 <a:cs typeface="Cambria" pitchFamily="34" charset="-120"/>
               </a:rPr>
-              <a:t>Où engager les premiers essais</a:t>
+              <a:t>Économie d'eau attendue selon le mode d'irrigation</a:t>
             </a:r>
             <a:endParaRPr lang="en-US" sz="3000" dirty="0"/>
           </a:p>
         </p:txBody>
       </p:sp>
-      <p:sp>
-        <p:nvSpPr>
-          <p:cNvPr id="4" name="Shape 2"/>
+      <p:graphicFrame>
+        <p:nvGraphicFramePr>
+          <p:cNvPr id="4" name="Chart 0" descr=""/>
+          <p:cNvGraphicFramePr/>
+          <p:nvPr/>
+        </p:nvGraphicFramePr>
+        <p:xfrm>
+          <a:off x="594360" y="1783080"/>
+          <a:ext cx="7360920" cy="3977640"/>
+        </p:xfrm>
+        <a:graphic xmlns:a="http://schemas.openxmlformats.org/drawingml/2006/main">
+          <a:graphicData uri="http://schemas.openxmlformats.org/drawingml/2006/chart">
+            <c:chart xmlns:c="http://schemas.openxmlformats.org/drawingml/2006/chart" r:id="rId1"/>
+          </a:graphicData>
+        </a:graphic>
+      </p:graphicFrame>
+      <p:sp>
+        <p:nvSpPr>
+          <p:cNvPr id="5" name="Shape 2"/>
           <p:cNvSpPr/>
           <p:nvPr/>
         </p:nvSpPr>
         <p:spPr>
           <a:xfrm>
-            <a:off x="594360" y="1783080"/>
-            <a:ext cx="3472586" cy="4069080"/>
+            <a:off x="8275320" y="1783080"/>
+            <a:ext cx="3291840" cy="3977640"/>
           </a:xfrm>
           <a:prstGeom prst="roundRect">
             <a:avLst>
-              <a:gd name="adj" fmla="val 2633"/>
+              <a:gd name="adj" fmla="val 2778"/>
             </a:avLst>
           </a:prstGeom>
           <a:solidFill>
@@ -5685,30 +6049,6 @@
           </a:ln>
         </p:spPr>
       </p:sp>
-      <p:pic>
-        <p:nvPicPr>
-          <p:cNvPr id="5" name="Image 0" descr="preencoded.png">    </p:cNvPr>
-          <p:cNvPicPr>
-            <a:picLocks noChangeAspect="1"/>
-          </p:cNvPicPr>
-          <p:nvPr/>
-        </p:nvPicPr>
-        <p:blipFill>
-          <a:blip r:embed="rId1"/>
-          <a:stretch>
-            <a:fillRect/>
-          </a:stretch>
-        </p:blipFill>
-        <p:spPr>
-          <a:xfrm>
-            <a:off x="594360" y="1783080"/>
-            <a:ext cx="3472586" cy="1691640"/>
-          </a:xfrm>
-          <a:prstGeom prst="rect">
-            <a:avLst/>
-          </a:prstGeom>
-        </p:spPr>
-      </p:pic>
       <p:sp>
         <p:nvSpPr>
           <p:cNvPr id="6" name="Text 3"/>
@@ -5717,8 +6057,8 @@
         </p:nvSpPr>
         <p:spPr>
           <a:xfrm>
-            <a:off x="795528" y="3639312"/>
-            <a:ext cx="3070250" cy="384048"/>
+            <a:off x="8503920" y="2011680"/>
+            <a:ext cx="2834640" cy="457200"/>
           </a:xfrm>
           <a:prstGeom prst="rect">
             <a:avLst/>
@@ -5734,7 +6074,7 @@
               <a:buNone/>
             </a:pPr>
             <a:r>
-              <a:rPr lang="en-US" sz="1500" b="1" dirty="0">
+              <a:rPr lang="en-US" sz="1300" b="1" dirty="0">
                 <a:solidFill>
                   <a:srgbClr val="1C5A73"/>
                 </a:solidFill>
@@ -5742,9 +6082,9 @@
                 <a:ea typeface="Cambria" pitchFamily="34" charset="-122"/>
                 <a:cs typeface="Cambria" pitchFamily="34" charset="-120"/>
               </a:rPr>
-              <a:t>Vallée de l'Artibonite</a:t>
-            </a:r>
-            <a:endParaRPr lang="en-US" sz="1500" dirty="0"/>
+              <a:t>À lire avec prudence</a:t>
+            </a:r>
+            <a:endParaRPr lang="en-US" sz="1300" dirty="0"/>
           </a:p>
         </p:txBody>
       </p:sp>
@@ -5756,580 +6096,72 @@
         </p:nvSpPr>
         <p:spPr>
           <a:xfrm>
-            <a:off x="795528" y="4041648"/>
-            <a:ext cx="3070250" cy="329184"/>
-          </a:xfrm>
-          <a:prstGeom prst="rect">
-            <a:avLst/>
-          </a:prstGeom>
-          <a:noFill/>
-          <a:ln/>
-        </p:spPr>
-        <p:txBody>
-          <a:bodyPr wrap="square" lIns="0" tIns="0" rIns="0" bIns="0" rtlCol="0" anchor="ctr"/>
+            <a:off x="8503920" y="2560320"/>
+            <a:ext cx="2834640" cy="3017520"/>
+          </a:xfrm>
+          <a:prstGeom prst="rect">
+            <a:avLst/>
+          </a:prstGeom>
+          <a:noFill/>
+          <a:ln/>
+        </p:spPr>
+        <p:txBody>
+          <a:bodyPr wrap="square" lIns="0" tIns="0" rIns="0" bIns="0" rtlCol="0" anchor="t"/>
           <a:lstStyle/>
           <a:p>
             <a:pPr algn="l" indent="0" marL="0">
-              <a:buNone/>
-            </a:pPr>
-            <a:r>
-              <a:rPr lang="en-US" sz="1250" b="1" dirty="0">
-                <a:solidFill>
-                  <a:srgbClr val="A3701A"/>
-                </a:solidFill>
-                <a:latin typeface="Calibri" pitchFamily="34" charset="0"/>
-                <a:ea typeface="Calibri" pitchFamily="34" charset="-122"/>
-                <a:cs typeface="Calibri" pitchFamily="34" charset="-120"/>
-              </a:rPr>
-              <a:t>Le grenier à riz du pays</a:t>
-            </a:r>
-            <a:endParaRPr lang="en-US" sz="1250" dirty="0"/>
+              <a:lnSpc>
+                <a:spcPct val="125000"/>
+              </a:lnSpc>
+              <a:buNone/>
+            </a:pPr>
+            <a:r>
+              <a:rPr lang="en-US" sz="1200" dirty="0">
+                <a:solidFill>
+                  <a:srgbClr val="31424A"/>
+                </a:solidFill>
+                <a:latin typeface="Calibri" pitchFamily="34" charset="0"/>
+                <a:ea typeface="Calibri" pitchFamily="34" charset="-122"/>
+                <a:cs typeface="Calibri" pitchFamily="34" charset="-120"/>
+              </a:rPr>
+              <a:t>Ces fourchettes sont indicatives et fondées sur les gains documentés de nos hydro-rétenteurs.</a:t>
+            </a:r>
+            <a:endParaRPr lang="en-US" sz="1200" dirty="0"/>
+          </a:p>
+          <a:p>
+            <a:pPr algn="l" indent="0" marL="0">
+              <a:lnSpc>
+                <a:spcPct val="125000"/>
+              </a:lnSpc>
+              <a:buNone/>
+            </a:pPr>
+            <a:endParaRPr lang="en-US" sz="1200" dirty="0"/>
+          </a:p>
+          <a:p>
+            <a:pPr algn="l" indent="0" marL="0">
+              <a:lnSpc>
+                <a:spcPct val="125000"/>
+              </a:lnSpc>
+              <a:buNone/>
+            </a:pPr>
+            <a:r>
+              <a:rPr lang="en-US" sz="1200" dirty="0">
+                <a:solidFill>
+                  <a:srgbClr val="31424A"/>
+                </a:solidFill>
+                <a:latin typeface="Calibri" pitchFamily="34" charset="0"/>
+                <a:ea typeface="Calibri" pitchFamily="34" charset="-122"/>
+                <a:cs typeface="Calibri" pitchFamily="34" charset="-120"/>
+              </a:rPr>
+              <a:t>Le résultat réel dépend du sol, du climat et de la culture. Ces chiffres donnent un ordre de grandeur : ils ne constituent en aucun cas une valeur garantie, contractuelle ou absolue.</a:t>
+            </a:r>
+            <a:endParaRPr lang="en-US" sz="1200" dirty="0"/>
           </a:p>
         </p:txBody>
       </p:sp>
       <p:sp>
         <p:nvSpPr>
           <p:cNvPr id="8" name="Text 5"/>
-          <p:cNvSpPr txBox="1"/>
-          <p:nvPr/>
-        </p:nvSpPr>
-        <p:spPr>
-          <a:xfrm>
-            <a:off x="795528" y="4407408"/>
-            <a:ext cx="3070250" cy="1280160"/>
-          </a:xfrm>
-          <a:prstGeom prst="rect">
-            <a:avLst/>
-          </a:prstGeom>
-          <a:noFill/>
-          <a:ln/>
-        </p:spPr>
-        <p:txBody>
-          <a:bodyPr wrap="square" lIns="0" tIns="0" rIns="0" bIns="0" rtlCol="0" anchor="t"/>
-          <a:lstStyle/>
-          <a:p>
-            <a:pPr algn="l" marL="342900" indent="-342900">
-              <a:lnSpc>
-                <a:spcPct val="116000"/>
-              </a:lnSpc>
-              <a:spcAft>
-                <a:spcPts val="700"/>
-              </a:spcAft>
-              <a:buSzPct val="100000"/>
-              <a:buChar char="•"/>
-            </a:pPr>
-            <a:r>
-              <a:rPr lang="en-US" sz="1150" dirty="0">
-                <a:solidFill>
-                  <a:srgbClr val="31424A"/>
-                </a:solidFill>
-                <a:latin typeface="Calibri" pitchFamily="34" charset="0"/>
-                <a:ea typeface="Calibri" pitchFamily="34" charset="-122"/>
-                <a:cs typeface="Calibri" pitchFamily="34" charset="-120"/>
-              </a:rPr>
-              <a:t>Le plus grand périmètre irrigué d'Haïti, alimenté par le fleuve Artibonite.</a:t>
-            </a:r>
-            <a:endParaRPr lang="en-US" sz="1150" dirty="0"/>
-          </a:p>
-          <a:p>
-            <a:pPr algn="l" marL="342900" indent="-342900">
-              <a:lnSpc>
-                <a:spcPct val="116000"/>
-              </a:lnSpc>
-              <a:spcAft>
-                <a:spcPts val="700"/>
-              </a:spcAft>
-              <a:buSzPct val="100000"/>
-              <a:buChar char="•"/>
-            </a:pPr>
-            <a:r>
-              <a:rPr lang="en-US" sz="1150" dirty="0">
-                <a:solidFill>
-                  <a:srgbClr val="31424A"/>
-                </a:solidFill>
-                <a:latin typeface="Calibri" pitchFamily="34" charset="0"/>
-                <a:ea typeface="Calibri" pitchFamily="34" charset="-122"/>
-                <a:cs typeface="Calibri" pitchFamily="34" charset="-120"/>
-              </a:rPr>
-              <a:t>Riz conduit en submersion : c'est le mode d'irrigation où la marge d'économie est la plus large.</a:t>
-            </a:r>
-            <a:endParaRPr lang="en-US" sz="1150" dirty="0"/>
-          </a:p>
-          <a:p>
-            <a:pPr algn="l" marL="342900" indent="-342900">
-              <a:lnSpc>
-                <a:spcPct val="116000"/>
-              </a:lnSpc>
-              <a:spcAft>
-                <a:spcPts val="700"/>
-              </a:spcAft>
-              <a:buSzPct val="100000"/>
-              <a:buChar char="•"/>
-            </a:pPr>
-            <a:r>
-              <a:rPr lang="en-US" sz="1150" dirty="0">
-                <a:solidFill>
-                  <a:srgbClr val="31424A"/>
-                </a:solidFill>
-                <a:latin typeface="Calibri" pitchFamily="34" charset="0"/>
-                <a:ea typeface="Calibri" pitchFamily="34" charset="-122"/>
-                <a:cs typeface="Calibri" pitchFamily="34" charset="-120"/>
-              </a:rPr>
-              <a:t>Réseau de canaux ancien et partiellement dégradé, d'où des inégalités d'accès à l'eau en bout de parcours.</a:t>
-            </a:r>
-            <a:endParaRPr lang="en-US" sz="1150" dirty="0"/>
-          </a:p>
-        </p:txBody>
-      </p:sp>
-      <p:sp>
-        <p:nvSpPr>
-          <p:cNvPr id="9" name="Shape 6"/>
-          <p:cNvSpPr/>
-          <p:nvPr/>
-        </p:nvSpPr>
-        <p:spPr>
-          <a:xfrm>
-            <a:off x="4359554" y="1783080"/>
-            <a:ext cx="3472586" cy="4069080"/>
-          </a:xfrm>
-          <a:prstGeom prst="roundRect">
-            <a:avLst>
-              <a:gd name="adj" fmla="val 2633"/>
-            </a:avLst>
-          </a:prstGeom>
-          <a:solidFill>
-            <a:srgbClr val="EDF3F5"/>
-          </a:solidFill>
-          <a:ln w="9525">
-            <a:solidFill>
-              <a:srgbClr val="D6E2E7"/>
-            </a:solidFill>
-            <a:prstDash val="solid"/>
-          </a:ln>
-        </p:spPr>
-      </p:sp>
-      <p:pic>
-        <p:nvPicPr>
-          <p:cNvPr id="10" name="Image 1" descr="preencoded.png">    </p:cNvPr>
-          <p:cNvPicPr>
-            <a:picLocks noChangeAspect="1"/>
-          </p:cNvPicPr>
-          <p:nvPr/>
-        </p:nvPicPr>
-        <p:blipFill>
-          <a:blip r:embed="rId2"/>
-          <a:stretch>
-            <a:fillRect/>
-          </a:stretch>
-        </p:blipFill>
-        <p:spPr>
-          <a:xfrm>
-            <a:off x="4359554" y="1783080"/>
-            <a:ext cx="3472586" cy="1691640"/>
-          </a:xfrm>
-          <a:prstGeom prst="rect">
-            <a:avLst/>
-          </a:prstGeom>
-        </p:spPr>
-      </p:pic>
-      <p:sp>
-        <p:nvSpPr>
-          <p:cNvPr id="11" name="Text 7"/>
-          <p:cNvSpPr txBox="1"/>
-          <p:nvPr/>
-        </p:nvSpPr>
-        <p:spPr>
-          <a:xfrm>
-            <a:off x="4560722" y="3639312"/>
-            <a:ext cx="3070250" cy="384048"/>
-          </a:xfrm>
-          <a:prstGeom prst="rect">
-            <a:avLst/>
-          </a:prstGeom>
-          <a:noFill/>
-          <a:ln/>
-        </p:spPr>
-        <p:txBody>
-          <a:bodyPr wrap="square" lIns="0" tIns="0" rIns="0" bIns="0" rtlCol="0" anchor="ctr"/>
-          <a:lstStyle/>
-          <a:p>
-            <a:pPr algn="l" indent="0" marL="0">
-              <a:buNone/>
-            </a:pPr>
-            <a:r>
-              <a:rPr lang="en-US" sz="1500" b="1" dirty="0">
-                <a:solidFill>
-                  <a:srgbClr val="1C5A73"/>
-                </a:solidFill>
-                <a:latin typeface="Cambria" pitchFamily="34" charset="0"/>
-                <a:ea typeface="Cambria" pitchFamily="34" charset="-122"/>
-                <a:cs typeface="Cambria" pitchFamily="34" charset="-120"/>
-              </a:rPr>
-              <a:t>Plateau Central</a:t>
-            </a:r>
-            <a:endParaRPr lang="en-US" sz="1500" dirty="0"/>
-          </a:p>
-        </p:txBody>
-      </p:sp>
-      <p:sp>
-        <p:nvSpPr>
-          <p:cNvPr id="12" name="Text 8"/>
-          <p:cNvSpPr txBox="1"/>
-          <p:nvPr/>
-        </p:nvSpPr>
-        <p:spPr>
-          <a:xfrm>
-            <a:off x="4560722" y="4041648"/>
-            <a:ext cx="3070250" cy="329184"/>
-          </a:xfrm>
-          <a:prstGeom prst="rect">
-            <a:avLst/>
-          </a:prstGeom>
-          <a:noFill/>
-          <a:ln/>
-        </p:spPr>
-        <p:txBody>
-          <a:bodyPr wrap="square" lIns="0" tIns="0" rIns="0" bIns="0" rtlCol="0" anchor="ctr"/>
-          <a:lstStyle/>
-          <a:p>
-            <a:pPr algn="l" indent="0" marL="0">
-              <a:buNone/>
-            </a:pPr>
-            <a:r>
-              <a:rPr lang="en-US" sz="1250" b="1" dirty="0">
-                <a:solidFill>
-                  <a:srgbClr val="A3701A"/>
-                </a:solidFill>
-                <a:latin typeface="Calibri" pitchFamily="34" charset="0"/>
-                <a:ea typeface="Calibri" pitchFamily="34" charset="-122"/>
-                <a:cs typeface="Calibri" pitchFamily="34" charset="-120"/>
-              </a:rPr>
-              <a:t>Vivrier et élevage</a:t>
-            </a:r>
-            <a:endParaRPr lang="en-US" sz="1250" dirty="0"/>
-          </a:p>
-        </p:txBody>
-      </p:sp>
-      <p:sp>
-        <p:nvSpPr>
-          <p:cNvPr id="13" name="Text 9"/>
-          <p:cNvSpPr txBox="1"/>
-          <p:nvPr/>
-        </p:nvSpPr>
-        <p:spPr>
-          <a:xfrm>
-            <a:off x="4560722" y="4407408"/>
-            <a:ext cx="3070250" cy="1280160"/>
-          </a:xfrm>
-          <a:prstGeom prst="rect">
-            <a:avLst/>
-          </a:prstGeom>
-          <a:noFill/>
-          <a:ln/>
-        </p:spPr>
-        <p:txBody>
-          <a:bodyPr wrap="square" lIns="0" tIns="0" rIns="0" bIns="0" rtlCol="0" anchor="t"/>
-          <a:lstStyle/>
-          <a:p>
-            <a:pPr algn="l" marL="342900" indent="-342900">
-              <a:lnSpc>
-                <a:spcPct val="116000"/>
-              </a:lnSpc>
-              <a:spcAft>
-                <a:spcPts val="700"/>
-              </a:spcAft>
-              <a:buSzPct val="100000"/>
-              <a:buChar char="•"/>
-            </a:pPr>
-            <a:r>
-              <a:rPr lang="en-US" sz="1150" dirty="0">
-                <a:solidFill>
-                  <a:srgbClr val="31424A"/>
-                </a:solidFill>
-                <a:latin typeface="Calibri" pitchFamily="34" charset="0"/>
-                <a:ea typeface="Calibri" pitchFamily="34" charset="-122"/>
-                <a:cs typeface="Calibri" pitchFamily="34" charset="-120"/>
-              </a:rPr>
-              <a:t>Maïs, haricot, manioc et sorgho conduits presque entièrement en pluvial.</a:t>
-            </a:r>
-            <a:endParaRPr lang="en-US" sz="1150" dirty="0"/>
-          </a:p>
-          <a:p>
-            <a:pPr algn="l" marL="342900" indent="-342900">
-              <a:lnSpc>
-                <a:spcPct val="116000"/>
-              </a:lnSpc>
-              <a:spcAft>
-                <a:spcPts val="700"/>
-              </a:spcAft>
-              <a:buSzPct val="100000"/>
-              <a:buChar char="•"/>
-            </a:pPr>
-            <a:r>
-              <a:rPr lang="en-US" sz="1150" dirty="0">
-                <a:solidFill>
-                  <a:srgbClr val="31424A"/>
-                </a:solidFill>
-                <a:latin typeface="Calibri" pitchFamily="34" charset="0"/>
-                <a:ea typeface="Calibri" pitchFamily="34" charset="-122"/>
-                <a:cs typeface="Calibri" pitchFamily="34" charset="-120"/>
-              </a:rPr>
-              <a:t>Saison sèche marquée : c'est exactement la séquence que l'hydro-rétenteur est fait pour franchir.</a:t>
-            </a:r>
-            <a:endParaRPr lang="en-US" sz="1150" dirty="0"/>
-          </a:p>
-          <a:p>
-            <a:pPr algn="l" marL="342900" indent="-342900">
-              <a:lnSpc>
-                <a:spcPct val="116000"/>
-              </a:lnSpc>
-              <a:spcAft>
-                <a:spcPts val="700"/>
-              </a:spcAft>
-              <a:buSzPct val="100000"/>
-              <a:buChar char="•"/>
-            </a:pPr>
-            <a:r>
-              <a:rPr lang="en-US" sz="1150" dirty="0">
-                <a:solidFill>
-                  <a:srgbClr val="31424A"/>
-                </a:solidFill>
-                <a:latin typeface="Calibri" pitchFamily="34" charset="0"/>
-                <a:ea typeface="Calibri" pitchFamily="34" charset="-122"/>
-                <a:cs typeface="Calibri" pitchFamily="34" charset="-120"/>
-              </a:rPr>
-              <a:t>Organisations paysannes structurées, capables de porter un essai groupé sur plusieurs parcelles.</a:t>
-            </a:r>
-            <a:endParaRPr lang="en-US" sz="1150" dirty="0"/>
-          </a:p>
-        </p:txBody>
-      </p:sp>
-      <p:sp>
-        <p:nvSpPr>
-          <p:cNvPr id="14" name="Shape 10"/>
-          <p:cNvSpPr/>
-          <p:nvPr/>
-        </p:nvSpPr>
-        <p:spPr>
-          <a:xfrm>
-            <a:off x="8124749" y="1783080"/>
-            <a:ext cx="3472586" cy="4069080"/>
-          </a:xfrm>
-          <a:prstGeom prst="roundRect">
-            <a:avLst>
-              <a:gd name="adj" fmla="val 2633"/>
-            </a:avLst>
-          </a:prstGeom>
-          <a:solidFill>
-            <a:srgbClr val="EDF3F5"/>
-          </a:solidFill>
-          <a:ln w="9525">
-            <a:solidFill>
-              <a:srgbClr val="D6E2E7"/>
-            </a:solidFill>
-            <a:prstDash val="solid"/>
-          </a:ln>
-        </p:spPr>
-      </p:sp>
-      <p:pic>
-        <p:nvPicPr>
-          <p:cNvPr id="15" name="Image 2" descr="preencoded.png">    </p:cNvPr>
-          <p:cNvPicPr>
-            <a:picLocks noChangeAspect="1"/>
-          </p:cNvPicPr>
-          <p:nvPr/>
-        </p:nvPicPr>
-        <p:blipFill>
-          <a:blip r:embed="rId3"/>
-          <a:stretch>
-            <a:fillRect/>
-          </a:stretch>
-        </p:blipFill>
-        <p:spPr>
-          <a:xfrm>
-            <a:off x="8124749" y="1783080"/>
-            <a:ext cx="3472586" cy="1691640"/>
-          </a:xfrm>
-          <a:prstGeom prst="rect">
-            <a:avLst/>
-          </a:prstGeom>
-        </p:spPr>
-      </p:pic>
-      <p:sp>
-        <p:nvSpPr>
-          <p:cNvPr id="16" name="Text 11"/>
-          <p:cNvSpPr txBox="1"/>
-          <p:nvPr/>
-        </p:nvSpPr>
-        <p:spPr>
-          <a:xfrm>
-            <a:off x="8325917" y="3639312"/>
-            <a:ext cx="3070250" cy="384048"/>
-          </a:xfrm>
-          <a:prstGeom prst="rect">
-            <a:avLst/>
-          </a:prstGeom>
-          <a:noFill/>
-          <a:ln/>
-        </p:spPr>
-        <p:txBody>
-          <a:bodyPr wrap="square" lIns="0" tIns="0" rIns="0" bIns="0" rtlCol="0" anchor="ctr"/>
-          <a:lstStyle/>
-          <a:p>
-            <a:pPr algn="l" indent="0" marL="0">
-              <a:buNone/>
-            </a:pPr>
-            <a:r>
-              <a:rPr lang="en-US" sz="1500" b="1" dirty="0">
-                <a:solidFill>
-                  <a:srgbClr val="1C5A73"/>
-                </a:solidFill>
-                <a:latin typeface="Cambria" pitchFamily="34" charset="0"/>
-                <a:ea typeface="Cambria" pitchFamily="34" charset="-122"/>
-                <a:cs typeface="Cambria" pitchFamily="34" charset="-120"/>
-              </a:rPr>
-              <a:t>Grand Sud — Grand'Anse</a:t>
-            </a:r>
-            <a:endParaRPr lang="en-US" sz="1500" dirty="0"/>
-          </a:p>
-        </p:txBody>
-      </p:sp>
-      <p:sp>
-        <p:nvSpPr>
-          <p:cNvPr id="17" name="Text 12"/>
-          <p:cNvSpPr txBox="1"/>
-          <p:nvPr/>
-        </p:nvSpPr>
-        <p:spPr>
-          <a:xfrm>
-            <a:off x="8325917" y="4041648"/>
-            <a:ext cx="3070250" cy="329184"/>
-          </a:xfrm>
-          <a:prstGeom prst="rect">
-            <a:avLst/>
-          </a:prstGeom>
-          <a:noFill/>
-          <a:ln/>
-        </p:spPr>
-        <p:txBody>
-          <a:bodyPr wrap="square" lIns="0" tIns="0" rIns="0" bIns="0" rtlCol="0" anchor="ctr"/>
-          <a:lstStyle/>
-          <a:p>
-            <a:pPr algn="l" indent="0" marL="0">
-              <a:buNone/>
-            </a:pPr>
-            <a:r>
-              <a:rPr lang="en-US" sz="1250" b="1" dirty="0">
-                <a:solidFill>
-                  <a:srgbClr val="A3701A"/>
-                </a:solidFill>
-                <a:latin typeface="Calibri" pitchFamily="34" charset="0"/>
-                <a:ea typeface="Calibri" pitchFamily="34" charset="-122"/>
-                <a:cs typeface="Calibri" pitchFamily="34" charset="-120"/>
-              </a:rPr>
-              <a:t>Café, cacao, mangue, vétiver</a:t>
-            </a:r>
-            <a:endParaRPr lang="en-US" sz="1250" dirty="0"/>
-          </a:p>
-        </p:txBody>
-      </p:sp>
-      <p:sp>
-        <p:nvSpPr>
-          <p:cNvPr id="18" name="Text 13"/>
-          <p:cNvSpPr txBox="1"/>
-          <p:nvPr/>
-        </p:nvSpPr>
-        <p:spPr>
-          <a:xfrm>
-            <a:off x="8325917" y="4407408"/>
-            <a:ext cx="3070250" cy="1280160"/>
-          </a:xfrm>
-          <a:prstGeom prst="rect">
-            <a:avLst/>
-          </a:prstGeom>
-          <a:noFill/>
-          <a:ln/>
-        </p:spPr>
-        <p:txBody>
-          <a:bodyPr wrap="square" lIns="0" tIns="0" rIns="0" bIns="0" rtlCol="0" anchor="t"/>
-          <a:lstStyle/>
-          <a:p>
-            <a:pPr algn="l" marL="342900" indent="-342900">
-              <a:lnSpc>
-                <a:spcPct val="116000"/>
-              </a:lnSpc>
-              <a:spcAft>
-                <a:spcPts val="700"/>
-              </a:spcAft>
-              <a:buSzPct val="100000"/>
-              <a:buChar char="•"/>
-            </a:pPr>
-            <a:r>
-              <a:rPr lang="en-US" sz="1150" dirty="0">
-                <a:solidFill>
-                  <a:srgbClr val="31424A"/>
-                </a:solidFill>
-                <a:latin typeface="Calibri" pitchFamily="34" charset="0"/>
-                <a:ea typeface="Calibri" pitchFamily="34" charset="-122"/>
-                <a:cs typeface="Calibri" pitchFamily="34" charset="-120"/>
-              </a:rPr>
-              <a:t>Cultures de rente destinées à l'export, seules à supporter une prime de certification biologique.</a:t>
-            </a:r>
-            <a:endParaRPr lang="en-US" sz="1150" dirty="0"/>
-          </a:p>
-          <a:p>
-            <a:pPr algn="l" marL="342900" indent="-342900">
-              <a:lnSpc>
-                <a:spcPct val="116000"/>
-              </a:lnSpc>
-              <a:spcAft>
-                <a:spcPts val="700"/>
-              </a:spcAft>
-              <a:buSzPct val="100000"/>
-              <a:buChar char="•"/>
-            </a:pPr>
-            <a:r>
-              <a:rPr lang="en-US" sz="1150" dirty="0">
-                <a:solidFill>
-                  <a:srgbClr val="31424A"/>
-                </a:solidFill>
-                <a:latin typeface="Calibri" pitchFamily="34" charset="0"/>
-                <a:ea typeface="Calibri" pitchFamily="34" charset="-122"/>
-                <a:cs typeface="Calibri" pitchFamily="34" charset="-120"/>
-              </a:rPr>
-              <a:t>Versants pentus et fortement érodés : chaque averse emporte du sol si rien ne le retient.</a:t>
-            </a:r>
-            <a:endParaRPr lang="en-US" sz="1150" dirty="0"/>
-          </a:p>
-          <a:p>
-            <a:pPr algn="l" marL="342900" indent="-342900">
-              <a:lnSpc>
-                <a:spcPct val="116000"/>
-              </a:lnSpc>
-              <a:spcAft>
-                <a:spcPts val="700"/>
-              </a:spcAft>
-              <a:buSzPct val="100000"/>
-              <a:buChar char="•"/>
-            </a:pPr>
-            <a:r>
-              <a:rPr lang="en-US" sz="1150" dirty="0">
-                <a:solidFill>
-                  <a:srgbClr val="31424A"/>
-                </a:solidFill>
-                <a:latin typeface="Calibri" pitchFamily="34" charset="0"/>
-                <a:ea typeface="Calibri" pitchFamily="34" charset="-122"/>
-                <a:cs typeface="Calibri" pitchFamily="34" charset="-120"/>
-              </a:rPr>
-              <a:t>Zone exposée aux cyclones, où la reprise des jeunes plants après sinistre est un enjeu récurrent.</a:t>
-            </a:r>
-            <a:endParaRPr lang="en-US" sz="1150" dirty="0"/>
-          </a:p>
-        </p:txBody>
-      </p:sp>
-      <p:sp>
-        <p:nvSpPr>
-          <p:cNvPr id="19" name="Text 14"/>
           <p:cNvSpPr txBox="1"/>
           <p:nvPr/>
         </p:nvSpPr>
@@ -6370,7 +6202,7 @@
       </p:sp>
       <p:sp>
         <p:nvSpPr>
-          <p:cNvPr id="20" name="Text 15"/>
+          <p:cNvPr id="9" name="Text 6"/>
           <p:cNvSpPr txBox="1"/>
           <p:nvPr/>
         </p:nvSpPr>
@@ -6474,7 +6306,7 @@
                 <a:ea typeface="Calibri" pitchFamily="34" charset="-122"/>
                 <a:cs typeface="Calibri" pitchFamily="34" charset="-120"/>
               </a:rPr>
-              <a:t>COMMENT NOUS PROCÉDONS</a:t>
+              <a:t>TROIS TERRAINS PRIORITAIRES</a:t>
             </a:r>
             <a:endParaRPr lang="en-US" sz="1150" dirty="0"/>
           </a:p>
@@ -6513,7 +6345,7 @@
                 <a:ea typeface="Cambria" pitchFamily="34" charset="-122"/>
                 <a:cs typeface="Cambria" pitchFamily="34" charset="-120"/>
               </a:rPr>
-              <a:t>Un déploiement par étapes, mesuré à chaque palier</a:t>
+              <a:t>Où engager les premiers essais</a:t>
             </a:r>
             <a:endParaRPr lang="en-US" sz="3000" dirty="0"/>
           </a:p>
@@ -6527,12 +6359,12 @@
         </p:nvSpPr>
         <p:spPr>
           <a:xfrm>
-            <a:off x="594360" y="1874520"/>
-            <a:ext cx="2545004" cy="2834640"/>
+            <a:off x="594360" y="1783080"/>
+            <a:ext cx="3472586" cy="4069080"/>
           </a:xfrm>
           <a:prstGeom prst="roundRect">
             <a:avLst>
-              <a:gd name="adj" fmla="val 3593"/>
+              <a:gd name="adj" fmla="val 2633"/>
             </a:avLst>
           </a:prstGeom>
           <a:solidFill>
@@ -6546,36 +6378,40 @@
           </a:ln>
         </p:spPr>
       </p:sp>
-      <p:sp>
-        <p:nvSpPr>
-          <p:cNvPr id="5" name="Shape 3"/>
-          <p:cNvSpPr/>
-          <p:nvPr/>
-        </p:nvSpPr>
-        <p:spPr>
-          <a:xfrm>
-            <a:off x="822960" y="2103120"/>
-            <a:ext cx="566928" cy="566928"/>
-          </a:xfrm>
-          <a:prstGeom prst="ellipse">
-            <a:avLst/>
-          </a:prstGeom>
-          <a:solidFill>
-            <a:srgbClr val="1C5A73"/>
-          </a:solidFill>
-          <a:ln/>
-        </p:spPr>
-      </p:sp>
-      <p:sp>
-        <p:nvSpPr>
-          <p:cNvPr id="6" name="Text 4"/>
-          <p:cNvSpPr txBox="1"/>
-          <p:nvPr/>
-        </p:nvSpPr>
-        <p:spPr>
-          <a:xfrm>
-            <a:off x="822960" y="2103120"/>
-            <a:ext cx="566928" cy="566928"/>
+      <p:pic>
+        <p:nvPicPr>
+          <p:cNvPr id="5" name="Image 0" descr="preencoded.png">    </p:cNvPr>
+          <p:cNvPicPr>
+            <a:picLocks noChangeAspect="1"/>
+          </p:cNvPicPr>
+          <p:nvPr/>
+        </p:nvPicPr>
+        <p:blipFill>
+          <a:blip r:embed="rId1"/>
+          <a:stretch>
+            <a:fillRect/>
+          </a:stretch>
+        </p:blipFill>
+        <p:spPr>
+          <a:xfrm>
+            <a:off x="594360" y="1783080"/>
+            <a:ext cx="3472586" cy="1691640"/>
+          </a:xfrm>
+          <a:prstGeom prst="rect">
+            <a:avLst/>
+          </a:prstGeom>
+        </p:spPr>
+      </p:pic>
+      <p:sp>
+        <p:nvSpPr>
+          <p:cNvPr id="6" name="Text 3"/>
+          <p:cNvSpPr txBox="1"/>
+          <p:nvPr/>
+        </p:nvSpPr>
+        <p:spPr>
+          <a:xfrm>
+            <a:off x="795528" y="3639312"/>
+            <a:ext cx="3070250" cy="384048"/>
           </a:xfrm>
           <a:prstGeom prst="rect">
             <a:avLst/>
@@ -6587,34 +6423,34 @@
           <a:bodyPr wrap="square" lIns="0" tIns="0" rIns="0" bIns="0" rtlCol="0" anchor="ctr"/>
           <a:lstStyle/>
           <a:p>
-            <a:pPr algn="ctr" indent="0" marL="0">
-              <a:buNone/>
-            </a:pPr>
-            <a:r>
-              <a:rPr lang="en-US" sz="1600" b="1" dirty="0">
-                <a:solidFill>
-                  <a:srgbClr val="FFFFFF"/>
+            <a:pPr algn="l" indent="0" marL="0">
+              <a:buNone/>
+            </a:pPr>
+            <a:r>
+              <a:rPr lang="en-US" sz="1500" b="1" dirty="0">
+                <a:solidFill>
+                  <a:srgbClr val="1C5A73"/>
                 </a:solidFill>
                 <a:latin typeface="Cambria" pitchFamily="34" charset="0"/>
                 <a:ea typeface="Cambria" pitchFamily="34" charset="-122"/>
                 <a:cs typeface="Cambria" pitchFamily="34" charset="-120"/>
               </a:rPr>
-              <a:t>1</a:t>
-            </a:r>
-            <a:endParaRPr lang="en-US" sz="1600" dirty="0"/>
-          </a:p>
-        </p:txBody>
-      </p:sp>
-      <p:sp>
-        <p:nvSpPr>
-          <p:cNvPr id="7" name="Text 5"/>
-          <p:cNvSpPr txBox="1"/>
-          <p:nvPr/>
-        </p:nvSpPr>
-        <p:spPr>
-          <a:xfrm>
-            <a:off x="822960" y="2788920"/>
-            <a:ext cx="2087804" cy="457200"/>
+              <a:t>Vallée de l'Artibonite</a:t>
+            </a:r>
+            <a:endParaRPr lang="en-US" sz="1500" dirty="0"/>
+          </a:p>
+        </p:txBody>
+      </p:sp>
+      <p:sp>
+        <p:nvSpPr>
+          <p:cNvPr id="7" name="Text 4"/>
+          <p:cNvSpPr txBox="1"/>
+          <p:nvPr/>
+        </p:nvSpPr>
+        <p:spPr>
+          <a:xfrm>
+            <a:off x="795528" y="4041648"/>
+            <a:ext cx="3070250" cy="329184"/>
           </a:xfrm>
           <a:prstGeom prst="rect">
             <a:avLst/>
@@ -6630,30 +6466,30 @@
               <a:buNone/>
             </a:pPr>
             <a:r>
-              <a:rPr lang="en-US" sz="1400" b="1" dirty="0">
-                <a:solidFill>
-                  <a:srgbClr val="1C5A73"/>
-                </a:solidFill>
-                <a:latin typeface="Cambria" pitchFamily="34" charset="0"/>
-                <a:ea typeface="Cambria" pitchFamily="34" charset="-122"/>
-                <a:cs typeface="Cambria" pitchFamily="34" charset="-120"/>
-              </a:rPr>
-              <a:t>Diagnostic</a:t>
-            </a:r>
-            <a:endParaRPr lang="en-US" sz="1400" dirty="0"/>
-          </a:p>
-        </p:txBody>
-      </p:sp>
-      <p:sp>
-        <p:nvSpPr>
-          <p:cNvPr id="8" name="Text 6"/>
-          <p:cNvSpPr txBox="1"/>
-          <p:nvPr/>
-        </p:nvSpPr>
-        <p:spPr>
-          <a:xfrm>
-            <a:off x="822960" y="3291840"/>
-            <a:ext cx="2087804" cy="1234440"/>
+              <a:rPr lang="en-US" sz="1250" b="1" dirty="0">
+                <a:solidFill>
+                  <a:srgbClr val="A3701A"/>
+                </a:solidFill>
+                <a:latin typeface="Calibri" pitchFamily="34" charset="0"/>
+                <a:ea typeface="Calibri" pitchFamily="34" charset="-122"/>
+                <a:cs typeface="Calibri" pitchFamily="34" charset="-120"/>
+              </a:rPr>
+              <a:t>Le grenier à riz du pays</a:t>
+            </a:r>
+            <a:endParaRPr lang="en-US" sz="1250" dirty="0"/>
+          </a:p>
+        </p:txBody>
+      </p:sp>
+      <p:sp>
+        <p:nvSpPr>
+          <p:cNvPr id="8" name="Text 5"/>
+          <p:cNvSpPr txBox="1"/>
+          <p:nvPr/>
+        </p:nvSpPr>
+        <p:spPr>
+          <a:xfrm>
+            <a:off x="795528" y="4407408"/>
+            <a:ext cx="3070250" cy="1280160"/>
           </a:xfrm>
           <a:prstGeom prst="rect">
             <a:avLst/>
@@ -6665,14 +6501,18 @@
           <a:bodyPr wrap="square" lIns="0" tIns="0" rIns="0" bIns="0" rtlCol="0" anchor="t"/>
           <a:lstStyle/>
           <a:p>
-            <a:pPr algn="l" indent="0" marL="0">
+            <a:pPr algn="l" marL="342900" indent="-342900">
               <a:lnSpc>
-                <a:spcPct val="120000"/>
+                <a:spcPct val="116000"/>
               </a:lnSpc>
-              <a:buNone/>
-            </a:pPr>
-            <a:r>
-              <a:rPr lang="en-US" sz="1200" dirty="0">
+              <a:spcAft>
+                <a:spcPts val="700"/>
+              </a:spcAft>
+              <a:buSzPct val="100000"/>
+              <a:buChar char="•"/>
+            </a:pPr>
+            <a:r>
+              <a:rPr lang="en-US" sz="1150" dirty="0">
                 <a:solidFill>
                   <a:srgbClr val="31424A"/>
                 </a:solidFill>
@@ -6680,26 +6520,74 @@
                 <a:ea typeface="Calibri" pitchFamily="34" charset="-122"/>
                 <a:cs typeface="Calibri" pitchFamily="34" charset="-120"/>
               </a:rPr>
-              <a:t>Analyse du sol, de la pente et de la culture. Aucun engagement à ce stade.</a:t>
-            </a:r>
-            <a:endParaRPr lang="en-US" sz="1200" dirty="0"/>
-          </a:p>
-        </p:txBody>
-      </p:sp>
-      <p:sp>
-        <p:nvSpPr>
-          <p:cNvPr id="9" name="Shape 7"/>
+              <a:t>Le plus grand périmètre irrigué d'Haïti, alimenté par le fleuve Artibonite.</a:t>
+            </a:r>
+            <a:endParaRPr lang="en-US" sz="1150" dirty="0"/>
+          </a:p>
+          <a:p>
+            <a:pPr algn="l" marL="342900" indent="-342900">
+              <a:lnSpc>
+                <a:spcPct val="116000"/>
+              </a:lnSpc>
+              <a:spcAft>
+                <a:spcPts val="700"/>
+              </a:spcAft>
+              <a:buSzPct val="100000"/>
+              <a:buChar char="•"/>
+            </a:pPr>
+            <a:r>
+              <a:rPr lang="en-US" sz="1150" dirty="0">
+                <a:solidFill>
+                  <a:srgbClr val="31424A"/>
+                </a:solidFill>
+                <a:latin typeface="Calibri" pitchFamily="34" charset="0"/>
+                <a:ea typeface="Calibri" pitchFamily="34" charset="-122"/>
+                <a:cs typeface="Calibri" pitchFamily="34" charset="-120"/>
+              </a:rPr>
+              <a:t>Riz conduit en submersion : c'est le mode d'irrigation où la marge d'économie est la plus large.</a:t>
+            </a:r>
+            <a:endParaRPr lang="en-US" sz="1150" dirty="0"/>
+          </a:p>
+          <a:p>
+            <a:pPr algn="l" marL="342900" indent="-342900">
+              <a:lnSpc>
+                <a:spcPct val="116000"/>
+              </a:lnSpc>
+              <a:spcAft>
+                <a:spcPts val="700"/>
+              </a:spcAft>
+              <a:buSzPct val="100000"/>
+              <a:buChar char="•"/>
+            </a:pPr>
+            <a:r>
+              <a:rPr lang="en-US" sz="1150" dirty="0">
+                <a:solidFill>
+                  <a:srgbClr val="31424A"/>
+                </a:solidFill>
+                <a:latin typeface="Calibri" pitchFamily="34" charset="0"/>
+                <a:ea typeface="Calibri" pitchFamily="34" charset="-122"/>
+                <a:cs typeface="Calibri" pitchFamily="34" charset="-120"/>
+              </a:rPr>
+              <a:t>Réseau de canaux ancien et partiellement dégradé, d'où des inégalités d'accès à l'eau en bout de parcours.</a:t>
+            </a:r>
+            <a:endParaRPr lang="en-US" sz="1150" dirty="0"/>
+          </a:p>
+        </p:txBody>
+      </p:sp>
+      <p:sp>
+        <p:nvSpPr>
+          <p:cNvPr id="9" name="Shape 6"/>
           <p:cNvSpPr/>
           <p:nvPr/>
         </p:nvSpPr>
         <p:spPr>
           <a:xfrm>
-            <a:off x="3413684" y="1874520"/>
-            <a:ext cx="2545004" cy="2834640"/>
+            <a:off x="4359554" y="1783080"/>
+            <a:ext cx="3472586" cy="4069080"/>
           </a:xfrm>
           <a:prstGeom prst="roundRect">
             <a:avLst>
-              <a:gd name="adj" fmla="val 3593"/>
+              <a:gd name="adj" fmla="val 2633"/>
             </a:avLst>
           </a:prstGeom>
           <a:solidFill>
@@ -6713,36 +6601,40 @@
           </a:ln>
         </p:spPr>
       </p:sp>
-      <p:sp>
-        <p:nvSpPr>
-          <p:cNvPr id="10" name="Shape 8"/>
-          <p:cNvSpPr/>
-          <p:nvPr/>
-        </p:nvSpPr>
-        <p:spPr>
-          <a:xfrm>
-            <a:off x="3642284" y="2103120"/>
-            <a:ext cx="566928" cy="566928"/>
-          </a:xfrm>
-          <a:prstGeom prst="ellipse">
-            <a:avLst/>
-          </a:prstGeom>
-          <a:solidFill>
-            <a:srgbClr val="1C5A73"/>
-          </a:solidFill>
-          <a:ln/>
-        </p:spPr>
-      </p:sp>
-      <p:sp>
-        <p:nvSpPr>
-          <p:cNvPr id="11" name="Text 9"/>
-          <p:cNvSpPr txBox="1"/>
-          <p:nvPr/>
-        </p:nvSpPr>
-        <p:spPr>
-          <a:xfrm>
-            <a:off x="3642284" y="2103120"/>
-            <a:ext cx="566928" cy="566928"/>
+      <p:pic>
+        <p:nvPicPr>
+          <p:cNvPr id="10" name="Image 1" descr="preencoded.png">    </p:cNvPr>
+          <p:cNvPicPr>
+            <a:picLocks noChangeAspect="1"/>
+          </p:cNvPicPr>
+          <p:nvPr/>
+        </p:nvPicPr>
+        <p:blipFill>
+          <a:blip r:embed="rId2"/>
+          <a:stretch>
+            <a:fillRect/>
+          </a:stretch>
+        </p:blipFill>
+        <p:spPr>
+          <a:xfrm>
+            <a:off x="4359554" y="1783080"/>
+            <a:ext cx="3472586" cy="1691640"/>
+          </a:xfrm>
+          <a:prstGeom prst="rect">
+            <a:avLst/>
+          </a:prstGeom>
+        </p:spPr>
+      </p:pic>
+      <p:sp>
+        <p:nvSpPr>
+          <p:cNvPr id="11" name="Text 7"/>
+          <p:cNvSpPr txBox="1"/>
+          <p:nvPr/>
+        </p:nvSpPr>
+        <p:spPr>
+          <a:xfrm>
+            <a:off x="4560722" y="3639312"/>
+            <a:ext cx="3070250" cy="384048"/>
           </a:xfrm>
           <a:prstGeom prst="rect">
             <a:avLst/>
@@ -6754,34 +6646,34 @@
           <a:bodyPr wrap="square" lIns="0" tIns="0" rIns="0" bIns="0" rtlCol="0" anchor="ctr"/>
           <a:lstStyle/>
           <a:p>
-            <a:pPr algn="ctr" indent="0" marL="0">
-              <a:buNone/>
-            </a:pPr>
-            <a:r>
-              <a:rPr lang="en-US" sz="1600" b="1" dirty="0">
-                <a:solidFill>
-                  <a:srgbClr val="FFFFFF"/>
+            <a:pPr algn="l" indent="0" marL="0">
+              <a:buNone/>
+            </a:pPr>
+            <a:r>
+              <a:rPr lang="en-US" sz="1500" b="1" dirty="0">
+                <a:solidFill>
+                  <a:srgbClr val="1C5A73"/>
                 </a:solidFill>
                 <a:latin typeface="Cambria" pitchFamily="34" charset="0"/>
                 <a:ea typeface="Cambria" pitchFamily="34" charset="-122"/>
                 <a:cs typeface="Cambria" pitchFamily="34" charset="-120"/>
               </a:rPr>
-              <a:t>2</a:t>
-            </a:r>
-            <a:endParaRPr lang="en-US" sz="1600" dirty="0"/>
-          </a:p>
-        </p:txBody>
-      </p:sp>
-      <p:sp>
-        <p:nvSpPr>
-          <p:cNvPr id="12" name="Text 10"/>
-          <p:cNvSpPr txBox="1"/>
-          <p:nvPr/>
-        </p:nvSpPr>
-        <p:spPr>
-          <a:xfrm>
-            <a:off x="3642284" y="2788920"/>
-            <a:ext cx="2087804" cy="457200"/>
+              <a:t>Plateau Central</a:t>
+            </a:r>
+            <a:endParaRPr lang="en-US" sz="1500" dirty="0"/>
+          </a:p>
+        </p:txBody>
+      </p:sp>
+      <p:sp>
+        <p:nvSpPr>
+          <p:cNvPr id="12" name="Text 8"/>
+          <p:cNvSpPr txBox="1"/>
+          <p:nvPr/>
+        </p:nvSpPr>
+        <p:spPr>
+          <a:xfrm>
+            <a:off x="4560722" y="4041648"/>
+            <a:ext cx="3070250" cy="329184"/>
           </a:xfrm>
           <a:prstGeom prst="rect">
             <a:avLst/>
@@ -6797,30 +6689,30 @@
               <a:buNone/>
             </a:pPr>
             <a:r>
-              <a:rPr lang="en-US" sz="1400" b="1" dirty="0">
-                <a:solidFill>
-                  <a:srgbClr val="1C5A73"/>
-                </a:solidFill>
-                <a:latin typeface="Cambria" pitchFamily="34" charset="0"/>
-                <a:ea typeface="Cambria" pitchFamily="34" charset="-122"/>
-                <a:cs typeface="Cambria" pitchFamily="34" charset="-120"/>
-              </a:rPr>
-              <a:t>Parcelle témoin</a:t>
-            </a:r>
-            <a:endParaRPr lang="en-US" sz="1400" dirty="0"/>
-          </a:p>
-        </p:txBody>
-      </p:sp>
-      <p:sp>
-        <p:nvSpPr>
-          <p:cNvPr id="13" name="Text 11"/>
-          <p:cNvSpPr txBox="1"/>
-          <p:nvPr/>
-        </p:nvSpPr>
-        <p:spPr>
-          <a:xfrm>
-            <a:off x="3642284" y="3291840"/>
-            <a:ext cx="2087804" cy="1234440"/>
+              <a:rPr lang="en-US" sz="1250" b="1" dirty="0">
+                <a:solidFill>
+                  <a:srgbClr val="A3701A"/>
+                </a:solidFill>
+                <a:latin typeface="Calibri" pitchFamily="34" charset="0"/>
+                <a:ea typeface="Calibri" pitchFamily="34" charset="-122"/>
+                <a:cs typeface="Calibri" pitchFamily="34" charset="-120"/>
+              </a:rPr>
+              <a:t>Vivrier et élevage</a:t>
+            </a:r>
+            <a:endParaRPr lang="en-US" sz="1250" dirty="0"/>
+          </a:p>
+        </p:txBody>
+      </p:sp>
+      <p:sp>
+        <p:nvSpPr>
+          <p:cNvPr id="13" name="Text 9"/>
+          <p:cNvSpPr txBox="1"/>
+          <p:nvPr/>
+        </p:nvSpPr>
+        <p:spPr>
+          <a:xfrm>
+            <a:off x="4560722" y="4407408"/>
+            <a:ext cx="3070250" cy="1280160"/>
           </a:xfrm>
           <a:prstGeom prst="rect">
             <a:avLst/>
@@ -6832,14 +6724,18 @@
           <a:bodyPr wrap="square" lIns="0" tIns="0" rIns="0" bIns="0" rtlCol="0" anchor="t"/>
           <a:lstStyle/>
           <a:p>
-            <a:pPr algn="l" indent="0" marL="0">
+            <a:pPr algn="l" marL="342900" indent="-342900">
               <a:lnSpc>
-                <a:spcPct val="120000"/>
+                <a:spcPct val="116000"/>
               </a:lnSpc>
-              <a:buNone/>
-            </a:pPr>
-            <a:r>
-              <a:rPr lang="en-US" sz="1200" dirty="0">
+              <a:spcAft>
+                <a:spcPts val="700"/>
+              </a:spcAft>
+              <a:buSzPct val="100000"/>
+              <a:buChar char="•"/>
+            </a:pPr>
+            <a:r>
+              <a:rPr lang="en-US" sz="1150" dirty="0">
                 <a:solidFill>
                   <a:srgbClr val="31424A"/>
                 </a:solidFill>
@@ -6847,26 +6743,74 @@
                 <a:ea typeface="Calibri" pitchFamily="34" charset="-122"/>
                 <a:cs typeface="Calibri" pitchFamily="34" charset="-120"/>
               </a:rPr>
-              <a:t>Un essai comparatif sur une parcelle, avec parcelle témoin conduite à l'identique.</a:t>
-            </a:r>
-            <a:endParaRPr lang="en-US" sz="1200" dirty="0"/>
-          </a:p>
-        </p:txBody>
-      </p:sp>
-      <p:sp>
-        <p:nvSpPr>
-          <p:cNvPr id="14" name="Shape 12"/>
+              <a:t>Maïs, haricot, manioc et sorgho conduits presque entièrement en pluvial.</a:t>
+            </a:r>
+            <a:endParaRPr lang="en-US" sz="1150" dirty="0"/>
+          </a:p>
+          <a:p>
+            <a:pPr algn="l" marL="342900" indent="-342900">
+              <a:lnSpc>
+                <a:spcPct val="116000"/>
+              </a:lnSpc>
+              <a:spcAft>
+                <a:spcPts val="700"/>
+              </a:spcAft>
+              <a:buSzPct val="100000"/>
+              <a:buChar char="•"/>
+            </a:pPr>
+            <a:r>
+              <a:rPr lang="en-US" sz="1150" dirty="0">
+                <a:solidFill>
+                  <a:srgbClr val="31424A"/>
+                </a:solidFill>
+                <a:latin typeface="Calibri" pitchFamily="34" charset="0"/>
+                <a:ea typeface="Calibri" pitchFamily="34" charset="-122"/>
+                <a:cs typeface="Calibri" pitchFamily="34" charset="-120"/>
+              </a:rPr>
+              <a:t>Saison sèche marquée : c'est exactement la séquence que l'hydro-rétenteur est fait pour franchir.</a:t>
+            </a:r>
+            <a:endParaRPr lang="en-US" sz="1150" dirty="0"/>
+          </a:p>
+          <a:p>
+            <a:pPr algn="l" marL="342900" indent="-342900">
+              <a:lnSpc>
+                <a:spcPct val="116000"/>
+              </a:lnSpc>
+              <a:spcAft>
+                <a:spcPts val="700"/>
+              </a:spcAft>
+              <a:buSzPct val="100000"/>
+              <a:buChar char="•"/>
+            </a:pPr>
+            <a:r>
+              <a:rPr lang="en-US" sz="1150" dirty="0">
+                <a:solidFill>
+                  <a:srgbClr val="31424A"/>
+                </a:solidFill>
+                <a:latin typeface="Calibri" pitchFamily="34" charset="0"/>
+                <a:ea typeface="Calibri" pitchFamily="34" charset="-122"/>
+                <a:cs typeface="Calibri" pitchFamily="34" charset="-120"/>
+              </a:rPr>
+              <a:t>Organisations paysannes structurées, capables de porter un essai groupé sur plusieurs parcelles.</a:t>
+            </a:r>
+            <a:endParaRPr lang="en-US" sz="1150" dirty="0"/>
+          </a:p>
+        </p:txBody>
+      </p:sp>
+      <p:sp>
+        <p:nvSpPr>
+          <p:cNvPr id="14" name="Shape 10"/>
           <p:cNvSpPr/>
           <p:nvPr/>
         </p:nvSpPr>
         <p:spPr>
           <a:xfrm>
-            <a:off x="6233008" y="1874520"/>
-            <a:ext cx="2545004" cy="2834640"/>
+            <a:off x="8124749" y="1783080"/>
+            <a:ext cx="3472586" cy="4069080"/>
           </a:xfrm>
           <a:prstGeom prst="roundRect">
             <a:avLst>
-              <a:gd name="adj" fmla="val 3593"/>
+              <a:gd name="adj" fmla="val 2633"/>
             </a:avLst>
           </a:prstGeom>
           <a:solidFill>
@@ -6880,36 +6824,40 @@
           </a:ln>
         </p:spPr>
       </p:sp>
-      <p:sp>
-        <p:nvSpPr>
-          <p:cNvPr id="15" name="Shape 13"/>
-          <p:cNvSpPr/>
-          <p:nvPr/>
-        </p:nvSpPr>
-        <p:spPr>
-          <a:xfrm>
-            <a:off x="6461608" y="2103120"/>
-            <a:ext cx="566928" cy="566928"/>
-          </a:xfrm>
-          <a:prstGeom prst="ellipse">
-            <a:avLst/>
-          </a:prstGeom>
-          <a:solidFill>
-            <a:srgbClr val="1C5A73"/>
-          </a:solidFill>
-          <a:ln/>
-        </p:spPr>
-      </p:sp>
-      <p:sp>
-        <p:nvSpPr>
-          <p:cNvPr id="16" name="Text 14"/>
-          <p:cNvSpPr txBox="1"/>
-          <p:nvPr/>
-        </p:nvSpPr>
-        <p:spPr>
-          <a:xfrm>
-            <a:off x="6461608" y="2103120"/>
-            <a:ext cx="566928" cy="566928"/>
+      <p:pic>
+        <p:nvPicPr>
+          <p:cNvPr id="15" name="Image 2" descr="preencoded.png">    </p:cNvPr>
+          <p:cNvPicPr>
+            <a:picLocks noChangeAspect="1"/>
+          </p:cNvPicPr>
+          <p:nvPr/>
+        </p:nvPicPr>
+        <p:blipFill>
+          <a:blip r:embed="rId3"/>
+          <a:stretch>
+            <a:fillRect/>
+          </a:stretch>
+        </p:blipFill>
+        <p:spPr>
+          <a:xfrm>
+            <a:off x="8124749" y="1783080"/>
+            <a:ext cx="3472586" cy="1691640"/>
+          </a:xfrm>
+          <a:prstGeom prst="rect">
+            <a:avLst/>
+          </a:prstGeom>
+        </p:spPr>
+      </p:pic>
+      <p:sp>
+        <p:nvSpPr>
+          <p:cNvPr id="16" name="Text 11"/>
+          <p:cNvSpPr txBox="1"/>
+          <p:nvPr/>
+        </p:nvSpPr>
+        <p:spPr>
+          <a:xfrm>
+            <a:off x="8325917" y="3639312"/>
+            <a:ext cx="3070250" cy="384048"/>
           </a:xfrm>
           <a:prstGeom prst="rect">
             <a:avLst/>
@@ -6921,34 +6869,34 @@
           <a:bodyPr wrap="square" lIns="0" tIns="0" rIns="0" bIns="0" rtlCol="0" anchor="ctr"/>
           <a:lstStyle/>
           <a:p>
-            <a:pPr algn="ctr" indent="0" marL="0">
-              <a:buNone/>
-            </a:pPr>
-            <a:r>
-              <a:rPr lang="en-US" sz="1600" b="1" dirty="0">
-                <a:solidFill>
-                  <a:srgbClr val="FFFFFF"/>
+            <a:pPr algn="l" indent="0" marL="0">
+              <a:buNone/>
+            </a:pPr>
+            <a:r>
+              <a:rPr lang="en-US" sz="1500" b="1" dirty="0">
+                <a:solidFill>
+                  <a:srgbClr val="1C5A73"/>
                 </a:solidFill>
                 <a:latin typeface="Cambria" pitchFamily="34" charset="0"/>
                 <a:ea typeface="Cambria" pitchFamily="34" charset="-122"/>
                 <a:cs typeface="Cambria" pitchFamily="34" charset="-120"/>
               </a:rPr>
-              <a:t>3</a:t>
-            </a:r>
-            <a:endParaRPr lang="en-US" sz="1600" dirty="0"/>
-          </a:p>
-        </p:txBody>
-      </p:sp>
-      <p:sp>
-        <p:nvSpPr>
-          <p:cNvPr id="17" name="Text 15"/>
-          <p:cNvSpPr txBox="1"/>
-          <p:nvPr/>
-        </p:nvSpPr>
-        <p:spPr>
-          <a:xfrm>
-            <a:off x="6461608" y="2788920"/>
-            <a:ext cx="2087804" cy="457200"/>
+              <a:t>Grand Sud — Grand'Anse</a:t>
+            </a:r>
+            <a:endParaRPr lang="en-US" sz="1500" dirty="0"/>
+          </a:p>
+        </p:txBody>
+      </p:sp>
+      <p:sp>
+        <p:nvSpPr>
+          <p:cNvPr id="17" name="Text 12"/>
+          <p:cNvSpPr txBox="1"/>
+          <p:nvPr/>
+        </p:nvSpPr>
+        <p:spPr>
+          <a:xfrm>
+            <a:off x="8325917" y="4041648"/>
+            <a:ext cx="3070250" cy="329184"/>
           </a:xfrm>
           <a:prstGeom prst="rect">
             <a:avLst/>
@@ -6964,30 +6912,30 @@
               <a:buNone/>
             </a:pPr>
             <a:r>
-              <a:rPr lang="en-US" sz="1400" b="1" dirty="0">
-                <a:solidFill>
-                  <a:srgbClr val="1C5A73"/>
-                </a:solidFill>
-                <a:latin typeface="Cambria" pitchFamily="34" charset="0"/>
-                <a:ea typeface="Cambria" pitchFamily="34" charset="-122"/>
-                <a:cs typeface="Cambria" pitchFamily="34" charset="-120"/>
-              </a:rPr>
-              <a:t>Mesure</a:t>
-            </a:r>
-            <a:endParaRPr lang="en-US" sz="1400" dirty="0"/>
-          </a:p>
-        </p:txBody>
-      </p:sp>
-      <p:sp>
-        <p:nvSpPr>
-          <p:cNvPr id="18" name="Text 16"/>
-          <p:cNvSpPr txBox="1"/>
-          <p:nvPr/>
-        </p:nvSpPr>
-        <p:spPr>
-          <a:xfrm>
-            <a:off x="6461608" y="3291840"/>
-            <a:ext cx="2087804" cy="1234440"/>
+              <a:rPr lang="en-US" sz="1250" b="1" dirty="0">
+                <a:solidFill>
+                  <a:srgbClr val="A3701A"/>
+                </a:solidFill>
+                <a:latin typeface="Calibri" pitchFamily="34" charset="0"/>
+                <a:ea typeface="Calibri" pitchFamily="34" charset="-122"/>
+                <a:cs typeface="Calibri" pitchFamily="34" charset="-120"/>
+              </a:rPr>
+              <a:t>Café, cacao, mangue, vétiver</a:t>
+            </a:r>
+            <a:endParaRPr lang="en-US" sz="1250" dirty="0"/>
+          </a:p>
+        </p:txBody>
+      </p:sp>
+      <p:sp>
+        <p:nvSpPr>
+          <p:cNvPr id="18" name="Text 13"/>
+          <p:cNvSpPr txBox="1"/>
+          <p:nvPr/>
+        </p:nvSpPr>
+        <p:spPr>
+          <a:xfrm>
+            <a:off x="8325917" y="4407408"/>
+            <a:ext cx="3070250" cy="1280160"/>
           </a:xfrm>
           <a:prstGeom prst="rect">
             <a:avLst/>
@@ -6999,14 +6947,18 @@
           <a:bodyPr wrap="square" lIns="0" tIns="0" rIns="0" bIns="0" rtlCol="0" anchor="t"/>
           <a:lstStyle/>
           <a:p>
-            <a:pPr algn="l" indent="0" marL="0">
+            <a:pPr algn="l" marL="342900" indent="-342900">
               <a:lnSpc>
-                <a:spcPct val="120000"/>
+                <a:spcPct val="116000"/>
               </a:lnSpc>
-              <a:buNone/>
-            </a:pPr>
-            <a:r>
-              <a:rPr lang="en-US" sz="1200" dirty="0">
+              <a:spcAft>
+                <a:spcPts val="700"/>
+              </a:spcAft>
+              <a:buSzPct val="100000"/>
+              <a:buChar char="•"/>
+            </a:pPr>
+            <a:r>
+              <a:rPr lang="en-US" sz="1150" dirty="0">
                 <a:solidFill>
                   <a:srgbClr val="31424A"/>
                 </a:solidFill>
@@ -7014,166 +6966,23 @@
                 <a:ea typeface="Calibri" pitchFamily="34" charset="-122"/>
                 <a:cs typeface="Calibri" pitchFamily="34" charset="-120"/>
               </a:rPr>
-              <a:t>Relevés de rendement et de reprise sur un cycle cultural complet.</a:t>
-            </a:r>
-            <a:endParaRPr lang="en-US" sz="1200" dirty="0"/>
-          </a:p>
-        </p:txBody>
-      </p:sp>
-      <p:sp>
-        <p:nvSpPr>
-          <p:cNvPr id="19" name="Shape 17"/>
-          <p:cNvSpPr/>
-          <p:nvPr/>
-        </p:nvSpPr>
-        <p:spPr>
-          <a:xfrm>
-            <a:off x="9052331" y="1874520"/>
-            <a:ext cx="2545004" cy="2834640"/>
-          </a:xfrm>
-          <a:prstGeom prst="roundRect">
-            <a:avLst>
-              <a:gd name="adj" fmla="val 3593"/>
-            </a:avLst>
-          </a:prstGeom>
-          <a:solidFill>
-            <a:srgbClr val="EDF3F5"/>
-          </a:solidFill>
-          <a:ln w="9525">
-            <a:solidFill>
-              <a:srgbClr val="D6E2E7"/>
-            </a:solidFill>
-            <a:prstDash val="solid"/>
-          </a:ln>
-        </p:spPr>
-      </p:sp>
-      <p:sp>
-        <p:nvSpPr>
-          <p:cNvPr id="20" name="Shape 18"/>
-          <p:cNvSpPr/>
-          <p:nvPr/>
-        </p:nvSpPr>
-        <p:spPr>
-          <a:xfrm>
-            <a:off x="9280931" y="2103120"/>
-            <a:ext cx="566928" cy="566928"/>
-          </a:xfrm>
-          <a:prstGeom prst="ellipse">
-            <a:avLst/>
-          </a:prstGeom>
-          <a:solidFill>
-            <a:srgbClr val="1C5A73"/>
-          </a:solidFill>
-          <a:ln/>
-        </p:spPr>
-      </p:sp>
-      <p:sp>
-        <p:nvSpPr>
-          <p:cNvPr id="21" name="Text 19"/>
-          <p:cNvSpPr txBox="1"/>
-          <p:nvPr/>
-        </p:nvSpPr>
-        <p:spPr>
-          <a:xfrm>
-            <a:off x="9280931" y="2103120"/>
-            <a:ext cx="566928" cy="566928"/>
-          </a:xfrm>
-          <a:prstGeom prst="rect">
-            <a:avLst/>
-          </a:prstGeom>
-          <a:noFill/>
-          <a:ln/>
-        </p:spPr>
-        <p:txBody>
-          <a:bodyPr wrap="square" lIns="0" tIns="0" rIns="0" bIns="0" rtlCol="0" anchor="ctr"/>
-          <a:lstStyle/>
-          <a:p>
-            <a:pPr algn="ctr" indent="0" marL="0">
-              <a:buNone/>
-            </a:pPr>
-            <a:r>
-              <a:rPr lang="en-US" sz="1600" b="1" dirty="0">
-                <a:solidFill>
-                  <a:srgbClr val="FFFFFF"/>
-                </a:solidFill>
-                <a:latin typeface="Cambria" pitchFamily="34" charset="0"/>
-                <a:ea typeface="Cambria" pitchFamily="34" charset="-122"/>
-                <a:cs typeface="Cambria" pitchFamily="34" charset="-120"/>
-              </a:rPr>
-              <a:t>4</a:t>
-            </a:r>
-            <a:endParaRPr lang="en-US" sz="1600" dirty="0"/>
-          </a:p>
-        </p:txBody>
-      </p:sp>
-      <p:sp>
-        <p:nvSpPr>
-          <p:cNvPr id="22" name="Text 20"/>
-          <p:cNvSpPr txBox="1"/>
-          <p:nvPr/>
-        </p:nvSpPr>
-        <p:spPr>
-          <a:xfrm>
-            <a:off x="9280931" y="2788920"/>
-            <a:ext cx="2087804" cy="457200"/>
-          </a:xfrm>
-          <a:prstGeom prst="rect">
-            <a:avLst/>
-          </a:prstGeom>
-          <a:noFill/>
-          <a:ln/>
-        </p:spPr>
-        <p:txBody>
-          <a:bodyPr wrap="square" lIns="0" tIns="0" rIns="0" bIns="0" rtlCol="0" anchor="ctr"/>
-          <a:lstStyle/>
-          <a:p>
-            <a:pPr algn="l" indent="0" marL="0">
-              <a:buNone/>
-            </a:pPr>
-            <a:r>
-              <a:rPr lang="en-US" sz="1400" b="1" dirty="0">
-                <a:solidFill>
-                  <a:srgbClr val="1C5A73"/>
-                </a:solidFill>
-                <a:latin typeface="Cambria" pitchFamily="34" charset="0"/>
-                <a:ea typeface="Cambria" pitchFamily="34" charset="-122"/>
-                <a:cs typeface="Cambria" pitchFamily="34" charset="-120"/>
-              </a:rPr>
-              <a:t>Extension</a:t>
-            </a:r>
-            <a:endParaRPr lang="en-US" sz="1400" dirty="0"/>
-          </a:p>
-        </p:txBody>
-      </p:sp>
-      <p:sp>
-        <p:nvSpPr>
-          <p:cNvPr id="23" name="Text 21"/>
-          <p:cNvSpPr txBox="1"/>
-          <p:nvPr/>
-        </p:nvSpPr>
-        <p:spPr>
-          <a:xfrm>
-            <a:off x="9280931" y="3291840"/>
-            <a:ext cx="2087804" cy="1234440"/>
-          </a:xfrm>
-          <a:prstGeom prst="rect">
-            <a:avLst/>
-          </a:prstGeom>
-          <a:noFill/>
-          <a:ln/>
-        </p:spPr>
-        <p:txBody>
-          <a:bodyPr wrap="square" lIns="0" tIns="0" rIns="0" bIns="0" rtlCol="0" anchor="t"/>
-          <a:lstStyle/>
-          <a:p>
-            <a:pPr algn="l" indent="0" marL="0">
+              <a:t>Cultures de rente destinées à l'export, seules à supporter une prime de certification biologique.</a:t>
+            </a:r>
+            <a:endParaRPr lang="en-US" sz="1150" dirty="0"/>
+          </a:p>
+          <a:p>
+            <a:pPr algn="l" marL="342900" indent="-342900">
               <a:lnSpc>
-                <a:spcPct val="120000"/>
+                <a:spcPct val="116000"/>
               </a:lnSpc>
-              <a:buNone/>
-            </a:pPr>
-            <a:r>
-              <a:rPr lang="en-US" sz="1200" dirty="0">
+              <a:spcAft>
+                <a:spcPts val="700"/>
+              </a:spcAft>
+              <a:buSzPct val="100000"/>
+              <a:buChar char="•"/>
+            </a:pPr>
+            <a:r>
+              <a:rPr lang="en-US" sz="1150" dirty="0">
                 <a:solidFill>
                   <a:srgbClr val="31424A"/>
                 </a:solidFill>
@@ -7181,57 +6990,39 @@
                 <a:ea typeface="Calibri" pitchFamily="34" charset="-122"/>
                 <a:cs typeface="Calibri" pitchFamily="34" charset="-120"/>
               </a:rPr>
-              <a:t>Généralisation progressive par groupement de producteurs, sur la base des résultats.</a:t>
-            </a:r>
-            <a:endParaRPr lang="en-US" sz="1200" dirty="0"/>
-          </a:p>
-        </p:txBody>
-      </p:sp>
-      <p:sp>
-        <p:nvSpPr>
-          <p:cNvPr id="24" name="Text 22"/>
-          <p:cNvSpPr txBox="1"/>
-          <p:nvPr/>
-        </p:nvSpPr>
-        <p:spPr>
-          <a:xfrm>
-            <a:off x="594360" y="4983480"/>
-            <a:ext cx="11002975" cy="822960"/>
-          </a:xfrm>
-          <a:prstGeom prst="rect">
-            <a:avLst/>
-          </a:prstGeom>
-          <a:noFill/>
-          <a:ln/>
-        </p:spPr>
-        <p:txBody>
-          <a:bodyPr wrap="square" lIns="0" tIns="0" rIns="0" bIns="0" rtlCol="0" anchor="t"/>
-          <a:lstStyle/>
-          <a:p>
-            <a:pPr algn="l" indent="0" marL="0">
+              <a:t>Versants pentus et fortement érodés : chaque averse emporte du sol si rien ne le retient.</a:t>
+            </a:r>
+            <a:endParaRPr lang="en-US" sz="1150" dirty="0"/>
+          </a:p>
+          <a:p>
+            <a:pPr algn="l" marL="342900" indent="-342900">
               <a:lnSpc>
-                <a:spcPct val="125000"/>
+                <a:spcPct val="116000"/>
               </a:lnSpc>
-              <a:buNone/>
-            </a:pPr>
-            <a:r>
-              <a:rPr lang="en-US" sz="1250" i="1" dirty="0">
-                <a:solidFill>
-                  <a:srgbClr val="6C8089"/>
-                </a:solidFill>
-                <a:latin typeface="Calibri" pitchFamily="34" charset="0"/>
-                <a:ea typeface="Calibri" pitchFamily="34" charset="-122"/>
-                <a:cs typeface="Calibri" pitchFamily="34" charset="-120"/>
-              </a:rPr>
-              <a:t>Un essai est déjà en cours en Haïti avec l'Institut CEHPAPE, sur maraîchage, banane plantain et riz, avec ECOSORB®, ECOFERT®, EVERGREEN® et NAPEMA®. Les premiers relevés sont disponibles sur demande.</a:t>
-            </a:r>
-            <a:endParaRPr lang="en-US" sz="1250" dirty="0"/>
-          </a:p>
-        </p:txBody>
-      </p:sp>
-      <p:sp>
-        <p:nvSpPr>
-          <p:cNvPr id="25" name="Text 23"/>
+              <a:spcAft>
+                <a:spcPts val="700"/>
+              </a:spcAft>
+              <a:buSzPct val="100000"/>
+              <a:buChar char="•"/>
+            </a:pPr>
+            <a:r>
+              <a:rPr lang="en-US" sz="1150" dirty="0">
+                <a:solidFill>
+                  <a:srgbClr val="31424A"/>
+                </a:solidFill>
+                <a:latin typeface="Calibri" pitchFamily="34" charset="0"/>
+                <a:ea typeface="Calibri" pitchFamily="34" charset="-122"/>
+                <a:cs typeface="Calibri" pitchFamily="34" charset="-120"/>
+              </a:rPr>
+              <a:t>Zone exposée aux cyclones, où la reprise des jeunes plants après sinistre est un enjeu récurrent.</a:t>
+            </a:r>
+            <a:endParaRPr lang="en-US" sz="1150" dirty="0"/>
+          </a:p>
+        </p:txBody>
+      </p:sp>
+      <p:sp>
+        <p:nvSpPr>
+          <p:cNvPr id="19" name="Text 14"/>
           <p:cNvSpPr txBox="1"/>
           <p:nvPr/>
         </p:nvSpPr>
@@ -7272,7 +7063,7 @@
       </p:sp>
       <p:sp>
         <p:nvSpPr>
-          <p:cNvPr id="26" name="Text 24"/>
+          <p:cNvPr id="20" name="Text 15"/>
           <p:cNvSpPr txBox="1"/>
           <p:nvPr/>
         </p:nvSpPr>
@@ -7376,7 +7167,7 @@
                 <a:ea typeface="Calibri" pitchFamily="34" charset="-122"/>
                 <a:cs typeface="Calibri" pitchFamily="34" charset="-120"/>
               </a:rPr>
-              <a:t>Travailler ensemble</a:t>
+              <a:t>COMMENT NOUS PROCÉDONS</a:t>
             </a:r>
             <a:endParaRPr lang="en-US" sz="1150" dirty="0"/>
           </a:p>
@@ -7415,7 +7206,7 @@
                 <a:ea typeface="Cambria" pitchFamily="34" charset="-122"/>
                 <a:cs typeface="Cambria" pitchFamily="34" charset="-120"/>
               </a:rPr>
-              <a:t>Un partenaire local pour Haïti</a:t>
+              <a:t>Un déploiement par étapes, mesuré à chaque palier</a:t>
             </a:r>
             <a:endParaRPr lang="en-US" sz="3000" dirty="0"/>
           </a:p>
@@ -7540,7 +7331,7 @@
                 <a:ea typeface="Cambria" pitchFamily="34" charset="-122"/>
                 <a:cs typeface="Cambria" pitchFamily="34" charset="-120"/>
               </a:rPr>
-              <a:t>Distribution</a:t>
+              <a:t>Diagnostic</a:t>
             </a:r>
             <a:endParaRPr lang="en-US" sz="1400" dirty="0"/>
           </a:p>
@@ -7582,7 +7373,7 @@
                 <a:ea typeface="Calibri" pitchFamily="34" charset="-122"/>
                 <a:cs typeface="Calibri" pitchFamily="34" charset="-120"/>
               </a:rPr>
-              <a:t>Exclusivité territoriale et stock de lancement pour la première saison commerciale.</a:t>
+              <a:t>Analyse du sol, de la pente et de la culture. Aucun engagement à ce stade.</a:t>
             </a:r>
             <a:endParaRPr lang="en-US" sz="1200" dirty="0"/>
           </a:p>
@@ -7707,7 +7498,7 @@
                 <a:ea typeface="Cambria" pitchFamily="34" charset="-122"/>
                 <a:cs typeface="Cambria" pitchFamily="34" charset="-120"/>
               </a:rPr>
-              <a:t>Formation</a:t>
+              <a:t>Parcelle témoin</a:t>
             </a:r>
             <a:endParaRPr lang="en-US" sz="1400" dirty="0"/>
           </a:p>
@@ -7749,7 +7540,7 @@
                 <a:ea typeface="Calibri" pitchFamily="34" charset="-122"/>
                 <a:cs typeface="Calibri" pitchFamily="34" charset="-120"/>
               </a:rPr>
-              <a:t>Formation technique des équipes, protocoles de dosage et mises à jour à chaque saison.</a:t>
+              <a:t>Un essai comparatif sur une parcelle, avec parcelle témoin conduite à l'identique.</a:t>
             </a:r>
             <a:endParaRPr lang="en-US" sz="1200" dirty="0"/>
           </a:p>
@@ -7874,7 +7665,7 @@
                 <a:ea typeface="Cambria" pitchFamily="34" charset="-122"/>
                 <a:cs typeface="Cambria" pitchFamily="34" charset="-120"/>
               </a:rPr>
-              <a:t>Essais conjoints</a:t>
+              <a:t>Mesure</a:t>
             </a:r>
             <a:endParaRPr lang="en-US" sz="1400" dirty="0"/>
           </a:p>
@@ -7916,7 +7707,7 @@
                 <a:ea typeface="Calibri" pitchFamily="34" charset="-122"/>
                 <a:cs typeface="Calibri" pitchFamily="34" charset="-120"/>
               </a:rPr>
-              <a:t>Parcelles de démonstration avec témoin, résultats partagés avec les producteurs.</a:t>
+              <a:t>Relevés de rendement et de reprise sur un cycle cultural complet.</a:t>
             </a:r>
             <a:endParaRPr lang="en-US" sz="1200" dirty="0"/>
           </a:p>
@@ -8041,7 +7832,7 @@
                 <a:ea typeface="Cambria" pitchFamily="34" charset="-122"/>
                 <a:cs typeface="Cambria" pitchFamily="34" charset="-120"/>
               </a:rPr>
-              <a:t>Institutions</a:t>
+              <a:t>Extension</a:t>
             </a:r>
             <a:endParaRPr lang="en-US" sz="1400" dirty="0"/>
           </a:p>
@@ -8083,7 +7874,7 @@
                 <a:ea typeface="Calibri" pitchFamily="34" charset="-122"/>
                 <a:cs typeface="Calibri" pitchFamily="34" charset="-120"/>
               </a:rPr>
-              <a:t>Dialogue avec le ministère de l'Agriculture et les programmes de sécurité alimentaire.</a:t>
+              <a:t>Généralisation progressive par groupement de producteurs, sur la base des résultats.</a:t>
             </a:r>
             <a:endParaRPr lang="en-US" sz="1200" dirty="0"/>
           </a:p>
@@ -8125,7 +7916,7 @@
                 <a:ea typeface="Calibri" pitchFamily="34" charset="-122"/>
                 <a:cs typeface="Calibri" pitchFamily="34" charset="-120"/>
               </a:rPr>
-              <a:t>Le cadre s'adapte au territoire : un importateur, un distributeur d'intrants ou un groupement de producteurs peut porter le partenariat.</a:t>
+              <a:t>Un essai est déjà en cours en Haïti avec l'Institut CEHPAPE, sur maraîchage, banane plantain et riz, avec ECOSORB®, ECOFERT®, EVERGREEN® et NAPEMA®. Les premiers relevés sont disponibles sur demande.</a:t>
             </a:r>
             <a:endParaRPr lang="en-US" sz="1250" dirty="0"/>
           </a:p>
@@ -8278,7 +8069,7 @@
                 <a:ea typeface="Calibri" pitchFamily="34" charset="-122"/>
                 <a:cs typeface="Calibri" pitchFamily="34" charset="-120"/>
               </a:rPr>
-              <a:t>CE QU'IL FAUT ANTICIPER</a:t>
+              <a:t>Travailler ensemble</a:t>
             </a:r>
             <a:endParaRPr lang="en-US" sz="1150" dirty="0"/>
           </a:p>
@@ -8317,7 +8108,7 @@
                 <a:ea typeface="Cambria" pitchFamily="34" charset="-122"/>
                 <a:cs typeface="Cambria" pitchFamily="34" charset="-120"/>
               </a:rPr>
-              <a:t>Risques identifiés et réponses</a:t>
+              <a:t>Un partenaire local pour Haïti</a:t>
             </a:r>
             <a:endParaRPr lang="en-US" sz="3000" dirty="0"/>
           </a:p>
@@ -8325,332 +8116,18 @@
       </p:sp>
       <p:sp>
         <p:nvSpPr>
-          <p:cNvPr id="4" name="Text 2"/>
-          <p:cNvSpPr txBox="1"/>
-          <p:nvPr/>
-        </p:nvSpPr>
-        <p:spPr>
-          <a:xfrm>
-            <a:off x="594360" y="1783080"/>
-            <a:ext cx="5227168" cy="411480"/>
-          </a:xfrm>
-          <a:prstGeom prst="rect">
-            <a:avLst/>
-          </a:prstGeom>
-          <a:noFill/>
-          <a:ln/>
-        </p:spPr>
-        <p:txBody>
-          <a:bodyPr wrap="square" lIns="0" tIns="0" rIns="0" bIns="0" rtlCol="0" anchor="ctr"/>
-          <a:lstStyle/>
-          <a:p>
-            <a:pPr algn="l" indent="0" marL="0">
-              <a:buNone/>
-            </a:pPr>
-            <a:r>
-              <a:rPr lang="en-US" sz="1600" b="1" dirty="0">
-                <a:solidFill>
-                  <a:srgbClr val="1C5A73"/>
-                </a:solidFill>
-                <a:latin typeface="Cambria" pitchFamily="34" charset="0"/>
-                <a:ea typeface="Cambria" pitchFamily="34" charset="-122"/>
-                <a:cs typeface="Cambria" pitchFamily="34" charset="-120"/>
-              </a:rPr>
-              <a:t>Risques</a:t>
-            </a:r>
-            <a:endParaRPr lang="en-US" sz="1600" dirty="0"/>
-          </a:p>
-        </p:txBody>
-      </p:sp>
-      <p:sp>
-        <p:nvSpPr>
-          <p:cNvPr id="5" name="Text 3"/>
-          <p:cNvSpPr txBox="1"/>
-          <p:nvPr/>
-        </p:nvSpPr>
-        <p:spPr>
-          <a:xfrm>
-            <a:off x="594360" y="2286000"/>
-            <a:ext cx="5227168" cy="2468880"/>
-          </a:xfrm>
-          <a:prstGeom prst="rect">
-            <a:avLst/>
-          </a:prstGeom>
-          <a:noFill/>
-          <a:ln/>
-        </p:spPr>
-        <p:txBody>
-          <a:bodyPr wrap="square" lIns="0" tIns="0" rIns="0" bIns="0" rtlCol="0" anchor="t"/>
-          <a:lstStyle/>
-          <a:p>
-            <a:pPr algn="l" marL="342900" indent="-342900">
-              <a:lnSpc>
-                <a:spcPct val="122000"/>
-              </a:lnSpc>
-              <a:spcAft>
-                <a:spcPts val="1000"/>
-              </a:spcAft>
-              <a:buSzPct val="100000"/>
-              <a:buChar char="•"/>
-            </a:pPr>
-            <a:r>
-              <a:rPr lang="en-US" sz="1350" dirty="0">
-                <a:solidFill>
-                  <a:srgbClr val="31424A"/>
-                </a:solidFill>
-                <a:latin typeface="Calibri" pitchFamily="34" charset="0"/>
-                <a:ea typeface="Calibri" pitchFamily="34" charset="-122"/>
-                <a:cs typeface="Calibri" pitchFamily="34" charset="-120"/>
-              </a:rPr>
-              <a:t>Morcellement extrême du foncier : la décision d'achat est dispersée sur des milliers de très petites exploitations.</a:t>
-            </a:r>
-            <a:endParaRPr lang="en-US" sz="1350" dirty="0"/>
-          </a:p>
-          <a:p>
-            <a:pPr algn="l" marL="342900" indent="-342900">
-              <a:lnSpc>
-                <a:spcPct val="122000"/>
-              </a:lnSpc>
-              <a:spcAft>
-                <a:spcPts val="1000"/>
-              </a:spcAft>
-              <a:buSzPct val="100000"/>
-              <a:buChar char="•"/>
-            </a:pPr>
-            <a:r>
-              <a:rPr lang="en-US" sz="1350" dirty="0">
-                <a:solidFill>
-                  <a:srgbClr val="31424A"/>
-                </a:solidFill>
-                <a:latin typeface="Calibri" pitchFamily="34" charset="0"/>
-                <a:ea typeface="Calibri" pitchFamily="34" charset="-122"/>
-                <a:cs typeface="Calibri" pitchFamily="34" charset="-120"/>
-              </a:rPr>
-              <a:t>Capacité de trésorerie limitée des producteurs, qui rend tout achat d'intrant difficile à engager seul.</a:t>
-            </a:r>
-            <a:endParaRPr lang="en-US" sz="1350" dirty="0"/>
-          </a:p>
-          <a:p>
-            <a:pPr algn="l" marL="342900" indent="-342900">
-              <a:lnSpc>
-                <a:spcPct val="122000"/>
-              </a:lnSpc>
-              <a:spcAft>
-                <a:spcPts val="1000"/>
-              </a:spcAft>
-              <a:buSzPct val="100000"/>
-              <a:buChar char="•"/>
-            </a:pPr>
-            <a:r>
-              <a:rPr lang="en-US" sz="1350" dirty="0">
-                <a:solidFill>
-                  <a:srgbClr val="31424A"/>
-                </a:solidFill>
-                <a:latin typeface="Calibri" pitchFamily="34" charset="0"/>
-                <a:ea typeface="Calibri" pitchFamily="34" charset="-122"/>
-                <a:cs typeface="Calibri" pitchFamily="34" charset="-120"/>
-              </a:rPr>
-              <a:t>Aléa cyclonique : une tempête peut effacer les résultats d'un essai en cours de campagne.</a:t>
-            </a:r>
-            <a:endParaRPr lang="en-US" sz="1350" dirty="0"/>
-          </a:p>
-          <a:p>
-            <a:pPr algn="l" marL="342900" indent="-342900">
-              <a:lnSpc>
-                <a:spcPct val="122000"/>
-              </a:lnSpc>
-              <a:spcAft>
-                <a:spcPts val="1000"/>
-              </a:spcAft>
-              <a:buSzPct val="100000"/>
-              <a:buChar char="•"/>
-            </a:pPr>
-            <a:r>
-              <a:rPr lang="en-US" sz="1350" dirty="0">
-                <a:solidFill>
-                  <a:srgbClr val="31424A"/>
-                </a:solidFill>
-                <a:latin typeface="Calibri" pitchFamily="34" charset="0"/>
-                <a:ea typeface="Calibri" pitchFamily="34" charset="-122"/>
-                <a:cs typeface="Calibri" pitchFamily="34" charset="-120"/>
-              </a:rPr>
-              <a:t>Logistique intérieure et sécurité des déplacements, qui compliquent le suivi agronomique de terrain.</a:t>
-            </a:r>
-            <a:endParaRPr lang="en-US" sz="1350" dirty="0"/>
-          </a:p>
-        </p:txBody>
-      </p:sp>
-      <p:sp>
-        <p:nvSpPr>
-          <p:cNvPr id="6" name="Text 4"/>
-          <p:cNvSpPr txBox="1"/>
-          <p:nvPr/>
-        </p:nvSpPr>
-        <p:spPr>
-          <a:xfrm>
-            <a:off x="6370168" y="1783080"/>
-            <a:ext cx="5227168" cy="411480"/>
-          </a:xfrm>
-          <a:prstGeom prst="rect">
-            <a:avLst/>
-          </a:prstGeom>
-          <a:noFill/>
-          <a:ln/>
-        </p:spPr>
-        <p:txBody>
-          <a:bodyPr wrap="square" lIns="0" tIns="0" rIns="0" bIns="0" rtlCol="0" anchor="ctr"/>
-          <a:lstStyle/>
-          <a:p>
-            <a:pPr algn="l" indent="0" marL="0">
-              <a:buNone/>
-            </a:pPr>
-            <a:r>
-              <a:rPr lang="en-US" sz="1600" b="1" dirty="0">
-                <a:solidFill>
-                  <a:srgbClr val="1C5A73"/>
-                </a:solidFill>
-                <a:latin typeface="Cambria" pitchFamily="34" charset="0"/>
-                <a:ea typeface="Cambria" pitchFamily="34" charset="-122"/>
-                <a:cs typeface="Cambria" pitchFamily="34" charset="-120"/>
-              </a:rPr>
-              <a:t>Réponses</a:t>
-            </a:r>
-            <a:endParaRPr lang="en-US" sz="1600" dirty="0"/>
-          </a:p>
-        </p:txBody>
-      </p:sp>
-      <p:sp>
-        <p:nvSpPr>
-          <p:cNvPr id="7" name="Text 5"/>
-          <p:cNvSpPr txBox="1"/>
-          <p:nvPr/>
-        </p:nvSpPr>
-        <p:spPr>
-          <a:xfrm>
-            <a:off x="6370168" y="2286000"/>
-            <a:ext cx="5227168" cy="2468880"/>
-          </a:xfrm>
-          <a:prstGeom prst="rect">
-            <a:avLst/>
-          </a:prstGeom>
-          <a:noFill/>
-          <a:ln/>
-        </p:spPr>
-        <p:txBody>
-          <a:bodyPr wrap="square" lIns="0" tIns="0" rIns="0" bIns="0" rtlCol="0" anchor="t"/>
-          <a:lstStyle/>
-          <a:p>
-            <a:pPr algn="l" marL="342900" indent="-342900">
-              <a:lnSpc>
-                <a:spcPct val="122000"/>
-              </a:lnSpc>
-              <a:spcAft>
-                <a:spcPts val="1000"/>
-              </a:spcAft>
-              <a:buSzPct val="100000"/>
-              <a:buChar char="•"/>
-            </a:pPr>
-            <a:r>
-              <a:rPr lang="en-US" sz="1350" dirty="0">
-                <a:solidFill>
-                  <a:srgbClr val="31424A"/>
-                </a:solidFill>
-                <a:latin typeface="Calibri" pitchFamily="34" charset="0"/>
-                <a:ea typeface="Calibri" pitchFamily="34" charset="-122"/>
-                <a:cs typeface="Calibri" pitchFamily="34" charset="-120"/>
-              </a:rPr>
-              <a:t>Passer par les organisations de producteurs et les coopératives plutôt que par l'exploitation individuelle.</a:t>
-            </a:r>
-            <a:endParaRPr lang="en-US" sz="1350" dirty="0"/>
-          </a:p>
-          <a:p>
-            <a:pPr algn="l" marL="342900" indent="-342900">
-              <a:lnSpc>
-                <a:spcPct val="122000"/>
-              </a:lnSpc>
-              <a:spcAft>
-                <a:spcPts val="1000"/>
-              </a:spcAft>
-              <a:buSzPct val="100000"/>
-              <a:buChar char="•"/>
-            </a:pPr>
-            <a:r>
-              <a:rPr lang="en-US" sz="1350" dirty="0">
-                <a:solidFill>
-                  <a:srgbClr val="31424A"/>
-                </a:solidFill>
-                <a:latin typeface="Calibri" pitchFamily="34" charset="0"/>
-                <a:ea typeface="Calibri" pitchFamily="34" charset="-122"/>
-                <a:cs typeface="Calibri" pitchFamily="34" charset="-120"/>
-              </a:rPr>
-              <a:t>Adosser les premiers déploiements aux programmes de développement agricole et aux bailleurs déjà présents.</a:t>
-            </a:r>
-            <a:endParaRPr lang="en-US" sz="1350" dirty="0"/>
-          </a:p>
-          <a:p>
-            <a:pPr algn="l" marL="342900" indent="-342900">
-              <a:lnSpc>
-                <a:spcPct val="122000"/>
-              </a:lnSpc>
-              <a:spcAft>
-                <a:spcPts val="1000"/>
-              </a:spcAft>
-              <a:buSzPct val="100000"/>
-              <a:buChar char="•"/>
-            </a:pPr>
-            <a:r>
-              <a:rPr lang="en-US" sz="1350" dirty="0">
-                <a:solidFill>
-                  <a:srgbClr val="31424A"/>
-                </a:solidFill>
-                <a:latin typeface="Calibri" pitchFamily="34" charset="0"/>
-                <a:ea typeface="Calibri" pitchFamily="34" charset="-122"/>
-                <a:cs typeface="Calibri" pitchFamily="34" charset="-120"/>
-              </a:rPr>
-              <a:t>Conduire les essais sur deux cycles, pour que l'aléa d'une campagne ne décide pas seul du résultat.</a:t>
-            </a:r>
-            <a:endParaRPr lang="en-US" sz="1350" dirty="0"/>
-          </a:p>
-          <a:p>
-            <a:pPr algn="l" marL="342900" indent="-342900">
-              <a:lnSpc>
-                <a:spcPct val="122000"/>
-              </a:lnSpc>
-              <a:spcAft>
-                <a:spcPts val="1000"/>
-              </a:spcAft>
-              <a:buSzPct val="100000"/>
-              <a:buChar char="•"/>
-            </a:pPr>
-            <a:r>
-              <a:rPr lang="en-US" sz="1350" dirty="0">
-                <a:solidFill>
-                  <a:srgbClr val="31424A"/>
-                </a:solidFill>
-                <a:latin typeface="Calibri" pitchFamily="34" charset="0"/>
-                <a:ea typeface="Calibri" pitchFamily="34" charset="-122"/>
-                <a:cs typeface="Calibri" pitchFamily="34" charset="-120"/>
-              </a:rPr>
-              <a:t>S'appuyer sur l'essai CEHPAPE en cours et sur un relais local établi pour le suivi des parcelles.</a:t>
-            </a:r>
-            <a:endParaRPr lang="en-US" sz="1350" dirty="0"/>
-          </a:p>
-        </p:txBody>
-      </p:sp>
-      <p:sp>
-        <p:nvSpPr>
-          <p:cNvPr id="8" name="Shape 6"/>
+          <p:cNvPr id="4" name="Shape 2"/>
           <p:cNvSpPr/>
           <p:nvPr/>
         </p:nvSpPr>
         <p:spPr>
           <a:xfrm>
-            <a:off x="594360" y="4846320"/>
-            <a:ext cx="11002975" cy="960120"/>
+            <a:off x="594360" y="1874520"/>
+            <a:ext cx="2545004" cy="2834640"/>
           </a:xfrm>
           <a:prstGeom prst="roundRect">
             <a:avLst>
-              <a:gd name="adj" fmla="val 7619"/>
+              <a:gd name="adj" fmla="val 3593"/>
             </a:avLst>
           </a:prstGeom>
           <a:solidFill>
@@ -8666,14 +8143,112 @@
       </p:sp>
       <p:sp>
         <p:nvSpPr>
-          <p:cNvPr id="9" name="Text 7"/>
-          <p:cNvSpPr txBox="1"/>
-          <p:nvPr/>
-        </p:nvSpPr>
-        <p:spPr>
-          <a:xfrm>
-            <a:off x="822960" y="4983480"/>
-            <a:ext cx="10545775" cy="713232"/>
+          <p:cNvPr id="5" name="Shape 3"/>
+          <p:cNvSpPr/>
+          <p:nvPr/>
+        </p:nvSpPr>
+        <p:spPr>
+          <a:xfrm>
+            <a:off x="822960" y="2103120"/>
+            <a:ext cx="566928" cy="566928"/>
+          </a:xfrm>
+          <a:prstGeom prst="ellipse">
+            <a:avLst/>
+          </a:prstGeom>
+          <a:solidFill>
+            <a:srgbClr val="1C5A73"/>
+          </a:solidFill>
+          <a:ln/>
+        </p:spPr>
+      </p:sp>
+      <p:sp>
+        <p:nvSpPr>
+          <p:cNvPr id="6" name="Text 4"/>
+          <p:cNvSpPr txBox="1"/>
+          <p:nvPr/>
+        </p:nvSpPr>
+        <p:spPr>
+          <a:xfrm>
+            <a:off x="822960" y="2103120"/>
+            <a:ext cx="566928" cy="566928"/>
+          </a:xfrm>
+          <a:prstGeom prst="rect">
+            <a:avLst/>
+          </a:prstGeom>
+          <a:noFill/>
+          <a:ln/>
+        </p:spPr>
+        <p:txBody>
+          <a:bodyPr wrap="square" lIns="0" tIns="0" rIns="0" bIns="0" rtlCol="0" anchor="ctr"/>
+          <a:lstStyle/>
+          <a:p>
+            <a:pPr algn="ctr" indent="0" marL="0">
+              <a:buNone/>
+            </a:pPr>
+            <a:r>
+              <a:rPr lang="en-US" sz="1600" b="1" dirty="0">
+                <a:solidFill>
+                  <a:srgbClr val="FFFFFF"/>
+                </a:solidFill>
+                <a:latin typeface="Cambria" pitchFamily="34" charset="0"/>
+                <a:ea typeface="Cambria" pitchFamily="34" charset="-122"/>
+                <a:cs typeface="Cambria" pitchFamily="34" charset="-120"/>
+              </a:rPr>
+              <a:t>1</a:t>
+            </a:r>
+            <a:endParaRPr lang="en-US" sz="1600" dirty="0"/>
+          </a:p>
+        </p:txBody>
+      </p:sp>
+      <p:sp>
+        <p:nvSpPr>
+          <p:cNvPr id="7" name="Text 5"/>
+          <p:cNvSpPr txBox="1"/>
+          <p:nvPr/>
+        </p:nvSpPr>
+        <p:spPr>
+          <a:xfrm>
+            <a:off x="822960" y="2788920"/>
+            <a:ext cx="2087804" cy="457200"/>
+          </a:xfrm>
+          <a:prstGeom prst="rect">
+            <a:avLst/>
+          </a:prstGeom>
+          <a:noFill/>
+          <a:ln/>
+        </p:spPr>
+        <p:txBody>
+          <a:bodyPr wrap="square" lIns="0" tIns="0" rIns="0" bIns="0" rtlCol="0" anchor="ctr"/>
+          <a:lstStyle/>
+          <a:p>
+            <a:pPr algn="l" indent="0" marL="0">
+              <a:buNone/>
+            </a:pPr>
+            <a:r>
+              <a:rPr lang="en-US" sz="1400" b="1" dirty="0">
+                <a:solidFill>
+                  <a:srgbClr val="1C5A73"/>
+                </a:solidFill>
+                <a:latin typeface="Cambria" pitchFamily="34" charset="0"/>
+                <a:ea typeface="Cambria" pitchFamily="34" charset="-122"/>
+                <a:cs typeface="Cambria" pitchFamily="34" charset="-120"/>
+              </a:rPr>
+              <a:t>Distribution</a:t>
+            </a:r>
+            <a:endParaRPr lang="en-US" sz="1400" dirty="0"/>
+          </a:p>
+        </p:txBody>
+      </p:sp>
+      <p:sp>
+        <p:nvSpPr>
+          <p:cNvPr id="8" name="Text 6"/>
+          <p:cNvSpPr txBox="1"/>
+          <p:nvPr/>
+        </p:nvSpPr>
+        <p:spPr>
+          <a:xfrm>
+            <a:off x="822960" y="3291840"/>
+            <a:ext cx="2087804" cy="1234440"/>
           </a:xfrm>
           <a:prstGeom prst="rect">
             <a:avLst/>
@@ -8687,12 +8262,555 @@
           <a:p>
             <a:pPr algn="l" indent="0" marL="0">
               <a:lnSpc>
-                <a:spcPct val="118000"/>
+                <a:spcPct val="120000"/>
               </a:lnSpc>
               <a:buNone/>
             </a:pPr>
             <a:r>
-              <a:rPr lang="en-US" sz="1100" dirty="0">
+              <a:rPr lang="en-US" sz="1200" dirty="0">
+                <a:solidFill>
+                  <a:srgbClr val="31424A"/>
+                </a:solidFill>
+                <a:latin typeface="Calibri" pitchFamily="34" charset="0"/>
+                <a:ea typeface="Calibri" pitchFamily="34" charset="-122"/>
+                <a:cs typeface="Calibri" pitchFamily="34" charset="-120"/>
+              </a:rPr>
+              <a:t>Exclusivité territoriale et stock de lancement pour la première saison commerciale.</a:t>
+            </a:r>
+            <a:endParaRPr lang="en-US" sz="1200" dirty="0"/>
+          </a:p>
+        </p:txBody>
+      </p:sp>
+      <p:sp>
+        <p:nvSpPr>
+          <p:cNvPr id="9" name="Shape 7"/>
+          <p:cNvSpPr/>
+          <p:nvPr/>
+        </p:nvSpPr>
+        <p:spPr>
+          <a:xfrm>
+            <a:off x="3413684" y="1874520"/>
+            <a:ext cx="2545004" cy="2834640"/>
+          </a:xfrm>
+          <a:prstGeom prst="roundRect">
+            <a:avLst>
+              <a:gd name="adj" fmla="val 3593"/>
+            </a:avLst>
+          </a:prstGeom>
+          <a:solidFill>
+            <a:srgbClr val="EDF3F5"/>
+          </a:solidFill>
+          <a:ln w="9525">
+            <a:solidFill>
+              <a:srgbClr val="D6E2E7"/>
+            </a:solidFill>
+            <a:prstDash val="solid"/>
+          </a:ln>
+        </p:spPr>
+      </p:sp>
+      <p:sp>
+        <p:nvSpPr>
+          <p:cNvPr id="10" name="Shape 8"/>
+          <p:cNvSpPr/>
+          <p:nvPr/>
+        </p:nvSpPr>
+        <p:spPr>
+          <a:xfrm>
+            <a:off x="3642284" y="2103120"/>
+            <a:ext cx="566928" cy="566928"/>
+          </a:xfrm>
+          <a:prstGeom prst="ellipse">
+            <a:avLst/>
+          </a:prstGeom>
+          <a:solidFill>
+            <a:srgbClr val="1C5A73"/>
+          </a:solidFill>
+          <a:ln/>
+        </p:spPr>
+      </p:sp>
+      <p:sp>
+        <p:nvSpPr>
+          <p:cNvPr id="11" name="Text 9"/>
+          <p:cNvSpPr txBox="1"/>
+          <p:nvPr/>
+        </p:nvSpPr>
+        <p:spPr>
+          <a:xfrm>
+            <a:off x="3642284" y="2103120"/>
+            <a:ext cx="566928" cy="566928"/>
+          </a:xfrm>
+          <a:prstGeom prst="rect">
+            <a:avLst/>
+          </a:prstGeom>
+          <a:noFill/>
+          <a:ln/>
+        </p:spPr>
+        <p:txBody>
+          <a:bodyPr wrap="square" lIns="0" tIns="0" rIns="0" bIns="0" rtlCol="0" anchor="ctr"/>
+          <a:lstStyle/>
+          <a:p>
+            <a:pPr algn="ctr" indent="0" marL="0">
+              <a:buNone/>
+            </a:pPr>
+            <a:r>
+              <a:rPr lang="en-US" sz="1600" b="1" dirty="0">
+                <a:solidFill>
+                  <a:srgbClr val="FFFFFF"/>
+                </a:solidFill>
+                <a:latin typeface="Cambria" pitchFamily="34" charset="0"/>
+                <a:ea typeface="Cambria" pitchFamily="34" charset="-122"/>
+                <a:cs typeface="Cambria" pitchFamily="34" charset="-120"/>
+              </a:rPr>
+              <a:t>2</a:t>
+            </a:r>
+            <a:endParaRPr lang="en-US" sz="1600" dirty="0"/>
+          </a:p>
+        </p:txBody>
+      </p:sp>
+      <p:sp>
+        <p:nvSpPr>
+          <p:cNvPr id="12" name="Text 10"/>
+          <p:cNvSpPr txBox="1"/>
+          <p:nvPr/>
+        </p:nvSpPr>
+        <p:spPr>
+          <a:xfrm>
+            <a:off x="3642284" y="2788920"/>
+            <a:ext cx="2087804" cy="457200"/>
+          </a:xfrm>
+          <a:prstGeom prst="rect">
+            <a:avLst/>
+          </a:prstGeom>
+          <a:noFill/>
+          <a:ln/>
+        </p:spPr>
+        <p:txBody>
+          <a:bodyPr wrap="square" lIns="0" tIns="0" rIns="0" bIns="0" rtlCol="0" anchor="ctr"/>
+          <a:lstStyle/>
+          <a:p>
+            <a:pPr algn="l" indent="0" marL="0">
+              <a:buNone/>
+            </a:pPr>
+            <a:r>
+              <a:rPr lang="en-US" sz="1400" b="1" dirty="0">
+                <a:solidFill>
+                  <a:srgbClr val="1C5A73"/>
+                </a:solidFill>
+                <a:latin typeface="Cambria" pitchFamily="34" charset="0"/>
+                <a:ea typeface="Cambria" pitchFamily="34" charset="-122"/>
+                <a:cs typeface="Cambria" pitchFamily="34" charset="-120"/>
+              </a:rPr>
+              <a:t>Formation</a:t>
+            </a:r>
+            <a:endParaRPr lang="en-US" sz="1400" dirty="0"/>
+          </a:p>
+        </p:txBody>
+      </p:sp>
+      <p:sp>
+        <p:nvSpPr>
+          <p:cNvPr id="13" name="Text 11"/>
+          <p:cNvSpPr txBox="1"/>
+          <p:nvPr/>
+        </p:nvSpPr>
+        <p:spPr>
+          <a:xfrm>
+            <a:off x="3642284" y="3291840"/>
+            <a:ext cx="2087804" cy="1234440"/>
+          </a:xfrm>
+          <a:prstGeom prst="rect">
+            <a:avLst/>
+          </a:prstGeom>
+          <a:noFill/>
+          <a:ln/>
+        </p:spPr>
+        <p:txBody>
+          <a:bodyPr wrap="square" lIns="0" tIns="0" rIns="0" bIns="0" rtlCol="0" anchor="t"/>
+          <a:lstStyle/>
+          <a:p>
+            <a:pPr algn="l" indent="0" marL="0">
+              <a:lnSpc>
+                <a:spcPct val="120000"/>
+              </a:lnSpc>
+              <a:buNone/>
+            </a:pPr>
+            <a:r>
+              <a:rPr lang="en-US" sz="1200" dirty="0">
+                <a:solidFill>
+                  <a:srgbClr val="31424A"/>
+                </a:solidFill>
+                <a:latin typeface="Calibri" pitchFamily="34" charset="0"/>
+                <a:ea typeface="Calibri" pitchFamily="34" charset="-122"/>
+                <a:cs typeface="Calibri" pitchFamily="34" charset="-120"/>
+              </a:rPr>
+              <a:t>Formation technique des équipes, protocoles de dosage et mises à jour à chaque saison.</a:t>
+            </a:r>
+            <a:endParaRPr lang="en-US" sz="1200" dirty="0"/>
+          </a:p>
+        </p:txBody>
+      </p:sp>
+      <p:sp>
+        <p:nvSpPr>
+          <p:cNvPr id="14" name="Shape 12"/>
+          <p:cNvSpPr/>
+          <p:nvPr/>
+        </p:nvSpPr>
+        <p:spPr>
+          <a:xfrm>
+            <a:off x="6233008" y="1874520"/>
+            <a:ext cx="2545004" cy="2834640"/>
+          </a:xfrm>
+          <a:prstGeom prst="roundRect">
+            <a:avLst>
+              <a:gd name="adj" fmla="val 3593"/>
+            </a:avLst>
+          </a:prstGeom>
+          <a:solidFill>
+            <a:srgbClr val="EDF3F5"/>
+          </a:solidFill>
+          <a:ln w="9525">
+            <a:solidFill>
+              <a:srgbClr val="D6E2E7"/>
+            </a:solidFill>
+            <a:prstDash val="solid"/>
+          </a:ln>
+        </p:spPr>
+      </p:sp>
+      <p:sp>
+        <p:nvSpPr>
+          <p:cNvPr id="15" name="Shape 13"/>
+          <p:cNvSpPr/>
+          <p:nvPr/>
+        </p:nvSpPr>
+        <p:spPr>
+          <a:xfrm>
+            <a:off x="6461608" y="2103120"/>
+            <a:ext cx="566928" cy="566928"/>
+          </a:xfrm>
+          <a:prstGeom prst="ellipse">
+            <a:avLst/>
+          </a:prstGeom>
+          <a:solidFill>
+            <a:srgbClr val="1C5A73"/>
+          </a:solidFill>
+          <a:ln/>
+        </p:spPr>
+      </p:sp>
+      <p:sp>
+        <p:nvSpPr>
+          <p:cNvPr id="16" name="Text 14"/>
+          <p:cNvSpPr txBox="1"/>
+          <p:nvPr/>
+        </p:nvSpPr>
+        <p:spPr>
+          <a:xfrm>
+            <a:off x="6461608" y="2103120"/>
+            <a:ext cx="566928" cy="566928"/>
+          </a:xfrm>
+          <a:prstGeom prst="rect">
+            <a:avLst/>
+          </a:prstGeom>
+          <a:noFill/>
+          <a:ln/>
+        </p:spPr>
+        <p:txBody>
+          <a:bodyPr wrap="square" lIns="0" tIns="0" rIns="0" bIns="0" rtlCol="0" anchor="ctr"/>
+          <a:lstStyle/>
+          <a:p>
+            <a:pPr algn="ctr" indent="0" marL="0">
+              <a:buNone/>
+            </a:pPr>
+            <a:r>
+              <a:rPr lang="en-US" sz="1600" b="1" dirty="0">
+                <a:solidFill>
+                  <a:srgbClr val="FFFFFF"/>
+                </a:solidFill>
+                <a:latin typeface="Cambria" pitchFamily="34" charset="0"/>
+                <a:ea typeface="Cambria" pitchFamily="34" charset="-122"/>
+                <a:cs typeface="Cambria" pitchFamily="34" charset="-120"/>
+              </a:rPr>
+              <a:t>3</a:t>
+            </a:r>
+            <a:endParaRPr lang="en-US" sz="1600" dirty="0"/>
+          </a:p>
+        </p:txBody>
+      </p:sp>
+      <p:sp>
+        <p:nvSpPr>
+          <p:cNvPr id="17" name="Text 15"/>
+          <p:cNvSpPr txBox="1"/>
+          <p:nvPr/>
+        </p:nvSpPr>
+        <p:spPr>
+          <a:xfrm>
+            <a:off x="6461608" y="2788920"/>
+            <a:ext cx="2087804" cy="457200"/>
+          </a:xfrm>
+          <a:prstGeom prst="rect">
+            <a:avLst/>
+          </a:prstGeom>
+          <a:noFill/>
+          <a:ln/>
+        </p:spPr>
+        <p:txBody>
+          <a:bodyPr wrap="square" lIns="0" tIns="0" rIns="0" bIns="0" rtlCol="0" anchor="ctr"/>
+          <a:lstStyle/>
+          <a:p>
+            <a:pPr algn="l" indent="0" marL="0">
+              <a:buNone/>
+            </a:pPr>
+            <a:r>
+              <a:rPr lang="en-US" sz="1400" b="1" dirty="0">
+                <a:solidFill>
+                  <a:srgbClr val="1C5A73"/>
+                </a:solidFill>
+                <a:latin typeface="Cambria" pitchFamily="34" charset="0"/>
+                <a:ea typeface="Cambria" pitchFamily="34" charset="-122"/>
+                <a:cs typeface="Cambria" pitchFamily="34" charset="-120"/>
+              </a:rPr>
+              <a:t>Essais conjoints</a:t>
+            </a:r>
+            <a:endParaRPr lang="en-US" sz="1400" dirty="0"/>
+          </a:p>
+        </p:txBody>
+      </p:sp>
+      <p:sp>
+        <p:nvSpPr>
+          <p:cNvPr id="18" name="Text 16"/>
+          <p:cNvSpPr txBox="1"/>
+          <p:nvPr/>
+        </p:nvSpPr>
+        <p:spPr>
+          <a:xfrm>
+            <a:off x="6461608" y="3291840"/>
+            <a:ext cx="2087804" cy="1234440"/>
+          </a:xfrm>
+          <a:prstGeom prst="rect">
+            <a:avLst/>
+          </a:prstGeom>
+          <a:noFill/>
+          <a:ln/>
+        </p:spPr>
+        <p:txBody>
+          <a:bodyPr wrap="square" lIns="0" tIns="0" rIns="0" bIns="0" rtlCol="0" anchor="t"/>
+          <a:lstStyle/>
+          <a:p>
+            <a:pPr algn="l" indent="0" marL="0">
+              <a:lnSpc>
+                <a:spcPct val="120000"/>
+              </a:lnSpc>
+              <a:buNone/>
+            </a:pPr>
+            <a:r>
+              <a:rPr lang="en-US" sz="1200" dirty="0">
+                <a:solidFill>
+                  <a:srgbClr val="31424A"/>
+                </a:solidFill>
+                <a:latin typeface="Calibri" pitchFamily="34" charset="0"/>
+                <a:ea typeface="Calibri" pitchFamily="34" charset="-122"/>
+                <a:cs typeface="Calibri" pitchFamily="34" charset="-120"/>
+              </a:rPr>
+              <a:t>Parcelles de démonstration avec témoin, résultats partagés avec les producteurs.</a:t>
+            </a:r>
+            <a:endParaRPr lang="en-US" sz="1200" dirty="0"/>
+          </a:p>
+        </p:txBody>
+      </p:sp>
+      <p:sp>
+        <p:nvSpPr>
+          <p:cNvPr id="19" name="Shape 17"/>
+          <p:cNvSpPr/>
+          <p:nvPr/>
+        </p:nvSpPr>
+        <p:spPr>
+          <a:xfrm>
+            <a:off x="9052331" y="1874520"/>
+            <a:ext cx="2545004" cy="2834640"/>
+          </a:xfrm>
+          <a:prstGeom prst="roundRect">
+            <a:avLst>
+              <a:gd name="adj" fmla="val 3593"/>
+            </a:avLst>
+          </a:prstGeom>
+          <a:solidFill>
+            <a:srgbClr val="EDF3F5"/>
+          </a:solidFill>
+          <a:ln w="9525">
+            <a:solidFill>
+              <a:srgbClr val="D6E2E7"/>
+            </a:solidFill>
+            <a:prstDash val="solid"/>
+          </a:ln>
+        </p:spPr>
+      </p:sp>
+      <p:sp>
+        <p:nvSpPr>
+          <p:cNvPr id="20" name="Shape 18"/>
+          <p:cNvSpPr/>
+          <p:nvPr/>
+        </p:nvSpPr>
+        <p:spPr>
+          <a:xfrm>
+            <a:off x="9280931" y="2103120"/>
+            <a:ext cx="566928" cy="566928"/>
+          </a:xfrm>
+          <a:prstGeom prst="ellipse">
+            <a:avLst/>
+          </a:prstGeom>
+          <a:solidFill>
+            <a:srgbClr val="1C5A73"/>
+          </a:solidFill>
+          <a:ln/>
+        </p:spPr>
+      </p:sp>
+      <p:sp>
+        <p:nvSpPr>
+          <p:cNvPr id="21" name="Text 19"/>
+          <p:cNvSpPr txBox="1"/>
+          <p:nvPr/>
+        </p:nvSpPr>
+        <p:spPr>
+          <a:xfrm>
+            <a:off x="9280931" y="2103120"/>
+            <a:ext cx="566928" cy="566928"/>
+          </a:xfrm>
+          <a:prstGeom prst="rect">
+            <a:avLst/>
+          </a:prstGeom>
+          <a:noFill/>
+          <a:ln/>
+        </p:spPr>
+        <p:txBody>
+          <a:bodyPr wrap="square" lIns="0" tIns="0" rIns="0" bIns="0" rtlCol="0" anchor="ctr"/>
+          <a:lstStyle/>
+          <a:p>
+            <a:pPr algn="ctr" indent="0" marL="0">
+              <a:buNone/>
+            </a:pPr>
+            <a:r>
+              <a:rPr lang="en-US" sz="1600" b="1" dirty="0">
+                <a:solidFill>
+                  <a:srgbClr val="FFFFFF"/>
+                </a:solidFill>
+                <a:latin typeface="Cambria" pitchFamily="34" charset="0"/>
+                <a:ea typeface="Cambria" pitchFamily="34" charset="-122"/>
+                <a:cs typeface="Cambria" pitchFamily="34" charset="-120"/>
+              </a:rPr>
+              <a:t>4</a:t>
+            </a:r>
+            <a:endParaRPr lang="en-US" sz="1600" dirty="0"/>
+          </a:p>
+        </p:txBody>
+      </p:sp>
+      <p:sp>
+        <p:nvSpPr>
+          <p:cNvPr id="22" name="Text 20"/>
+          <p:cNvSpPr txBox="1"/>
+          <p:nvPr/>
+        </p:nvSpPr>
+        <p:spPr>
+          <a:xfrm>
+            <a:off x="9280931" y="2788920"/>
+            <a:ext cx="2087804" cy="457200"/>
+          </a:xfrm>
+          <a:prstGeom prst="rect">
+            <a:avLst/>
+          </a:prstGeom>
+          <a:noFill/>
+          <a:ln/>
+        </p:spPr>
+        <p:txBody>
+          <a:bodyPr wrap="square" lIns="0" tIns="0" rIns="0" bIns="0" rtlCol="0" anchor="ctr"/>
+          <a:lstStyle/>
+          <a:p>
+            <a:pPr algn="l" indent="0" marL="0">
+              <a:buNone/>
+            </a:pPr>
+            <a:r>
+              <a:rPr lang="en-US" sz="1400" b="1" dirty="0">
+                <a:solidFill>
+                  <a:srgbClr val="1C5A73"/>
+                </a:solidFill>
+                <a:latin typeface="Cambria" pitchFamily="34" charset="0"/>
+                <a:ea typeface="Cambria" pitchFamily="34" charset="-122"/>
+                <a:cs typeface="Cambria" pitchFamily="34" charset="-120"/>
+              </a:rPr>
+              <a:t>Institutions</a:t>
+            </a:r>
+            <a:endParaRPr lang="en-US" sz="1400" dirty="0"/>
+          </a:p>
+        </p:txBody>
+      </p:sp>
+      <p:sp>
+        <p:nvSpPr>
+          <p:cNvPr id="23" name="Text 21"/>
+          <p:cNvSpPr txBox="1"/>
+          <p:nvPr/>
+        </p:nvSpPr>
+        <p:spPr>
+          <a:xfrm>
+            <a:off x="9280931" y="3291840"/>
+            <a:ext cx="2087804" cy="1234440"/>
+          </a:xfrm>
+          <a:prstGeom prst="rect">
+            <a:avLst/>
+          </a:prstGeom>
+          <a:noFill/>
+          <a:ln/>
+        </p:spPr>
+        <p:txBody>
+          <a:bodyPr wrap="square" lIns="0" tIns="0" rIns="0" bIns="0" rtlCol="0" anchor="t"/>
+          <a:lstStyle/>
+          <a:p>
+            <a:pPr algn="l" indent="0" marL="0">
+              <a:lnSpc>
+                <a:spcPct val="120000"/>
+              </a:lnSpc>
+              <a:buNone/>
+            </a:pPr>
+            <a:r>
+              <a:rPr lang="en-US" sz="1200" dirty="0">
+                <a:solidFill>
+                  <a:srgbClr val="31424A"/>
+                </a:solidFill>
+                <a:latin typeface="Calibri" pitchFamily="34" charset="0"/>
+                <a:ea typeface="Calibri" pitchFamily="34" charset="-122"/>
+                <a:cs typeface="Calibri" pitchFamily="34" charset="-120"/>
+              </a:rPr>
+              <a:t>Dialogue avec le ministère de l'Agriculture et les programmes de sécurité alimentaire.</a:t>
+            </a:r>
+            <a:endParaRPr lang="en-US" sz="1200" dirty="0"/>
+          </a:p>
+        </p:txBody>
+      </p:sp>
+      <p:sp>
+        <p:nvSpPr>
+          <p:cNvPr id="24" name="Text 22"/>
+          <p:cNvSpPr txBox="1"/>
+          <p:nvPr/>
+        </p:nvSpPr>
+        <p:spPr>
+          <a:xfrm>
+            <a:off x="594360" y="4983480"/>
+            <a:ext cx="11002975" cy="822960"/>
+          </a:xfrm>
+          <a:prstGeom prst="rect">
+            <a:avLst/>
+          </a:prstGeom>
+          <a:noFill/>
+          <a:ln/>
+        </p:spPr>
+        <p:txBody>
+          <a:bodyPr wrap="square" lIns="0" tIns="0" rIns="0" bIns="0" rtlCol="0" anchor="t"/>
+          <a:lstStyle/>
+          <a:p>
+            <a:pPr algn="l" indent="0" marL="0">
+              <a:lnSpc>
+                <a:spcPct val="125000"/>
+              </a:lnSpc>
+              <a:buNone/>
+            </a:pPr>
+            <a:r>
+              <a:rPr lang="en-US" sz="1250" i="1" dirty="0">
                 <a:solidFill>
                   <a:srgbClr val="6C8089"/>
                 </a:solidFill>
@@ -8700,15 +8818,15 @@
                 <a:ea typeface="Calibri" pitchFamily="34" charset="-122"/>
                 <a:cs typeface="Calibri" pitchFamily="34" charset="-120"/>
               </a:rPr>
-              <a:t>Analyse acrylamide (laboratoire Polymex, ISO 9001, teneur inférieure à 3,0 µg/g), screening REACH / SVHC (SGS) et certificat SOHISCERT valable jusqu'au 4 septembre 2027 : disponibles sur demande.</a:t>
-            </a:r>
-            <a:endParaRPr lang="en-US" sz="1100" dirty="0"/>
-          </a:p>
-        </p:txBody>
-      </p:sp>
-      <p:sp>
-        <p:nvSpPr>
-          <p:cNvPr id="10" name="Text 8"/>
+              <a:t>Le cadre s'adapte au territoire : un importateur, un distributeur d'intrants ou un groupement de producteurs peut porter le partenariat.</a:t>
+            </a:r>
+            <a:endParaRPr lang="en-US" sz="1250" dirty="0"/>
+          </a:p>
+        </p:txBody>
+      </p:sp>
+      <p:sp>
+        <p:nvSpPr>
+          <p:cNvPr id="25" name="Text 23"/>
           <p:cNvSpPr txBox="1"/>
           <p:nvPr/>
         </p:nvSpPr>
@@ -8749,7 +8867,7 @@
       </p:sp>
       <p:sp>
         <p:nvSpPr>
-          <p:cNvPr id="11" name="Text 9"/>
+          <p:cNvPr id="26" name="Text 24"/>
           <p:cNvSpPr txBox="1"/>
           <p:nvPr/>
         </p:nvSpPr>
@@ -8853,7 +8971,7 @@
                 <a:ea typeface="Calibri" pitchFamily="34" charset="-122"/>
                 <a:cs typeface="Calibri" pitchFamily="34" charset="-120"/>
               </a:rPr>
-              <a:t>Sources</a:t>
+              <a:t>CE QU'IL FAUT ANTICIPER</a:t>
             </a:r>
             <a:endParaRPr lang="en-US" sz="1150" dirty="0"/>
           </a:p>
@@ -8892,7 +9010,7 @@
                 <a:ea typeface="Cambria" pitchFamily="34" charset="-122"/>
                 <a:cs typeface="Cambria" pitchFamily="34" charset="-120"/>
               </a:rPr>
-              <a:t>Sources et hypothèses de travail</a:t>
+              <a:t>Risques identifiés et réponses</a:t>
             </a:r>
             <a:endParaRPr lang="en-US" sz="3000" dirty="0"/>
           </a:p>
@@ -8931,7 +9049,7 @@
                 <a:ea typeface="Cambria" pitchFamily="34" charset="-122"/>
                 <a:cs typeface="Cambria" pitchFamily="34" charset="-120"/>
               </a:rPr>
-              <a:t>Sources principales</a:t>
+              <a:t>Risques</a:t>
             </a:r>
             <a:endParaRPr lang="en-US" sz="1600" dirty="0"/>
           </a:p>
@@ -8977,7 +9095,7 @@
                 <a:ea typeface="Calibri" pitchFamily="34" charset="-122"/>
                 <a:cs typeface="Calibri" pitchFamily="34" charset="-120"/>
               </a:rPr>
-              <a:t>Institut haïtien de statistique et d'informatique (IHSI) : comptes nationaux.</a:t>
+              <a:t>Morcellement extrême du foncier : la décision d'achat est dispersée sur des milliers de très petites exploitations.</a:t>
             </a:r>
             <a:endParaRPr lang="en-US" sz="1350" dirty="0"/>
           </a:p>
@@ -9001,7 +9119,7 @@
                 <a:ea typeface="Calibri" pitchFamily="34" charset="-122"/>
                 <a:cs typeface="Calibri" pitchFamily="34" charset="-120"/>
               </a:rPr>
-              <a:t>Coordination nationale de la sécurité alimentaire (CNSA) et analyses IPC.</a:t>
+              <a:t>Capacité de trésorerie limitée des producteurs, qui rend tout achat d'intrant difficile à engager seul.</a:t>
             </a:r>
             <a:endParaRPr lang="en-US" sz="1350" dirty="0"/>
           </a:p>
@@ -9025,7 +9143,7 @@
                 <a:ea typeface="Calibri" pitchFamily="34" charset="-122"/>
                 <a:cs typeface="Calibri" pitchFamily="34" charset="-120"/>
               </a:rPr>
-              <a:t>Ministère de l'Agriculture, des Ressources naturelles et du Développement rural (MARNDR).</a:t>
+              <a:t>Aléa cyclonique : une tempête peut effacer les résultats d'un essai en cours de campagne.</a:t>
             </a:r>
             <a:endParaRPr lang="en-US" sz="1350" dirty="0"/>
           </a:p>
@@ -9049,10 +9167,71 @@
                 <a:ea typeface="Calibri" pitchFamily="34" charset="-122"/>
                 <a:cs typeface="Calibri" pitchFamily="34" charset="-120"/>
               </a:rPr>
-              <a:t>FAO (FAOSTAT, AQUASTAT) et Banque mondiale (WDI).</a:t>
+              <a:t>Logistique intérieure et sécurité des déplacements, qui compliquent le suivi agronomique de terrain.</a:t>
             </a:r>
             <a:endParaRPr lang="en-US" sz="1350" dirty="0"/>
           </a:p>
+        </p:txBody>
+      </p:sp>
+      <p:sp>
+        <p:nvSpPr>
+          <p:cNvPr id="6" name="Text 4"/>
+          <p:cNvSpPr txBox="1"/>
+          <p:nvPr/>
+        </p:nvSpPr>
+        <p:spPr>
+          <a:xfrm>
+            <a:off x="6370168" y="1783080"/>
+            <a:ext cx="5227168" cy="411480"/>
+          </a:xfrm>
+          <a:prstGeom prst="rect">
+            <a:avLst/>
+          </a:prstGeom>
+          <a:noFill/>
+          <a:ln/>
+        </p:spPr>
+        <p:txBody>
+          <a:bodyPr wrap="square" lIns="0" tIns="0" rIns="0" bIns="0" rtlCol="0" anchor="ctr"/>
+          <a:lstStyle/>
+          <a:p>
+            <a:pPr algn="l" indent="0" marL="0">
+              <a:buNone/>
+            </a:pPr>
+            <a:r>
+              <a:rPr lang="en-US" sz="1600" b="1" dirty="0">
+                <a:solidFill>
+                  <a:srgbClr val="1C5A73"/>
+                </a:solidFill>
+                <a:latin typeface="Cambria" pitchFamily="34" charset="0"/>
+                <a:ea typeface="Cambria" pitchFamily="34" charset="-122"/>
+                <a:cs typeface="Cambria" pitchFamily="34" charset="-120"/>
+              </a:rPr>
+              <a:t>Réponses</a:t>
+            </a:r>
+            <a:endParaRPr lang="en-US" sz="1600" dirty="0"/>
+          </a:p>
+        </p:txBody>
+      </p:sp>
+      <p:sp>
+        <p:nvSpPr>
+          <p:cNvPr id="7" name="Text 5"/>
+          <p:cNvSpPr txBox="1"/>
+          <p:nvPr/>
+        </p:nvSpPr>
+        <p:spPr>
+          <a:xfrm>
+            <a:off x="6370168" y="2286000"/>
+            <a:ext cx="5227168" cy="2468880"/>
+          </a:xfrm>
+          <a:prstGeom prst="rect">
+            <a:avLst/>
+          </a:prstGeom>
+          <a:noFill/>
+          <a:ln/>
+        </p:spPr>
+        <p:txBody>
+          <a:bodyPr wrap="square" lIns="0" tIns="0" rIns="0" bIns="0" rtlCol="0" anchor="t"/>
+          <a:lstStyle/>
           <a:p>
             <a:pPr algn="l" marL="342900" indent="-342900">
               <a:lnSpc>
@@ -9073,71 +9252,10 @@
                 <a:ea typeface="Calibri" pitchFamily="34" charset="-122"/>
                 <a:cs typeface="Calibri" pitchFamily="34" charset="-120"/>
               </a:rPr>
-              <a:t>Photographies : USAID U.S. Agency for International Development (Public domain), Jlanghurst (CC BY-SA 3.0) — via Wikimedia Commons.</a:t>
+              <a:t>Passer par les organisations de producteurs et les coopératives plutôt que par l'exploitation individuelle.</a:t>
             </a:r>
             <a:endParaRPr lang="en-US" sz="1350" dirty="0"/>
           </a:p>
-        </p:txBody>
-      </p:sp>
-      <p:sp>
-        <p:nvSpPr>
-          <p:cNvPr id="6" name="Text 4"/>
-          <p:cNvSpPr txBox="1"/>
-          <p:nvPr/>
-        </p:nvSpPr>
-        <p:spPr>
-          <a:xfrm>
-            <a:off x="6370168" y="1783080"/>
-            <a:ext cx="5227168" cy="411480"/>
-          </a:xfrm>
-          <a:prstGeom prst="rect">
-            <a:avLst/>
-          </a:prstGeom>
-          <a:noFill/>
-          <a:ln/>
-        </p:spPr>
-        <p:txBody>
-          <a:bodyPr wrap="square" lIns="0" tIns="0" rIns="0" bIns="0" rtlCol="0" anchor="ctr"/>
-          <a:lstStyle/>
-          <a:p>
-            <a:pPr algn="l" indent="0" marL="0">
-              <a:buNone/>
-            </a:pPr>
-            <a:r>
-              <a:rPr lang="en-US" sz="1600" b="1" dirty="0">
-                <a:solidFill>
-                  <a:srgbClr val="1C5A73"/>
-                </a:solidFill>
-                <a:latin typeface="Cambria" pitchFamily="34" charset="0"/>
-                <a:ea typeface="Cambria" pitchFamily="34" charset="-122"/>
-                <a:cs typeface="Cambria" pitchFamily="34" charset="-120"/>
-              </a:rPr>
-              <a:t>Hypothèses de travail</a:t>
-            </a:r>
-            <a:endParaRPr lang="en-US" sz="1600" dirty="0"/>
-          </a:p>
-        </p:txBody>
-      </p:sp>
-      <p:sp>
-        <p:nvSpPr>
-          <p:cNvPr id="7" name="Text 5"/>
-          <p:cNvSpPr txBox="1"/>
-          <p:nvPr/>
-        </p:nvSpPr>
-        <p:spPr>
-          <a:xfrm>
-            <a:off x="6370168" y="2286000"/>
-            <a:ext cx="5227168" cy="2468880"/>
-          </a:xfrm>
-          <a:prstGeom prst="rect">
-            <a:avLst/>
-          </a:prstGeom>
-          <a:noFill/>
-          <a:ln/>
-        </p:spPr>
-        <p:txBody>
-          <a:bodyPr wrap="square" lIns="0" tIns="0" rIns="0" bIns="0" rtlCol="0" anchor="t"/>
-          <a:lstStyle/>
           <a:p>
             <a:pPr algn="l" marL="342900" indent="-342900">
               <a:lnSpc>
@@ -9158,7 +9276,7 @@
                 <a:ea typeface="Calibri" pitchFamily="34" charset="-122"/>
                 <a:cs typeface="Calibri" pitchFamily="34" charset="-120"/>
               </a:rPr>
-              <a:t>Les chiffres sont des ordres de grandeur arrondis, tirés des dernières données publiques disponibles.</a:t>
+              <a:t>Adosser les premiers déploiements aux programmes de développement agricole et aux bailleurs déjà présents.</a:t>
             </a:r>
             <a:endParaRPr lang="en-US" sz="1350" dirty="0"/>
           </a:p>
@@ -9182,7 +9300,7 @@
                 <a:ea typeface="Calibri" pitchFamily="34" charset="-122"/>
                 <a:cs typeface="Calibri" pitchFamily="34" charset="-120"/>
               </a:rPr>
-              <a:t>Les gains d'eau et de rendement sont indicatifs et varient selon le sol, le climat et la culture.</a:t>
+              <a:t>Conduire les essais sur deux cycles, pour que l'aléa d'une campagne ne décide pas seul du résultat.</a:t>
             </a:r>
             <a:endParaRPr lang="en-US" sz="1350" dirty="0"/>
           </a:p>
@@ -9206,7 +9324,7 @@
                 <a:ea typeface="Calibri" pitchFamily="34" charset="-122"/>
                 <a:cs typeface="Calibri" pitchFamily="34" charset="-120"/>
               </a:rPr>
-              <a:t>Document de travail commercial : chiffres à actualiser avant toute soumission officielle.</a:t>
+              <a:t>S'appuyer sur l'essai CEHPAPE en cours et sur un relais local établi pour le suivi des parcelles.</a:t>
             </a:r>
             <a:endParaRPr lang="en-US" sz="1350" dirty="0"/>
           </a:p>
@@ -9275,7 +9393,7 @@
                 <a:ea typeface="Calibri" pitchFamily="34" charset="-122"/>
                 <a:cs typeface="Calibri" pitchFamily="34" charset="-120"/>
               </a:rPr>
-              <a:t>Rapports d'essais, certificats (SOHISCERT, analyses Polymex et SGS) et fiches techniques : disponibles sur demande.</a:t>
+              <a:t>Analyse acrylamide (laboratoire Polymex, ISO 9001, teneur inférieure à 3,0 µg/g), screening REACH / SVHC (SGS) et certificat SOHISCERT valable jusqu'au 4 septembre 2027 : disponibles sur demande.</a:t>
             </a:r>
             <a:endParaRPr lang="en-US" sz="1100" dirty="0"/>
           </a:p>
@@ -9374,6 +9492,605 @@
 <file path=ppt/slides/slide18.xml><?xml version="1.0" encoding="utf-8"?>
 <p:sld xmlns:a="http://schemas.openxmlformats.org/drawingml/2006/main" xmlns:r="http://schemas.openxmlformats.org/officeDocument/2006/relationships" xmlns:p="http://schemas.openxmlformats.org/presentationml/2006/main">
   <p:cSld name="Slide 18">
+    <p:bg>
+      <p:bgPr>
+        <a:solidFill>
+          <a:srgbClr val="FAFBFB"/>
+        </a:solidFill>
+      </p:bgPr>
+    </p:bg>
+    <p:spTree>
+      <p:nvGrpSpPr>
+        <p:cNvPr id="1" name=""/>
+        <p:cNvGrpSpPr/>
+        <p:nvPr/>
+      </p:nvGrpSpPr>
+      <p:grpSpPr>
+        <a:xfrm>
+          <a:off x="0" y="0"/>
+          <a:ext cx="0" cy="0"/>
+          <a:chOff x="0" y="0"/>
+          <a:chExt cx="0" cy="0"/>
+        </a:xfrm>
+      </p:grpSpPr>
+      <p:sp>
+        <p:nvSpPr>
+          <p:cNvPr id="2" name="Text 0"/>
+          <p:cNvSpPr txBox="1"/>
+          <p:nvPr/>
+        </p:nvSpPr>
+        <p:spPr>
+          <a:xfrm>
+            <a:off x="594360" y="411480"/>
+            <a:ext cx="10515600" cy="274320"/>
+          </a:xfrm>
+          <a:prstGeom prst="rect">
+            <a:avLst/>
+          </a:prstGeom>
+          <a:noFill/>
+          <a:ln/>
+        </p:spPr>
+        <p:txBody>
+          <a:bodyPr wrap="square" lIns="0" tIns="0" rIns="0" bIns="0" rtlCol="0" anchor="ctr"/>
+          <a:lstStyle/>
+          <a:p>
+            <a:pPr algn="l" indent="0" marL="0">
+              <a:buNone/>
+            </a:pPr>
+            <a:r>
+              <a:rPr lang="en-US" sz="1150" b="1" spc="200" kern="0" dirty="0">
+                <a:solidFill>
+                  <a:srgbClr val="E0A33E"/>
+                </a:solidFill>
+                <a:latin typeface="Calibri" pitchFamily="34" charset="0"/>
+                <a:ea typeface="Calibri" pitchFamily="34" charset="-122"/>
+                <a:cs typeface="Calibri" pitchFamily="34" charset="-120"/>
+              </a:rPr>
+              <a:t>Sources</a:t>
+            </a:r>
+            <a:endParaRPr lang="en-US" sz="1150" dirty="0"/>
+          </a:p>
+        </p:txBody>
+      </p:sp>
+      <p:sp>
+        <p:nvSpPr>
+          <p:cNvPr id="3" name="Text 1"/>
+          <p:cNvSpPr txBox="1"/>
+          <p:nvPr/>
+        </p:nvSpPr>
+        <p:spPr>
+          <a:xfrm>
+            <a:off x="594360" y="731520"/>
+            <a:ext cx="10881360" cy="731520"/>
+          </a:xfrm>
+          <a:prstGeom prst="rect">
+            <a:avLst/>
+          </a:prstGeom>
+          <a:noFill/>
+          <a:ln/>
+        </p:spPr>
+        <p:txBody>
+          <a:bodyPr wrap="square" lIns="0" tIns="0" rIns="0" bIns="0" rtlCol="0" anchor="ctr"/>
+          <a:lstStyle/>
+          <a:p>
+            <a:pPr algn="l" indent="0" marL="0">
+              <a:buNone/>
+            </a:pPr>
+            <a:r>
+              <a:rPr lang="en-US" sz="3000" b="1" dirty="0">
+                <a:solidFill>
+                  <a:srgbClr val="0E3546"/>
+                </a:solidFill>
+                <a:latin typeface="Cambria" pitchFamily="34" charset="0"/>
+                <a:ea typeface="Cambria" pitchFamily="34" charset="-122"/>
+                <a:cs typeface="Cambria" pitchFamily="34" charset="-120"/>
+              </a:rPr>
+              <a:t>Sources et hypothèses de travail</a:t>
+            </a:r>
+            <a:endParaRPr lang="en-US" sz="3000" dirty="0"/>
+          </a:p>
+        </p:txBody>
+      </p:sp>
+      <p:sp>
+        <p:nvSpPr>
+          <p:cNvPr id="4" name="Text 2"/>
+          <p:cNvSpPr txBox="1"/>
+          <p:nvPr/>
+        </p:nvSpPr>
+        <p:spPr>
+          <a:xfrm>
+            <a:off x="594360" y="1783080"/>
+            <a:ext cx="5227168" cy="411480"/>
+          </a:xfrm>
+          <a:prstGeom prst="rect">
+            <a:avLst/>
+          </a:prstGeom>
+          <a:noFill/>
+          <a:ln/>
+        </p:spPr>
+        <p:txBody>
+          <a:bodyPr wrap="square" lIns="0" tIns="0" rIns="0" bIns="0" rtlCol="0" anchor="ctr"/>
+          <a:lstStyle/>
+          <a:p>
+            <a:pPr algn="l" indent="0" marL="0">
+              <a:buNone/>
+            </a:pPr>
+            <a:r>
+              <a:rPr lang="en-US" sz="1600" b="1" dirty="0">
+                <a:solidFill>
+                  <a:srgbClr val="1C5A73"/>
+                </a:solidFill>
+                <a:latin typeface="Cambria" pitchFamily="34" charset="0"/>
+                <a:ea typeface="Cambria" pitchFamily="34" charset="-122"/>
+                <a:cs typeface="Cambria" pitchFamily="34" charset="-120"/>
+              </a:rPr>
+              <a:t>Sources principales</a:t>
+            </a:r>
+            <a:endParaRPr lang="en-US" sz="1600" dirty="0"/>
+          </a:p>
+        </p:txBody>
+      </p:sp>
+      <p:sp>
+        <p:nvSpPr>
+          <p:cNvPr id="5" name="Text 3"/>
+          <p:cNvSpPr txBox="1"/>
+          <p:nvPr/>
+        </p:nvSpPr>
+        <p:spPr>
+          <a:xfrm>
+            <a:off x="594360" y="2286000"/>
+            <a:ext cx="5227168" cy="2468880"/>
+          </a:xfrm>
+          <a:prstGeom prst="rect">
+            <a:avLst/>
+          </a:prstGeom>
+          <a:noFill/>
+          <a:ln/>
+        </p:spPr>
+        <p:txBody>
+          <a:bodyPr wrap="square" lIns="0" tIns="0" rIns="0" bIns="0" rtlCol="0" anchor="t"/>
+          <a:lstStyle/>
+          <a:p>
+            <a:pPr algn="l" marL="342900" indent="-342900">
+              <a:lnSpc>
+                <a:spcPct val="122000"/>
+              </a:lnSpc>
+              <a:spcAft>
+                <a:spcPts val="1000"/>
+              </a:spcAft>
+              <a:buSzPct val="100000"/>
+              <a:buChar char="•"/>
+            </a:pPr>
+            <a:r>
+              <a:rPr lang="en-US" sz="1350" dirty="0">
+                <a:solidFill>
+                  <a:srgbClr val="31424A"/>
+                </a:solidFill>
+                <a:latin typeface="Calibri" pitchFamily="34" charset="0"/>
+                <a:ea typeface="Calibri" pitchFamily="34" charset="-122"/>
+                <a:cs typeface="Calibri" pitchFamily="34" charset="-120"/>
+              </a:rPr>
+              <a:t>Institut haïtien de statistique et d'informatique (IHSI) : comptes nationaux.</a:t>
+            </a:r>
+            <a:endParaRPr lang="en-US" sz="1350" dirty="0"/>
+          </a:p>
+          <a:p>
+            <a:pPr algn="l" marL="342900" indent="-342900">
+              <a:lnSpc>
+                <a:spcPct val="122000"/>
+              </a:lnSpc>
+              <a:spcAft>
+                <a:spcPts val="1000"/>
+              </a:spcAft>
+              <a:buSzPct val="100000"/>
+              <a:buChar char="•"/>
+            </a:pPr>
+            <a:r>
+              <a:rPr lang="en-US" sz="1350" dirty="0">
+                <a:solidFill>
+                  <a:srgbClr val="31424A"/>
+                </a:solidFill>
+                <a:latin typeface="Calibri" pitchFamily="34" charset="0"/>
+                <a:ea typeface="Calibri" pitchFamily="34" charset="-122"/>
+                <a:cs typeface="Calibri" pitchFamily="34" charset="-120"/>
+              </a:rPr>
+              <a:t>Coordination nationale de la sécurité alimentaire (CNSA) et analyses IPC.</a:t>
+            </a:r>
+            <a:endParaRPr lang="en-US" sz="1350" dirty="0"/>
+          </a:p>
+          <a:p>
+            <a:pPr algn="l" marL="342900" indent="-342900">
+              <a:lnSpc>
+                <a:spcPct val="122000"/>
+              </a:lnSpc>
+              <a:spcAft>
+                <a:spcPts val="1000"/>
+              </a:spcAft>
+              <a:buSzPct val="100000"/>
+              <a:buChar char="•"/>
+            </a:pPr>
+            <a:r>
+              <a:rPr lang="en-US" sz="1350" dirty="0">
+                <a:solidFill>
+                  <a:srgbClr val="31424A"/>
+                </a:solidFill>
+                <a:latin typeface="Calibri" pitchFamily="34" charset="0"/>
+                <a:ea typeface="Calibri" pitchFamily="34" charset="-122"/>
+                <a:cs typeface="Calibri" pitchFamily="34" charset="-120"/>
+              </a:rPr>
+              <a:t>Ministère de l'Agriculture, des Ressources naturelles et du Développement rural (MARNDR).</a:t>
+            </a:r>
+            <a:endParaRPr lang="en-US" sz="1350" dirty="0"/>
+          </a:p>
+          <a:p>
+            <a:pPr algn="l" marL="342900" indent="-342900">
+              <a:lnSpc>
+                <a:spcPct val="122000"/>
+              </a:lnSpc>
+              <a:spcAft>
+                <a:spcPts val="1000"/>
+              </a:spcAft>
+              <a:buSzPct val="100000"/>
+              <a:buChar char="•"/>
+            </a:pPr>
+            <a:r>
+              <a:rPr lang="en-US" sz="1350" dirty="0">
+                <a:solidFill>
+                  <a:srgbClr val="31424A"/>
+                </a:solidFill>
+                <a:latin typeface="Calibri" pitchFamily="34" charset="0"/>
+                <a:ea typeface="Calibri" pitchFamily="34" charset="-122"/>
+                <a:cs typeface="Calibri" pitchFamily="34" charset="-120"/>
+              </a:rPr>
+              <a:t>FAO (FAOSTAT, AQUASTAT) et Banque mondiale (WDI).</a:t>
+            </a:r>
+            <a:endParaRPr lang="en-US" sz="1350" dirty="0"/>
+          </a:p>
+          <a:p>
+            <a:pPr algn="l" marL="342900" indent="-342900">
+              <a:lnSpc>
+                <a:spcPct val="122000"/>
+              </a:lnSpc>
+              <a:spcAft>
+                <a:spcPts val="1000"/>
+              </a:spcAft>
+              <a:buSzPct val="100000"/>
+              <a:buChar char="•"/>
+            </a:pPr>
+            <a:r>
+              <a:rPr lang="en-US" sz="1350" dirty="0">
+                <a:solidFill>
+                  <a:srgbClr val="31424A"/>
+                </a:solidFill>
+                <a:latin typeface="Calibri" pitchFamily="34" charset="0"/>
+                <a:ea typeface="Calibri" pitchFamily="34" charset="-122"/>
+                <a:cs typeface="Calibri" pitchFamily="34" charset="-120"/>
+              </a:rPr>
+              <a:t>UNCCD, Drought in Numbers 2022 : nombre et durée des sécheresses, +29 % depuis 2000 par rapport à 1980–1999.</a:t>
+            </a:r>
+            <a:endParaRPr lang="en-US" sz="1350" dirty="0"/>
+          </a:p>
+          <a:p>
+            <a:pPr algn="l" marL="342900" indent="-342900">
+              <a:lnSpc>
+                <a:spcPct val="122000"/>
+              </a:lnSpc>
+              <a:spcAft>
+                <a:spcPts val="1000"/>
+              </a:spcAft>
+              <a:buSzPct val="100000"/>
+              <a:buChar char="•"/>
+            </a:pPr>
+            <a:r>
+              <a:rPr lang="en-US" sz="1350" dirty="0">
+                <a:solidFill>
+                  <a:srgbClr val="31424A"/>
+                </a:solidFill>
+                <a:latin typeface="Calibri" pitchFamily="34" charset="0"/>
+                <a:ea typeface="Calibri" pitchFamily="34" charset="-122"/>
+                <a:cs typeface="Calibri" pitchFamily="34" charset="-120"/>
+              </a:rPr>
+              <a:t>ONU-Eau / FAO AQUASTAT, indicateur ODD 6.4.2 : définition et seuils du stress hydrique.</a:t>
+            </a:r>
+            <a:endParaRPr lang="en-US" sz="1350" dirty="0"/>
+          </a:p>
+        </p:txBody>
+      </p:sp>
+      <p:sp>
+        <p:nvSpPr>
+          <p:cNvPr id="6" name="Text 4"/>
+          <p:cNvSpPr txBox="1"/>
+          <p:nvPr/>
+        </p:nvSpPr>
+        <p:spPr>
+          <a:xfrm>
+            <a:off x="6370168" y="1783080"/>
+            <a:ext cx="5227168" cy="411480"/>
+          </a:xfrm>
+          <a:prstGeom prst="rect">
+            <a:avLst/>
+          </a:prstGeom>
+          <a:noFill/>
+          <a:ln/>
+        </p:spPr>
+        <p:txBody>
+          <a:bodyPr wrap="square" lIns="0" tIns="0" rIns="0" bIns="0" rtlCol="0" anchor="ctr"/>
+          <a:lstStyle/>
+          <a:p>
+            <a:pPr algn="l" indent="0" marL="0">
+              <a:buNone/>
+            </a:pPr>
+            <a:r>
+              <a:rPr lang="en-US" sz="1600" b="1" dirty="0">
+                <a:solidFill>
+                  <a:srgbClr val="1C5A73"/>
+                </a:solidFill>
+                <a:latin typeface="Cambria" pitchFamily="34" charset="0"/>
+                <a:ea typeface="Cambria" pitchFamily="34" charset="-122"/>
+                <a:cs typeface="Cambria" pitchFamily="34" charset="-120"/>
+              </a:rPr>
+              <a:t>Hypothèses de travail</a:t>
+            </a:r>
+            <a:endParaRPr lang="en-US" sz="1600" dirty="0"/>
+          </a:p>
+        </p:txBody>
+      </p:sp>
+      <p:sp>
+        <p:nvSpPr>
+          <p:cNvPr id="7" name="Text 5"/>
+          <p:cNvSpPr txBox="1"/>
+          <p:nvPr/>
+        </p:nvSpPr>
+        <p:spPr>
+          <a:xfrm>
+            <a:off x="6370168" y="2286000"/>
+            <a:ext cx="5227168" cy="2468880"/>
+          </a:xfrm>
+          <a:prstGeom prst="rect">
+            <a:avLst/>
+          </a:prstGeom>
+          <a:noFill/>
+          <a:ln/>
+        </p:spPr>
+        <p:txBody>
+          <a:bodyPr wrap="square" lIns="0" tIns="0" rIns="0" bIns="0" rtlCol="0" anchor="t"/>
+          <a:lstStyle/>
+          <a:p>
+            <a:pPr algn="l" marL="342900" indent="-342900">
+              <a:lnSpc>
+                <a:spcPct val="122000"/>
+              </a:lnSpc>
+              <a:spcAft>
+                <a:spcPts val="1000"/>
+              </a:spcAft>
+              <a:buSzPct val="100000"/>
+              <a:buChar char="•"/>
+            </a:pPr>
+            <a:r>
+              <a:rPr lang="en-US" sz="1350" dirty="0">
+                <a:solidFill>
+                  <a:srgbClr val="31424A"/>
+                </a:solidFill>
+                <a:latin typeface="Calibri" pitchFamily="34" charset="0"/>
+                <a:ea typeface="Calibri" pitchFamily="34" charset="-122"/>
+                <a:cs typeface="Calibri" pitchFamily="34" charset="-120"/>
+              </a:rPr>
+              <a:t>Les chiffres sont des ordres de grandeur arrondis, tirés des dernières données publiques disponibles.</a:t>
+            </a:r>
+            <a:endParaRPr lang="en-US" sz="1350" dirty="0"/>
+          </a:p>
+          <a:p>
+            <a:pPr algn="l" marL="342900" indent="-342900">
+              <a:lnSpc>
+                <a:spcPct val="122000"/>
+              </a:lnSpc>
+              <a:spcAft>
+                <a:spcPts val="1000"/>
+              </a:spcAft>
+              <a:buSzPct val="100000"/>
+              <a:buChar char="•"/>
+            </a:pPr>
+            <a:r>
+              <a:rPr lang="en-US" sz="1350" dirty="0">
+                <a:solidFill>
+                  <a:srgbClr val="31424A"/>
+                </a:solidFill>
+                <a:latin typeface="Calibri" pitchFamily="34" charset="0"/>
+                <a:ea typeface="Calibri" pitchFamily="34" charset="-122"/>
+                <a:cs typeface="Calibri" pitchFamily="34" charset="-120"/>
+              </a:rPr>
+              <a:t>Les gains d'eau et de rendement sont indicatifs et varient selon le sol, le climat et la culture.</a:t>
+            </a:r>
+            <a:endParaRPr lang="en-US" sz="1350" dirty="0"/>
+          </a:p>
+          <a:p>
+            <a:pPr algn="l" marL="342900" indent="-342900">
+              <a:lnSpc>
+                <a:spcPct val="122000"/>
+              </a:lnSpc>
+              <a:spcAft>
+                <a:spcPts val="1000"/>
+              </a:spcAft>
+              <a:buSzPct val="100000"/>
+              <a:buChar char="•"/>
+            </a:pPr>
+            <a:r>
+              <a:rPr lang="en-US" sz="1350" dirty="0">
+                <a:solidFill>
+                  <a:srgbClr val="31424A"/>
+                </a:solidFill>
+                <a:latin typeface="Calibri" pitchFamily="34" charset="0"/>
+                <a:ea typeface="Calibri" pitchFamily="34" charset="-122"/>
+                <a:cs typeface="Calibri" pitchFamily="34" charset="-120"/>
+              </a:rPr>
+              <a:t>Document de travail commercial : chiffres à actualiser avant toute soumission officielle.</a:t>
+            </a:r>
+            <a:endParaRPr lang="en-US" sz="1350" dirty="0"/>
+          </a:p>
+        </p:txBody>
+      </p:sp>
+      <p:sp>
+        <p:nvSpPr>
+          <p:cNvPr id="8" name="Shape 6"/>
+          <p:cNvSpPr/>
+          <p:nvPr/>
+        </p:nvSpPr>
+        <p:spPr>
+          <a:xfrm>
+            <a:off x="594360" y="4846320"/>
+            <a:ext cx="11002975" cy="960120"/>
+          </a:xfrm>
+          <a:prstGeom prst="roundRect">
+            <a:avLst>
+              <a:gd name="adj" fmla="val 7619"/>
+            </a:avLst>
+          </a:prstGeom>
+          <a:solidFill>
+            <a:srgbClr val="EDF3F5"/>
+          </a:solidFill>
+          <a:ln w="9525">
+            <a:solidFill>
+              <a:srgbClr val="D6E2E7"/>
+            </a:solidFill>
+            <a:prstDash val="solid"/>
+          </a:ln>
+        </p:spPr>
+      </p:sp>
+      <p:sp>
+        <p:nvSpPr>
+          <p:cNvPr id="9" name="Text 7"/>
+          <p:cNvSpPr txBox="1"/>
+          <p:nvPr/>
+        </p:nvSpPr>
+        <p:spPr>
+          <a:xfrm>
+            <a:off x="822960" y="4983480"/>
+            <a:ext cx="10545775" cy="713232"/>
+          </a:xfrm>
+          <a:prstGeom prst="rect">
+            <a:avLst/>
+          </a:prstGeom>
+          <a:noFill/>
+          <a:ln/>
+        </p:spPr>
+        <p:txBody>
+          <a:bodyPr wrap="square" lIns="0" tIns="0" rIns="0" bIns="0" rtlCol="0" anchor="t"/>
+          <a:lstStyle/>
+          <a:p>
+            <a:pPr algn="l" indent="0" marL="0">
+              <a:lnSpc>
+                <a:spcPct val="118000"/>
+              </a:lnSpc>
+              <a:buNone/>
+            </a:pPr>
+            <a:r>
+              <a:rPr lang="en-US" sz="1100" dirty="0">
+                <a:solidFill>
+                  <a:srgbClr val="6C8089"/>
+                </a:solidFill>
+                <a:latin typeface="Calibri" pitchFamily="34" charset="0"/>
+                <a:ea typeface="Calibri" pitchFamily="34" charset="-122"/>
+                <a:cs typeface="Calibri" pitchFamily="34" charset="-120"/>
+              </a:rPr>
+              <a:t>Rapports d'essais, certificats (SOHISCERT, analyses Polymex et SGS) et fiches techniques : disponibles sur demande.</a:t>
+            </a:r>
+            <a:endParaRPr lang="en-US" sz="1100" dirty="0"/>
+          </a:p>
+        </p:txBody>
+      </p:sp>
+      <p:sp>
+        <p:nvSpPr>
+          <p:cNvPr id="10" name="Text 8"/>
+          <p:cNvSpPr txBox="1"/>
+          <p:nvPr/>
+        </p:nvSpPr>
+        <p:spPr>
+          <a:xfrm>
+            <a:off x="502920" y="6382512"/>
+            <a:ext cx="8229600" cy="274320"/>
+          </a:xfrm>
+          <a:prstGeom prst="rect">
+            <a:avLst/>
+          </a:prstGeom>
+          <a:noFill/>
+          <a:ln/>
+        </p:spPr>
+        <p:txBody>
+          <a:bodyPr wrap="square" lIns="0" tIns="0" rIns="0" bIns="0" rtlCol="0" anchor="ctr"/>
+          <a:lstStyle/>
+          <a:p>
+            <a:pPr algn="l" indent="0" marL="0">
+              <a:buNone/>
+            </a:pPr>
+            <a:r>
+              <a:rPr lang="en-US" sz="950" dirty="0">
+                <a:solidFill>
+                  <a:srgbClr val="6C8089">
+                    <a:alpha val="80000"/>
+                  </a:srgbClr>
+                </a:solidFill>
+                <a:latin typeface="Calibri" pitchFamily="34" charset="0"/>
+                <a:ea typeface="Calibri" pitchFamily="34" charset="-122"/>
+                <a:cs typeface="Calibri" pitchFamily="34" charset="-120"/>
+              </a:rPr>
+              <a:t>Green Solutions · Dossier marché Haïti</a:t>
+            </a:r>
+            <a:endParaRPr lang="en-US" sz="950" dirty="0"/>
+          </a:p>
+        </p:txBody>
+      </p:sp>
+      <p:sp>
+        <p:nvSpPr>
+          <p:cNvPr id="11" name="Text 9"/>
+          <p:cNvSpPr txBox="1"/>
+          <p:nvPr/>
+        </p:nvSpPr>
+        <p:spPr>
+          <a:xfrm>
+            <a:off x="11140135" y="6382512"/>
+            <a:ext cx="548640" cy="274320"/>
+          </a:xfrm>
+          <a:prstGeom prst="rect">
+            <a:avLst/>
+          </a:prstGeom>
+          <a:noFill/>
+          <a:ln/>
+        </p:spPr>
+        <p:txBody>
+          <a:bodyPr wrap="square" lIns="0" tIns="0" rIns="0" bIns="0" rtlCol="0" anchor="ctr"/>
+          <a:lstStyle/>
+          <a:p>
+            <a:pPr algn="r" indent="0" marL="0">
+              <a:buNone/>
+            </a:pPr>
+            <a:r>
+              <a:rPr lang="en-US" sz="950" dirty="0">
+                <a:solidFill>
+                  <a:srgbClr val="6C8089">
+                    <a:alpha val="80000"/>
+                  </a:srgbClr>
+                </a:solidFill>
+                <a:latin typeface="Calibri" pitchFamily="34" charset="0"/>
+                <a:ea typeface="Calibri" pitchFamily="34" charset="-122"/>
+                <a:cs typeface="Calibri" pitchFamily="34" charset="-120"/>
+              </a:rPr>
+              <a:t>17</a:t>
+            </a:r>
+            <a:endParaRPr lang="en-US" sz="950" dirty="0"/>
+          </a:p>
+        </p:txBody>
+      </p:sp>
+    </p:spTree>
+  </p:cSld>
+  <p:clrMapOvr>
+    <a:masterClrMapping/>
+  </p:clrMapOvr>
+</p:sld>
+</file>
+
+<file path=ppt/slides/slide19.xml><?xml version="1.0" encoding="utf-8"?>
+<p:sld xmlns:a="http://schemas.openxmlformats.org/drawingml/2006/main" xmlns:r="http://schemas.openxmlformats.org/officeDocument/2006/relationships" xmlns:p="http://schemas.openxmlformats.org/presentationml/2006/main">
+  <p:cSld name="Slide 19">
     <p:spTree>
       <p:nvGrpSpPr>
         <p:cNvPr id="1" name=""/>
@@ -9567,7 +10284,7 @@
       </p:sp>
       <p:pic>
         <p:nvPicPr>
-          <p:cNvPr id="6" name="Image 1" descr="C:\Users\Utilisateur\dev\green-solutions-web\scripts\dossiers\sceau-aim-clair.png">    </p:cNvPr>
+          <p:cNvPr id="6" name="Image 1" descr="/workspace/scratch/50eb4f7d8e13/green-solutions-web/scripts/dossiers/sceau-aim-clair.png">    </p:cNvPr>
           <p:cNvPicPr>
             <a:picLocks noChangeAspect="1"/>
           </p:cNvPicPr>
@@ -9667,7 +10384,7 @@
                 <a:ea typeface="Calibri" pitchFamily="34" charset="-122"/>
                 <a:cs typeface="Calibri" pitchFamily="34" charset="-120"/>
               </a:rPr>
-              <a:t>17</a:t>
+              <a:t>18</a:t>
             </a:r>
             <a:endParaRPr lang="en-US" sz="950" dirty="0"/>
           </a:p>
@@ -10801,7 +11518,7 @@
                 <a:ea typeface="Calibri" pitchFamily="34" charset="-122"/>
                 <a:cs typeface="Calibri" pitchFamily="34" charset="-120"/>
               </a:rPr>
-              <a:t>OÙ PART L'EAU</a:t>
+              <a:t>SÉCHERESSE ET STRESS HYDRIQUE</a:t>
             </a:r>
             <a:endParaRPr lang="en-US" sz="1150" dirty="0"/>
           </a:p>
@@ -10840,7 +11557,7 @@
                 <a:ea typeface="Cambria" pitchFamily="34" charset="-122"/>
                 <a:cs typeface="Cambria" pitchFamily="34" charset="-120"/>
               </a:rPr>
-              <a:t>L'irrigation domine largement les prélèvements</a:t>
+              <a:t>La pression augmente, mais le risque se lit localement</a:t>
             </a:r>
             <a:endParaRPr lang="en-US" sz="3000" dirty="0"/>
           </a:p>
@@ -10922,7 +11639,7 @@
                 <a:ea typeface="Cambria" pitchFamily="34" charset="-122"/>
                 <a:cs typeface="Cambria" pitchFamily="34" charset="-120"/>
               </a:rPr>
-              <a:t>Ce que cela implique</a:t>
+              <a:t>Deux indicateurs, pas un raccourci</a:t>
             </a:r>
             <a:endParaRPr lang="en-US" sz="1300" dirty="0"/>
           </a:p>
@@ -10964,7 +11681,7 @@
                 <a:ea typeface="Calibri" pitchFamily="34" charset="-122"/>
                 <a:cs typeface="Calibri" pitchFamily="34" charset="-120"/>
               </a:rPr>
-              <a:t>Réduire de 10 % la consommation d'irrigation libère un volume comparable à la moitié de tout l'usage domestique du pays.</a:t>
+              <a:t>À l’échelle mondiale, le nombre et la durée des sécheresses ont augmenté de 29 % depuis 2000 par rapport aux deux décennies précédentes.</a:t>
             </a:r>
             <a:endParaRPr lang="en-US" sz="1200" dirty="0"/>
           </a:p>
@@ -10993,7 +11710,7 @@
                 <a:ea typeface="Calibri" pitchFamily="34" charset="-122"/>
                 <a:cs typeface="Calibri" pitchFamily="34" charset="-120"/>
               </a:rPr>
-              <a:t>Mais la vraie marge, ici, est en pluvial : c'est sur les parcelles non irriguées que la pluie se perd le plus.</a:t>
+              <a:t>Le stress hydrique mesure autre chose : les prélèvements rapportés aux ressources renouvelables disponibles après les besoins environnementaux. Ce signal mondial n’est donc pas une prévision nationale ; il doit être confronté aux pluies, aux nappes, aux saisons et aux usages locaux.</a:t>
             </a:r>
             <a:endParaRPr lang="en-US" sz="1200" dirty="0"/>
           </a:p>
@@ -11146,7 +11863,7 @@
                 <a:ea typeface="Calibri" pitchFamily="34" charset="-122"/>
                 <a:cs typeface="Calibri" pitchFamily="34" charset="-120"/>
               </a:rPr>
-              <a:t>ÉCONOMIE ET SÉCURITÉ ALIMENTAIRE</a:t>
+              <a:t>OÙ PART L'EAU</a:t>
             </a:r>
             <a:endParaRPr lang="en-US" sz="1150" dirty="0"/>
           </a:p>
@@ -11185,26 +11902,42 @@
                 <a:ea typeface="Cambria" pitchFamily="34" charset="-122"/>
                 <a:cs typeface="Cambria" pitchFamily="34" charset="-120"/>
               </a:rPr>
-              <a:t>Un pays agricole qui importe la moitié de sa nourriture</a:t>
+              <a:t>L'irrigation domine largement les prélèvements</a:t>
             </a:r>
             <a:endParaRPr lang="en-US" sz="3000" dirty="0"/>
           </a:p>
         </p:txBody>
       </p:sp>
-      <p:sp>
-        <p:nvSpPr>
-          <p:cNvPr id="4" name="Shape 2"/>
+      <p:graphicFrame>
+        <p:nvGraphicFramePr>
+          <p:cNvPr id="4" name="Chart 0" descr=""/>
+          <p:cNvGraphicFramePr/>
+          <p:nvPr/>
+        </p:nvGraphicFramePr>
+        <p:xfrm>
+          <a:off x="594360" y="1783080"/>
+          <a:ext cx="7360920" cy="3977640"/>
+        </p:xfrm>
+        <a:graphic xmlns:a="http://schemas.openxmlformats.org/drawingml/2006/main">
+          <a:graphicData uri="http://schemas.openxmlformats.org/drawingml/2006/chart">
+            <c:chart xmlns:c="http://schemas.openxmlformats.org/drawingml/2006/chart" r:id="rId1"/>
+          </a:graphicData>
+        </a:graphic>
+      </p:graphicFrame>
+      <p:sp>
+        <p:nvSpPr>
+          <p:cNvPr id="5" name="Shape 2"/>
           <p:cNvSpPr/>
           <p:nvPr/>
         </p:nvSpPr>
         <p:spPr>
           <a:xfrm>
-            <a:off x="594360" y="1874520"/>
-            <a:ext cx="2545004" cy="2514600"/>
+            <a:off x="8275320" y="1783080"/>
+            <a:ext cx="3291840" cy="3977640"/>
           </a:xfrm>
           <a:prstGeom prst="roundRect">
             <a:avLst>
-              <a:gd name="adj" fmla="val 3636"/>
+              <a:gd name="adj" fmla="val 2778"/>
             </a:avLst>
           </a:prstGeom>
           <a:solidFill>
@@ -11220,14 +11953,14 @@
       </p:sp>
       <p:sp>
         <p:nvSpPr>
-          <p:cNvPr id="5" name="Text 3"/>
-          <p:cNvSpPr txBox="1"/>
-          <p:nvPr/>
-        </p:nvSpPr>
-        <p:spPr>
-          <a:xfrm>
-            <a:off x="777240" y="2148840"/>
-            <a:ext cx="2179244" cy="960120"/>
+          <p:cNvPr id="6" name="Text 3"/>
+          <p:cNvSpPr txBox="1"/>
+          <p:nvPr/>
+        </p:nvSpPr>
+        <p:spPr>
+          <a:xfrm>
+            <a:off x="8503920" y="2011680"/>
+            <a:ext cx="2834640" cy="457200"/>
           </a:xfrm>
           <a:prstGeom prst="rect">
             <a:avLst/>
@@ -11239,11 +11972,11 @@
           <a:bodyPr wrap="square" lIns="0" tIns="0" rIns="0" bIns="0" rtlCol="0" anchor="ctr"/>
           <a:lstStyle/>
           <a:p>
-            <a:pPr algn="ctr" indent="0" marL="0">
-              <a:buNone/>
-            </a:pPr>
-            <a:r>
-              <a:rPr lang="en-US" sz="3800" b="1" dirty="0">
+            <a:pPr algn="l" indent="0" marL="0">
+              <a:buNone/>
+            </a:pPr>
+            <a:r>
+              <a:rPr lang="en-US" sz="1300" b="1" dirty="0">
                 <a:solidFill>
                   <a:srgbClr val="1C5A73"/>
                 </a:solidFill>
@@ -11251,388 +11984,22 @@
                 <a:ea typeface="Cambria" pitchFamily="34" charset="-122"/>
                 <a:cs typeface="Cambria" pitchFamily="34" charset="-120"/>
               </a:rPr>
-              <a:t>≈ 50 %</a:t>
-            </a:r>
-            <a:endParaRPr lang="en-US" sz="3800" dirty="0"/>
-          </a:p>
-        </p:txBody>
-      </p:sp>
-      <p:sp>
-        <p:nvSpPr>
-          <p:cNvPr id="6" name="Text 4"/>
-          <p:cNvSpPr txBox="1"/>
-          <p:nvPr/>
-        </p:nvSpPr>
-        <p:spPr>
-          <a:xfrm>
-            <a:off x="795528" y="3154680"/>
-            <a:ext cx="2142668" cy="1051560"/>
-          </a:xfrm>
-          <a:prstGeom prst="rect">
-            <a:avLst/>
-          </a:prstGeom>
-          <a:noFill/>
-          <a:ln/>
-        </p:spPr>
-        <p:txBody>
-          <a:bodyPr wrap="square" lIns="0" tIns="0" rIns="0" bIns="0" rtlCol="0" anchor="t"/>
-          <a:lstStyle/>
-          <a:p>
-            <a:pPr algn="ctr" indent="0" marL="0">
-              <a:lnSpc>
-                <a:spcPct val="118000"/>
-              </a:lnSpc>
-              <a:buNone/>
-            </a:pPr>
-            <a:r>
-              <a:rPr lang="en-US" sz="1250" dirty="0">
-                <a:solidFill>
-                  <a:srgbClr val="31424A"/>
-                </a:solidFill>
-                <a:latin typeface="Calibri" pitchFamily="34" charset="0"/>
-                <a:ea typeface="Calibri" pitchFamily="34" charset="-122"/>
-                <a:cs typeface="Calibri" pitchFamily="34" charset="-120"/>
-              </a:rPr>
-              <a:t>de la nourriture consommée est importée</a:t>
-            </a:r>
-            <a:endParaRPr lang="en-US" sz="1250" dirty="0"/>
-          </a:p>
-        </p:txBody>
-      </p:sp>
-      <p:sp>
-        <p:nvSpPr>
-          <p:cNvPr id="7" name="Shape 5"/>
-          <p:cNvSpPr/>
-          <p:nvPr/>
-        </p:nvSpPr>
-        <p:spPr>
-          <a:xfrm>
-            <a:off x="3413684" y="1874520"/>
-            <a:ext cx="2545004" cy="2514600"/>
-          </a:xfrm>
-          <a:prstGeom prst="roundRect">
-            <a:avLst>
-              <a:gd name="adj" fmla="val 3636"/>
-            </a:avLst>
-          </a:prstGeom>
-          <a:solidFill>
-            <a:srgbClr val="EDF3F5"/>
-          </a:solidFill>
-          <a:ln w="9525">
-            <a:solidFill>
-              <a:srgbClr val="D6E2E7"/>
-            </a:solidFill>
-            <a:prstDash val="solid"/>
-          </a:ln>
-        </p:spPr>
-      </p:sp>
-      <p:sp>
-        <p:nvSpPr>
-          <p:cNvPr id="8" name="Text 6"/>
-          <p:cNvSpPr txBox="1"/>
-          <p:nvPr/>
-        </p:nvSpPr>
-        <p:spPr>
-          <a:xfrm>
-            <a:off x="3596564" y="2148840"/>
-            <a:ext cx="2179244" cy="960120"/>
-          </a:xfrm>
-          <a:prstGeom prst="rect">
-            <a:avLst/>
-          </a:prstGeom>
-          <a:noFill/>
-          <a:ln/>
-        </p:spPr>
-        <p:txBody>
-          <a:bodyPr wrap="square" lIns="0" tIns="0" rIns="0" bIns="0" rtlCol="0" anchor="ctr"/>
-          <a:lstStyle/>
-          <a:p>
-            <a:pPr algn="ctr" indent="0" marL="0">
-              <a:buNone/>
-            </a:pPr>
-            <a:r>
-              <a:rPr lang="en-US" sz="3800" b="1" dirty="0">
-                <a:solidFill>
-                  <a:srgbClr val="1C5A73"/>
-                </a:solidFill>
-                <a:latin typeface="Cambria" pitchFamily="34" charset="0"/>
-                <a:ea typeface="Cambria" pitchFamily="34" charset="-122"/>
-                <a:cs typeface="Cambria" pitchFamily="34" charset="-120"/>
-              </a:rPr>
-              <a:t>≈ 80 %</a:t>
-            </a:r>
-            <a:endParaRPr lang="en-US" sz="3800" dirty="0"/>
-          </a:p>
-        </p:txBody>
-      </p:sp>
-      <p:sp>
-        <p:nvSpPr>
-          <p:cNvPr id="9" name="Text 7"/>
-          <p:cNvSpPr txBox="1"/>
-          <p:nvPr/>
-        </p:nvSpPr>
-        <p:spPr>
-          <a:xfrm>
-            <a:off x="3614852" y="3154680"/>
-            <a:ext cx="2142668" cy="1051560"/>
-          </a:xfrm>
-          <a:prstGeom prst="rect">
-            <a:avLst/>
-          </a:prstGeom>
-          <a:noFill/>
-          <a:ln/>
-        </p:spPr>
-        <p:txBody>
-          <a:bodyPr wrap="square" lIns="0" tIns="0" rIns="0" bIns="0" rtlCol="0" anchor="t"/>
-          <a:lstStyle/>
-          <a:p>
-            <a:pPr algn="ctr" indent="0" marL="0">
-              <a:lnSpc>
-                <a:spcPct val="118000"/>
-              </a:lnSpc>
-              <a:buNone/>
-            </a:pPr>
-            <a:r>
-              <a:rPr lang="en-US" sz="1250" dirty="0">
-                <a:solidFill>
-                  <a:srgbClr val="31424A"/>
-                </a:solidFill>
-                <a:latin typeface="Calibri" pitchFamily="34" charset="0"/>
-                <a:ea typeface="Calibri" pitchFamily="34" charset="-122"/>
-                <a:cs typeface="Calibri" pitchFamily="34" charset="-120"/>
-              </a:rPr>
-              <a:t>du riz consommé vient de l'étranger</a:t>
-            </a:r>
-            <a:endParaRPr lang="en-US" sz="1250" dirty="0"/>
-          </a:p>
-        </p:txBody>
-      </p:sp>
-      <p:sp>
-        <p:nvSpPr>
-          <p:cNvPr id="10" name="Shape 8"/>
-          <p:cNvSpPr/>
-          <p:nvPr/>
-        </p:nvSpPr>
-        <p:spPr>
-          <a:xfrm>
-            <a:off x="6233008" y="1874520"/>
-            <a:ext cx="2545004" cy="2514600"/>
-          </a:xfrm>
-          <a:prstGeom prst="roundRect">
-            <a:avLst>
-              <a:gd name="adj" fmla="val 3636"/>
-            </a:avLst>
-          </a:prstGeom>
-          <a:solidFill>
-            <a:srgbClr val="EDF3F5"/>
-          </a:solidFill>
-          <a:ln w="9525">
-            <a:solidFill>
-              <a:srgbClr val="D6E2E7"/>
-            </a:solidFill>
-            <a:prstDash val="solid"/>
-          </a:ln>
-        </p:spPr>
-      </p:sp>
-      <p:sp>
-        <p:nvSpPr>
-          <p:cNvPr id="11" name="Text 9"/>
-          <p:cNvSpPr txBox="1"/>
-          <p:nvPr/>
-        </p:nvSpPr>
-        <p:spPr>
-          <a:xfrm>
-            <a:off x="6415888" y="2148840"/>
-            <a:ext cx="2179244" cy="960120"/>
-          </a:xfrm>
-          <a:prstGeom prst="rect">
-            <a:avLst/>
-          </a:prstGeom>
-          <a:noFill/>
-          <a:ln/>
-        </p:spPr>
-        <p:txBody>
-          <a:bodyPr wrap="square" lIns="0" tIns="0" rIns="0" bIns="0" rtlCol="0" anchor="ctr"/>
-          <a:lstStyle/>
-          <a:p>
-            <a:pPr algn="ctr" indent="0" marL="0">
-              <a:buNone/>
-            </a:pPr>
-            <a:r>
-              <a:rPr lang="en-US" sz="3800" b="1" dirty="0">
-                <a:solidFill>
-                  <a:srgbClr val="1C5A73"/>
-                </a:solidFill>
-                <a:latin typeface="Cambria" pitchFamily="34" charset="0"/>
-                <a:ea typeface="Cambria" pitchFamily="34" charset="-122"/>
-                <a:cs typeface="Cambria" pitchFamily="34" charset="-120"/>
-              </a:rPr>
-              <a:t>≈ 5 M</a:t>
-            </a:r>
-            <a:endParaRPr lang="en-US" sz="3800" dirty="0"/>
-          </a:p>
-        </p:txBody>
-      </p:sp>
-      <p:sp>
-        <p:nvSpPr>
-          <p:cNvPr id="12" name="Text 10"/>
-          <p:cNvSpPr txBox="1"/>
-          <p:nvPr/>
-        </p:nvSpPr>
-        <p:spPr>
-          <a:xfrm>
-            <a:off x="6434176" y="3154680"/>
-            <a:ext cx="2142668" cy="1051560"/>
-          </a:xfrm>
-          <a:prstGeom prst="rect">
-            <a:avLst/>
-          </a:prstGeom>
-          <a:noFill/>
-          <a:ln/>
-        </p:spPr>
-        <p:txBody>
-          <a:bodyPr wrap="square" lIns="0" tIns="0" rIns="0" bIns="0" rtlCol="0" anchor="t"/>
-          <a:lstStyle/>
-          <a:p>
-            <a:pPr algn="ctr" indent="0" marL="0">
-              <a:lnSpc>
-                <a:spcPct val="118000"/>
-              </a:lnSpc>
-              <a:buNone/>
-            </a:pPr>
-            <a:r>
-              <a:rPr lang="en-US" sz="1250" dirty="0">
-                <a:solidFill>
-                  <a:srgbClr val="31424A"/>
-                </a:solidFill>
-                <a:latin typeface="Calibri" pitchFamily="34" charset="0"/>
-                <a:ea typeface="Calibri" pitchFamily="34" charset="-122"/>
-                <a:cs typeface="Calibri" pitchFamily="34" charset="-120"/>
-              </a:rPr>
-              <a:t>d'Haïtiens en insécurité alimentaire aiguë selon l'IPC</a:t>
-            </a:r>
-            <a:endParaRPr lang="en-US" sz="1250" dirty="0"/>
-          </a:p>
-        </p:txBody>
-      </p:sp>
-      <p:sp>
-        <p:nvSpPr>
-          <p:cNvPr id="13" name="Shape 11"/>
-          <p:cNvSpPr/>
-          <p:nvPr/>
-        </p:nvSpPr>
-        <p:spPr>
-          <a:xfrm>
-            <a:off x="9052331" y="1874520"/>
-            <a:ext cx="2545004" cy="2514600"/>
-          </a:xfrm>
-          <a:prstGeom prst="roundRect">
-            <a:avLst>
-              <a:gd name="adj" fmla="val 3636"/>
-            </a:avLst>
-          </a:prstGeom>
-          <a:solidFill>
-            <a:srgbClr val="EDF3F5"/>
-          </a:solidFill>
-          <a:ln w="9525">
-            <a:solidFill>
-              <a:srgbClr val="D6E2E7"/>
-            </a:solidFill>
-            <a:prstDash val="solid"/>
-          </a:ln>
-        </p:spPr>
-      </p:sp>
-      <p:sp>
-        <p:nvSpPr>
-          <p:cNvPr id="14" name="Text 12"/>
-          <p:cNvSpPr txBox="1"/>
-          <p:nvPr/>
-        </p:nvSpPr>
-        <p:spPr>
-          <a:xfrm>
-            <a:off x="9235211" y="2148840"/>
-            <a:ext cx="2179244" cy="960120"/>
-          </a:xfrm>
-          <a:prstGeom prst="rect">
-            <a:avLst/>
-          </a:prstGeom>
-          <a:noFill/>
-          <a:ln/>
-        </p:spPr>
-        <p:txBody>
-          <a:bodyPr wrap="square" lIns="0" tIns="0" rIns="0" bIns="0" rtlCol="0" anchor="ctr"/>
-          <a:lstStyle/>
-          <a:p>
-            <a:pPr algn="ctr" indent="0" marL="0">
-              <a:buNone/>
-            </a:pPr>
-            <a:r>
-              <a:rPr lang="en-US" sz="3800" b="1" dirty="0">
-                <a:solidFill>
-                  <a:srgbClr val="1C5A73"/>
-                </a:solidFill>
-                <a:latin typeface="Cambria" pitchFamily="34" charset="0"/>
-                <a:ea typeface="Cambria" pitchFamily="34" charset="-122"/>
-                <a:cs typeface="Cambria" pitchFamily="34" charset="-120"/>
-              </a:rPr>
-              <a:t>1er</a:t>
-            </a:r>
-            <a:endParaRPr lang="en-US" sz="3800" dirty="0"/>
-          </a:p>
-        </p:txBody>
-      </p:sp>
-      <p:sp>
-        <p:nvSpPr>
-          <p:cNvPr id="15" name="Text 13"/>
-          <p:cNvSpPr txBox="1"/>
-          <p:nvPr/>
-        </p:nvSpPr>
-        <p:spPr>
-          <a:xfrm>
-            <a:off x="9253499" y="3154680"/>
-            <a:ext cx="2142668" cy="1051560"/>
-          </a:xfrm>
-          <a:prstGeom prst="rect">
-            <a:avLst/>
-          </a:prstGeom>
-          <a:noFill/>
-          <a:ln/>
-        </p:spPr>
-        <p:txBody>
-          <a:bodyPr wrap="square" lIns="0" tIns="0" rIns="0" bIns="0" rtlCol="0" anchor="t"/>
-          <a:lstStyle/>
-          <a:p>
-            <a:pPr algn="ctr" indent="0" marL="0">
-              <a:lnSpc>
-                <a:spcPct val="118000"/>
-              </a:lnSpc>
-              <a:buNone/>
-            </a:pPr>
-            <a:r>
-              <a:rPr lang="en-US" sz="1250" dirty="0">
-                <a:solidFill>
-                  <a:srgbClr val="31424A"/>
-                </a:solidFill>
-                <a:latin typeface="Calibri" pitchFamily="34" charset="0"/>
-                <a:ea typeface="Calibri" pitchFamily="34" charset="-122"/>
-                <a:cs typeface="Calibri" pitchFamily="34" charset="-120"/>
-              </a:rPr>
-              <a:t>producteur mondial d'huile essentielle de vétiver</a:t>
-            </a:r>
-            <a:endParaRPr lang="en-US" sz="1250" dirty="0"/>
-          </a:p>
-        </p:txBody>
-      </p:sp>
-      <p:sp>
-        <p:nvSpPr>
-          <p:cNvPr id="16" name="Text 14"/>
-          <p:cNvSpPr txBox="1"/>
-          <p:nvPr/>
-        </p:nvSpPr>
-        <p:spPr>
-          <a:xfrm>
-            <a:off x="594360" y="4709160"/>
-            <a:ext cx="11002975" cy="1097280"/>
+              <a:t>Ce que cela implique</a:t>
+            </a:r>
+            <a:endParaRPr lang="en-US" sz="1300" dirty="0"/>
+          </a:p>
+        </p:txBody>
+      </p:sp>
+      <p:sp>
+        <p:nvSpPr>
+          <p:cNvPr id="7" name="Text 4"/>
+          <p:cNvSpPr txBox="1"/>
+          <p:nvPr/>
+        </p:nvSpPr>
+        <p:spPr>
+          <a:xfrm>
+            <a:off x="8503920" y="2560320"/>
+            <a:ext cx="2834640" cy="3017520"/>
           </a:xfrm>
           <a:prstGeom prst="rect">
             <a:avLst/>
@@ -11646,12 +12013,12 @@
           <a:p>
             <a:pPr algn="l" indent="0" marL="0">
               <a:lnSpc>
-                <a:spcPct val="130000"/>
+                <a:spcPct val="125000"/>
               </a:lnSpc>
               <a:buNone/>
             </a:pPr>
             <a:r>
-              <a:rPr lang="en-US" sz="1350" dirty="0">
+              <a:rPr lang="en-US" sz="1200" dirty="0">
                 <a:solidFill>
                   <a:srgbClr val="31424A"/>
                 </a:solidFill>
@@ -11659,15 +12026,44 @@
                 <a:ea typeface="Calibri" pitchFamily="34" charset="-122"/>
                 <a:cs typeface="Calibri" pitchFamily="34" charset="-120"/>
               </a:rPr>
-              <a:t>L'insécurité, l'état des routes et la hausse des prix pèsent sur les campagnes autant que sur les villes. Les filières d'exportation — mangue Francisque, cacao, café, vétiver — restent les rares sources de devises agricoles, et chaque récolte perdue se ressent directement dans le revenu des familles.</a:t>
-            </a:r>
-            <a:endParaRPr lang="en-US" sz="1350" dirty="0"/>
-          </a:p>
-        </p:txBody>
-      </p:sp>
-      <p:sp>
-        <p:nvSpPr>
-          <p:cNvPr id="17" name="Text 15"/>
+              <a:t>Réduire de 10 % la consommation d'irrigation libère un volume comparable à la moitié de tout l'usage domestique du pays.</a:t>
+            </a:r>
+            <a:endParaRPr lang="en-US" sz="1200" dirty="0"/>
+          </a:p>
+          <a:p>
+            <a:pPr algn="l" indent="0" marL="0">
+              <a:lnSpc>
+                <a:spcPct val="125000"/>
+              </a:lnSpc>
+              <a:buNone/>
+            </a:pPr>
+            <a:endParaRPr lang="en-US" sz="1200" dirty="0"/>
+          </a:p>
+          <a:p>
+            <a:pPr algn="l" indent="0" marL="0">
+              <a:lnSpc>
+                <a:spcPct val="125000"/>
+              </a:lnSpc>
+              <a:buNone/>
+            </a:pPr>
+            <a:r>
+              <a:rPr lang="en-US" sz="1200" dirty="0">
+                <a:solidFill>
+                  <a:srgbClr val="31424A"/>
+                </a:solidFill>
+                <a:latin typeface="Calibri" pitchFamily="34" charset="0"/>
+                <a:ea typeface="Calibri" pitchFamily="34" charset="-122"/>
+                <a:cs typeface="Calibri" pitchFamily="34" charset="-120"/>
+              </a:rPr>
+              <a:t>Mais la vraie marge, ici, est en pluvial : c'est sur les parcelles non irriguées que la pluie se perd le plus.</a:t>
+            </a:r>
+            <a:endParaRPr lang="en-US" sz="1200" dirty="0"/>
+          </a:p>
+        </p:txBody>
+      </p:sp>
+      <p:sp>
+        <p:nvSpPr>
+          <p:cNvPr id="8" name="Text 5"/>
           <p:cNvSpPr txBox="1"/>
           <p:nvPr/>
         </p:nvSpPr>
@@ -11708,7 +12104,7 @@
       </p:sp>
       <p:sp>
         <p:nvSpPr>
-          <p:cNvPr id="18" name="Text 16"/>
+          <p:cNvPr id="9" name="Text 6"/>
           <p:cNvSpPr txBox="1"/>
           <p:nvPr/>
         </p:nvSpPr>
@@ -11812,7 +12208,7 @@
                 <a:ea typeface="Calibri" pitchFamily="34" charset="-122"/>
                 <a:cs typeface="Calibri" pitchFamily="34" charset="-120"/>
               </a:rPr>
-              <a:t>LES CULTURES</a:t>
+              <a:t>ÉCONOMIE ET SÉCURITÉ ALIMENTAIRE</a:t>
             </a:r>
             <a:endParaRPr lang="en-US" sz="1150" dirty="0"/>
           </a:p>
@@ -11851,42 +12247,26 @@
                 <a:ea typeface="Cambria" pitchFamily="34" charset="-122"/>
                 <a:cs typeface="Cambria" pitchFamily="34" charset="-120"/>
               </a:rPr>
-              <a:t>Cinq productions structurent les campagnes</a:t>
+              <a:t>Un pays agricole qui importe la moitié de sa nourriture</a:t>
             </a:r>
             <a:endParaRPr lang="en-US" sz="3000" dirty="0"/>
           </a:p>
         </p:txBody>
       </p:sp>
-      <p:graphicFrame>
-        <p:nvGraphicFramePr>
-          <p:cNvPr id="4" name="Chart 0" descr=""/>
-          <p:cNvGraphicFramePr/>
-          <p:nvPr/>
-        </p:nvGraphicFramePr>
-        <p:xfrm>
-          <a:off x="594360" y="1783080"/>
-          <a:ext cx="7360920" cy="3977640"/>
-        </p:xfrm>
-        <a:graphic xmlns:a="http://schemas.openxmlformats.org/drawingml/2006/main">
-          <a:graphicData uri="http://schemas.openxmlformats.org/drawingml/2006/chart">
-            <c:chart xmlns:c="http://schemas.openxmlformats.org/drawingml/2006/chart" r:id="rId1"/>
-          </a:graphicData>
-        </a:graphic>
-      </p:graphicFrame>
-      <p:sp>
-        <p:nvSpPr>
-          <p:cNvPr id="5" name="Shape 2"/>
+      <p:sp>
+        <p:nvSpPr>
+          <p:cNvPr id="4" name="Shape 2"/>
           <p:cNvSpPr/>
           <p:nvPr/>
         </p:nvSpPr>
         <p:spPr>
           <a:xfrm>
-            <a:off x="8275320" y="1783080"/>
-            <a:ext cx="3291840" cy="3977640"/>
+            <a:off x="594360" y="1874520"/>
+            <a:ext cx="2545004" cy="2514600"/>
           </a:xfrm>
           <a:prstGeom prst="roundRect">
             <a:avLst>
-              <a:gd name="adj" fmla="val 2778"/>
+              <a:gd name="adj" fmla="val 3636"/>
             </a:avLst>
           </a:prstGeom>
           <a:solidFill>
@@ -11902,14 +12282,14 @@
       </p:sp>
       <p:sp>
         <p:nvSpPr>
-          <p:cNvPr id="6" name="Text 3"/>
-          <p:cNvSpPr txBox="1"/>
-          <p:nvPr/>
-        </p:nvSpPr>
-        <p:spPr>
-          <a:xfrm>
-            <a:off x="8503920" y="2011680"/>
-            <a:ext cx="2834640" cy="457200"/>
+          <p:cNvPr id="5" name="Text 3"/>
+          <p:cNvSpPr txBox="1"/>
+          <p:nvPr/>
+        </p:nvSpPr>
+        <p:spPr>
+          <a:xfrm>
+            <a:off x="777240" y="2148840"/>
+            <a:ext cx="2179244" cy="960120"/>
           </a:xfrm>
           <a:prstGeom prst="rect">
             <a:avLst/>
@@ -11921,11 +12301,11 @@
           <a:bodyPr wrap="square" lIns="0" tIns="0" rIns="0" bIns="0" rtlCol="0" anchor="ctr"/>
           <a:lstStyle/>
           <a:p>
-            <a:pPr algn="l" indent="0" marL="0">
-              <a:buNone/>
-            </a:pPr>
-            <a:r>
-              <a:rPr lang="en-US" sz="1300" b="1" dirty="0">
+            <a:pPr algn="ctr" indent="0" marL="0">
+              <a:buNone/>
+            </a:pPr>
+            <a:r>
+              <a:rPr lang="en-US" sz="3800" b="1" dirty="0">
                 <a:solidFill>
                   <a:srgbClr val="1C5A73"/>
                 </a:solidFill>
@@ -11933,22 +12313,388 @@
                 <a:ea typeface="Cambria" pitchFamily="34" charset="-122"/>
                 <a:cs typeface="Cambria" pitchFamily="34" charset="-120"/>
               </a:rPr>
-              <a:t>Lecture</a:t>
-            </a:r>
-            <a:endParaRPr lang="en-US" sz="1300" dirty="0"/>
-          </a:p>
-        </p:txBody>
-      </p:sp>
-      <p:sp>
-        <p:nvSpPr>
-          <p:cNvPr id="7" name="Text 4"/>
-          <p:cNvSpPr txBox="1"/>
-          <p:nvPr/>
-        </p:nvSpPr>
-        <p:spPr>
-          <a:xfrm>
-            <a:off x="8503920" y="2560320"/>
-            <a:ext cx="2834640" cy="3017520"/>
+              <a:t>≈ 50 %</a:t>
+            </a:r>
+            <a:endParaRPr lang="en-US" sz="3800" dirty="0"/>
+          </a:p>
+        </p:txBody>
+      </p:sp>
+      <p:sp>
+        <p:nvSpPr>
+          <p:cNvPr id="6" name="Text 4"/>
+          <p:cNvSpPr txBox="1"/>
+          <p:nvPr/>
+        </p:nvSpPr>
+        <p:spPr>
+          <a:xfrm>
+            <a:off x="795528" y="3154680"/>
+            <a:ext cx="2142668" cy="1051560"/>
+          </a:xfrm>
+          <a:prstGeom prst="rect">
+            <a:avLst/>
+          </a:prstGeom>
+          <a:noFill/>
+          <a:ln/>
+        </p:spPr>
+        <p:txBody>
+          <a:bodyPr wrap="square" lIns="0" tIns="0" rIns="0" bIns="0" rtlCol="0" anchor="t"/>
+          <a:lstStyle/>
+          <a:p>
+            <a:pPr algn="ctr" indent="0" marL="0">
+              <a:lnSpc>
+                <a:spcPct val="118000"/>
+              </a:lnSpc>
+              <a:buNone/>
+            </a:pPr>
+            <a:r>
+              <a:rPr lang="en-US" sz="1250" dirty="0">
+                <a:solidFill>
+                  <a:srgbClr val="31424A"/>
+                </a:solidFill>
+                <a:latin typeface="Calibri" pitchFamily="34" charset="0"/>
+                <a:ea typeface="Calibri" pitchFamily="34" charset="-122"/>
+                <a:cs typeface="Calibri" pitchFamily="34" charset="-120"/>
+              </a:rPr>
+              <a:t>de la nourriture consommée est importée</a:t>
+            </a:r>
+            <a:endParaRPr lang="en-US" sz="1250" dirty="0"/>
+          </a:p>
+        </p:txBody>
+      </p:sp>
+      <p:sp>
+        <p:nvSpPr>
+          <p:cNvPr id="7" name="Shape 5"/>
+          <p:cNvSpPr/>
+          <p:nvPr/>
+        </p:nvSpPr>
+        <p:spPr>
+          <a:xfrm>
+            <a:off x="3413684" y="1874520"/>
+            <a:ext cx="2545004" cy="2514600"/>
+          </a:xfrm>
+          <a:prstGeom prst="roundRect">
+            <a:avLst>
+              <a:gd name="adj" fmla="val 3636"/>
+            </a:avLst>
+          </a:prstGeom>
+          <a:solidFill>
+            <a:srgbClr val="EDF3F5"/>
+          </a:solidFill>
+          <a:ln w="9525">
+            <a:solidFill>
+              <a:srgbClr val="D6E2E7"/>
+            </a:solidFill>
+            <a:prstDash val="solid"/>
+          </a:ln>
+        </p:spPr>
+      </p:sp>
+      <p:sp>
+        <p:nvSpPr>
+          <p:cNvPr id="8" name="Text 6"/>
+          <p:cNvSpPr txBox="1"/>
+          <p:nvPr/>
+        </p:nvSpPr>
+        <p:spPr>
+          <a:xfrm>
+            <a:off x="3596564" y="2148840"/>
+            <a:ext cx="2179244" cy="960120"/>
+          </a:xfrm>
+          <a:prstGeom prst="rect">
+            <a:avLst/>
+          </a:prstGeom>
+          <a:noFill/>
+          <a:ln/>
+        </p:spPr>
+        <p:txBody>
+          <a:bodyPr wrap="square" lIns="0" tIns="0" rIns="0" bIns="0" rtlCol="0" anchor="ctr"/>
+          <a:lstStyle/>
+          <a:p>
+            <a:pPr algn="ctr" indent="0" marL="0">
+              <a:buNone/>
+            </a:pPr>
+            <a:r>
+              <a:rPr lang="en-US" sz="3800" b="1" dirty="0">
+                <a:solidFill>
+                  <a:srgbClr val="1C5A73"/>
+                </a:solidFill>
+                <a:latin typeface="Cambria" pitchFamily="34" charset="0"/>
+                <a:ea typeface="Cambria" pitchFamily="34" charset="-122"/>
+                <a:cs typeface="Cambria" pitchFamily="34" charset="-120"/>
+              </a:rPr>
+              <a:t>≈ 80 %</a:t>
+            </a:r>
+            <a:endParaRPr lang="en-US" sz="3800" dirty="0"/>
+          </a:p>
+        </p:txBody>
+      </p:sp>
+      <p:sp>
+        <p:nvSpPr>
+          <p:cNvPr id="9" name="Text 7"/>
+          <p:cNvSpPr txBox="1"/>
+          <p:nvPr/>
+        </p:nvSpPr>
+        <p:spPr>
+          <a:xfrm>
+            <a:off x="3614852" y="3154680"/>
+            <a:ext cx="2142668" cy="1051560"/>
+          </a:xfrm>
+          <a:prstGeom prst="rect">
+            <a:avLst/>
+          </a:prstGeom>
+          <a:noFill/>
+          <a:ln/>
+        </p:spPr>
+        <p:txBody>
+          <a:bodyPr wrap="square" lIns="0" tIns="0" rIns="0" bIns="0" rtlCol="0" anchor="t"/>
+          <a:lstStyle/>
+          <a:p>
+            <a:pPr algn="ctr" indent="0" marL="0">
+              <a:lnSpc>
+                <a:spcPct val="118000"/>
+              </a:lnSpc>
+              <a:buNone/>
+            </a:pPr>
+            <a:r>
+              <a:rPr lang="en-US" sz="1250" dirty="0">
+                <a:solidFill>
+                  <a:srgbClr val="31424A"/>
+                </a:solidFill>
+                <a:latin typeface="Calibri" pitchFamily="34" charset="0"/>
+                <a:ea typeface="Calibri" pitchFamily="34" charset="-122"/>
+                <a:cs typeface="Calibri" pitchFamily="34" charset="-120"/>
+              </a:rPr>
+              <a:t>du riz consommé vient de l'étranger</a:t>
+            </a:r>
+            <a:endParaRPr lang="en-US" sz="1250" dirty="0"/>
+          </a:p>
+        </p:txBody>
+      </p:sp>
+      <p:sp>
+        <p:nvSpPr>
+          <p:cNvPr id="10" name="Shape 8"/>
+          <p:cNvSpPr/>
+          <p:nvPr/>
+        </p:nvSpPr>
+        <p:spPr>
+          <a:xfrm>
+            <a:off x="6233008" y="1874520"/>
+            <a:ext cx="2545004" cy="2514600"/>
+          </a:xfrm>
+          <a:prstGeom prst="roundRect">
+            <a:avLst>
+              <a:gd name="adj" fmla="val 3636"/>
+            </a:avLst>
+          </a:prstGeom>
+          <a:solidFill>
+            <a:srgbClr val="EDF3F5"/>
+          </a:solidFill>
+          <a:ln w="9525">
+            <a:solidFill>
+              <a:srgbClr val="D6E2E7"/>
+            </a:solidFill>
+            <a:prstDash val="solid"/>
+          </a:ln>
+        </p:spPr>
+      </p:sp>
+      <p:sp>
+        <p:nvSpPr>
+          <p:cNvPr id="11" name="Text 9"/>
+          <p:cNvSpPr txBox="1"/>
+          <p:nvPr/>
+        </p:nvSpPr>
+        <p:spPr>
+          <a:xfrm>
+            <a:off x="6415888" y="2148840"/>
+            <a:ext cx="2179244" cy="960120"/>
+          </a:xfrm>
+          <a:prstGeom prst="rect">
+            <a:avLst/>
+          </a:prstGeom>
+          <a:noFill/>
+          <a:ln/>
+        </p:spPr>
+        <p:txBody>
+          <a:bodyPr wrap="square" lIns="0" tIns="0" rIns="0" bIns="0" rtlCol="0" anchor="ctr"/>
+          <a:lstStyle/>
+          <a:p>
+            <a:pPr algn="ctr" indent="0" marL="0">
+              <a:buNone/>
+            </a:pPr>
+            <a:r>
+              <a:rPr lang="en-US" sz="3800" b="1" dirty="0">
+                <a:solidFill>
+                  <a:srgbClr val="1C5A73"/>
+                </a:solidFill>
+                <a:latin typeface="Cambria" pitchFamily="34" charset="0"/>
+                <a:ea typeface="Cambria" pitchFamily="34" charset="-122"/>
+                <a:cs typeface="Cambria" pitchFamily="34" charset="-120"/>
+              </a:rPr>
+              <a:t>≈ 5 M</a:t>
+            </a:r>
+            <a:endParaRPr lang="en-US" sz="3800" dirty="0"/>
+          </a:p>
+        </p:txBody>
+      </p:sp>
+      <p:sp>
+        <p:nvSpPr>
+          <p:cNvPr id="12" name="Text 10"/>
+          <p:cNvSpPr txBox="1"/>
+          <p:nvPr/>
+        </p:nvSpPr>
+        <p:spPr>
+          <a:xfrm>
+            <a:off x="6434176" y="3154680"/>
+            <a:ext cx="2142668" cy="1051560"/>
+          </a:xfrm>
+          <a:prstGeom prst="rect">
+            <a:avLst/>
+          </a:prstGeom>
+          <a:noFill/>
+          <a:ln/>
+        </p:spPr>
+        <p:txBody>
+          <a:bodyPr wrap="square" lIns="0" tIns="0" rIns="0" bIns="0" rtlCol="0" anchor="t"/>
+          <a:lstStyle/>
+          <a:p>
+            <a:pPr algn="ctr" indent="0" marL="0">
+              <a:lnSpc>
+                <a:spcPct val="118000"/>
+              </a:lnSpc>
+              <a:buNone/>
+            </a:pPr>
+            <a:r>
+              <a:rPr lang="en-US" sz="1250" dirty="0">
+                <a:solidFill>
+                  <a:srgbClr val="31424A"/>
+                </a:solidFill>
+                <a:latin typeface="Calibri" pitchFamily="34" charset="0"/>
+                <a:ea typeface="Calibri" pitchFamily="34" charset="-122"/>
+                <a:cs typeface="Calibri" pitchFamily="34" charset="-120"/>
+              </a:rPr>
+              <a:t>d'Haïtiens en insécurité alimentaire aiguë selon l'IPC</a:t>
+            </a:r>
+            <a:endParaRPr lang="en-US" sz="1250" dirty="0"/>
+          </a:p>
+        </p:txBody>
+      </p:sp>
+      <p:sp>
+        <p:nvSpPr>
+          <p:cNvPr id="13" name="Shape 11"/>
+          <p:cNvSpPr/>
+          <p:nvPr/>
+        </p:nvSpPr>
+        <p:spPr>
+          <a:xfrm>
+            <a:off x="9052331" y="1874520"/>
+            <a:ext cx="2545004" cy="2514600"/>
+          </a:xfrm>
+          <a:prstGeom prst="roundRect">
+            <a:avLst>
+              <a:gd name="adj" fmla="val 3636"/>
+            </a:avLst>
+          </a:prstGeom>
+          <a:solidFill>
+            <a:srgbClr val="EDF3F5"/>
+          </a:solidFill>
+          <a:ln w="9525">
+            <a:solidFill>
+              <a:srgbClr val="D6E2E7"/>
+            </a:solidFill>
+            <a:prstDash val="solid"/>
+          </a:ln>
+        </p:spPr>
+      </p:sp>
+      <p:sp>
+        <p:nvSpPr>
+          <p:cNvPr id="14" name="Text 12"/>
+          <p:cNvSpPr txBox="1"/>
+          <p:nvPr/>
+        </p:nvSpPr>
+        <p:spPr>
+          <a:xfrm>
+            <a:off x="9235211" y="2148840"/>
+            <a:ext cx="2179244" cy="960120"/>
+          </a:xfrm>
+          <a:prstGeom prst="rect">
+            <a:avLst/>
+          </a:prstGeom>
+          <a:noFill/>
+          <a:ln/>
+        </p:spPr>
+        <p:txBody>
+          <a:bodyPr wrap="square" lIns="0" tIns="0" rIns="0" bIns="0" rtlCol="0" anchor="ctr"/>
+          <a:lstStyle/>
+          <a:p>
+            <a:pPr algn="ctr" indent="0" marL="0">
+              <a:buNone/>
+            </a:pPr>
+            <a:r>
+              <a:rPr lang="en-US" sz="3800" b="1" dirty="0">
+                <a:solidFill>
+                  <a:srgbClr val="1C5A73"/>
+                </a:solidFill>
+                <a:latin typeface="Cambria" pitchFamily="34" charset="0"/>
+                <a:ea typeface="Cambria" pitchFamily="34" charset="-122"/>
+                <a:cs typeface="Cambria" pitchFamily="34" charset="-120"/>
+              </a:rPr>
+              <a:t>1er</a:t>
+            </a:r>
+            <a:endParaRPr lang="en-US" sz="3800" dirty="0"/>
+          </a:p>
+        </p:txBody>
+      </p:sp>
+      <p:sp>
+        <p:nvSpPr>
+          <p:cNvPr id="15" name="Text 13"/>
+          <p:cNvSpPr txBox="1"/>
+          <p:nvPr/>
+        </p:nvSpPr>
+        <p:spPr>
+          <a:xfrm>
+            <a:off x="9253499" y="3154680"/>
+            <a:ext cx="2142668" cy="1051560"/>
+          </a:xfrm>
+          <a:prstGeom prst="rect">
+            <a:avLst/>
+          </a:prstGeom>
+          <a:noFill/>
+          <a:ln/>
+        </p:spPr>
+        <p:txBody>
+          <a:bodyPr wrap="square" lIns="0" tIns="0" rIns="0" bIns="0" rtlCol="0" anchor="t"/>
+          <a:lstStyle/>
+          <a:p>
+            <a:pPr algn="ctr" indent="0" marL="0">
+              <a:lnSpc>
+                <a:spcPct val="118000"/>
+              </a:lnSpc>
+              <a:buNone/>
+            </a:pPr>
+            <a:r>
+              <a:rPr lang="en-US" sz="1250" dirty="0">
+                <a:solidFill>
+                  <a:srgbClr val="31424A"/>
+                </a:solidFill>
+                <a:latin typeface="Calibri" pitchFamily="34" charset="0"/>
+                <a:ea typeface="Calibri" pitchFamily="34" charset="-122"/>
+                <a:cs typeface="Calibri" pitchFamily="34" charset="-120"/>
+              </a:rPr>
+              <a:t>producteur mondial d'huile essentielle de vétiver</a:t>
+            </a:r>
+            <a:endParaRPr lang="en-US" sz="1250" dirty="0"/>
+          </a:p>
+        </p:txBody>
+      </p:sp>
+      <p:sp>
+        <p:nvSpPr>
+          <p:cNvPr id="16" name="Text 14"/>
+          <p:cNvSpPr txBox="1"/>
+          <p:nvPr/>
+        </p:nvSpPr>
+        <p:spPr>
+          <a:xfrm>
+            <a:off x="594360" y="4709160"/>
+            <a:ext cx="11002975" cy="1097280"/>
           </a:xfrm>
           <a:prstGeom prst="rect">
             <a:avLst/>
@@ -11962,12 +12708,12 @@
           <a:p>
             <a:pPr algn="l" indent="0" marL="0">
               <a:lnSpc>
-                <a:spcPct val="125000"/>
+                <a:spcPct val="130000"/>
               </a:lnSpc>
               <a:buNone/>
             </a:pPr>
             <a:r>
-              <a:rPr lang="en-US" sz="1200" dirty="0">
+              <a:rPr lang="en-US" sz="1350" dirty="0">
                 <a:solidFill>
                   <a:srgbClr val="31424A"/>
                 </a:solidFill>
@@ -11975,44 +12721,15 @@
                 <a:ea typeface="Calibri" pitchFamily="34" charset="-122"/>
                 <a:cs typeface="Calibri" pitchFamily="34" charset="-120"/>
               </a:rPr>
-              <a:t>Ces cinq cultures sont d'abord destinées au marché intérieur : chaque tonne gagnée remplace une tonne importée.</a:t>
-            </a:r>
-            <a:endParaRPr lang="en-US" sz="1200" dirty="0"/>
-          </a:p>
-          <a:p>
-            <a:pPr algn="l" indent="0" marL="0">
-              <a:lnSpc>
-                <a:spcPct val="125000"/>
-              </a:lnSpc>
-              <a:buNone/>
-            </a:pPr>
-            <a:endParaRPr lang="en-US" sz="1200" dirty="0"/>
-          </a:p>
-          <a:p>
-            <a:pPr algn="l" indent="0" marL="0">
-              <a:lnSpc>
-                <a:spcPct val="125000"/>
-              </a:lnSpc>
-              <a:buNone/>
-            </a:pPr>
-            <a:r>
-              <a:rPr lang="en-US" sz="1200" dirty="0">
-                <a:solidFill>
-                  <a:srgbClr val="31424A"/>
-                </a:solidFill>
-                <a:latin typeface="Calibri" pitchFamily="34" charset="0"/>
-                <a:ea typeface="Calibri" pitchFamily="34" charset="-122"/>
-                <a:cs typeface="Calibri" pitchFamily="34" charset="-120"/>
-              </a:rPr>
-              <a:t>À côté, les cultures de rente — café, cacao, mangue Francique, vétiver — pèsent peu en volume mais portent l'essentiel des devises agricoles.</a:t>
-            </a:r>
-            <a:endParaRPr lang="en-US" sz="1200" dirty="0"/>
-          </a:p>
-        </p:txBody>
-      </p:sp>
-      <p:sp>
-        <p:nvSpPr>
-          <p:cNvPr id="8" name="Text 5"/>
+              <a:t>L'insécurité, l'état des routes et la hausse des prix pèsent sur les campagnes autant que sur les villes. Les filières d'exportation — mangue Francisque, cacao, café, vétiver — restent les rares sources de devises agricoles, et chaque récolte perdue se ressent directement dans le revenu des familles.</a:t>
+            </a:r>
+            <a:endParaRPr lang="en-US" sz="1350" dirty="0"/>
+          </a:p>
+        </p:txBody>
+      </p:sp>
+      <p:sp>
+        <p:nvSpPr>
+          <p:cNvPr id="17" name="Text 15"/>
           <p:cNvSpPr txBox="1"/>
           <p:nvPr/>
         </p:nvSpPr>
@@ -12053,7 +12770,7 @@
       </p:sp>
       <p:sp>
         <p:nvSpPr>
-          <p:cNvPr id="9" name="Text 6"/>
+          <p:cNvPr id="18" name="Text 16"/>
           <p:cNvSpPr txBox="1"/>
           <p:nvPr/>
         </p:nvSpPr>
@@ -12157,7 +12874,7 @@
                 <a:ea typeface="Calibri" pitchFamily="34" charset="-122"/>
                 <a:cs typeface="Calibri" pitchFamily="34" charset="-120"/>
               </a:rPr>
-              <a:t>PREMIÈRE FILIÈRE</a:t>
+              <a:t>LES CULTURES</a:t>
             </a:r>
             <a:endParaRPr lang="en-US" sz="1150" dirty="0"/>
           </a:p>
@@ -12196,46 +12913,104 @@
                 <a:ea typeface="Cambria" pitchFamily="34" charset="-122"/>
                 <a:cs typeface="Cambria" pitchFamily="34" charset="-120"/>
               </a:rPr>
-              <a:t>Mangue Francisque et cacao : des devises à protéger</a:t>
+              <a:t>Cinq productions structurent les campagnes</a:t>
             </a:r>
             <a:endParaRPr lang="en-US" sz="3000" dirty="0"/>
           </a:p>
         </p:txBody>
       </p:sp>
-      <p:pic>
-        <p:nvPicPr>
-          <p:cNvPr id="4" name="Image 0" descr="preencoded.png">    </p:cNvPr>
-          <p:cNvPicPr>
-            <a:picLocks noChangeAspect="1"/>
-          </p:cNvPicPr>
-          <p:nvPr/>
-        </p:nvPicPr>
-        <p:blipFill>
-          <a:blip r:embed="rId1"/>
-          <a:stretch>
-            <a:fillRect/>
-          </a:stretch>
-        </p:blipFill>
-        <p:spPr>
-          <a:xfrm>
-            <a:off x="6522415" y="1783080"/>
-            <a:ext cx="5074920" cy="3794760"/>
-          </a:xfrm>
-          <a:prstGeom prst="rect">
-            <a:avLst/>
-          </a:prstGeom>
-        </p:spPr>
-      </p:pic>
-      <p:sp>
-        <p:nvSpPr>
-          <p:cNvPr id="5" name="Text 2"/>
-          <p:cNvSpPr txBox="1"/>
-          <p:nvPr/>
-        </p:nvSpPr>
-        <p:spPr>
-          <a:xfrm>
-            <a:off x="594360" y="1783080"/>
-            <a:ext cx="5379415" cy="4251960"/>
+      <p:graphicFrame>
+        <p:nvGraphicFramePr>
+          <p:cNvPr id="4" name="Chart 0" descr=""/>
+          <p:cNvGraphicFramePr/>
+          <p:nvPr/>
+        </p:nvGraphicFramePr>
+        <p:xfrm>
+          <a:off x="594360" y="1783080"/>
+          <a:ext cx="7360920" cy="3977640"/>
+        </p:xfrm>
+        <a:graphic xmlns:a="http://schemas.openxmlformats.org/drawingml/2006/main">
+          <a:graphicData uri="http://schemas.openxmlformats.org/drawingml/2006/chart">
+            <c:chart xmlns:c="http://schemas.openxmlformats.org/drawingml/2006/chart" r:id="rId1"/>
+          </a:graphicData>
+        </a:graphic>
+      </p:graphicFrame>
+      <p:sp>
+        <p:nvSpPr>
+          <p:cNvPr id="5" name="Shape 2"/>
+          <p:cNvSpPr/>
+          <p:nvPr/>
+        </p:nvSpPr>
+        <p:spPr>
+          <a:xfrm>
+            <a:off x="8275320" y="1783080"/>
+            <a:ext cx="3291840" cy="3977640"/>
+          </a:xfrm>
+          <a:prstGeom prst="roundRect">
+            <a:avLst>
+              <a:gd name="adj" fmla="val 2778"/>
+            </a:avLst>
+          </a:prstGeom>
+          <a:solidFill>
+            <a:srgbClr val="EDF3F5"/>
+          </a:solidFill>
+          <a:ln w="9525">
+            <a:solidFill>
+              <a:srgbClr val="D6E2E7"/>
+            </a:solidFill>
+            <a:prstDash val="solid"/>
+          </a:ln>
+        </p:spPr>
+      </p:sp>
+      <p:sp>
+        <p:nvSpPr>
+          <p:cNvPr id="6" name="Text 3"/>
+          <p:cNvSpPr txBox="1"/>
+          <p:nvPr/>
+        </p:nvSpPr>
+        <p:spPr>
+          <a:xfrm>
+            <a:off x="8503920" y="2011680"/>
+            <a:ext cx="2834640" cy="457200"/>
+          </a:xfrm>
+          <a:prstGeom prst="rect">
+            <a:avLst/>
+          </a:prstGeom>
+          <a:noFill/>
+          <a:ln/>
+        </p:spPr>
+        <p:txBody>
+          <a:bodyPr wrap="square" lIns="0" tIns="0" rIns="0" bIns="0" rtlCol="0" anchor="ctr"/>
+          <a:lstStyle/>
+          <a:p>
+            <a:pPr algn="l" indent="0" marL="0">
+              <a:buNone/>
+            </a:pPr>
+            <a:r>
+              <a:rPr lang="en-US" sz="1300" b="1" dirty="0">
+                <a:solidFill>
+                  <a:srgbClr val="1C5A73"/>
+                </a:solidFill>
+                <a:latin typeface="Cambria" pitchFamily="34" charset="0"/>
+                <a:ea typeface="Cambria" pitchFamily="34" charset="-122"/>
+                <a:cs typeface="Cambria" pitchFamily="34" charset="-120"/>
+              </a:rPr>
+              <a:t>Lecture</a:t>
+            </a:r>
+            <a:endParaRPr lang="en-US" sz="1300" dirty="0"/>
+          </a:p>
+        </p:txBody>
+      </p:sp>
+      <p:sp>
+        <p:nvSpPr>
+          <p:cNvPr id="7" name="Text 4"/>
+          <p:cNvSpPr txBox="1"/>
+          <p:nvPr/>
+        </p:nvSpPr>
+        <p:spPr>
+          <a:xfrm>
+            <a:off x="8503920" y="2560320"/>
+            <a:ext cx="2834640" cy="3017520"/>
           </a:xfrm>
           <a:prstGeom prst="rect">
             <a:avLst/>
@@ -12247,18 +13022,14 @@
           <a:bodyPr wrap="square" lIns="0" tIns="0" rIns="0" bIns="0" rtlCol="0" anchor="t"/>
           <a:lstStyle/>
           <a:p>
-            <a:pPr algn="l" marL="342900" indent="-342900">
+            <a:pPr algn="l" indent="0" marL="0">
               <a:lnSpc>
-                <a:spcPct val="122000"/>
+                <a:spcPct val="125000"/>
               </a:lnSpc>
-              <a:spcAft>
-                <a:spcPts val="1100"/>
-              </a:spcAft>
-              <a:buSzPct val="100000"/>
-              <a:buChar char="•"/>
-            </a:pPr>
-            <a:r>
-              <a:rPr lang="en-US" sz="1400" dirty="0">
+              <a:buNone/>
+            </a:pPr>
+            <a:r>
+              <a:rPr lang="en-US" sz="1200" dirty="0">
                 <a:solidFill>
                   <a:srgbClr val="31424A"/>
                 </a:solidFill>
@@ -12266,23 +13037,28 @@
                 <a:ea typeface="Calibri" pitchFamily="34" charset="-122"/>
                 <a:cs typeface="Calibri" pitchFamily="34" charset="-120"/>
               </a:rPr>
-              <a:t>La mangue Francisque, exportée surtout vers les États-Unis, vient de vergers souvent anciens et dispersés.</a:t>
-            </a:r>
-            <a:endParaRPr lang="en-US" sz="1400" dirty="0"/>
-          </a:p>
-          <a:p>
-            <a:pPr algn="l" marL="342900" indent="-342900">
+              <a:t>Ces cinq cultures sont d'abord destinées au marché intérieur : chaque tonne gagnée remplace une tonne importée.</a:t>
+            </a:r>
+            <a:endParaRPr lang="en-US" sz="1200" dirty="0"/>
+          </a:p>
+          <a:p>
+            <a:pPr algn="l" indent="0" marL="0">
               <a:lnSpc>
-                <a:spcPct val="122000"/>
+                <a:spcPct val="125000"/>
               </a:lnSpc>
-              <a:spcAft>
-                <a:spcPts val="1100"/>
-              </a:spcAft>
-              <a:buSzPct val="100000"/>
-              <a:buChar char="•"/>
-            </a:pPr>
-            <a:r>
-              <a:rPr lang="en-US" sz="1400" dirty="0">
+              <a:buNone/>
+            </a:pPr>
+            <a:endParaRPr lang="en-US" sz="1200" dirty="0"/>
+          </a:p>
+          <a:p>
+            <a:pPr algn="l" indent="0" marL="0">
+              <a:lnSpc>
+                <a:spcPct val="125000"/>
+              </a:lnSpc>
+              <a:buNone/>
+            </a:pPr>
+            <a:r>
+              <a:rPr lang="en-US" sz="1200" dirty="0">
                 <a:solidFill>
                   <a:srgbClr val="31424A"/>
                 </a:solidFill>
@@ -12290,87 +13066,15 @@
                 <a:ea typeface="Calibri" pitchFamily="34" charset="-122"/>
                 <a:cs typeface="Calibri" pitchFamily="34" charset="-120"/>
               </a:rPr>
-              <a:t>Le cacao du Nord et de la Grand'Anse gagne des marchés de qualité, notamment en filière biologique.</a:t>
-            </a:r>
-            <a:endParaRPr lang="en-US" sz="1400" dirty="0"/>
-          </a:p>
-          <a:p>
-            <a:pPr algn="l" marL="342900" indent="-342900">
-              <a:lnSpc>
-                <a:spcPct val="122000"/>
-              </a:lnSpc>
-              <a:spcAft>
-                <a:spcPts val="1100"/>
-              </a:spcAft>
-              <a:buSzPct val="100000"/>
-              <a:buChar char="•"/>
-            </a:pPr>
-            <a:r>
-              <a:rPr lang="en-US" sz="1400" dirty="0">
-                <a:solidFill>
-                  <a:srgbClr val="31424A"/>
-                </a:solidFill>
-                <a:latin typeface="Calibri" pitchFamily="34" charset="0"/>
-                <a:ea typeface="Calibri" pitchFamily="34" charset="-122"/>
-                <a:cs typeface="Calibri" pitchFamily="34" charset="-120"/>
-              </a:rPr>
-              <a:t>Les arbres subissent des sécheresses de plus en plus marquées entre deux saisons des pluies.</a:t>
-            </a:r>
-            <a:endParaRPr lang="en-US" sz="1400" dirty="0"/>
-          </a:p>
-          <a:p>
-            <a:pPr algn="l" marL="342900" indent="-342900">
-              <a:lnSpc>
-                <a:spcPct val="122000"/>
-              </a:lnSpc>
-              <a:spcAft>
-                <a:spcPts val="1100"/>
-              </a:spcAft>
-              <a:buSzPct val="100000"/>
-              <a:buChar char="•"/>
-            </a:pPr>
-            <a:r>
-              <a:rPr lang="en-US" sz="1400" dirty="0">
-                <a:solidFill>
-                  <a:srgbClr val="31424A"/>
-                </a:solidFill>
-                <a:latin typeface="Calibri" pitchFamily="34" charset="0"/>
-                <a:ea typeface="Calibri" pitchFamily="34" charset="-122"/>
-                <a:cs typeface="Calibri" pitchFamily="34" charset="-120"/>
-              </a:rPr>
-              <a:t>Les exigences sanitaires à l'export imposent une protection sans résidu : NAPEMA® y répond.</a:t>
-            </a:r>
-            <a:endParaRPr lang="en-US" sz="1400" dirty="0"/>
-          </a:p>
-          <a:p>
-            <a:pPr algn="l" marL="342900" indent="-342900">
-              <a:lnSpc>
-                <a:spcPct val="122000"/>
-              </a:lnSpc>
-              <a:spcAft>
-                <a:spcPts val="1100"/>
-              </a:spcAft>
-              <a:buSzPct val="100000"/>
-              <a:buChar char="•"/>
-            </a:pPr>
-            <a:r>
-              <a:rPr lang="en-US" sz="1400" dirty="0">
-                <a:solidFill>
-                  <a:srgbClr val="31424A"/>
-                </a:solidFill>
-                <a:latin typeface="Calibri" pitchFamily="34" charset="0"/>
-                <a:ea typeface="Calibri" pitchFamily="34" charset="-122"/>
-                <a:cs typeface="Calibri" pitchFamily="34" charset="-120"/>
-              </a:rPr>
-              <a:t>Planter les jeunes arbres avec EVERGREEN® améliore leur survie pendant la première saison sèche.</a:t>
-            </a:r>
-            <a:endParaRPr lang="en-US" sz="1400" dirty="0"/>
-          </a:p>
-        </p:txBody>
-      </p:sp>
-      <p:sp>
-        <p:nvSpPr>
-          <p:cNvPr id="6" name="Text 3"/>
+              <a:t>À côté, les cultures de rente — café, cacao, mangue Francique, vétiver — pèsent peu en volume mais portent l'essentiel des devises agricoles.</a:t>
+            </a:r>
+            <a:endParaRPr lang="en-US" sz="1200" dirty="0"/>
+          </a:p>
+        </p:txBody>
+      </p:sp>
+      <p:sp>
+        <p:nvSpPr>
+          <p:cNvPr id="8" name="Text 5"/>
           <p:cNvSpPr txBox="1"/>
           <p:nvPr/>
         </p:nvSpPr>
@@ -12411,7 +13115,7 @@
       </p:sp>
       <p:sp>
         <p:nvSpPr>
-          <p:cNvPr id="7" name="Text 4"/>
+          <p:cNvPr id="9" name="Text 6"/>
           <p:cNvSpPr txBox="1"/>
           <p:nvPr/>
         </p:nvSpPr>
@@ -12515,7 +13219,7 @@
                 <a:ea typeface="Calibri" pitchFamily="34" charset="-122"/>
                 <a:cs typeface="Calibri" pitchFamily="34" charset="-120"/>
               </a:rPr>
-              <a:t>DEUXIÈME FILIÈRE</a:t>
+              <a:t>PREMIÈRE FILIÈRE</a:t>
             </a:r>
             <a:endParaRPr lang="en-US" sz="1150" dirty="0"/>
           </a:p>
@@ -12554,7 +13258,7 @@
                 <a:ea typeface="Cambria" pitchFamily="34" charset="-122"/>
                 <a:cs typeface="Cambria" pitchFamily="34" charset="-120"/>
               </a:rPr>
-              <a:t>Mornes dénudés : retenir l'eau et le sol sur les pentes</a:t>
+              <a:t>Mangue Francisque et cacao : des devises à protéger</a:t>
             </a:r>
             <a:endParaRPr lang="en-US" sz="3000" dirty="0"/>
           </a:p>
@@ -12576,23 +13280,23 @@
         </p:blipFill>
         <p:spPr>
           <a:xfrm>
+            <a:off x="6522415" y="1783080"/>
+            <a:ext cx="5074920" cy="3794760"/>
+          </a:xfrm>
+          <a:prstGeom prst="rect">
+            <a:avLst/>
+          </a:prstGeom>
+        </p:spPr>
+      </p:pic>
+      <p:sp>
+        <p:nvSpPr>
+          <p:cNvPr id="5" name="Text 2"/>
+          <p:cNvSpPr txBox="1"/>
+          <p:nvPr/>
+        </p:nvSpPr>
+        <p:spPr>
+          <a:xfrm>
             <a:off x="594360" y="1783080"/>
-            <a:ext cx="5074920" cy="3794760"/>
-          </a:xfrm>
-          <a:prstGeom prst="rect">
-            <a:avLst/>
-          </a:prstGeom>
-        </p:spPr>
-      </p:pic>
-      <p:sp>
-        <p:nvSpPr>
-          <p:cNvPr id="5" name="Text 2"/>
-          <p:cNvSpPr txBox="1"/>
-          <p:nvPr/>
-        </p:nvSpPr>
-        <p:spPr>
-          <a:xfrm>
-            <a:off x="6217920" y="1783080"/>
             <a:ext cx="5379415" cy="4251960"/>
           </a:xfrm>
           <a:prstGeom prst="rect">
@@ -12624,7 +13328,7 @@
                 <a:ea typeface="Calibri" pitchFamily="34" charset="-122"/>
                 <a:cs typeface="Calibri" pitchFamily="34" charset="-120"/>
               </a:rPr>
-              <a:t>Une grande partie des terres cultivées est en pente, où maïs, haricot et pois congo sont semés sur sol nu.</a:t>
+              <a:t>La mangue Francisque, exportée surtout vers les États-Unis, vient de vergers souvent anciens et dispersés.</a:t>
             </a:r>
             <a:endParaRPr lang="en-US" sz="1400" dirty="0"/>
           </a:p>
@@ -12648,7 +13352,7 @@
                 <a:ea typeface="Calibri" pitchFamily="34" charset="-122"/>
                 <a:cs typeface="Calibri" pitchFamily="34" charset="-120"/>
               </a:rPr>
-              <a:t>La déforestation expose les sols : chaque averse emporte de la terre fertile vers les rivières et la mer.</a:t>
+              <a:t>Le cacao du Nord et de la Grand'Anse gagne des marchés de qualité, notamment en filière biologique.</a:t>
             </a:r>
             <a:endParaRPr lang="en-US" sz="1400" dirty="0"/>
           </a:p>
@@ -12672,7 +13376,7 @@
                 <a:ea typeface="Calibri" pitchFamily="34" charset="-122"/>
                 <a:cs typeface="Calibri" pitchFamily="34" charset="-120"/>
               </a:rPr>
-              <a:t>Il pleut assez sur l'année, mais l'eau ruisselle au lieu de s'infiltrer, puis manque en saison sèche.</a:t>
+              <a:t>Les arbres subissent des sécheresses de plus en plus marquées entre deux saisons des pluies.</a:t>
             </a:r>
             <a:endParaRPr lang="en-US" sz="1400" dirty="0"/>
           </a:p>
@@ -12696,7 +13400,7 @@
                 <a:ea typeface="Calibri" pitchFamily="34" charset="-122"/>
                 <a:cs typeface="Calibri" pitchFamily="34" charset="-120"/>
               </a:rPr>
-              <a:t>Des haies et des arbres comme le Paulownia tiennent les sols tout en produisant du bois et du miel.</a:t>
+              <a:t>Les exigences sanitaires à l'export imposent une protection sans résidu : NAPEMA® y répond.</a:t>
             </a:r>
             <a:endParaRPr lang="en-US" sz="1400" dirty="0"/>
           </a:p>
@@ -12720,7 +13424,7 @@
                 <a:ea typeface="Calibri" pitchFamily="34" charset="-122"/>
                 <a:cs typeface="Calibri" pitchFamily="34" charset="-120"/>
               </a:rPr>
-              <a:t>Un hydro-rétenteur au pied des plants garde l'eau de pluie là où les racines peuvent la prendre.</a:t>
+              <a:t>Planter les jeunes arbres avec EVERGREEN® améliore leur survie pendant la première saison sèche.</a:t>
             </a:r>
             <a:endParaRPr lang="en-US" sz="1400" dirty="0"/>
           </a:p>
@@ -12873,7 +13577,7 @@
                 <a:ea typeface="Calibri" pitchFamily="34" charset="-122"/>
                 <a:cs typeface="Calibri" pitchFamily="34" charset="-120"/>
               </a:rPr>
-              <a:t>Potentiel de rendement</a:t>
+              <a:t>DEUXIÈME FILIÈRE</a:t>
             </a:r>
             <a:endParaRPr lang="en-US" sz="1150" dirty="0"/>
           </a:p>
@@ -12912,168 +13616,181 @@
                 <a:ea typeface="Cambria" pitchFamily="34" charset="-122"/>
                 <a:cs typeface="Cambria" pitchFamily="34" charset="-120"/>
               </a:rPr>
-              <a:t>Gain de rendement attendu par culture</a:t>
+              <a:t>Mornes dénudés : retenir l'eau et le sol sur les pentes</a:t>
             </a:r>
             <a:endParaRPr lang="en-US" sz="3000" dirty="0"/>
           </a:p>
         </p:txBody>
       </p:sp>
-      <p:graphicFrame>
-        <p:nvGraphicFramePr>
-          <p:cNvPr id="4" name="Chart 0" descr=""/>
-          <p:cNvGraphicFramePr/>
-          <p:nvPr/>
-        </p:nvGraphicFramePr>
-        <p:xfrm>
-          <a:off x="594360" y="1783080"/>
-          <a:ext cx="7360920" cy="3977640"/>
-        </p:xfrm>
-        <a:graphic xmlns:a="http://schemas.openxmlformats.org/drawingml/2006/main">
-          <a:graphicData uri="http://schemas.openxmlformats.org/drawingml/2006/chart">
-            <c:chart xmlns:c="http://schemas.openxmlformats.org/drawingml/2006/chart" r:id="rId1"/>
-          </a:graphicData>
-        </a:graphic>
-      </p:graphicFrame>
-      <p:sp>
-        <p:nvSpPr>
-          <p:cNvPr id="5" name="Shape 2"/>
-          <p:cNvSpPr/>
-          <p:nvPr/>
-        </p:nvSpPr>
-        <p:spPr>
-          <a:xfrm>
-            <a:off x="8275320" y="1783080"/>
-            <a:ext cx="3291840" cy="3977640"/>
-          </a:xfrm>
-          <a:prstGeom prst="roundRect">
-            <a:avLst>
-              <a:gd name="adj" fmla="val 2778"/>
-            </a:avLst>
-          </a:prstGeom>
-          <a:solidFill>
-            <a:srgbClr val="EDF3F5"/>
-          </a:solidFill>
-          <a:ln w="9525">
-            <a:solidFill>
-              <a:srgbClr val="D6E2E7"/>
-            </a:solidFill>
-            <a:prstDash val="solid"/>
-          </a:ln>
-        </p:spPr>
+      <p:pic>
+        <p:nvPicPr>
+          <p:cNvPr id="4" name="Image 0" descr="preencoded.png">    </p:cNvPr>
+          <p:cNvPicPr>
+            <a:picLocks noChangeAspect="1"/>
+          </p:cNvPicPr>
+          <p:nvPr/>
+        </p:nvPicPr>
+        <p:blipFill>
+          <a:blip r:embed="rId1"/>
+          <a:stretch>
+            <a:fillRect/>
+          </a:stretch>
+        </p:blipFill>
+        <p:spPr>
+          <a:xfrm>
+            <a:off x="594360" y="1783080"/>
+            <a:ext cx="5074920" cy="3794760"/>
+          </a:xfrm>
+          <a:prstGeom prst="rect">
+            <a:avLst/>
+          </a:prstGeom>
+        </p:spPr>
+      </p:pic>
+      <p:sp>
+        <p:nvSpPr>
+          <p:cNvPr id="5" name="Text 2"/>
+          <p:cNvSpPr txBox="1"/>
+          <p:nvPr/>
+        </p:nvSpPr>
+        <p:spPr>
+          <a:xfrm>
+            <a:off x="6217920" y="1783080"/>
+            <a:ext cx="5379415" cy="4251960"/>
+          </a:xfrm>
+          <a:prstGeom prst="rect">
+            <a:avLst/>
+          </a:prstGeom>
+          <a:noFill/>
+          <a:ln/>
+        </p:spPr>
+        <p:txBody>
+          <a:bodyPr wrap="square" lIns="0" tIns="0" rIns="0" bIns="0" rtlCol="0" anchor="t"/>
+          <a:lstStyle/>
+          <a:p>
+            <a:pPr algn="l" marL="342900" indent="-342900">
+              <a:lnSpc>
+                <a:spcPct val="122000"/>
+              </a:lnSpc>
+              <a:spcAft>
+                <a:spcPts val="1100"/>
+              </a:spcAft>
+              <a:buSzPct val="100000"/>
+              <a:buChar char="•"/>
+            </a:pPr>
+            <a:r>
+              <a:rPr lang="en-US" sz="1400" dirty="0">
+                <a:solidFill>
+                  <a:srgbClr val="31424A"/>
+                </a:solidFill>
+                <a:latin typeface="Calibri" pitchFamily="34" charset="0"/>
+                <a:ea typeface="Calibri" pitchFamily="34" charset="-122"/>
+                <a:cs typeface="Calibri" pitchFamily="34" charset="-120"/>
+              </a:rPr>
+              <a:t>Une grande partie des terres cultivées est en pente, où maïs, haricot et pois congo sont semés sur sol nu.</a:t>
+            </a:r>
+            <a:endParaRPr lang="en-US" sz="1400" dirty="0"/>
+          </a:p>
+          <a:p>
+            <a:pPr algn="l" marL="342900" indent="-342900">
+              <a:lnSpc>
+                <a:spcPct val="122000"/>
+              </a:lnSpc>
+              <a:spcAft>
+                <a:spcPts val="1100"/>
+              </a:spcAft>
+              <a:buSzPct val="100000"/>
+              <a:buChar char="•"/>
+            </a:pPr>
+            <a:r>
+              <a:rPr lang="en-US" sz="1400" dirty="0">
+                <a:solidFill>
+                  <a:srgbClr val="31424A"/>
+                </a:solidFill>
+                <a:latin typeface="Calibri" pitchFamily="34" charset="0"/>
+                <a:ea typeface="Calibri" pitchFamily="34" charset="-122"/>
+                <a:cs typeface="Calibri" pitchFamily="34" charset="-120"/>
+              </a:rPr>
+              <a:t>La déforestation expose les sols : chaque averse emporte de la terre fertile vers les rivières et la mer.</a:t>
+            </a:r>
+            <a:endParaRPr lang="en-US" sz="1400" dirty="0"/>
+          </a:p>
+          <a:p>
+            <a:pPr algn="l" marL="342900" indent="-342900">
+              <a:lnSpc>
+                <a:spcPct val="122000"/>
+              </a:lnSpc>
+              <a:spcAft>
+                <a:spcPts val="1100"/>
+              </a:spcAft>
+              <a:buSzPct val="100000"/>
+              <a:buChar char="•"/>
+            </a:pPr>
+            <a:r>
+              <a:rPr lang="en-US" sz="1400" dirty="0">
+                <a:solidFill>
+                  <a:srgbClr val="31424A"/>
+                </a:solidFill>
+                <a:latin typeface="Calibri" pitchFamily="34" charset="0"/>
+                <a:ea typeface="Calibri" pitchFamily="34" charset="-122"/>
+                <a:cs typeface="Calibri" pitchFamily="34" charset="-120"/>
+              </a:rPr>
+              <a:t>Il pleut assez sur l'année, mais l'eau ruisselle au lieu de s'infiltrer, puis manque en saison sèche.</a:t>
+            </a:r>
+            <a:endParaRPr lang="en-US" sz="1400" dirty="0"/>
+          </a:p>
+          <a:p>
+            <a:pPr algn="l" marL="342900" indent="-342900">
+              <a:lnSpc>
+                <a:spcPct val="122000"/>
+              </a:lnSpc>
+              <a:spcAft>
+                <a:spcPts val="1100"/>
+              </a:spcAft>
+              <a:buSzPct val="100000"/>
+              <a:buChar char="•"/>
+            </a:pPr>
+            <a:r>
+              <a:rPr lang="en-US" sz="1400" dirty="0">
+                <a:solidFill>
+                  <a:srgbClr val="31424A"/>
+                </a:solidFill>
+                <a:latin typeface="Calibri" pitchFamily="34" charset="0"/>
+                <a:ea typeface="Calibri" pitchFamily="34" charset="-122"/>
+                <a:cs typeface="Calibri" pitchFamily="34" charset="-120"/>
+              </a:rPr>
+              <a:t>Des haies et des arbres comme le Paulownia tiennent les sols tout en produisant du bois et du miel.</a:t>
+            </a:r>
+            <a:endParaRPr lang="en-US" sz="1400" dirty="0"/>
+          </a:p>
+          <a:p>
+            <a:pPr algn="l" marL="342900" indent="-342900">
+              <a:lnSpc>
+                <a:spcPct val="122000"/>
+              </a:lnSpc>
+              <a:spcAft>
+                <a:spcPts val="1100"/>
+              </a:spcAft>
+              <a:buSzPct val="100000"/>
+              <a:buChar char="•"/>
+            </a:pPr>
+            <a:r>
+              <a:rPr lang="en-US" sz="1400" dirty="0">
+                <a:solidFill>
+                  <a:srgbClr val="31424A"/>
+                </a:solidFill>
+                <a:latin typeface="Calibri" pitchFamily="34" charset="0"/>
+                <a:ea typeface="Calibri" pitchFamily="34" charset="-122"/>
+                <a:cs typeface="Calibri" pitchFamily="34" charset="-120"/>
+              </a:rPr>
+              <a:t>Un hydro-rétenteur au pied des plants garde l'eau de pluie là où les racines peuvent la prendre.</a:t>
+            </a:r>
+            <a:endParaRPr lang="en-US" sz="1400" dirty="0"/>
+          </a:p>
+        </p:txBody>
       </p:sp>
       <p:sp>
         <p:nvSpPr>
           <p:cNvPr id="6" name="Text 3"/>
-          <p:cNvSpPr txBox="1"/>
-          <p:nvPr/>
-        </p:nvSpPr>
-        <p:spPr>
-          <a:xfrm>
-            <a:off x="8503920" y="2011680"/>
-            <a:ext cx="2834640" cy="457200"/>
-          </a:xfrm>
-          <a:prstGeom prst="rect">
-            <a:avLst/>
-          </a:prstGeom>
-          <a:noFill/>
-          <a:ln/>
-        </p:spPr>
-        <p:txBody>
-          <a:bodyPr wrap="square" lIns="0" tIns="0" rIns="0" bIns="0" rtlCol="0" anchor="ctr"/>
-          <a:lstStyle/>
-          <a:p>
-            <a:pPr algn="l" indent="0" marL="0">
-              <a:buNone/>
-            </a:pPr>
-            <a:r>
-              <a:rPr lang="en-US" sz="1300" b="1" dirty="0">
-                <a:solidFill>
-                  <a:srgbClr val="1C5A73"/>
-                </a:solidFill>
-                <a:latin typeface="Cambria" pitchFamily="34" charset="0"/>
-                <a:ea typeface="Cambria" pitchFamily="34" charset="-122"/>
-                <a:cs typeface="Cambria" pitchFamily="34" charset="-120"/>
-              </a:rPr>
-              <a:t>À lire avec prudence</a:t>
-            </a:r>
-            <a:endParaRPr lang="en-US" sz="1300" dirty="0"/>
-          </a:p>
-        </p:txBody>
-      </p:sp>
-      <p:sp>
-        <p:nvSpPr>
-          <p:cNvPr id="7" name="Text 4"/>
-          <p:cNvSpPr txBox="1"/>
-          <p:nvPr/>
-        </p:nvSpPr>
-        <p:spPr>
-          <a:xfrm>
-            <a:off x="8503920" y="2560320"/>
-            <a:ext cx="2834640" cy="3017520"/>
-          </a:xfrm>
-          <a:prstGeom prst="rect">
-            <a:avLst/>
-          </a:prstGeom>
-          <a:noFill/>
-          <a:ln/>
-        </p:spPr>
-        <p:txBody>
-          <a:bodyPr wrap="square" lIns="0" tIns="0" rIns="0" bIns="0" rtlCol="0" anchor="t"/>
-          <a:lstStyle/>
-          <a:p>
-            <a:pPr algn="l" indent="0" marL="0">
-              <a:lnSpc>
-                <a:spcPct val="125000"/>
-              </a:lnSpc>
-              <a:buNone/>
-            </a:pPr>
-            <a:r>
-              <a:rPr lang="en-US" sz="1200" dirty="0">
-                <a:solidFill>
-                  <a:srgbClr val="31424A"/>
-                </a:solidFill>
-                <a:latin typeface="Calibri" pitchFamily="34" charset="0"/>
-                <a:ea typeface="Calibri" pitchFamily="34" charset="-122"/>
-                <a:cs typeface="Calibri" pitchFamily="34" charset="-120"/>
-              </a:rPr>
-              <a:t>Fourchettes retenues par notre calculateur de dose, pour une culture conduite normalement avec EVERGREEN® à la plantation.</a:t>
-            </a:r>
-            <a:endParaRPr lang="en-US" sz="1200" dirty="0"/>
-          </a:p>
-          <a:p>
-            <a:pPr algn="l" indent="0" marL="0">
-              <a:lnSpc>
-                <a:spcPct val="125000"/>
-              </a:lnSpc>
-              <a:buNone/>
-            </a:pPr>
-            <a:endParaRPr lang="en-US" sz="1200" dirty="0"/>
-          </a:p>
-          <a:p>
-            <a:pPr algn="l" indent="0" marL="0">
-              <a:lnSpc>
-                <a:spcPct val="125000"/>
-              </a:lnSpc>
-              <a:buNone/>
-            </a:pPr>
-            <a:r>
-              <a:rPr lang="en-US" sz="1200" dirty="0">
-                <a:solidFill>
-                  <a:srgbClr val="31424A"/>
-                </a:solidFill>
-                <a:latin typeface="Calibri" pitchFamily="34" charset="0"/>
-                <a:ea typeface="Calibri" pitchFamily="34" charset="-122"/>
-                <a:cs typeface="Calibri" pitchFamily="34" charset="-120"/>
-              </a:rPr>
-              <a:t>Le résultat réel dépend du sol, du climat et de la conduite. Pour les céréales, aucun gain n'est avancé sans essai de terrain.</a:t>
-            </a:r>
-            <a:endParaRPr lang="en-US" sz="1200" dirty="0"/>
-          </a:p>
-        </p:txBody>
-      </p:sp>
-      <p:sp>
-        <p:nvSpPr>
-          <p:cNvPr id="8" name="Text 5"/>
           <p:cNvSpPr txBox="1"/>
           <p:nvPr/>
         </p:nvSpPr>
@@ -13114,7 +13831,7 @@
       </p:sp>
       <p:sp>
         <p:nvSpPr>
-          <p:cNvPr id="9" name="Text 6"/>
+          <p:cNvPr id="7" name="Text 4"/>
           <p:cNvSpPr txBox="1"/>
           <p:nvPr/>
         </p:nvSpPr>

--- a/public/documents/countries/haiti.pptx
+++ b/public/documents/countries/haiti.pptx
@@ -125,7 +125,7 @@
 </p:presentation>
 </file>
 
-<file path=ppt/charts/chart59.xml><?xml version="1.0" encoding="utf-8"?>
+<file path=ppt/charts/chart61.xml><?xml version="1.0" encoding="utf-8"?>
 <c:chartSpace xmlns:c="http://schemas.openxmlformats.org/drawingml/2006/chart" xmlns:a="http://schemas.openxmlformats.org/drawingml/2006/main" xmlns:r="http://schemas.openxmlformats.org/officeDocument/2006/relationships">
   <c:date1904 val="0"/>
   <c:roundedCorners val="1"/>
@@ -384,7 +384,7 @@
 </c:chartSpace>
 </file>
 
-<file path=ppt/charts/chart60.xml><?xml version="1.0" encoding="utf-8"?>
+<file path=ppt/charts/chart62.xml><?xml version="1.0" encoding="utf-8"?>
 <c:chartSpace xmlns:c="http://schemas.openxmlformats.org/drawingml/2006/chart" xmlns:a="http://schemas.openxmlformats.org/drawingml/2006/main" xmlns:r="http://schemas.openxmlformats.org/officeDocument/2006/relationships">
   <c:date1904 val="0"/>
   <c:roundedCorners val="1"/>
@@ -629,7 +629,7 @@
 </c:chartSpace>
 </file>
 
-<file path=ppt/charts/chart61.xml><?xml version="1.0" encoding="utf-8"?>
+<file path=ppt/charts/chart63.xml><?xml version="1.0" encoding="utf-8"?>
 <c:chartSpace xmlns:c="http://schemas.openxmlformats.org/drawingml/2006/chart" xmlns:a="http://schemas.openxmlformats.org/drawingml/2006/main" xmlns:r="http://schemas.openxmlformats.org/officeDocument/2006/relationships">
   <c:date1904 val="0"/>
   <c:roundedCorners val="1"/>
@@ -937,7 +937,7 @@
 </c:chartSpace>
 </file>
 
-<file path=ppt/charts/chart62.xml><?xml version="1.0" encoding="utf-8"?>
+<file path=ppt/charts/chart64.xml><?xml version="1.0" encoding="utf-8"?>
 <c:chartSpace xmlns:c="http://schemas.openxmlformats.org/drawingml/2006/chart" xmlns:a="http://schemas.openxmlformats.org/drawingml/2006/main" xmlns:r="http://schemas.openxmlformats.org/officeDocument/2006/relationships">
   <c:date1904 val="0"/>
   <c:roundedCorners val="1"/>
@@ -1302,7 +1302,7 @@
 </c:chartSpace>
 </file>
 
-<file path=ppt/charts/chart63.xml><?xml version="1.0" encoding="utf-8"?>
+<file path=ppt/charts/chart65.xml><?xml version="1.0" encoding="utf-8"?>
 <c:chartSpace xmlns:c="http://schemas.openxmlformats.org/drawingml/2006/chart" xmlns:a="http://schemas.openxmlformats.org/drawingml/2006/main" xmlns:r="http://schemas.openxmlformats.org/officeDocument/2006/relationships">
   <c:date1904 val="0"/>
   <c:roundedCorners val="1"/>
@@ -4092,7 +4092,7 @@
       </p:sp>
       <p:pic>
         <p:nvPicPr>
-          <p:cNvPr id="5" name="Image 1" descr="/workspace/scratch/50eb4f7d8e13/green-solutions-web/public/images/logo-icon.png">    </p:cNvPr>
+          <p:cNvPr id="5" name="Image 1" descr="/home/claude/green-solutions-web/public/images/logo-icon.png">    </p:cNvPr>
           <p:cNvPicPr>
             <a:picLocks noChangeAspect="1"/>
           </p:cNvPicPr>
@@ -4116,7 +4116,7 @@
       </p:pic>
       <p:pic>
         <p:nvPicPr>
-          <p:cNvPr id="6" name="Image 2" descr="/workspace/scratch/50eb4f7d8e13/green-solutions-web/scripts/dossiers/drapeaux/haiti.png">    </p:cNvPr>
+          <p:cNvPr id="6" name="Image 2" descr="/home/claude/green-solutions-web/scripts/dossiers/drapeaux/haiti.png">    </p:cNvPr>
           <p:cNvPicPr>
             <a:picLocks noChangeAspect="1"/>
           </p:cNvPicPr>
@@ -10276,7 +10276,7 @@
                 <a:ea typeface="Calibri" pitchFamily="34" charset="-122"/>
                 <a:cs typeface="Calibri" pitchFamily="34" charset="-120"/>
               </a:rPr>
-              <a:t>contact@evergreen-ecosorb.com · Green Solutions Groupe AIM SA, 46, route de la Condémine, 1475 Forel, Suisse</a:t>
+              <a:t>contact@green-solutions-group.com · Green Solutions Groupe AIM SA, 46, route de la Condémine, 1475 Forel, Suisse</a:t>
             </a:r>
             <a:endParaRPr lang="en-US" sz="1400" dirty="0"/>
           </a:p>
@@ -10284,7 +10284,7 @@
       </p:sp>
       <p:pic>
         <p:nvPicPr>
-          <p:cNvPr id="6" name="Image 1" descr="/workspace/scratch/50eb4f7d8e13/green-solutions-web/scripts/dossiers/sceau-aim-clair.png">    </p:cNvPr>
+          <p:cNvPr id="6" name="Image 1" descr="/home/claude/green-solutions-web/scripts/dossiers/sceau-aim-clair.png">    </p:cNvPr>
           <p:cNvPicPr>
             <a:picLocks noChangeAspect="1"/>
           </p:cNvPicPr>
